--- a/day2-deck/decks/CP vs Internal GP - Review.pptx
+++ b/day2-deck/decks/CP vs Internal GP - Review.pptx
@@ -1249,7 +1249,7 @@
         <p:spPr>
           <a:xfrm>
             <a:off x="457200" y="1207008"/>
-            <a:ext cx="11274552" cy="4645152"/>
+            <a:ext cx="11274552" cy="4782312"/>
           </a:xfrm>
           <a:prstGeom prst="rect">
             <a:avLst/>
@@ -1535,7 +1535,7 @@
         <p:spPr>
           <a:xfrm>
             <a:off x="3249778" y="2103120"/>
-            <a:ext cx="10973" cy="3657600"/>
+            <a:ext cx="10973" cy="3822192"/>
           </a:xfrm>
           <a:prstGeom prst="rect">
             <a:avLst/>
@@ -1555,7 +1555,7 @@
         <p:spPr>
           <a:xfrm>
             <a:off x="3183188" y="2103120"/>
-            <a:ext cx="0" cy="3657600"/>
+            <a:ext cx="0" cy="3822192"/>
           </a:xfrm>
           <a:prstGeom prst="line">
             <a:avLst/>
@@ -1723,7 +1723,7 @@
         <p:spPr>
           <a:xfrm>
             <a:off x="8800186" y="2103120"/>
-            <a:ext cx="10973" cy="3442447"/>
+            <a:ext cx="10973" cy="3597357"/>
           </a:xfrm>
           <a:prstGeom prst="rect">
             <a:avLst/>
@@ -1743,7 +1743,7 @@
         <p:spPr>
           <a:xfrm>
             <a:off x="8733596" y="2103120"/>
-            <a:ext cx="0" cy="3442447"/>
+            <a:ext cx="0" cy="3597357"/>
           </a:xfrm>
           <a:prstGeom prst="line">
             <a:avLst/>
@@ -1766,7 +1766,7 @@
         <p:spPr>
           <a:xfrm>
             <a:off x="658368" y="2103120"/>
-            <a:ext cx="2011680" cy="215153"/>
+            <a:ext cx="2011680" cy="224835"/>
           </a:xfrm>
           <a:prstGeom prst="rect">
             <a:avLst/>
@@ -1804,8 +1804,8 @@
         </p:nvSpPr>
         <p:spPr>
           <a:xfrm>
-            <a:off x="3255264" y="2151529"/>
-            <a:ext cx="130113" cy="118334"/>
+            <a:off x="3255264" y="2153708"/>
+            <a:ext cx="130113" cy="123659"/>
           </a:xfrm>
           <a:prstGeom prst="rect">
             <a:avLst/>
@@ -1825,7 +1825,7 @@
         <p:spPr>
           <a:xfrm>
             <a:off x="3840480" y="2103120"/>
-            <a:ext cx="566928" cy="215153"/>
+            <a:ext cx="566928" cy="224835"/>
           </a:xfrm>
           <a:prstGeom prst="rect">
             <a:avLst/>
@@ -1864,7 +1864,7 @@
         <p:spPr>
           <a:xfrm>
             <a:off x="4407408" y="2103120"/>
-            <a:ext cx="566928" cy="215153"/>
+            <a:ext cx="566928" cy="224835"/>
           </a:xfrm>
           <a:prstGeom prst="rect">
             <a:avLst/>
@@ -1903,7 +1903,7 @@
         <p:spPr>
           <a:xfrm>
             <a:off x="4974336" y="2103120"/>
-            <a:ext cx="859536" cy="215153"/>
+            <a:ext cx="859536" cy="224835"/>
           </a:xfrm>
           <a:prstGeom prst="rect">
             <a:avLst/>
@@ -1941,8 +1941,8 @@
         </p:nvSpPr>
         <p:spPr>
           <a:xfrm>
-            <a:off x="585216" y="2318273"/>
-            <a:ext cx="5394960" cy="215153"/>
+            <a:off x="585216" y="2327955"/>
+            <a:ext cx="5394960" cy="224835"/>
           </a:xfrm>
           <a:prstGeom prst="rect">
             <a:avLst/>
@@ -1961,8 +1961,8 @@
         </p:nvSpPr>
         <p:spPr>
           <a:xfrm>
-            <a:off x="658368" y="2318273"/>
-            <a:ext cx="2011680" cy="215153"/>
+            <a:off x="658368" y="2327955"/>
+            <a:ext cx="2011680" cy="224835"/>
           </a:xfrm>
           <a:prstGeom prst="rect">
             <a:avLst/>
@@ -2000,8 +2000,8 @@
         </p:nvSpPr>
         <p:spPr>
           <a:xfrm>
-            <a:off x="3255264" y="2366682"/>
-            <a:ext cx="129665" cy="118334"/>
+            <a:off x="3255264" y="2378543"/>
+            <a:ext cx="129665" cy="123659"/>
           </a:xfrm>
           <a:prstGeom prst="rect">
             <a:avLst/>
@@ -2020,8 +2020,8 @@
         </p:nvSpPr>
         <p:spPr>
           <a:xfrm>
-            <a:off x="3840480" y="2318273"/>
-            <a:ext cx="566928" cy="215153"/>
+            <a:off x="3840480" y="2327955"/>
+            <a:ext cx="566928" cy="224835"/>
           </a:xfrm>
           <a:prstGeom prst="rect">
             <a:avLst/>
@@ -2059,8 +2059,8 @@
         </p:nvSpPr>
         <p:spPr>
           <a:xfrm>
-            <a:off x="4407408" y="2318273"/>
-            <a:ext cx="566928" cy="215153"/>
+            <a:off x="4407408" y="2327955"/>
+            <a:ext cx="566928" cy="224835"/>
           </a:xfrm>
           <a:prstGeom prst="rect">
             <a:avLst/>
@@ -2098,8 +2098,8 @@
         </p:nvSpPr>
         <p:spPr>
           <a:xfrm>
-            <a:off x="4974336" y="2318273"/>
-            <a:ext cx="859536" cy="215153"/>
+            <a:off x="4974336" y="2327955"/>
+            <a:ext cx="859536" cy="224835"/>
           </a:xfrm>
           <a:prstGeom prst="rect">
             <a:avLst/>
@@ -2137,8 +2137,8 @@
         </p:nvSpPr>
         <p:spPr>
           <a:xfrm>
-            <a:off x="658368" y="2533426"/>
-            <a:ext cx="2011680" cy="215153"/>
+            <a:off x="658368" y="2552790"/>
+            <a:ext cx="2011680" cy="224835"/>
           </a:xfrm>
           <a:prstGeom prst="rect">
             <a:avLst/>
@@ -2176,8 +2176,8 @@
         </p:nvSpPr>
         <p:spPr>
           <a:xfrm>
-            <a:off x="3255264" y="2581835"/>
-            <a:ext cx="104292" cy="118334"/>
+            <a:off x="3255264" y="2603377"/>
+            <a:ext cx="104292" cy="123659"/>
           </a:xfrm>
           <a:prstGeom prst="rect">
             <a:avLst/>
@@ -2196,8 +2196,8 @@
         </p:nvSpPr>
         <p:spPr>
           <a:xfrm>
-            <a:off x="3840480" y="2533426"/>
-            <a:ext cx="566928" cy="215153"/>
+            <a:off x="3840480" y="2552790"/>
+            <a:ext cx="566928" cy="224835"/>
           </a:xfrm>
           <a:prstGeom prst="rect">
             <a:avLst/>
@@ -2235,8 +2235,8 @@
         </p:nvSpPr>
         <p:spPr>
           <a:xfrm>
-            <a:off x="4407408" y="2533426"/>
-            <a:ext cx="566928" cy="215153"/>
+            <a:off x="4407408" y="2552790"/>
+            <a:ext cx="566928" cy="224835"/>
           </a:xfrm>
           <a:prstGeom prst="rect">
             <a:avLst/>
@@ -2274,8 +2274,8 @@
         </p:nvSpPr>
         <p:spPr>
           <a:xfrm>
-            <a:off x="4974336" y="2533426"/>
-            <a:ext cx="859536" cy="215153"/>
+            <a:off x="4974336" y="2552790"/>
+            <a:ext cx="859536" cy="224835"/>
           </a:xfrm>
           <a:prstGeom prst="rect">
             <a:avLst/>
@@ -2313,8 +2313,8 @@
         </p:nvSpPr>
         <p:spPr>
           <a:xfrm>
-            <a:off x="585216" y="2748579"/>
-            <a:ext cx="5394960" cy="215153"/>
+            <a:off x="585216" y="2777624"/>
+            <a:ext cx="5394960" cy="224835"/>
           </a:xfrm>
           <a:prstGeom prst="rect">
             <a:avLst/>
@@ -2333,8 +2333,8 @@
         </p:nvSpPr>
         <p:spPr>
           <a:xfrm>
-            <a:off x="658368" y="2748579"/>
-            <a:ext cx="2011680" cy="215153"/>
+            <a:off x="658368" y="2777624"/>
+            <a:ext cx="2011680" cy="224835"/>
           </a:xfrm>
           <a:prstGeom prst="rect">
             <a:avLst/>
@@ -2372,8 +2372,8 @@
         </p:nvSpPr>
         <p:spPr>
           <a:xfrm>
-            <a:off x="3255264" y="2796988"/>
-            <a:ext cx="96492" cy="118334"/>
+            <a:off x="3255264" y="2828212"/>
+            <a:ext cx="96492" cy="123659"/>
           </a:xfrm>
           <a:prstGeom prst="rect">
             <a:avLst/>
@@ -2392,8 +2392,8 @@
         </p:nvSpPr>
         <p:spPr>
           <a:xfrm>
-            <a:off x="3840480" y="2748579"/>
-            <a:ext cx="566928" cy="215153"/>
+            <a:off x="3840480" y="2777624"/>
+            <a:ext cx="566928" cy="224835"/>
           </a:xfrm>
           <a:prstGeom prst="rect">
             <a:avLst/>
@@ -2431,8 +2431,8 @@
         </p:nvSpPr>
         <p:spPr>
           <a:xfrm>
-            <a:off x="4407408" y="2748579"/>
-            <a:ext cx="566928" cy="215153"/>
+            <a:off x="4407408" y="2777624"/>
+            <a:ext cx="566928" cy="224835"/>
           </a:xfrm>
           <a:prstGeom prst="rect">
             <a:avLst/>
@@ -2470,8 +2470,8 @@
         </p:nvSpPr>
         <p:spPr>
           <a:xfrm>
-            <a:off x="4974336" y="2748579"/>
-            <a:ext cx="859536" cy="215153"/>
+            <a:off x="4974336" y="2777624"/>
+            <a:ext cx="859536" cy="224835"/>
           </a:xfrm>
           <a:prstGeom prst="rect">
             <a:avLst/>
@@ -2509,8 +2509,8 @@
         </p:nvSpPr>
         <p:spPr>
           <a:xfrm>
-            <a:off x="658368" y="2963732"/>
-            <a:ext cx="2011680" cy="215153"/>
+            <a:off x="658368" y="3002459"/>
+            <a:ext cx="2011680" cy="224835"/>
           </a:xfrm>
           <a:prstGeom prst="rect">
             <a:avLst/>
@@ -2548,8 +2548,8 @@
         </p:nvSpPr>
         <p:spPr>
           <a:xfrm>
-            <a:off x="3255264" y="3012141"/>
-            <a:ext cx="77376" cy="118334"/>
+            <a:off x="3255264" y="3053047"/>
+            <a:ext cx="77376" cy="123659"/>
           </a:xfrm>
           <a:prstGeom prst="rect">
             <a:avLst/>
@@ -2568,8 +2568,8 @@
         </p:nvSpPr>
         <p:spPr>
           <a:xfrm>
-            <a:off x="3840480" y="2963732"/>
-            <a:ext cx="566928" cy="215153"/>
+            <a:off x="3840480" y="3002459"/>
+            <a:ext cx="566928" cy="224835"/>
           </a:xfrm>
           <a:prstGeom prst="rect">
             <a:avLst/>
@@ -2607,8 +2607,8 @@
         </p:nvSpPr>
         <p:spPr>
           <a:xfrm>
-            <a:off x="4407408" y="2963732"/>
-            <a:ext cx="566928" cy="215153"/>
+            <a:off x="4407408" y="3002459"/>
+            <a:ext cx="566928" cy="224835"/>
           </a:xfrm>
           <a:prstGeom prst="rect">
             <a:avLst/>
@@ -2646,8 +2646,8 @@
         </p:nvSpPr>
         <p:spPr>
           <a:xfrm>
-            <a:off x="4974336" y="2963732"/>
-            <a:ext cx="859536" cy="215153"/>
+            <a:off x="4974336" y="3002459"/>
+            <a:ext cx="859536" cy="224835"/>
           </a:xfrm>
           <a:prstGeom prst="rect">
             <a:avLst/>
@@ -2685,8 +2685,8 @@
         </p:nvSpPr>
         <p:spPr>
           <a:xfrm>
-            <a:off x="585216" y="3178885"/>
-            <a:ext cx="5394960" cy="215153"/>
+            <a:off x="585216" y="3227294"/>
+            <a:ext cx="5394960" cy="224835"/>
           </a:xfrm>
           <a:prstGeom prst="rect">
             <a:avLst/>
@@ -2705,8 +2705,8 @@
         </p:nvSpPr>
         <p:spPr>
           <a:xfrm>
-            <a:off x="658368" y="3178885"/>
-            <a:ext cx="2011680" cy="215153"/>
+            <a:off x="658368" y="3227294"/>
+            <a:ext cx="2011680" cy="224835"/>
           </a:xfrm>
           <a:prstGeom prst="rect">
             <a:avLst/>
@@ -2744,8 +2744,8 @@
         </p:nvSpPr>
         <p:spPr>
           <a:xfrm>
-            <a:off x="3255264" y="3227294"/>
-            <a:ext cx="65728" cy="118334"/>
+            <a:off x="3255264" y="3277882"/>
+            <a:ext cx="65728" cy="123659"/>
           </a:xfrm>
           <a:prstGeom prst="rect">
             <a:avLst/>
@@ -2764,8 +2764,8 @@
         </p:nvSpPr>
         <p:spPr>
           <a:xfrm>
-            <a:off x="3840480" y="3178885"/>
-            <a:ext cx="566928" cy="215153"/>
+            <a:off x="3840480" y="3227294"/>
+            <a:ext cx="566928" cy="224835"/>
           </a:xfrm>
           <a:prstGeom prst="rect">
             <a:avLst/>
@@ -2803,8 +2803,8 @@
         </p:nvSpPr>
         <p:spPr>
           <a:xfrm>
-            <a:off x="4407408" y="3178885"/>
-            <a:ext cx="566928" cy="215153"/>
+            <a:off x="4407408" y="3227294"/>
+            <a:ext cx="566928" cy="224835"/>
           </a:xfrm>
           <a:prstGeom prst="rect">
             <a:avLst/>
@@ -2842,8 +2842,8 @@
         </p:nvSpPr>
         <p:spPr>
           <a:xfrm>
-            <a:off x="4974336" y="3178885"/>
-            <a:ext cx="859536" cy="215153"/>
+            <a:off x="4974336" y="3227294"/>
+            <a:ext cx="859536" cy="224835"/>
           </a:xfrm>
           <a:prstGeom prst="rect">
             <a:avLst/>
@@ -2881,8 +2881,8 @@
         </p:nvSpPr>
         <p:spPr>
           <a:xfrm>
-            <a:off x="658368" y="3394038"/>
-            <a:ext cx="2011680" cy="215153"/>
+            <a:off x="658368" y="3452129"/>
+            <a:ext cx="2011680" cy="224835"/>
           </a:xfrm>
           <a:prstGeom prst="rect">
             <a:avLst/>
@@ -2920,8 +2920,8 @@
         </p:nvSpPr>
         <p:spPr>
           <a:xfrm>
-            <a:off x="3255264" y="3442447"/>
-            <a:ext cx="65019" cy="118334"/>
+            <a:off x="3255264" y="3502717"/>
+            <a:ext cx="65019" cy="123659"/>
           </a:xfrm>
           <a:prstGeom prst="rect">
             <a:avLst/>
@@ -2940,8 +2940,8 @@
         </p:nvSpPr>
         <p:spPr>
           <a:xfrm>
-            <a:off x="3840480" y="3394038"/>
-            <a:ext cx="566928" cy="215153"/>
+            <a:off x="3840480" y="3452129"/>
+            <a:ext cx="566928" cy="224835"/>
           </a:xfrm>
           <a:prstGeom prst="rect">
             <a:avLst/>
@@ -2979,8 +2979,8 @@
         </p:nvSpPr>
         <p:spPr>
           <a:xfrm>
-            <a:off x="4407408" y="3394038"/>
-            <a:ext cx="566928" cy="215153"/>
+            <a:off x="4407408" y="3452129"/>
+            <a:ext cx="566928" cy="224835"/>
           </a:xfrm>
           <a:prstGeom prst="rect">
             <a:avLst/>
@@ -3018,8 +3018,8 @@
         </p:nvSpPr>
         <p:spPr>
           <a:xfrm>
-            <a:off x="4974336" y="3394038"/>
-            <a:ext cx="859536" cy="215153"/>
+            <a:off x="4974336" y="3452129"/>
+            <a:ext cx="859536" cy="224835"/>
           </a:xfrm>
           <a:prstGeom prst="rect">
             <a:avLst/>
@@ -3057,8 +3057,8 @@
         </p:nvSpPr>
         <p:spPr>
           <a:xfrm>
-            <a:off x="585216" y="3609191"/>
-            <a:ext cx="5394960" cy="215153"/>
+            <a:off x="585216" y="3676964"/>
+            <a:ext cx="5394960" cy="224835"/>
           </a:xfrm>
           <a:prstGeom prst="rect">
             <a:avLst/>
@@ -3077,8 +3077,8 @@
         </p:nvSpPr>
         <p:spPr>
           <a:xfrm>
-            <a:off x="658368" y="3609191"/>
-            <a:ext cx="2011680" cy="215153"/>
+            <a:off x="658368" y="3676964"/>
+            <a:ext cx="2011680" cy="224835"/>
           </a:xfrm>
           <a:prstGeom prst="rect">
             <a:avLst/>
@@ -3116,8 +3116,8 @@
         </p:nvSpPr>
         <p:spPr>
           <a:xfrm>
-            <a:off x="3255264" y="3657600"/>
-            <a:ext cx="23117" cy="118334"/>
+            <a:off x="3255264" y="3727552"/>
+            <a:ext cx="23117" cy="123659"/>
           </a:xfrm>
           <a:prstGeom prst="rect">
             <a:avLst/>
@@ -3136,8 +3136,8 @@
         </p:nvSpPr>
         <p:spPr>
           <a:xfrm>
-            <a:off x="3840480" y="3609191"/>
-            <a:ext cx="566928" cy="215153"/>
+            <a:off x="3840480" y="3676964"/>
+            <a:ext cx="566928" cy="224835"/>
           </a:xfrm>
           <a:prstGeom prst="rect">
             <a:avLst/>
@@ -3175,8 +3175,8 @@
         </p:nvSpPr>
         <p:spPr>
           <a:xfrm>
-            <a:off x="4407408" y="3609191"/>
-            <a:ext cx="566928" cy="215153"/>
+            <a:off x="4407408" y="3676964"/>
+            <a:ext cx="566928" cy="224835"/>
           </a:xfrm>
           <a:prstGeom prst="rect">
             <a:avLst/>
@@ -3214,8 +3214,8 @@
         </p:nvSpPr>
         <p:spPr>
           <a:xfrm>
-            <a:off x="4974336" y="3609191"/>
-            <a:ext cx="859536" cy="215153"/>
+            <a:off x="4974336" y="3676964"/>
+            <a:ext cx="859536" cy="224835"/>
           </a:xfrm>
           <a:prstGeom prst="rect">
             <a:avLst/>
@@ -3253,8 +3253,8 @@
         </p:nvSpPr>
         <p:spPr>
           <a:xfrm>
-            <a:off x="658368" y="3824344"/>
-            <a:ext cx="2011680" cy="215153"/>
+            <a:off x="658368" y="3901799"/>
+            <a:ext cx="2011680" cy="224835"/>
           </a:xfrm>
           <a:prstGeom prst="rect">
             <a:avLst/>
@@ -3292,8 +3292,8 @@
         </p:nvSpPr>
         <p:spPr>
           <a:xfrm>
-            <a:off x="3253849" y="3872753"/>
-            <a:ext cx="9144" cy="118334"/>
+            <a:off x="3253849" y="3952386"/>
+            <a:ext cx="9144" cy="123659"/>
           </a:xfrm>
           <a:prstGeom prst="rect">
             <a:avLst/>
@@ -3312,8 +3312,8 @@
         </p:nvSpPr>
         <p:spPr>
           <a:xfrm>
-            <a:off x="3840480" y="3824344"/>
-            <a:ext cx="566928" cy="215153"/>
+            <a:off x="3840480" y="3901799"/>
+            <a:ext cx="566928" cy="224835"/>
           </a:xfrm>
           <a:prstGeom prst="rect">
             <a:avLst/>
@@ -3351,8 +3351,8 @@
         </p:nvSpPr>
         <p:spPr>
           <a:xfrm>
-            <a:off x="4407408" y="3824344"/>
-            <a:ext cx="566928" cy="215153"/>
+            <a:off x="4407408" y="3901799"/>
+            <a:ext cx="566928" cy="224835"/>
           </a:xfrm>
           <a:prstGeom prst="rect">
             <a:avLst/>
@@ -3390,8 +3390,8 @@
         </p:nvSpPr>
         <p:spPr>
           <a:xfrm>
-            <a:off x="4974336" y="3824344"/>
-            <a:ext cx="859536" cy="215153"/>
+            <a:off x="4974336" y="3901799"/>
+            <a:ext cx="859536" cy="224835"/>
           </a:xfrm>
           <a:prstGeom prst="rect">
             <a:avLst/>
@@ -3429,8 +3429,8 @@
         </p:nvSpPr>
         <p:spPr>
           <a:xfrm>
-            <a:off x="585216" y="4039496"/>
-            <a:ext cx="5394960" cy="215153"/>
+            <a:off x="585216" y="4126633"/>
+            <a:ext cx="5394960" cy="224835"/>
           </a:xfrm>
           <a:prstGeom prst="rect">
             <a:avLst/>
@@ -3449,8 +3449,8 @@
         </p:nvSpPr>
         <p:spPr>
           <a:xfrm>
-            <a:off x="658368" y="4039496"/>
-            <a:ext cx="2011680" cy="215153"/>
+            <a:off x="658368" y="4126633"/>
+            <a:ext cx="2011680" cy="224835"/>
           </a:xfrm>
           <a:prstGeom prst="rect">
             <a:avLst/>
@@ -3488,8 +3488,8 @@
         </p:nvSpPr>
         <p:spPr>
           <a:xfrm>
-            <a:off x="3250197" y="4087906"/>
-            <a:ext cx="9144" cy="118334"/>
+            <a:off x="3250197" y="4177221"/>
+            <a:ext cx="9144" cy="123659"/>
           </a:xfrm>
           <a:prstGeom prst="rect">
             <a:avLst/>
@@ -3508,8 +3508,8 @@
         </p:nvSpPr>
         <p:spPr>
           <a:xfrm>
-            <a:off x="3840480" y="4039496"/>
-            <a:ext cx="566928" cy="215153"/>
+            <a:off x="3840480" y="4126633"/>
+            <a:ext cx="566928" cy="224835"/>
           </a:xfrm>
           <a:prstGeom prst="rect">
             <a:avLst/>
@@ -3547,8 +3547,8 @@
         </p:nvSpPr>
         <p:spPr>
           <a:xfrm>
-            <a:off x="4407408" y="4039496"/>
-            <a:ext cx="566928" cy="215153"/>
+            <a:off x="4407408" y="4126633"/>
+            <a:ext cx="566928" cy="224835"/>
           </a:xfrm>
           <a:prstGeom prst="rect">
             <a:avLst/>
@@ -3586,8 +3586,8 @@
         </p:nvSpPr>
         <p:spPr>
           <a:xfrm>
-            <a:off x="4974336" y="4039496"/>
-            <a:ext cx="859536" cy="215153"/>
+            <a:off x="4974336" y="4126633"/>
+            <a:ext cx="859536" cy="224835"/>
           </a:xfrm>
           <a:prstGeom prst="rect">
             <a:avLst/>
@@ -3625,8 +3625,8 @@
         </p:nvSpPr>
         <p:spPr>
           <a:xfrm>
-            <a:off x="658368" y="4254649"/>
-            <a:ext cx="2011680" cy="215153"/>
+            <a:off x="658368" y="4351468"/>
+            <a:ext cx="2011680" cy="224835"/>
           </a:xfrm>
           <a:prstGeom prst="rect">
             <a:avLst/>
@@ -3664,8 +3664,8 @@
         </p:nvSpPr>
         <p:spPr>
           <a:xfrm>
-            <a:off x="3245953" y="4303059"/>
-            <a:ext cx="9311" cy="118334"/>
+            <a:off x="3245953" y="4402056"/>
+            <a:ext cx="9311" cy="123659"/>
           </a:xfrm>
           <a:prstGeom prst="rect">
             <a:avLst/>
@@ -3684,8 +3684,8 @@
         </p:nvSpPr>
         <p:spPr>
           <a:xfrm>
-            <a:off x="3840480" y="4254649"/>
-            <a:ext cx="566928" cy="215153"/>
+            <a:off x="3840480" y="4351468"/>
+            <a:ext cx="566928" cy="224835"/>
           </a:xfrm>
           <a:prstGeom prst="rect">
             <a:avLst/>
@@ -3723,8 +3723,8 @@
         </p:nvSpPr>
         <p:spPr>
           <a:xfrm>
-            <a:off x="4407408" y="4254649"/>
-            <a:ext cx="566928" cy="215153"/>
+            <a:off x="4407408" y="4351468"/>
+            <a:ext cx="566928" cy="224835"/>
           </a:xfrm>
           <a:prstGeom prst="rect">
             <a:avLst/>
@@ -3762,8 +3762,8 @@
         </p:nvSpPr>
         <p:spPr>
           <a:xfrm>
-            <a:off x="4974336" y="4254649"/>
-            <a:ext cx="859536" cy="215153"/>
+            <a:off x="4974336" y="4351468"/>
+            <a:ext cx="859536" cy="224835"/>
           </a:xfrm>
           <a:prstGeom prst="rect">
             <a:avLst/>
@@ -3801,8 +3801,8 @@
         </p:nvSpPr>
         <p:spPr>
           <a:xfrm>
-            <a:off x="585216" y="4469802"/>
-            <a:ext cx="5394960" cy="215153"/>
+            <a:off x="585216" y="4576303"/>
+            <a:ext cx="5394960" cy="224835"/>
           </a:xfrm>
           <a:prstGeom prst="rect">
             <a:avLst/>
@@ -3821,8 +3821,8 @@
         </p:nvSpPr>
         <p:spPr>
           <a:xfrm>
-            <a:off x="658368" y="4469802"/>
-            <a:ext cx="2011680" cy="215153"/>
+            <a:off x="658368" y="4576303"/>
+            <a:ext cx="2011680" cy="224835"/>
           </a:xfrm>
           <a:prstGeom prst="rect">
             <a:avLst/>
@@ -3860,8 +3860,8 @@
         </p:nvSpPr>
         <p:spPr>
           <a:xfrm>
-            <a:off x="3244900" y="4518212"/>
-            <a:ext cx="10364" cy="118334"/>
+            <a:off x="3244900" y="4626891"/>
+            <a:ext cx="10364" cy="123659"/>
           </a:xfrm>
           <a:prstGeom prst="rect">
             <a:avLst/>
@@ -3880,8 +3880,8 @@
         </p:nvSpPr>
         <p:spPr>
           <a:xfrm>
-            <a:off x="3840480" y="4469802"/>
-            <a:ext cx="566928" cy="215153"/>
+            <a:off x="3840480" y="4576303"/>
+            <a:ext cx="566928" cy="224835"/>
           </a:xfrm>
           <a:prstGeom prst="rect">
             <a:avLst/>
@@ -3919,8 +3919,8 @@
         </p:nvSpPr>
         <p:spPr>
           <a:xfrm>
-            <a:off x="4407408" y="4469802"/>
-            <a:ext cx="566928" cy="215153"/>
+            <a:off x="4407408" y="4576303"/>
+            <a:ext cx="566928" cy="224835"/>
           </a:xfrm>
           <a:prstGeom prst="rect">
             <a:avLst/>
@@ -3958,8 +3958,8 @@
         </p:nvSpPr>
         <p:spPr>
           <a:xfrm>
-            <a:off x="4974336" y="4469802"/>
-            <a:ext cx="859536" cy="215153"/>
+            <a:off x="4974336" y="4576303"/>
+            <a:ext cx="859536" cy="224835"/>
           </a:xfrm>
           <a:prstGeom prst="rect">
             <a:avLst/>
@@ -3997,8 +3997,8 @@
         </p:nvSpPr>
         <p:spPr>
           <a:xfrm>
-            <a:off x="658368" y="4684955"/>
-            <a:ext cx="2011680" cy="215153"/>
+            <a:off x="658368" y="4801138"/>
+            <a:ext cx="2011680" cy="224835"/>
           </a:xfrm>
           <a:prstGeom prst="rect">
             <a:avLst/>
@@ -4036,8 +4036,8 @@
         </p:nvSpPr>
         <p:spPr>
           <a:xfrm>
-            <a:off x="3221879" y="4733365"/>
-            <a:ext cx="33385" cy="118334"/>
+            <a:off x="3221879" y="4851726"/>
+            <a:ext cx="33385" cy="123659"/>
           </a:xfrm>
           <a:prstGeom prst="rect">
             <a:avLst/>
@@ -4056,8 +4056,8 @@
         </p:nvSpPr>
         <p:spPr>
           <a:xfrm>
-            <a:off x="3840480" y="4684955"/>
-            <a:ext cx="566928" cy="215153"/>
+            <a:off x="3840480" y="4801138"/>
+            <a:ext cx="566928" cy="224835"/>
           </a:xfrm>
           <a:prstGeom prst="rect">
             <a:avLst/>
@@ -4095,8 +4095,8 @@
         </p:nvSpPr>
         <p:spPr>
           <a:xfrm>
-            <a:off x="4407408" y="4684955"/>
-            <a:ext cx="566928" cy="215153"/>
+            <a:off x="4407408" y="4801138"/>
+            <a:ext cx="566928" cy="224835"/>
           </a:xfrm>
           <a:prstGeom prst="rect">
             <a:avLst/>
@@ -4134,8 +4134,8 @@
         </p:nvSpPr>
         <p:spPr>
           <a:xfrm>
-            <a:off x="4974336" y="4684955"/>
-            <a:ext cx="859536" cy="215153"/>
+            <a:off x="4974336" y="4801138"/>
+            <a:ext cx="859536" cy="224835"/>
           </a:xfrm>
           <a:prstGeom prst="rect">
             <a:avLst/>
@@ -4173,8 +4173,8 @@
         </p:nvSpPr>
         <p:spPr>
           <a:xfrm>
-            <a:off x="585216" y="4900108"/>
-            <a:ext cx="5394960" cy="215153"/>
+            <a:off x="585216" y="5025973"/>
+            <a:ext cx="5394960" cy="224835"/>
           </a:xfrm>
           <a:prstGeom prst="rect">
             <a:avLst/>
@@ -4193,8 +4193,8 @@
         </p:nvSpPr>
         <p:spPr>
           <a:xfrm>
-            <a:off x="658368" y="4900108"/>
-            <a:ext cx="2011680" cy="215153"/>
+            <a:off x="658368" y="5025973"/>
+            <a:ext cx="2011680" cy="224835"/>
           </a:xfrm>
           <a:prstGeom prst="rect">
             <a:avLst/>
@@ -4232,8 +4232,8 @@
         </p:nvSpPr>
         <p:spPr>
           <a:xfrm>
-            <a:off x="3198494" y="4948518"/>
-            <a:ext cx="56770" cy="118334"/>
+            <a:off x="3198494" y="5076561"/>
+            <a:ext cx="56770" cy="123659"/>
           </a:xfrm>
           <a:prstGeom prst="rect">
             <a:avLst/>
@@ -4252,8 +4252,8 @@
         </p:nvSpPr>
         <p:spPr>
           <a:xfrm>
-            <a:off x="3840480" y="4900108"/>
-            <a:ext cx="566928" cy="215153"/>
+            <a:off x="3840480" y="5025973"/>
+            <a:ext cx="566928" cy="224835"/>
           </a:xfrm>
           <a:prstGeom prst="rect">
             <a:avLst/>
@@ -4291,8 +4291,8 @@
         </p:nvSpPr>
         <p:spPr>
           <a:xfrm>
-            <a:off x="4407408" y="4900108"/>
-            <a:ext cx="566928" cy="215153"/>
+            <a:off x="4407408" y="5025973"/>
+            <a:ext cx="566928" cy="224835"/>
           </a:xfrm>
           <a:prstGeom prst="rect">
             <a:avLst/>
@@ -4330,8 +4330,8 @@
         </p:nvSpPr>
         <p:spPr>
           <a:xfrm>
-            <a:off x="4974336" y="4900108"/>
-            <a:ext cx="859536" cy="215153"/>
+            <a:off x="4974336" y="5025973"/>
+            <a:ext cx="859536" cy="224835"/>
           </a:xfrm>
           <a:prstGeom prst="rect">
             <a:avLst/>
@@ -4369,8 +4369,8 @@
         </p:nvSpPr>
         <p:spPr>
           <a:xfrm>
-            <a:off x="658368" y="5115261"/>
-            <a:ext cx="2011680" cy="215153"/>
+            <a:off x="658368" y="5250808"/>
+            <a:ext cx="2011680" cy="224835"/>
           </a:xfrm>
           <a:prstGeom prst="rect">
             <a:avLst/>
@@ -4408,8 +4408,8 @@
         </p:nvSpPr>
         <p:spPr>
           <a:xfrm>
-            <a:off x="3198327" y="5163671"/>
-            <a:ext cx="56937" cy="118334"/>
+            <a:off x="3198327" y="5301395"/>
+            <a:ext cx="56937" cy="123659"/>
           </a:xfrm>
           <a:prstGeom prst="rect">
             <a:avLst/>
@@ -4428,8 +4428,8 @@
         </p:nvSpPr>
         <p:spPr>
           <a:xfrm>
-            <a:off x="3840480" y="5115261"/>
-            <a:ext cx="566928" cy="215153"/>
+            <a:off x="3840480" y="5250808"/>
+            <a:ext cx="566928" cy="224835"/>
           </a:xfrm>
           <a:prstGeom prst="rect">
             <a:avLst/>
@@ -4467,8 +4467,8 @@
         </p:nvSpPr>
         <p:spPr>
           <a:xfrm>
-            <a:off x="4407408" y="5115261"/>
-            <a:ext cx="566928" cy="215153"/>
+            <a:off x="4407408" y="5250808"/>
+            <a:ext cx="566928" cy="224835"/>
           </a:xfrm>
           <a:prstGeom prst="rect">
             <a:avLst/>
@@ -4506,8 +4506,8 @@
         </p:nvSpPr>
         <p:spPr>
           <a:xfrm>
-            <a:off x="4974336" y="5115261"/>
-            <a:ext cx="859536" cy="215153"/>
+            <a:off x="4974336" y="5250808"/>
+            <a:ext cx="859536" cy="224835"/>
           </a:xfrm>
           <a:prstGeom prst="rect">
             <a:avLst/>
@@ -4545,8 +4545,8 @@
         </p:nvSpPr>
         <p:spPr>
           <a:xfrm>
-            <a:off x="585216" y="5330414"/>
-            <a:ext cx="5394960" cy="215153"/>
+            <a:off x="585216" y="5475642"/>
+            <a:ext cx="5394960" cy="224835"/>
           </a:xfrm>
           <a:prstGeom prst="rect">
             <a:avLst/>
@@ -4565,8 +4565,8 @@
         </p:nvSpPr>
         <p:spPr>
           <a:xfrm>
-            <a:off x="658368" y="5330414"/>
-            <a:ext cx="2011680" cy="215153"/>
+            <a:off x="658368" y="5475642"/>
+            <a:ext cx="2011680" cy="224835"/>
           </a:xfrm>
           <a:prstGeom prst="rect">
             <a:avLst/>
@@ -4604,8 +4604,8 @@
         </p:nvSpPr>
         <p:spPr>
           <a:xfrm>
-            <a:off x="3197693" y="5378824"/>
-            <a:ext cx="57571" cy="118334"/>
+            <a:off x="3197693" y="5526230"/>
+            <a:ext cx="57571" cy="123659"/>
           </a:xfrm>
           <a:prstGeom prst="rect">
             <a:avLst/>
@@ -4624,8 +4624,8 @@
         </p:nvSpPr>
         <p:spPr>
           <a:xfrm>
-            <a:off x="3840480" y="5330414"/>
-            <a:ext cx="566928" cy="215153"/>
+            <a:off x="3840480" y="5475642"/>
+            <a:ext cx="566928" cy="224835"/>
           </a:xfrm>
           <a:prstGeom prst="rect">
             <a:avLst/>
@@ -4663,8 +4663,8 @@
         </p:nvSpPr>
         <p:spPr>
           <a:xfrm>
-            <a:off x="4407408" y="5330414"/>
-            <a:ext cx="566928" cy="215153"/>
+            <a:off x="4407408" y="5475642"/>
+            <a:ext cx="566928" cy="224835"/>
           </a:xfrm>
           <a:prstGeom prst="rect">
             <a:avLst/>
@@ -4702,8 +4702,8 @@
         </p:nvSpPr>
         <p:spPr>
           <a:xfrm>
-            <a:off x="4974336" y="5330414"/>
-            <a:ext cx="859536" cy="215153"/>
+            <a:off x="4974336" y="5475642"/>
+            <a:ext cx="859536" cy="224835"/>
           </a:xfrm>
           <a:prstGeom prst="rect">
             <a:avLst/>
@@ -4741,8 +4741,8 @@
         </p:nvSpPr>
         <p:spPr>
           <a:xfrm>
-            <a:off x="658368" y="5545567"/>
-            <a:ext cx="2011680" cy="215153"/>
+            <a:off x="658368" y="5700477"/>
+            <a:ext cx="2011680" cy="224835"/>
           </a:xfrm>
           <a:prstGeom prst="rect">
             <a:avLst/>
@@ -4780,8 +4780,8 @@
         </p:nvSpPr>
         <p:spPr>
           <a:xfrm>
-            <a:off x="3195970" y="5593976"/>
-            <a:ext cx="59294" cy="118334"/>
+            <a:off x="3195970" y="5751065"/>
+            <a:ext cx="59294" cy="123659"/>
           </a:xfrm>
           <a:prstGeom prst="rect">
             <a:avLst/>
@@ -4800,8 +4800,8 @@
         </p:nvSpPr>
         <p:spPr>
           <a:xfrm>
-            <a:off x="3840480" y="5545567"/>
-            <a:ext cx="566928" cy="215153"/>
+            <a:off x="3840480" y="5700477"/>
+            <a:ext cx="566928" cy="224835"/>
           </a:xfrm>
           <a:prstGeom prst="rect">
             <a:avLst/>
@@ -4839,8 +4839,8 @@
         </p:nvSpPr>
         <p:spPr>
           <a:xfrm>
-            <a:off x="4407408" y="5545567"/>
-            <a:ext cx="566928" cy="215153"/>
+            <a:off x="4407408" y="5700477"/>
+            <a:ext cx="566928" cy="224835"/>
           </a:xfrm>
           <a:prstGeom prst="rect">
             <a:avLst/>
@@ -4878,8 +4878,8 @@
         </p:nvSpPr>
         <p:spPr>
           <a:xfrm>
-            <a:off x="4974336" y="5545567"/>
-            <a:ext cx="859536" cy="215153"/>
+            <a:off x="4974336" y="5700477"/>
+            <a:ext cx="859536" cy="224835"/>
           </a:xfrm>
           <a:prstGeom prst="rect">
             <a:avLst/>
@@ -4918,7 +4918,7 @@
         <p:spPr>
           <a:xfrm>
             <a:off x="6208776" y="2103120"/>
-            <a:ext cx="2011680" cy="215153"/>
+            <a:ext cx="2011680" cy="224835"/>
           </a:xfrm>
           <a:prstGeom prst="rect">
             <a:avLst/>
@@ -4956,8 +4956,8 @@
         </p:nvSpPr>
         <p:spPr>
           <a:xfrm>
-            <a:off x="8734848" y="2151529"/>
-            <a:ext cx="70824" cy="118334"/>
+            <a:off x="8734848" y="2153708"/>
+            <a:ext cx="70824" cy="123659"/>
           </a:xfrm>
           <a:prstGeom prst="rect">
             <a:avLst/>
@@ -4977,7 +4977,7 @@
         <p:spPr>
           <a:xfrm>
             <a:off x="9390888" y="2103120"/>
-            <a:ext cx="566928" cy="215153"/>
+            <a:ext cx="566928" cy="224835"/>
           </a:xfrm>
           <a:prstGeom prst="rect">
             <a:avLst/>
@@ -5016,7 +5016,7 @@
         <p:spPr>
           <a:xfrm>
             <a:off x="9957816" y="2103120"/>
-            <a:ext cx="566928" cy="215153"/>
+            <a:ext cx="566928" cy="224835"/>
           </a:xfrm>
           <a:prstGeom prst="rect">
             <a:avLst/>
@@ -5055,7 +5055,7 @@
         <p:spPr>
           <a:xfrm>
             <a:off x="10524744" y="2103120"/>
-            <a:ext cx="859536" cy="215153"/>
+            <a:ext cx="859536" cy="224835"/>
           </a:xfrm>
           <a:prstGeom prst="rect">
             <a:avLst/>
@@ -5093,8 +5093,8 @@
         </p:nvSpPr>
         <p:spPr>
           <a:xfrm>
-            <a:off x="6135624" y="2318273"/>
-            <a:ext cx="5394960" cy="215153"/>
+            <a:off x="6135624" y="2327955"/>
+            <a:ext cx="5394960" cy="224835"/>
           </a:xfrm>
           <a:prstGeom prst="rect">
             <a:avLst/>
@@ -5113,8 +5113,8 @@
         </p:nvSpPr>
         <p:spPr>
           <a:xfrm>
-            <a:off x="6208776" y="2318273"/>
-            <a:ext cx="2011680" cy="215153"/>
+            <a:off x="6208776" y="2327955"/>
+            <a:ext cx="2011680" cy="224835"/>
           </a:xfrm>
           <a:prstGeom prst="rect">
             <a:avLst/>
@@ -5152,8 +5152,8 @@
         </p:nvSpPr>
         <p:spPr>
           <a:xfrm>
-            <a:off x="8730906" y="2366682"/>
-            <a:ext cx="74766" cy="118334"/>
+            <a:off x="8730906" y="2378543"/>
+            <a:ext cx="74766" cy="123659"/>
           </a:xfrm>
           <a:prstGeom prst="rect">
             <a:avLst/>
@@ -5172,8 +5172,8 @@
         </p:nvSpPr>
         <p:spPr>
           <a:xfrm>
-            <a:off x="9390888" y="2318273"/>
-            <a:ext cx="566928" cy="215153"/>
+            <a:off x="9390888" y="2327955"/>
+            <a:ext cx="566928" cy="224835"/>
           </a:xfrm>
           <a:prstGeom prst="rect">
             <a:avLst/>
@@ -5211,8 +5211,8 @@
         </p:nvSpPr>
         <p:spPr>
           <a:xfrm>
-            <a:off x="9957816" y="2318273"/>
-            <a:ext cx="566928" cy="215153"/>
+            <a:off x="9957816" y="2327955"/>
+            <a:ext cx="566928" cy="224835"/>
           </a:xfrm>
           <a:prstGeom prst="rect">
             <a:avLst/>
@@ -5250,8 +5250,8 @@
         </p:nvSpPr>
         <p:spPr>
           <a:xfrm>
-            <a:off x="10524744" y="2318273"/>
-            <a:ext cx="859536" cy="215153"/>
+            <a:off x="10524744" y="2327955"/>
+            <a:ext cx="859536" cy="224835"/>
           </a:xfrm>
           <a:prstGeom prst="rect">
             <a:avLst/>
@@ -5289,8 +5289,8 @@
         </p:nvSpPr>
         <p:spPr>
           <a:xfrm>
-            <a:off x="6208776" y="2533426"/>
-            <a:ext cx="2011680" cy="215153"/>
+            <a:off x="6208776" y="2552790"/>
+            <a:ext cx="2011680" cy="224835"/>
           </a:xfrm>
           <a:prstGeom prst="rect">
             <a:avLst/>
@@ -5328,8 +5328,8 @@
         </p:nvSpPr>
         <p:spPr>
           <a:xfrm>
-            <a:off x="8716961" y="2581835"/>
-            <a:ext cx="88711" cy="118334"/>
+            <a:off x="8716961" y="2603377"/>
+            <a:ext cx="88711" cy="123659"/>
           </a:xfrm>
           <a:prstGeom prst="rect">
             <a:avLst/>
@@ -5348,8 +5348,8 @@
         </p:nvSpPr>
         <p:spPr>
           <a:xfrm>
-            <a:off x="9390888" y="2533426"/>
-            <a:ext cx="566928" cy="215153"/>
+            <a:off x="9390888" y="2552790"/>
+            <a:ext cx="566928" cy="224835"/>
           </a:xfrm>
           <a:prstGeom prst="rect">
             <a:avLst/>
@@ -5387,8 +5387,8 @@
         </p:nvSpPr>
         <p:spPr>
           <a:xfrm>
-            <a:off x="9957816" y="2533426"/>
-            <a:ext cx="566928" cy="215153"/>
+            <a:off x="9957816" y="2552790"/>
+            <a:ext cx="566928" cy="224835"/>
           </a:xfrm>
           <a:prstGeom prst="rect">
             <a:avLst/>
@@ -5426,8 +5426,8 @@
         </p:nvSpPr>
         <p:spPr>
           <a:xfrm>
-            <a:off x="10524744" y="2533426"/>
-            <a:ext cx="859536" cy="215153"/>
+            <a:off x="10524744" y="2552790"/>
+            <a:ext cx="859536" cy="224835"/>
           </a:xfrm>
           <a:prstGeom prst="rect">
             <a:avLst/>
@@ -5465,8 +5465,8 @@
         </p:nvSpPr>
         <p:spPr>
           <a:xfrm>
-            <a:off x="6135624" y="2748579"/>
-            <a:ext cx="5394960" cy="215153"/>
+            <a:off x="6135624" y="2777624"/>
+            <a:ext cx="5394960" cy="224835"/>
           </a:xfrm>
           <a:prstGeom prst="rect">
             <a:avLst/>
@@ -5485,8 +5485,8 @@
         </p:nvSpPr>
         <p:spPr>
           <a:xfrm>
-            <a:off x="6208776" y="2748579"/>
-            <a:ext cx="2011680" cy="215153"/>
+            <a:off x="6208776" y="2777624"/>
+            <a:ext cx="2011680" cy="224835"/>
           </a:xfrm>
           <a:prstGeom prst="rect">
             <a:avLst/>
@@ -5524,8 +5524,8 @@
         </p:nvSpPr>
         <p:spPr>
           <a:xfrm>
-            <a:off x="8711353" y="2796988"/>
-            <a:ext cx="94319" cy="118334"/>
+            <a:off x="8711353" y="2828212"/>
+            <a:ext cx="94319" cy="123659"/>
           </a:xfrm>
           <a:prstGeom prst="rect">
             <a:avLst/>
@@ -5544,8 +5544,8 @@
         </p:nvSpPr>
         <p:spPr>
           <a:xfrm>
-            <a:off x="9390888" y="2748579"/>
-            <a:ext cx="566928" cy="215153"/>
+            <a:off x="9390888" y="2777624"/>
+            <a:ext cx="566928" cy="224835"/>
           </a:xfrm>
           <a:prstGeom prst="rect">
             <a:avLst/>
@@ -5583,8 +5583,8 @@
         </p:nvSpPr>
         <p:spPr>
           <a:xfrm>
-            <a:off x="9957816" y="2748579"/>
-            <a:ext cx="566928" cy="215153"/>
+            <a:off x="9957816" y="2777624"/>
+            <a:ext cx="566928" cy="224835"/>
           </a:xfrm>
           <a:prstGeom prst="rect">
             <a:avLst/>
@@ -5622,8 +5622,8 @@
         </p:nvSpPr>
         <p:spPr>
           <a:xfrm>
-            <a:off x="10524744" y="2748579"/>
-            <a:ext cx="859536" cy="215153"/>
+            <a:off x="10524744" y="2777624"/>
+            <a:ext cx="859536" cy="224835"/>
           </a:xfrm>
           <a:prstGeom prst="rect">
             <a:avLst/>
@@ -5661,8 +5661,8 @@
         </p:nvSpPr>
         <p:spPr>
           <a:xfrm>
-            <a:off x="6208776" y="2963732"/>
-            <a:ext cx="2011680" cy="215153"/>
+            <a:off x="6208776" y="3002459"/>
+            <a:ext cx="2011680" cy="224835"/>
           </a:xfrm>
           <a:prstGeom prst="rect">
             <a:avLst/>
@@ -5700,8 +5700,8 @@
         </p:nvSpPr>
         <p:spPr>
           <a:xfrm>
-            <a:off x="8703971" y="3012141"/>
-            <a:ext cx="101701" cy="118334"/>
+            <a:off x="8703971" y="3053047"/>
+            <a:ext cx="101701" cy="123659"/>
           </a:xfrm>
           <a:prstGeom prst="rect">
             <a:avLst/>
@@ -5720,8 +5720,8 @@
         </p:nvSpPr>
         <p:spPr>
           <a:xfrm>
-            <a:off x="9390888" y="2963732"/>
-            <a:ext cx="566928" cy="215153"/>
+            <a:off x="9390888" y="3002459"/>
+            <a:ext cx="566928" cy="224835"/>
           </a:xfrm>
           <a:prstGeom prst="rect">
             <a:avLst/>
@@ -5759,8 +5759,8 @@
         </p:nvSpPr>
         <p:spPr>
           <a:xfrm>
-            <a:off x="9957816" y="2963732"/>
-            <a:ext cx="566928" cy="215153"/>
+            <a:off x="9957816" y="3002459"/>
+            <a:ext cx="566928" cy="224835"/>
           </a:xfrm>
           <a:prstGeom prst="rect">
             <a:avLst/>
@@ -5798,8 +5798,8 @@
         </p:nvSpPr>
         <p:spPr>
           <a:xfrm>
-            <a:off x="10524744" y="2963732"/>
-            <a:ext cx="859536" cy="215153"/>
+            <a:off x="10524744" y="3002459"/>
+            <a:ext cx="859536" cy="224835"/>
           </a:xfrm>
           <a:prstGeom prst="rect">
             <a:avLst/>
@@ -5837,8 +5837,8 @@
         </p:nvSpPr>
         <p:spPr>
           <a:xfrm>
-            <a:off x="6135624" y="3178885"/>
-            <a:ext cx="5394960" cy="215153"/>
+            <a:off x="6135624" y="3227294"/>
+            <a:ext cx="5394960" cy="224835"/>
           </a:xfrm>
           <a:prstGeom prst="rect">
             <a:avLst/>
@@ -5857,8 +5857,8 @@
         </p:nvSpPr>
         <p:spPr>
           <a:xfrm>
-            <a:off x="6208776" y="3178885"/>
-            <a:ext cx="2011680" cy="215153"/>
+            <a:off x="6208776" y="3227294"/>
+            <a:ext cx="2011680" cy="224835"/>
           </a:xfrm>
           <a:prstGeom prst="rect">
             <a:avLst/>
@@ -5896,8 +5896,8 @@
         </p:nvSpPr>
         <p:spPr>
           <a:xfrm>
-            <a:off x="8701890" y="3227294"/>
-            <a:ext cx="103782" cy="118334"/>
+            <a:off x="8701890" y="3277882"/>
+            <a:ext cx="103782" cy="123659"/>
           </a:xfrm>
           <a:prstGeom prst="rect">
             <a:avLst/>
@@ -5916,8 +5916,8 @@
         </p:nvSpPr>
         <p:spPr>
           <a:xfrm>
-            <a:off x="9390888" y="3178885"/>
-            <a:ext cx="566928" cy="215153"/>
+            <a:off x="9390888" y="3227294"/>
+            <a:ext cx="566928" cy="224835"/>
           </a:xfrm>
           <a:prstGeom prst="rect">
             <a:avLst/>
@@ -5955,8 +5955,8 @@
         </p:nvSpPr>
         <p:spPr>
           <a:xfrm>
-            <a:off x="9957816" y="3178885"/>
-            <a:ext cx="566928" cy="215153"/>
+            <a:off x="9957816" y="3227294"/>
+            <a:ext cx="566928" cy="224835"/>
           </a:xfrm>
           <a:prstGeom prst="rect">
             <a:avLst/>
@@ -5994,8 +5994,8 @@
         </p:nvSpPr>
         <p:spPr>
           <a:xfrm>
-            <a:off x="10524744" y="3178885"/>
-            <a:ext cx="859536" cy="215153"/>
+            <a:off x="10524744" y="3227294"/>
+            <a:ext cx="859536" cy="224835"/>
           </a:xfrm>
           <a:prstGeom prst="rect">
             <a:avLst/>
@@ -6033,8 +6033,8 @@
         </p:nvSpPr>
         <p:spPr>
           <a:xfrm>
-            <a:off x="6208776" y="3394038"/>
-            <a:ext cx="2011680" cy="215153"/>
+            <a:off x="6208776" y="3452129"/>
+            <a:ext cx="2011680" cy="224835"/>
           </a:xfrm>
           <a:prstGeom prst="rect">
             <a:avLst/>
@@ -6072,8 +6072,8 @@
         </p:nvSpPr>
         <p:spPr>
           <a:xfrm>
-            <a:off x="8679444" y="3442447"/>
-            <a:ext cx="126228" cy="118334"/>
+            <a:off x="8679444" y="3502717"/>
+            <a:ext cx="126228" cy="123659"/>
           </a:xfrm>
           <a:prstGeom prst="rect">
             <a:avLst/>
@@ -6092,8 +6092,8 @@
         </p:nvSpPr>
         <p:spPr>
           <a:xfrm>
-            <a:off x="9390888" y="3394038"/>
-            <a:ext cx="566928" cy="215153"/>
+            <a:off x="9390888" y="3452129"/>
+            <a:ext cx="566928" cy="224835"/>
           </a:xfrm>
           <a:prstGeom prst="rect">
             <a:avLst/>
@@ -6131,8 +6131,8 @@
         </p:nvSpPr>
         <p:spPr>
           <a:xfrm>
-            <a:off x="9957816" y="3394038"/>
-            <a:ext cx="566928" cy="215153"/>
+            <a:off x="9957816" y="3452129"/>
+            <a:ext cx="566928" cy="224835"/>
           </a:xfrm>
           <a:prstGeom prst="rect">
             <a:avLst/>
@@ -6170,8 +6170,8 @@
         </p:nvSpPr>
         <p:spPr>
           <a:xfrm>
-            <a:off x="10524744" y="3394038"/>
-            <a:ext cx="859536" cy="215153"/>
+            <a:off x="10524744" y="3452129"/>
+            <a:ext cx="859536" cy="224835"/>
           </a:xfrm>
           <a:prstGeom prst="rect">
             <a:avLst/>
@@ -6209,8 +6209,8 @@
         </p:nvSpPr>
         <p:spPr>
           <a:xfrm>
-            <a:off x="6135624" y="3609191"/>
-            <a:ext cx="5394960" cy="215153"/>
+            <a:off x="6135624" y="3676964"/>
+            <a:ext cx="5394960" cy="224835"/>
           </a:xfrm>
           <a:prstGeom prst="rect">
             <a:avLst/>
@@ -6229,8 +6229,8 @@
         </p:nvSpPr>
         <p:spPr>
           <a:xfrm>
-            <a:off x="6208776" y="3609191"/>
-            <a:ext cx="2011680" cy="215153"/>
+            <a:off x="6208776" y="3676964"/>
+            <a:ext cx="2011680" cy="224835"/>
           </a:xfrm>
           <a:prstGeom prst="rect">
             <a:avLst/>
@@ -6268,8 +6268,8 @@
         </p:nvSpPr>
         <p:spPr>
           <a:xfrm>
-            <a:off x="8672194" y="3657600"/>
-            <a:ext cx="133478" cy="118334"/>
+            <a:off x="8672194" y="3727552"/>
+            <a:ext cx="133478" cy="123659"/>
           </a:xfrm>
           <a:prstGeom prst="rect">
             <a:avLst/>
@@ -6288,8 +6288,8 @@
         </p:nvSpPr>
         <p:spPr>
           <a:xfrm>
-            <a:off x="9390888" y="3609191"/>
-            <a:ext cx="566928" cy="215153"/>
+            <a:off x="9390888" y="3676964"/>
+            <a:ext cx="566928" cy="224835"/>
           </a:xfrm>
           <a:prstGeom prst="rect">
             <a:avLst/>
@@ -6327,8 +6327,8 @@
         </p:nvSpPr>
         <p:spPr>
           <a:xfrm>
-            <a:off x="9957816" y="3609191"/>
-            <a:ext cx="566928" cy="215153"/>
+            <a:off x="9957816" y="3676964"/>
+            <a:ext cx="566928" cy="224835"/>
           </a:xfrm>
           <a:prstGeom prst="rect">
             <a:avLst/>
@@ -6366,8 +6366,8 @@
         </p:nvSpPr>
         <p:spPr>
           <a:xfrm>
-            <a:off x="10524744" y="3609191"/>
-            <a:ext cx="859536" cy="215153"/>
+            <a:off x="10524744" y="3676964"/>
+            <a:ext cx="859536" cy="224835"/>
           </a:xfrm>
           <a:prstGeom prst="rect">
             <a:avLst/>
@@ -6405,8 +6405,8 @@
         </p:nvSpPr>
         <p:spPr>
           <a:xfrm>
-            <a:off x="6208776" y="3824344"/>
-            <a:ext cx="2011680" cy="215153"/>
+            <a:off x="6208776" y="3901799"/>
+            <a:ext cx="2011680" cy="224835"/>
           </a:xfrm>
           <a:prstGeom prst="rect">
             <a:avLst/>
@@ -6444,8 +6444,8 @@
         </p:nvSpPr>
         <p:spPr>
           <a:xfrm>
-            <a:off x="8624168" y="3872753"/>
-            <a:ext cx="181504" cy="118334"/>
+            <a:off x="8624168" y="3952386"/>
+            <a:ext cx="181504" cy="123659"/>
           </a:xfrm>
           <a:prstGeom prst="rect">
             <a:avLst/>
@@ -6464,8 +6464,8 @@
         </p:nvSpPr>
         <p:spPr>
           <a:xfrm>
-            <a:off x="9390888" y="3824344"/>
-            <a:ext cx="566928" cy="215153"/>
+            <a:off x="9390888" y="3901799"/>
+            <a:ext cx="566928" cy="224835"/>
           </a:xfrm>
           <a:prstGeom prst="rect">
             <a:avLst/>
@@ -6503,8 +6503,8 @@
         </p:nvSpPr>
         <p:spPr>
           <a:xfrm>
-            <a:off x="9957816" y="3824344"/>
-            <a:ext cx="566928" cy="215153"/>
+            <a:off x="9957816" y="3901799"/>
+            <a:ext cx="566928" cy="224835"/>
           </a:xfrm>
           <a:prstGeom prst="rect">
             <a:avLst/>
@@ -6542,8 +6542,8 @@
         </p:nvSpPr>
         <p:spPr>
           <a:xfrm>
-            <a:off x="10524744" y="3824344"/>
-            <a:ext cx="859536" cy="215153"/>
+            <a:off x="10524744" y="3901799"/>
+            <a:ext cx="859536" cy="224835"/>
           </a:xfrm>
           <a:prstGeom prst="rect">
             <a:avLst/>
@@ -6581,8 +6581,8 @@
         </p:nvSpPr>
         <p:spPr>
           <a:xfrm>
-            <a:off x="6135624" y="4039496"/>
-            <a:ext cx="5394960" cy="215153"/>
+            <a:off x="6135624" y="4126633"/>
+            <a:ext cx="5394960" cy="224835"/>
           </a:xfrm>
           <a:prstGeom prst="rect">
             <a:avLst/>
@@ -6601,8 +6601,8 @@
         </p:nvSpPr>
         <p:spPr>
           <a:xfrm>
-            <a:off x="6208776" y="4039496"/>
-            <a:ext cx="2011680" cy="215153"/>
+            <a:off x="6208776" y="4126633"/>
+            <a:ext cx="2011680" cy="224835"/>
           </a:xfrm>
           <a:prstGeom prst="rect">
             <a:avLst/>
@@ -6640,8 +6640,8 @@
         </p:nvSpPr>
         <p:spPr>
           <a:xfrm>
-            <a:off x="8616775" y="4087906"/>
-            <a:ext cx="188897" cy="118334"/>
+            <a:off x="8616775" y="4177221"/>
+            <a:ext cx="188897" cy="123659"/>
           </a:xfrm>
           <a:prstGeom prst="rect">
             <a:avLst/>
@@ -6660,8 +6660,8 @@
         </p:nvSpPr>
         <p:spPr>
           <a:xfrm>
-            <a:off x="9390888" y="4039496"/>
-            <a:ext cx="566928" cy="215153"/>
+            <a:off x="9390888" y="4126633"/>
+            <a:ext cx="566928" cy="224835"/>
           </a:xfrm>
           <a:prstGeom prst="rect">
             <a:avLst/>
@@ -6699,8 +6699,8 @@
         </p:nvSpPr>
         <p:spPr>
           <a:xfrm>
-            <a:off x="9957816" y="4039496"/>
-            <a:ext cx="566928" cy="215153"/>
+            <a:off x="9957816" y="4126633"/>
+            <a:ext cx="566928" cy="224835"/>
           </a:xfrm>
           <a:prstGeom prst="rect">
             <a:avLst/>
@@ -6738,8 +6738,8 @@
         </p:nvSpPr>
         <p:spPr>
           <a:xfrm>
-            <a:off x="10524744" y="4039496"/>
-            <a:ext cx="859536" cy="215153"/>
+            <a:off x="10524744" y="4126633"/>
+            <a:ext cx="859536" cy="224835"/>
           </a:xfrm>
           <a:prstGeom prst="rect">
             <a:avLst/>
@@ -6777,8 +6777,8 @@
         </p:nvSpPr>
         <p:spPr>
           <a:xfrm>
-            <a:off x="6208776" y="4254649"/>
-            <a:ext cx="2011680" cy="215153"/>
+            <a:off x="6208776" y="4351468"/>
+            <a:ext cx="2011680" cy="224835"/>
           </a:xfrm>
           <a:prstGeom prst="rect">
             <a:avLst/>
@@ -6816,8 +6816,8 @@
         </p:nvSpPr>
         <p:spPr>
           <a:xfrm>
-            <a:off x="8590345" y="4303059"/>
-            <a:ext cx="215327" cy="118334"/>
+            <a:off x="8590345" y="4402056"/>
+            <a:ext cx="215327" cy="123659"/>
           </a:xfrm>
           <a:prstGeom prst="rect">
             <a:avLst/>
@@ -6836,8 +6836,8 @@
         </p:nvSpPr>
         <p:spPr>
           <a:xfrm>
-            <a:off x="9390888" y="4254649"/>
-            <a:ext cx="566928" cy="215153"/>
+            <a:off x="9390888" y="4351468"/>
+            <a:ext cx="566928" cy="224835"/>
           </a:xfrm>
           <a:prstGeom prst="rect">
             <a:avLst/>
@@ -6875,8 +6875,8 @@
         </p:nvSpPr>
         <p:spPr>
           <a:xfrm>
-            <a:off x="9957816" y="4254649"/>
-            <a:ext cx="566928" cy="215153"/>
+            <a:off x="9957816" y="4351468"/>
+            <a:ext cx="566928" cy="224835"/>
           </a:xfrm>
           <a:prstGeom prst="rect">
             <a:avLst/>
@@ -6914,8 +6914,8 @@
         </p:nvSpPr>
         <p:spPr>
           <a:xfrm>
-            <a:off x="10524744" y="4254649"/>
-            <a:ext cx="859536" cy="215153"/>
+            <a:off x="10524744" y="4351468"/>
+            <a:ext cx="859536" cy="224835"/>
           </a:xfrm>
           <a:prstGeom prst="rect">
             <a:avLst/>
@@ -6953,8 +6953,8 @@
         </p:nvSpPr>
         <p:spPr>
           <a:xfrm>
-            <a:off x="6135624" y="4469802"/>
-            <a:ext cx="5394960" cy="215153"/>
+            <a:off x="6135624" y="4576303"/>
+            <a:ext cx="5394960" cy="224835"/>
           </a:xfrm>
           <a:prstGeom prst="rect">
             <a:avLst/>
@@ -6973,8 +6973,8 @@
         </p:nvSpPr>
         <p:spPr>
           <a:xfrm>
-            <a:off x="6208776" y="4469802"/>
-            <a:ext cx="2011680" cy="215153"/>
+            <a:off x="6208776" y="4576303"/>
+            <a:ext cx="2011680" cy="224835"/>
           </a:xfrm>
           <a:prstGeom prst="rect">
             <a:avLst/>
@@ -7012,8 +7012,8 @@
         </p:nvSpPr>
         <p:spPr>
           <a:xfrm>
-            <a:off x="8562958" y="4518212"/>
-            <a:ext cx="242714" cy="118334"/>
+            <a:off x="8562958" y="4626891"/>
+            <a:ext cx="242714" cy="123659"/>
           </a:xfrm>
           <a:prstGeom prst="rect">
             <a:avLst/>
@@ -7032,8 +7032,8 @@
         </p:nvSpPr>
         <p:spPr>
           <a:xfrm>
-            <a:off x="9390888" y="4469802"/>
-            <a:ext cx="566928" cy="215153"/>
+            <a:off x="9390888" y="4576303"/>
+            <a:ext cx="566928" cy="224835"/>
           </a:xfrm>
           <a:prstGeom prst="rect">
             <a:avLst/>
@@ -7071,8 +7071,8 @@
         </p:nvSpPr>
         <p:spPr>
           <a:xfrm>
-            <a:off x="9957816" y="4469802"/>
-            <a:ext cx="566928" cy="215153"/>
+            <a:off x="9957816" y="4576303"/>
+            <a:ext cx="566928" cy="224835"/>
           </a:xfrm>
           <a:prstGeom prst="rect">
             <a:avLst/>
@@ -7110,8 +7110,8 @@
         </p:nvSpPr>
         <p:spPr>
           <a:xfrm>
-            <a:off x="10524744" y="4469802"/>
-            <a:ext cx="859536" cy="215153"/>
+            <a:off x="10524744" y="4576303"/>
+            <a:ext cx="859536" cy="224835"/>
           </a:xfrm>
           <a:prstGeom prst="rect">
             <a:avLst/>
@@ -7149,8 +7149,8 @@
         </p:nvSpPr>
         <p:spPr>
           <a:xfrm>
-            <a:off x="6208776" y="4684955"/>
-            <a:ext cx="2011680" cy="215153"/>
+            <a:off x="6208776" y="4801138"/>
+            <a:ext cx="2011680" cy="224835"/>
           </a:xfrm>
           <a:prstGeom prst="rect">
             <a:avLst/>
@@ -7188,8 +7188,8 @@
         </p:nvSpPr>
         <p:spPr>
           <a:xfrm>
-            <a:off x="8514572" y="4733365"/>
-            <a:ext cx="291100" cy="118334"/>
+            <a:off x="8514572" y="4851726"/>
+            <a:ext cx="291100" cy="123659"/>
           </a:xfrm>
           <a:prstGeom prst="rect">
             <a:avLst/>
@@ -7208,8 +7208,8 @@
         </p:nvSpPr>
         <p:spPr>
           <a:xfrm>
-            <a:off x="9390888" y="4684955"/>
-            <a:ext cx="566928" cy="215153"/>
+            <a:off x="9390888" y="4801138"/>
+            <a:ext cx="566928" cy="224835"/>
           </a:xfrm>
           <a:prstGeom prst="rect">
             <a:avLst/>
@@ -7247,8 +7247,8 @@
         </p:nvSpPr>
         <p:spPr>
           <a:xfrm>
-            <a:off x="9957816" y="4684955"/>
-            <a:ext cx="566928" cy="215153"/>
+            <a:off x="9957816" y="4801138"/>
+            <a:ext cx="566928" cy="224835"/>
           </a:xfrm>
           <a:prstGeom prst="rect">
             <a:avLst/>
@@ -7286,8 +7286,8 @@
         </p:nvSpPr>
         <p:spPr>
           <a:xfrm>
-            <a:off x="10524744" y="4684955"/>
-            <a:ext cx="859536" cy="215153"/>
+            <a:off x="10524744" y="4801138"/>
+            <a:ext cx="859536" cy="224835"/>
           </a:xfrm>
           <a:prstGeom prst="rect">
             <a:avLst/>
@@ -7325,8 +7325,8 @@
         </p:nvSpPr>
         <p:spPr>
           <a:xfrm>
-            <a:off x="6135624" y="4900108"/>
-            <a:ext cx="5394960" cy="215153"/>
+            <a:off x="6135624" y="5025973"/>
+            <a:ext cx="5394960" cy="224835"/>
           </a:xfrm>
           <a:prstGeom prst="rect">
             <a:avLst/>
@@ -7345,8 +7345,8 @@
         </p:nvSpPr>
         <p:spPr>
           <a:xfrm>
-            <a:off x="6208776" y="4900108"/>
-            <a:ext cx="2011680" cy="215153"/>
+            <a:off x="6208776" y="5025973"/>
+            <a:ext cx="2011680" cy="224835"/>
           </a:xfrm>
           <a:prstGeom prst="rect">
             <a:avLst/>
@@ -7384,8 +7384,8 @@
         </p:nvSpPr>
         <p:spPr>
           <a:xfrm>
-            <a:off x="8475849" y="4948518"/>
-            <a:ext cx="329823" cy="118334"/>
+            <a:off x="8475849" y="5076561"/>
+            <a:ext cx="329823" cy="123659"/>
           </a:xfrm>
           <a:prstGeom prst="rect">
             <a:avLst/>
@@ -7404,8 +7404,8 @@
         </p:nvSpPr>
         <p:spPr>
           <a:xfrm>
-            <a:off x="9390888" y="4900108"/>
-            <a:ext cx="566928" cy="215153"/>
+            <a:off x="9390888" y="5025973"/>
+            <a:ext cx="566928" cy="224835"/>
           </a:xfrm>
           <a:prstGeom prst="rect">
             <a:avLst/>
@@ -7443,8 +7443,8 @@
         </p:nvSpPr>
         <p:spPr>
           <a:xfrm>
-            <a:off x="9957816" y="4900108"/>
-            <a:ext cx="566928" cy="215153"/>
+            <a:off x="9957816" y="5025973"/>
+            <a:ext cx="566928" cy="224835"/>
           </a:xfrm>
           <a:prstGeom prst="rect">
             <a:avLst/>
@@ -7482,8 +7482,8 @@
         </p:nvSpPr>
         <p:spPr>
           <a:xfrm>
-            <a:off x="10524744" y="4900108"/>
-            <a:ext cx="859536" cy="215153"/>
+            <a:off x="10524744" y="5025973"/>
+            <a:ext cx="859536" cy="224835"/>
           </a:xfrm>
           <a:prstGeom prst="rect">
             <a:avLst/>
@@ -7521,8 +7521,8 @@
         </p:nvSpPr>
         <p:spPr>
           <a:xfrm>
-            <a:off x="6208776" y="5115261"/>
-            <a:ext cx="2011680" cy="215153"/>
+            <a:off x="6208776" y="5250808"/>
+            <a:ext cx="2011680" cy="224835"/>
           </a:xfrm>
           <a:prstGeom prst="rect">
             <a:avLst/>
@@ -7560,8 +7560,8 @@
         </p:nvSpPr>
         <p:spPr>
           <a:xfrm>
-            <a:off x="8430963" y="5163671"/>
-            <a:ext cx="374709" cy="118334"/>
+            <a:off x="8430963" y="5301395"/>
+            <a:ext cx="374709" cy="123659"/>
           </a:xfrm>
           <a:prstGeom prst="rect">
             <a:avLst/>
@@ -7580,8 +7580,8 @@
         </p:nvSpPr>
         <p:spPr>
           <a:xfrm>
-            <a:off x="9390888" y="5115261"/>
-            <a:ext cx="566928" cy="215153"/>
+            <a:off x="9390888" y="5250808"/>
+            <a:ext cx="566928" cy="224835"/>
           </a:xfrm>
           <a:prstGeom prst="rect">
             <a:avLst/>
@@ -7619,8 +7619,8 @@
         </p:nvSpPr>
         <p:spPr>
           <a:xfrm>
-            <a:off x="9957816" y="5115261"/>
-            <a:ext cx="566928" cy="215153"/>
+            <a:off x="9957816" y="5250808"/>
+            <a:ext cx="566928" cy="224835"/>
           </a:xfrm>
           <a:prstGeom prst="rect">
             <a:avLst/>
@@ -7658,8 +7658,8 @@
         </p:nvSpPr>
         <p:spPr>
           <a:xfrm>
-            <a:off x="10524744" y="5115261"/>
-            <a:ext cx="859536" cy="215153"/>
+            <a:off x="10524744" y="5250808"/>
+            <a:ext cx="859536" cy="224835"/>
           </a:xfrm>
           <a:prstGeom prst="rect">
             <a:avLst/>
@@ -7697,8 +7697,8 @@
         </p:nvSpPr>
         <p:spPr>
           <a:xfrm>
-            <a:off x="6135624" y="5330414"/>
-            <a:ext cx="5394960" cy="215153"/>
+            <a:off x="6135624" y="5475642"/>
+            <a:ext cx="5394960" cy="224835"/>
           </a:xfrm>
           <a:prstGeom prst="rect">
             <a:avLst/>
@@ -7717,8 +7717,8 @@
         </p:nvSpPr>
         <p:spPr>
           <a:xfrm>
-            <a:off x="6208776" y="5330414"/>
-            <a:ext cx="2011680" cy="215153"/>
+            <a:off x="6208776" y="5475642"/>
+            <a:ext cx="2011680" cy="224835"/>
           </a:xfrm>
           <a:prstGeom prst="rect">
             <a:avLst/>
@@ -7756,8 +7756,8 @@
         </p:nvSpPr>
         <p:spPr>
           <a:xfrm>
-            <a:off x="8266176" y="5378824"/>
-            <a:ext cx="539496" cy="118334"/>
+            <a:off x="8266176" y="5526230"/>
+            <a:ext cx="539496" cy="123659"/>
           </a:xfrm>
           <a:prstGeom prst="rect">
             <a:avLst/>
@@ -7776,8 +7776,8 @@
         </p:nvSpPr>
         <p:spPr>
           <a:xfrm>
-            <a:off x="9390888" y="5330414"/>
-            <a:ext cx="566928" cy="215153"/>
+            <a:off x="9390888" y="5475642"/>
+            <a:ext cx="566928" cy="224835"/>
           </a:xfrm>
           <a:prstGeom prst="rect">
             <a:avLst/>
@@ -7815,8 +7815,8 @@
         </p:nvSpPr>
         <p:spPr>
           <a:xfrm>
-            <a:off x="9957816" y="5330414"/>
-            <a:ext cx="566928" cy="215153"/>
+            <a:off x="9957816" y="5475642"/>
+            <a:ext cx="566928" cy="224835"/>
           </a:xfrm>
           <a:prstGeom prst="rect">
             <a:avLst/>
@@ -7854,8 +7854,8 @@
         </p:nvSpPr>
         <p:spPr>
           <a:xfrm>
-            <a:off x="10524744" y="5330414"/>
-            <a:ext cx="859536" cy="215153"/>
+            <a:off x="10524744" y="5475642"/>
+            <a:ext cx="859536" cy="224835"/>
           </a:xfrm>
           <a:prstGeom prst="rect">
             <a:avLst/>
@@ -7893,8 +7893,8 @@
         </p:nvSpPr>
         <p:spPr>
           <a:xfrm>
-            <a:off x="457200" y="5961888"/>
-            <a:ext cx="11274552" cy="548640"/>
+            <a:off x="457200" y="6126480"/>
+            <a:ext cx="11274552" cy="615696"/>
           </a:xfrm>
           <a:prstGeom prst="rect">
             <a:avLst/>
@@ -7913,8 +7913,8 @@
         </p:nvSpPr>
         <p:spPr>
           <a:xfrm>
-            <a:off x="658368" y="5980176"/>
-            <a:ext cx="10927080" cy="512064"/>
+            <a:off x="658368" y="6144768"/>
+            <a:ext cx="10927080" cy="579120"/>
           </a:xfrm>
           <a:prstGeom prst="rect">
             <a:avLst/>
@@ -7938,7 +7938,7 @@
                 <a:ea typeface="Inter" pitchFamily="34" charset="-122"/>
                 <a:cs typeface="Inter" pitchFamily="34" charset="-120"/>
               </a:rPr>
-              <a:t>Internal labor margin runs 2.7 pts below customer pay across the group; 18 of 33 stores are at or better than that gap. Widest: AUDI RENO (−20.0 pts), LR LV (−13.9 pts) and LR HENDERSON (−12.2 pts).</a:t>
+              <a:t>Internal labor margin runs 2.7 pts below customer pay across the group; 18 of 33 stores are at or better than that gap. Widest: Audi Reno (−20.0 pts), LR LV (−13.9 pts) and LR Henderson (−12.2 pts).</a:t>
             </a:r>
             <a:endParaRPr lang="en-US" sz="1600" dirty="0"/>
           </a:p>
@@ -8083,7 +8083,7 @@
         <p:spPr>
           <a:xfrm>
             <a:off x="457200" y="1207008"/>
-            <a:ext cx="11274552" cy="4645152"/>
+            <a:ext cx="11274552" cy="4782312"/>
           </a:xfrm>
           <a:prstGeom prst="rect">
             <a:avLst/>
@@ -8369,7 +8369,7 @@
         <p:spPr>
           <a:xfrm>
             <a:off x="3249778" y="2103120"/>
-            <a:ext cx="10973" cy="3657600"/>
+            <a:ext cx="10973" cy="3822192"/>
           </a:xfrm>
           <a:prstGeom prst="rect">
             <a:avLst/>
@@ -8389,7 +8389,7 @@
         <p:spPr>
           <a:xfrm>
             <a:off x="3125947" y="2103120"/>
-            <a:ext cx="0" cy="3657600"/>
+            <a:ext cx="0" cy="3822192"/>
           </a:xfrm>
           <a:prstGeom prst="line">
             <a:avLst/>
@@ -8557,7 +8557,7 @@
         <p:spPr>
           <a:xfrm>
             <a:off x="8800186" y="2103120"/>
-            <a:ext cx="10973" cy="3442447"/>
+            <a:ext cx="10973" cy="3597357"/>
           </a:xfrm>
           <a:prstGeom prst="rect">
             <a:avLst/>
@@ -8577,7 +8577,7 @@
         <p:spPr>
           <a:xfrm>
             <a:off x="8676355" y="2103120"/>
-            <a:ext cx="0" cy="3442447"/>
+            <a:ext cx="0" cy="3597357"/>
           </a:xfrm>
           <a:prstGeom prst="line">
             <a:avLst/>
@@ -8600,7 +8600,7 @@
         <p:spPr>
           <a:xfrm>
             <a:off x="658368" y="2103120"/>
-            <a:ext cx="2011680" cy="215153"/>
+            <a:ext cx="2011680" cy="224835"/>
           </a:xfrm>
           <a:prstGeom prst="rect">
             <a:avLst/>
@@ -8638,8 +8638,8 @@
         </p:nvSpPr>
         <p:spPr>
           <a:xfrm>
-            <a:off x="3255264" y="2151529"/>
-            <a:ext cx="150363" cy="118334"/>
+            <a:off x="3255264" y="2153708"/>
+            <a:ext cx="150363" cy="123659"/>
           </a:xfrm>
           <a:prstGeom prst="rect">
             <a:avLst/>
@@ -8659,7 +8659,7 @@
         <p:spPr>
           <a:xfrm>
             <a:off x="3840480" y="2103120"/>
-            <a:ext cx="566928" cy="215153"/>
+            <a:ext cx="566928" cy="224835"/>
           </a:xfrm>
           <a:prstGeom prst="rect">
             <a:avLst/>
@@ -8698,7 +8698,7 @@
         <p:spPr>
           <a:xfrm>
             <a:off x="4407408" y="2103120"/>
-            <a:ext cx="566928" cy="215153"/>
+            <a:ext cx="566928" cy="224835"/>
           </a:xfrm>
           <a:prstGeom prst="rect">
             <a:avLst/>
@@ -8737,7 +8737,7 @@
         <p:spPr>
           <a:xfrm>
             <a:off x="4974336" y="2103120"/>
-            <a:ext cx="859536" cy="215153"/>
+            <a:ext cx="859536" cy="224835"/>
           </a:xfrm>
           <a:prstGeom prst="rect">
             <a:avLst/>
@@ -8775,8 +8775,8 @@
         </p:nvSpPr>
         <p:spPr>
           <a:xfrm>
-            <a:off x="585216" y="2318273"/>
-            <a:ext cx="5394960" cy="215153"/>
+            <a:off x="585216" y="2327955"/>
+            <a:ext cx="5394960" cy="224835"/>
           </a:xfrm>
           <a:prstGeom prst="rect">
             <a:avLst/>
@@ -8795,8 +8795,8 @@
         </p:nvSpPr>
         <p:spPr>
           <a:xfrm>
-            <a:off x="658368" y="2318273"/>
-            <a:ext cx="2011680" cy="215153"/>
+            <a:off x="658368" y="2327955"/>
+            <a:ext cx="2011680" cy="224835"/>
           </a:xfrm>
           <a:prstGeom prst="rect">
             <a:avLst/>
@@ -8834,8 +8834,8 @@
         </p:nvSpPr>
         <p:spPr>
           <a:xfrm>
-            <a:off x="3255264" y="2366682"/>
-            <a:ext cx="70154" cy="118334"/>
+            <a:off x="3255264" y="2378543"/>
+            <a:ext cx="70154" cy="123659"/>
           </a:xfrm>
           <a:prstGeom prst="rect">
             <a:avLst/>
@@ -8854,8 +8854,8 @@
         </p:nvSpPr>
         <p:spPr>
           <a:xfrm>
-            <a:off x="3840480" y="2318273"/>
-            <a:ext cx="566928" cy="215153"/>
+            <a:off x="3840480" y="2327955"/>
+            <a:ext cx="566928" cy="224835"/>
           </a:xfrm>
           <a:prstGeom prst="rect">
             <a:avLst/>
@@ -8893,8 +8893,8 @@
         </p:nvSpPr>
         <p:spPr>
           <a:xfrm>
-            <a:off x="4407408" y="2318273"/>
-            <a:ext cx="566928" cy="215153"/>
+            <a:off x="4407408" y="2327955"/>
+            <a:ext cx="566928" cy="224835"/>
           </a:xfrm>
           <a:prstGeom prst="rect">
             <a:avLst/>
@@ -8932,8 +8932,8 @@
         </p:nvSpPr>
         <p:spPr>
           <a:xfrm>
-            <a:off x="4974336" y="2318273"/>
-            <a:ext cx="859536" cy="215153"/>
+            <a:off x="4974336" y="2327955"/>
+            <a:ext cx="859536" cy="224835"/>
           </a:xfrm>
           <a:prstGeom prst="rect">
             <a:avLst/>
@@ -8971,8 +8971,8 @@
         </p:nvSpPr>
         <p:spPr>
           <a:xfrm>
-            <a:off x="658368" y="2533426"/>
-            <a:ext cx="2011680" cy="215153"/>
+            <a:off x="658368" y="2552790"/>
+            <a:ext cx="2011680" cy="224835"/>
           </a:xfrm>
           <a:prstGeom prst="rect">
             <a:avLst/>
@@ -9010,8 +9010,8 @@
         </p:nvSpPr>
         <p:spPr>
           <a:xfrm>
-            <a:off x="3255264" y="2581835"/>
-            <a:ext cx="38107" cy="118334"/>
+            <a:off x="3255264" y="2603377"/>
+            <a:ext cx="38107" cy="123659"/>
           </a:xfrm>
           <a:prstGeom prst="rect">
             <a:avLst/>
@@ -9030,8 +9030,8 @@
         </p:nvSpPr>
         <p:spPr>
           <a:xfrm>
-            <a:off x="3840480" y="2533426"/>
-            <a:ext cx="566928" cy="215153"/>
+            <a:off x="3840480" y="2552790"/>
+            <a:ext cx="566928" cy="224835"/>
           </a:xfrm>
           <a:prstGeom prst="rect">
             <a:avLst/>
@@ -9069,8 +9069,8 @@
         </p:nvSpPr>
         <p:spPr>
           <a:xfrm>
-            <a:off x="4407408" y="2533426"/>
-            <a:ext cx="566928" cy="215153"/>
+            <a:off x="4407408" y="2552790"/>
+            <a:ext cx="566928" cy="224835"/>
           </a:xfrm>
           <a:prstGeom prst="rect">
             <a:avLst/>
@@ -9108,8 +9108,8 @@
         </p:nvSpPr>
         <p:spPr>
           <a:xfrm>
-            <a:off x="4974336" y="2533426"/>
-            <a:ext cx="859536" cy="215153"/>
+            <a:off x="4974336" y="2552790"/>
+            <a:ext cx="859536" cy="224835"/>
           </a:xfrm>
           <a:prstGeom prst="rect">
             <a:avLst/>
@@ -9147,8 +9147,8 @@
         </p:nvSpPr>
         <p:spPr>
           <a:xfrm>
-            <a:off x="585216" y="2748579"/>
-            <a:ext cx="5394960" cy="215153"/>
+            <a:off x="585216" y="2777624"/>
+            <a:ext cx="5394960" cy="224835"/>
           </a:xfrm>
           <a:prstGeom prst="rect">
             <a:avLst/>
@@ -9167,8 +9167,8 @@
         </p:nvSpPr>
         <p:spPr>
           <a:xfrm>
-            <a:off x="658368" y="2748579"/>
-            <a:ext cx="2011680" cy="215153"/>
+            <a:off x="658368" y="2777624"/>
+            <a:ext cx="2011680" cy="224835"/>
           </a:xfrm>
           <a:prstGeom prst="rect">
             <a:avLst/>
@@ -9206,8 +9206,8 @@
         </p:nvSpPr>
         <p:spPr>
           <a:xfrm>
-            <a:off x="3255264" y="2796988"/>
-            <a:ext cx="20517" cy="118334"/>
+            <a:off x="3255264" y="2828212"/>
+            <a:ext cx="20517" cy="123659"/>
           </a:xfrm>
           <a:prstGeom prst="rect">
             <a:avLst/>
@@ -9226,8 +9226,8 @@
         </p:nvSpPr>
         <p:spPr>
           <a:xfrm>
-            <a:off x="3840480" y="2748579"/>
-            <a:ext cx="566928" cy="215153"/>
+            <a:off x="3840480" y="2777624"/>
+            <a:ext cx="566928" cy="224835"/>
           </a:xfrm>
           <a:prstGeom prst="rect">
             <a:avLst/>
@@ -9265,8 +9265,8 @@
         </p:nvSpPr>
         <p:spPr>
           <a:xfrm>
-            <a:off x="4407408" y="2748579"/>
-            <a:ext cx="566928" cy="215153"/>
+            <a:off x="4407408" y="2777624"/>
+            <a:ext cx="566928" cy="224835"/>
           </a:xfrm>
           <a:prstGeom prst="rect">
             <a:avLst/>
@@ -9304,8 +9304,8 @@
         </p:nvSpPr>
         <p:spPr>
           <a:xfrm>
-            <a:off x="4974336" y="2748579"/>
-            <a:ext cx="859536" cy="215153"/>
+            <a:off x="4974336" y="2777624"/>
+            <a:ext cx="859536" cy="224835"/>
           </a:xfrm>
           <a:prstGeom prst="rect">
             <a:avLst/>
@@ -9343,8 +9343,8 @@
         </p:nvSpPr>
         <p:spPr>
           <a:xfrm>
-            <a:off x="658368" y="2963732"/>
-            <a:ext cx="2011680" cy="215153"/>
+            <a:off x="658368" y="3002459"/>
+            <a:ext cx="2011680" cy="224835"/>
           </a:xfrm>
           <a:prstGeom prst="rect">
             <a:avLst/>
@@ -9382,8 +9382,8 @@
         </p:nvSpPr>
         <p:spPr>
           <a:xfrm>
-            <a:off x="3255264" y="3012141"/>
-            <a:ext cx="9144" cy="118334"/>
+            <a:off x="3255264" y="3053047"/>
+            <a:ext cx="9144" cy="123659"/>
           </a:xfrm>
           <a:prstGeom prst="rect">
             <a:avLst/>
@@ -9402,8 +9402,8 @@
         </p:nvSpPr>
         <p:spPr>
           <a:xfrm>
-            <a:off x="3840480" y="2963732"/>
-            <a:ext cx="566928" cy="215153"/>
+            <a:off x="3840480" y="3002459"/>
+            <a:ext cx="566928" cy="224835"/>
           </a:xfrm>
           <a:prstGeom prst="rect">
             <a:avLst/>
@@ -9441,8 +9441,8 @@
         </p:nvSpPr>
         <p:spPr>
           <a:xfrm>
-            <a:off x="4407408" y="2963732"/>
-            <a:ext cx="566928" cy="215153"/>
+            <a:off x="4407408" y="3002459"/>
+            <a:ext cx="566928" cy="224835"/>
           </a:xfrm>
           <a:prstGeom prst="rect">
             <a:avLst/>
@@ -9480,8 +9480,8 @@
         </p:nvSpPr>
         <p:spPr>
           <a:xfrm>
-            <a:off x="4974336" y="2963732"/>
-            <a:ext cx="859536" cy="215153"/>
+            <a:off x="4974336" y="3002459"/>
+            <a:ext cx="859536" cy="224835"/>
           </a:xfrm>
           <a:prstGeom prst="rect">
             <a:avLst/>
@@ -9519,8 +9519,8 @@
         </p:nvSpPr>
         <p:spPr>
           <a:xfrm>
-            <a:off x="585216" y="3178885"/>
-            <a:ext cx="5394960" cy="215153"/>
+            <a:off x="585216" y="3227294"/>
+            <a:ext cx="5394960" cy="224835"/>
           </a:xfrm>
           <a:prstGeom prst="rect">
             <a:avLst/>
@@ -9539,8 +9539,8 @@
         </p:nvSpPr>
         <p:spPr>
           <a:xfrm>
-            <a:off x="658368" y="3178885"/>
-            <a:ext cx="2011680" cy="215153"/>
+            <a:off x="658368" y="3227294"/>
+            <a:ext cx="2011680" cy="224835"/>
           </a:xfrm>
           <a:prstGeom prst="rect">
             <a:avLst/>
@@ -9578,8 +9578,8 @@
         </p:nvSpPr>
         <p:spPr>
           <a:xfrm>
-            <a:off x="3222182" y="3227294"/>
-            <a:ext cx="33082" cy="118334"/>
+            <a:off x="3222182" y="3277882"/>
+            <a:ext cx="33082" cy="123659"/>
           </a:xfrm>
           <a:prstGeom prst="rect">
             <a:avLst/>
@@ -9598,8 +9598,8 @@
         </p:nvSpPr>
         <p:spPr>
           <a:xfrm>
-            <a:off x="3840480" y="3178885"/>
-            <a:ext cx="566928" cy="215153"/>
+            <a:off x="3840480" y="3227294"/>
+            <a:ext cx="566928" cy="224835"/>
           </a:xfrm>
           <a:prstGeom prst="rect">
             <a:avLst/>
@@ -9637,8 +9637,8 @@
         </p:nvSpPr>
         <p:spPr>
           <a:xfrm>
-            <a:off x="4407408" y="3178885"/>
-            <a:ext cx="566928" cy="215153"/>
+            <a:off x="4407408" y="3227294"/>
+            <a:ext cx="566928" cy="224835"/>
           </a:xfrm>
           <a:prstGeom prst="rect">
             <a:avLst/>
@@ -9676,8 +9676,8 @@
         </p:nvSpPr>
         <p:spPr>
           <a:xfrm>
-            <a:off x="4974336" y="3178885"/>
-            <a:ext cx="859536" cy="215153"/>
+            <a:off x="4974336" y="3227294"/>
+            <a:ext cx="859536" cy="224835"/>
           </a:xfrm>
           <a:prstGeom prst="rect">
             <a:avLst/>
@@ -9715,8 +9715,8 @@
         </p:nvSpPr>
         <p:spPr>
           <a:xfrm>
-            <a:off x="658368" y="3394038"/>
-            <a:ext cx="2011680" cy="215153"/>
+            <a:off x="658368" y="3452129"/>
+            <a:ext cx="2011680" cy="224835"/>
           </a:xfrm>
           <a:prstGeom prst="rect">
             <a:avLst/>
@@ -9754,8 +9754,8 @@
         </p:nvSpPr>
         <p:spPr>
           <a:xfrm>
-            <a:off x="3179597" y="3442447"/>
-            <a:ext cx="75667" cy="118334"/>
+            <a:off x="3179597" y="3502717"/>
+            <a:ext cx="75667" cy="123659"/>
           </a:xfrm>
           <a:prstGeom prst="rect">
             <a:avLst/>
@@ -9774,8 +9774,8 @@
         </p:nvSpPr>
         <p:spPr>
           <a:xfrm>
-            <a:off x="3840480" y="3394038"/>
-            <a:ext cx="566928" cy="215153"/>
+            <a:off x="3840480" y="3452129"/>
+            <a:ext cx="566928" cy="224835"/>
           </a:xfrm>
           <a:prstGeom prst="rect">
             <a:avLst/>
@@ -9813,8 +9813,8 @@
         </p:nvSpPr>
         <p:spPr>
           <a:xfrm>
-            <a:off x="4407408" y="3394038"/>
-            <a:ext cx="566928" cy="215153"/>
+            <a:off x="4407408" y="3452129"/>
+            <a:ext cx="566928" cy="224835"/>
           </a:xfrm>
           <a:prstGeom prst="rect">
             <a:avLst/>
@@ -9852,8 +9852,8 @@
         </p:nvSpPr>
         <p:spPr>
           <a:xfrm>
-            <a:off x="4974336" y="3394038"/>
-            <a:ext cx="859536" cy="215153"/>
+            <a:off x="4974336" y="3452129"/>
+            <a:ext cx="859536" cy="224835"/>
           </a:xfrm>
           <a:prstGeom prst="rect">
             <a:avLst/>
@@ -9891,8 +9891,8 @@
         </p:nvSpPr>
         <p:spPr>
           <a:xfrm>
-            <a:off x="585216" y="3609191"/>
-            <a:ext cx="5394960" cy="215153"/>
+            <a:off x="585216" y="3676964"/>
+            <a:ext cx="5394960" cy="224835"/>
           </a:xfrm>
           <a:prstGeom prst="rect">
             <a:avLst/>
@@ -9911,8 +9911,8 @@
         </p:nvSpPr>
         <p:spPr>
           <a:xfrm>
-            <a:off x="658368" y="3609191"/>
-            <a:ext cx="2011680" cy="215153"/>
+            <a:off x="658368" y="3676964"/>
+            <a:ext cx="2011680" cy="224835"/>
           </a:xfrm>
           <a:prstGeom prst="rect">
             <a:avLst/>
@@ -9950,8 +9950,8 @@
         </p:nvSpPr>
         <p:spPr>
           <a:xfrm>
-            <a:off x="3178337" y="3657600"/>
-            <a:ext cx="76927" cy="118334"/>
+            <a:off x="3178337" y="3727552"/>
+            <a:ext cx="76927" cy="123659"/>
           </a:xfrm>
           <a:prstGeom prst="rect">
             <a:avLst/>
@@ -9970,8 +9970,8 @@
         </p:nvSpPr>
         <p:spPr>
           <a:xfrm>
-            <a:off x="3840480" y="3609191"/>
-            <a:ext cx="566928" cy="215153"/>
+            <a:off x="3840480" y="3676964"/>
+            <a:ext cx="566928" cy="224835"/>
           </a:xfrm>
           <a:prstGeom prst="rect">
             <a:avLst/>
@@ -10009,8 +10009,8 @@
         </p:nvSpPr>
         <p:spPr>
           <a:xfrm>
-            <a:off x="4407408" y="3609191"/>
-            <a:ext cx="566928" cy="215153"/>
+            <a:off x="4407408" y="3676964"/>
+            <a:ext cx="566928" cy="224835"/>
           </a:xfrm>
           <a:prstGeom prst="rect">
             <a:avLst/>
@@ -10048,8 +10048,8 @@
         </p:nvSpPr>
         <p:spPr>
           <a:xfrm>
-            <a:off x="4974336" y="3609191"/>
-            <a:ext cx="859536" cy="215153"/>
+            <a:off x="4974336" y="3676964"/>
+            <a:ext cx="859536" cy="224835"/>
           </a:xfrm>
           <a:prstGeom prst="rect">
             <a:avLst/>
@@ -10087,8 +10087,8 @@
         </p:nvSpPr>
         <p:spPr>
           <a:xfrm>
-            <a:off x="658368" y="3824344"/>
-            <a:ext cx="2011680" cy="215153"/>
+            <a:off x="658368" y="3901799"/>
+            <a:ext cx="2011680" cy="224835"/>
           </a:xfrm>
           <a:prstGeom prst="rect">
             <a:avLst/>
@@ -10126,8 +10126,8 @@
         </p:nvSpPr>
         <p:spPr>
           <a:xfrm>
-            <a:off x="3177426" y="3872753"/>
-            <a:ext cx="77838" cy="118334"/>
+            <a:off x="3177426" y="3952386"/>
+            <a:ext cx="77838" cy="123659"/>
           </a:xfrm>
           <a:prstGeom prst="rect">
             <a:avLst/>
@@ -10146,8 +10146,8 @@
         </p:nvSpPr>
         <p:spPr>
           <a:xfrm>
-            <a:off x="3840480" y="3824344"/>
-            <a:ext cx="566928" cy="215153"/>
+            <a:off x="3840480" y="3901799"/>
+            <a:ext cx="566928" cy="224835"/>
           </a:xfrm>
           <a:prstGeom prst="rect">
             <a:avLst/>
@@ -10185,8 +10185,8 @@
         </p:nvSpPr>
         <p:spPr>
           <a:xfrm>
-            <a:off x="4407408" y="3824344"/>
-            <a:ext cx="566928" cy="215153"/>
+            <a:off x="4407408" y="3901799"/>
+            <a:ext cx="566928" cy="224835"/>
           </a:xfrm>
           <a:prstGeom prst="rect">
             <a:avLst/>
@@ -10224,8 +10224,8 @@
         </p:nvSpPr>
         <p:spPr>
           <a:xfrm>
-            <a:off x="4974336" y="3824344"/>
-            <a:ext cx="859536" cy="215153"/>
+            <a:off x="4974336" y="3901799"/>
+            <a:ext cx="859536" cy="224835"/>
           </a:xfrm>
           <a:prstGeom prst="rect">
             <a:avLst/>
@@ -10263,8 +10263,8 @@
         </p:nvSpPr>
         <p:spPr>
           <a:xfrm>
-            <a:off x="585216" y="4039496"/>
-            <a:ext cx="5394960" cy="215153"/>
+            <a:off x="585216" y="4126633"/>
+            <a:ext cx="5394960" cy="224835"/>
           </a:xfrm>
           <a:prstGeom prst="rect">
             <a:avLst/>
@@ -10283,8 +10283,8 @@
         </p:nvSpPr>
         <p:spPr>
           <a:xfrm>
-            <a:off x="658368" y="4039496"/>
-            <a:ext cx="2011680" cy="215153"/>
+            <a:off x="658368" y="4126633"/>
+            <a:ext cx="2011680" cy="224835"/>
           </a:xfrm>
           <a:prstGeom prst="rect">
             <a:avLst/>
@@ -10322,8 +10322,8 @@
         </p:nvSpPr>
         <p:spPr>
           <a:xfrm>
-            <a:off x="3137487" y="4087906"/>
-            <a:ext cx="117777" cy="118334"/>
+            <a:off x="3137487" y="4177221"/>
+            <a:ext cx="117777" cy="123659"/>
           </a:xfrm>
           <a:prstGeom prst="rect">
             <a:avLst/>
@@ -10342,8 +10342,8 @@
         </p:nvSpPr>
         <p:spPr>
           <a:xfrm>
-            <a:off x="3840480" y="4039496"/>
-            <a:ext cx="566928" cy="215153"/>
+            <a:off x="3840480" y="4126633"/>
+            <a:ext cx="566928" cy="224835"/>
           </a:xfrm>
           <a:prstGeom prst="rect">
             <a:avLst/>
@@ -10381,8 +10381,8 @@
         </p:nvSpPr>
         <p:spPr>
           <a:xfrm>
-            <a:off x="4407408" y="4039496"/>
-            <a:ext cx="566928" cy="215153"/>
+            <a:off x="4407408" y="4126633"/>
+            <a:ext cx="566928" cy="224835"/>
           </a:xfrm>
           <a:prstGeom prst="rect">
             <a:avLst/>
@@ -10420,8 +10420,8 @@
         </p:nvSpPr>
         <p:spPr>
           <a:xfrm>
-            <a:off x="4974336" y="4039496"/>
-            <a:ext cx="859536" cy="215153"/>
+            <a:off x="4974336" y="4126633"/>
+            <a:ext cx="859536" cy="224835"/>
           </a:xfrm>
           <a:prstGeom prst="rect">
             <a:avLst/>
@@ -10459,8 +10459,8 @@
         </p:nvSpPr>
         <p:spPr>
           <a:xfrm>
-            <a:off x="658368" y="4254649"/>
-            <a:ext cx="2011680" cy="215153"/>
+            <a:off x="658368" y="4351468"/>
+            <a:ext cx="2011680" cy="224835"/>
           </a:xfrm>
           <a:prstGeom prst="rect">
             <a:avLst/>
@@ -10498,8 +10498,8 @@
         </p:nvSpPr>
         <p:spPr>
           <a:xfrm>
-            <a:off x="3136637" y="4303059"/>
-            <a:ext cx="118627" cy="118334"/>
+            <a:off x="3136637" y="4402056"/>
+            <a:ext cx="118627" cy="123659"/>
           </a:xfrm>
           <a:prstGeom prst="rect">
             <a:avLst/>
@@ -10518,8 +10518,8 @@
         </p:nvSpPr>
         <p:spPr>
           <a:xfrm>
-            <a:off x="3840480" y="4254649"/>
-            <a:ext cx="566928" cy="215153"/>
+            <a:off x="3840480" y="4351468"/>
+            <a:ext cx="566928" cy="224835"/>
           </a:xfrm>
           <a:prstGeom prst="rect">
             <a:avLst/>
@@ -10557,8 +10557,8 @@
         </p:nvSpPr>
         <p:spPr>
           <a:xfrm>
-            <a:off x="4407408" y="4254649"/>
-            <a:ext cx="566928" cy="215153"/>
+            <a:off x="4407408" y="4351468"/>
+            <a:ext cx="566928" cy="224835"/>
           </a:xfrm>
           <a:prstGeom prst="rect">
             <a:avLst/>
@@ -10596,8 +10596,8 @@
         </p:nvSpPr>
         <p:spPr>
           <a:xfrm>
-            <a:off x="4974336" y="4254649"/>
-            <a:ext cx="859536" cy="215153"/>
+            <a:off x="4974336" y="4351468"/>
+            <a:ext cx="859536" cy="224835"/>
           </a:xfrm>
           <a:prstGeom prst="rect">
             <a:avLst/>
@@ -10635,8 +10635,8 @@
         </p:nvSpPr>
         <p:spPr>
           <a:xfrm>
-            <a:off x="585216" y="4469802"/>
-            <a:ext cx="5394960" cy="215153"/>
+            <a:off x="585216" y="4576303"/>
+            <a:ext cx="5394960" cy="224835"/>
           </a:xfrm>
           <a:prstGeom prst="rect">
             <a:avLst/>
@@ -10655,8 +10655,8 @@
         </p:nvSpPr>
         <p:spPr>
           <a:xfrm>
-            <a:off x="658368" y="4469802"/>
-            <a:ext cx="2011680" cy="215153"/>
+            <a:off x="658368" y="4576303"/>
+            <a:ext cx="2011680" cy="224835"/>
           </a:xfrm>
           <a:prstGeom prst="rect">
             <a:avLst/>
@@ -10694,8 +10694,8 @@
         </p:nvSpPr>
         <p:spPr>
           <a:xfrm>
-            <a:off x="3096612" y="4518212"/>
-            <a:ext cx="158652" cy="118334"/>
+            <a:off x="3096612" y="4626891"/>
+            <a:ext cx="158652" cy="123659"/>
           </a:xfrm>
           <a:prstGeom prst="rect">
             <a:avLst/>
@@ -10714,8 +10714,8 @@
         </p:nvSpPr>
         <p:spPr>
           <a:xfrm>
-            <a:off x="3840480" y="4469802"/>
-            <a:ext cx="566928" cy="215153"/>
+            <a:off x="3840480" y="4576303"/>
+            <a:ext cx="566928" cy="224835"/>
           </a:xfrm>
           <a:prstGeom prst="rect">
             <a:avLst/>
@@ -10753,8 +10753,8 @@
         </p:nvSpPr>
         <p:spPr>
           <a:xfrm>
-            <a:off x="4407408" y="4469802"/>
-            <a:ext cx="566928" cy="215153"/>
+            <a:off x="4407408" y="4576303"/>
+            <a:ext cx="566928" cy="224835"/>
           </a:xfrm>
           <a:prstGeom prst="rect">
             <a:avLst/>
@@ -10792,8 +10792,8 @@
         </p:nvSpPr>
         <p:spPr>
           <a:xfrm>
-            <a:off x="4974336" y="4469802"/>
-            <a:ext cx="859536" cy="215153"/>
+            <a:off x="4974336" y="4576303"/>
+            <a:ext cx="859536" cy="224835"/>
           </a:xfrm>
           <a:prstGeom prst="rect">
             <a:avLst/>
@@ -10831,8 +10831,8 @@
         </p:nvSpPr>
         <p:spPr>
           <a:xfrm>
-            <a:off x="658368" y="4684955"/>
-            <a:ext cx="2011680" cy="215153"/>
+            <a:off x="658368" y="4801138"/>
+            <a:ext cx="2011680" cy="224835"/>
           </a:xfrm>
           <a:prstGeom prst="rect">
             <a:avLst/>
@@ -10870,8 +10870,8 @@
         </p:nvSpPr>
         <p:spPr>
           <a:xfrm>
-            <a:off x="3081235" y="4733365"/>
-            <a:ext cx="174029" cy="118334"/>
+            <a:off x="3081235" y="4851726"/>
+            <a:ext cx="174029" cy="123659"/>
           </a:xfrm>
           <a:prstGeom prst="rect">
             <a:avLst/>
@@ -10890,8 +10890,8 @@
         </p:nvSpPr>
         <p:spPr>
           <a:xfrm>
-            <a:off x="3840480" y="4684955"/>
-            <a:ext cx="566928" cy="215153"/>
+            <a:off x="3840480" y="4801138"/>
+            <a:ext cx="566928" cy="224835"/>
           </a:xfrm>
           <a:prstGeom prst="rect">
             <a:avLst/>
@@ -10929,8 +10929,8 @@
         </p:nvSpPr>
         <p:spPr>
           <a:xfrm>
-            <a:off x="4407408" y="4684955"/>
-            <a:ext cx="566928" cy="215153"/>
+            <a:off x="4407408" y="4801138"/>
+            <a:ext cx="566928" cy="224835"/>
           </a:xfrm>
           <a:prstGeom prst="rect">
             <a:avLst/>
@@ -10968,8 +10968,8 @@
         </p:nvSpPr>
         <p:spPr>
           <a:xfrm>
-            <a:off x="4974336" y="4684955"/>
-            <a:ext cx="859536" cy="215153"/>
+            <a:off x="4974336" y="4801138"/>
+            <a:ext cx="859536" cy="224835"/>
           </a:xfrm>
           <a:prstGeom prst="rect">
             <a:avLst/>
@@ -11007,8 +11007,8 @@
         </p:nvSpPr>
         <p:spPr>
           <a:xfrm>
-            <a:off x="585216" y="4900108"/>
-            <a:ext cx="5394960" cy="215153"/>
+            <a:off x="585216" y="5025973"/>
+            <a:ext cx="5394960" cy="224835"/>
           </a:xfrm>
           <a:prstGeom prst="rect">
             <a:avLst/>
@@ -11027,8 +11027,8 @@
         </p:nvSpPr>
         <p:spPr>
           <a:xfrm>
-            <a:off x="658368" y="4900108"/>
-            <a:ext cx="2011680" cy="215153"/>
+            <a:off x="658368" y="5025973"/>
+            <a:ext cx="2011680" cy="224835"/>
           </a:xfrm>
           <a:prstGeom prst="rect">
             <a:avLst/>
@@ -11066,8 +11066,8 @@
         </p:nvSpPr>
         <p:spPr>
           <a:xfrm>
-            <a:off x="3077450" y="4948518"/>
-            <a:ext cx="177814" cy="118334"/>
+            <a:off x="3077450" y="5076561"/>
+            <a:ext cx="177814" cy="123659"/>
           </a:xfrm>
           <a:prstGeom prst="rect">
             <a:avLst/>
@@ -11086,8 +11086,8 @@
         </p:nvSpPr>
         <p:spPr>
           <a:xfrm>
-            <a:off x="3840480" y="4900108"/>
-            <a:ext cx="566928" cy="215153"/>
+            <a:off x="3840480" y="5025973"/>
+            <a:ext cx="566928" cy="224835"/>
           </a:xfrm>
           <a:prstGeom prst="rect">
             <a:avLst/>
@@ -11125,8 +11125,8 @@
         </p:nvSpPr>
         <p:spPr>
           <a:xfrm>
-            <a:off x="4407408" y="4900108"/>
-            <a:ext cx="566928" cy="215153"/>
+            <a:off x="4407408" y="5025973"/>
+            <a:ext cx="566928" cy="224835"/>
           </a:xfrm>
           <a:prstGeom prst="rect">
             <a:avLst/>
@@ -11164,8 +11164,8 @@
         </p:nvSpPr>
         <p:spPr>
           <a:xfrm>
-            <a:off x="4974336" y="4900108"/>
-            <a:ext cx="859536" cy="215153"/>
+            <a:off x="4974336" y="5025973"/>
+            <a:ext cx="859536" cy="224835"/>
           </a:xfrm>
           <a:prstGeom prst="rect">
             <a:avLst/>
@@ -11203,8 +11203,8 @@
         </p:nvSpPr>
         <p:spPr>
           <a:xfrm>
-            <a:off x="658368" y="5115261"/>
-            <a:ext cx="2011680" cy="215153"/>
+            <a:off x="658368" y="5250808"/>
+            <a:ext cx="2011680" cy="224835"/>
           </a:xfrm>
           <a:prstGeom prst="rect">
             <a:avLst/>
@@ -11242,8 +11242,8 @@
         </p:nvSpPr>
         <p:spPr>
           <a:xfrm>
-            <a:off x="3070973" y="5163671"/>
-            <a:ext cx="184291" cy="118334"/>
+            <a:off x="3070973" y="5301395"/>
+            <a:ext cx="184291" cy="123659"/>
           </a:xfrm>
           <a:prstGeom prst="rect">
             <a:avLst/>
@@ -11262,8 +11262,8 @@
         </p:nvSpPr>
         <p:spPr>
           <a:xfrm>
-            <a:off x="3840480" y="5115261"/>
-            <a:ext cx="566928" cy="215153"/>
+            <a:off x="3840480" y="5250808"/>
+            <a:ext cx="566928" cy="224835"/>
           </a:xfrm>
           <a:prstGeom prst="rect">
             <a:avLst/>
@@ -11301,8 +11301,8 @@
         </p:nvSpPr>
         <p:spPr>
           <a:xfrm>
-            <a:off x="4407408" y="5115261"/>
-            <a:ext cx="566928" cy="215153"/>
+            <a:off x="4407408" y="5250808"/>
+            <a:ext cx="566928" cy="224835"/>
           </a:xfrm>
           <a:prstGeom prst="rect">
             <a:avLst/>
@@ -11340,8 +11340,8 @@
         </p:nvSpPr>
         <p:spPr>
           <a:xfrm>
-            <a:off x="4974336" y="5115261"/>
-            <a:ext cx="859536" cy="215153"/>
+            <a:off x="4974336" y="5250808"/>
+            <a:ext cx="859536" cy="224835"/>
           </a:xfrm>
           <a:prstGeom prst="rect">
             <a:avLst/>
@@ -11379,8 +11379,8 @@
         </p:nvSpPr>
         <p:spPr>
           <a:xfrm>
-            <a:off x="585216" y="5330414"/>
-            <a:ext cx="5394960" cy="215153"/>
+            <a:off x="585216" y="5475642"/>
+            <a:ext cx="5394960" cy="224835"/>
           </a:xfrm>
           <a:prstGeom prst="rect">
             <a:avLst/>
@@ -11399,8 +11399,8 @@
         </p:nvSpPr>
         <p:spPr>
           <a:xfrm>
-            <a:off x="658368" y="5330414"/>
-            <a:ext cx="2011680" cy="215153"/>
+            <a:off x="658368" y="5475642"/>
+            <a:ext cx="2011680" cy="224835"/>
           </a:xfrm>
           <a:prstGeom prst="rect">
             <a:avLst/>
@@ -11438,8 +11438,8 @@
         </p:nvSpPr>
         <p:spPr>
           <a:xfrm>
-            <a:off x="3060053" y="5378824"/>
-            <a:ext cx="195211" cy="118334"/>
+            <a:off x="3060053" y="5526230"/>
+            <a:ext cx="195211" cy="123659"/>
           </a:xfrm>
           <a:prstGeom prst="rect">
             <a:avLst/>
@@ -11458,8 +11458,8 @@
         </p:nvSpPr>
         <p:spPr>
           <a:xfrm>
-            <a:off x="3840480" y="5330414"/>
-            <a:ext cx="566928" cy="215153"/>
+            <a:off x="3840480" y="5475642"/>
+            <a:ext cx="566928" cy="224835"/>
           </a:xfrm>
           <a:prstGeom prst="rect">
             <a:avLst/>
@@ -11497,8 +11497,8 @@
         </p:nvSpPr>
         <p:spPr>
           <a:xfrm>
-            <a:off x="4407408" y="5330414"/>
-            <a:ext cx="566928" cy="215153"/>
+            <a:off x="4407408" y="5475642"/>
+            <a:ext cx="566928" cy="224835"/>
           </a:xfrm>
           <a:prstGeom prst="rect">
             <a:avLst/>
@@ -11536,8 +11536,8 @@
         </p:nvSpPr>
         <p:spPr>
           <a:xfrm>
-            <a:off x="4974336" y="5330414"/>
-            <a:ext cx="859536" cy="215153"/>
+            <a:off x="4974336" y="5475642"/>
+            <a:ext cx="859536" cy="224835"/>
           </a:xfrm>
           <a:prstGeom prst="rect">
             <a:avLst/>
@@ -11575,8 +11575,8 @@
         </p:nvSpPr>
         <p:spPr>
           <a:xfrm>
-            <a:off x="658368" y="5545567"/>
-            <a:ext cx="2011680" cy="215153"/>
+            <a:off x="658368" y="5700477"/>
+            <a:ext cx="2011680" cy="224835"/>
           </a:xfrm>
           <a:prstGeom prst="rect">
             <a:avLst/>
@@ -11614,8 +11614,8 @@
         </p:nvSpPr>
         <p:spPr>
           <a:xfrm>
-            <a:off x="3033339" y="5593976"/>
-            <a:ext cx="221925" cy="118334"/>
+            <a:off x="3033339" y="5751065"/>
+            <a:ext cx="221925" cy="123659"/>
           </a:xfrm>
           <a:prstGeom prst="rect">
             <a:avLst/>
@@ -11634,8 +11634,8 @@
         </p:nvSpPr>
         <p:spPr>
           <a:xfrm>
-            <a:off x="3840480" y="5545567"/>
-            <a:ext cx="566928" cy="215153"/>
+            <a:off x="3840480" y="5700477"/>
+            <a:ext cx="566928" cy="224835"/>
           </a:xfrm>
           <a:prstGeom prst="rect">
             <a:avLst/>
@@ -11673,8 +11673,8 @@
         </p:nvSpPr>
         <p:spPr>
           <a:xfrm>
-            <a:off x="4407408" y="5545567"/>
-            <a:ext cx="566928" cy="215153"/>
+            <a:off x="4407408" y="5700477"/>
+            <a:ext cx="566928" cy="224835"/>
           </a:xfrm>
           <a:prstGeom prst="rect">
             <a:avLst/>
@@ -11712,8 +11712,8 @@
         </p:nvSpPr>
         <p:spPr>
           <a:xfrm>
-            <a:off x="4974336" y="5545567"/>
-            <a:ext cx="859536" cy="215153"/>
+            <a:off x="4974336" y="5700477"/>
+            <a:ext cx="859536" cy="224835"/>
           </a:xfrm>
           <a:prstGeom prst="rect">
             <a:avLst/>
@@ -11752,7 +11752,7 @@
         <p:spPr>
           <a:xfrm>
             <a:off x="6208776" y="2103120"/>
-            <a:ext cx="2011680" cy="215153"/>
+            <a:ext cx="2011680" cy="224835"/>
           </a:xfrm>
           <a:prstGeom prst="rect">
             <a:avLst/>
@@ -11790,8 +11790,8 @@
         </p:nvSpPr>
         <p:spPr>
           <a:xfrm>
-            <a:off x="8575710" y="2151529"/>
-            <a:ext cx="229962" cy="118334"/>
+            <a:off x="8575710" y="2153708"/>
+            <a:ext cx="229962" cy="123659"/>
           </a:xfrm>
           <a:prstGeom prst="rect">
             <a:avLst/>
@@ -11811,7 +11811,7 @@
         <p:spPr>
           <a:xfrm>
             <a:off x="9390888" y="2103120"/>
-            <a:ext cx="566928" cy="215153"/>
+            <a:ext cx="566928" cy="224835"/>
           </a:xfrm>
           <a:prstGeom prst="rect">
             <a:avLst/>
@@ -11850,7 +11850,7 @@
         <p:spPr>
           <a:xfrm>
             <a:off x="9957816" y="2103120"/>
-            <a:ext cx="566928" cy="215153"/>
+            <a:ext cx="566928" cy="224835"/>
           </a:xfrm>
           <a:prstGeom prst="rect">
             <a:avLst/>
@@ -11889,7 +11889,7 @@
         <p:spPr>
           <a:xfrm>
             <a:off x="10524744" y="2103120"/>
-            <a:ext cx="859536" cy="215153"/>
+            <a:ext cx="859536" cy="224835"/>
           </a:xfrm>
           <a:prstGeom prst="rect">
             <a:avLst/>
@@ -11927,8 +11927,8 @@
         </p:nvSpPr>
         <p:spPr>
           <a:xfrm>
-            <a:off x="6135624" y="2318273"/>
-            <a:ext cx="5394960" cy="215153"/>
+            <a:off x="6135624" y="2327955"/>
+            <a:ext cx="5394960" cy="224835"/>
           </a:xfrm>
           <a:prstGeom prst="rect">
             <a:avLst/>
@@ -11947,8 +11947,8 @@
         </p:nvSpPr>
         <p:spPr>
           <a:xfrm>
-            <a:off x="6208776" y="2318273"/>
-            <a:ext cx="2011680" cy="215153"/>
+            <a:off x="6208776" y="2327955"/>
+            <a:ext cx="2011680" cy="224835"/>
           </a:xfrm>
           <a:prstGeom prst="rect">
             <a:avLst/>
@@ -11986,8 +11986,8 @@
         </p:nvSpPr>
         <p:spPr>
           <a:xfrm>
-            <a:off x="8565630" y="2366682"/>
-            <a:ext cx="240042" cy="118334"/>
+            <a:off x="8565630" y="2378543"/>
+            <a:ext cx="240042" cy="123659"/>
           </a:xfrm>
           <a:prstGeom prst="rect">
             <a:avLst/>
@@ -12006,8 +12006,8 @@
         </p:nvSpPr>
         <p:spPr>
           <a:xfrm>
-            <a:off x="9390888" y="2318273"/>
-            <a:ext cx="566928" cy="215153"/>
+            <a:off x="9390888" y="2327955"/>
+            <a:ext cx="566928" cy="224835"/>
           </a:xfrm>
           <a:prstGeom prst="rect">
             <a:avLst/>
@@ -12045,8 +12045,8 @@
         </p:nvSpPr>
         <p:spPr>
           <a:xfrm>
-            <a:off x="9957816" y="2318273"/>
-            <a:ext cx="566928" cy="215153"/>
+            <a:off x="9957816" y="2327955"/>
+            <a:ext cx="566928" cy="224835"/>
           </a:xfrm>
           <a:prstGeom prst="rect">
             <a:avLst/>
@@ -12084,8 +12084,8 @@
         </p:nvSpPr>
         <p:spPr>
           <a:xfrm>
-            <a:off x="10524744" y="2318273"/>
-            <a:ext cx="859536" cy="215153"/>
+            <a:off x="10524744" y="2327955"/>
+            <a:ext cx="859536" cy="224835"/>
           </a:xfrm>
           <a:prstGeom prst="rect">
             <a:avLst/>
@@ -12123,8 +12123,8 @@
         </p:nvSpPr>
         <p:spPr>
           <a:xfrm>
-            <a:off x="6208776" y="2533426"/>
-            <a:ext cx="2011680" cy="215153"/>
+            <a:off x="6208776" y="2552790"/>
+            <a:ext cx="2011680" cy="224835"/>
           </a:xfrm>
           <a:prstGeom prst="rect">
             <a:avLst/>
@@ -12162,8 +12162,8 @@
         </p:nvSpPr>
         <p:spPr>
           <a:xfrm>
-            <a:off x="8564916" y="2581835"/>
-            <a:ext cx="240756" cy="118334"/>
+            <a:off x="8564916" y="2603377"/>
+            <a:ext cx="240756" cy="123659"/>
           </a:xfrm>
           <a:prstGeom prst="rect">
             <a:avLst/>
@@ -12182,8 +12182,8 @@
         </p:nvSpPr>
         <p:spPr>
           <a:xfrm>
-            <a:off x="9390888" y="2533426"/>
-            <a:ext cx="566928" cy="215153"/>
+            <a:off x="9390888" y="2552790"/>
+            <a:ext cx="566928" cy="224835"/>
           </a:xfrm>
           <a:prstGeom prst="rect">
             <a:avLst/>
@@ -12221,8 +12221,8 @@
         </p:nvSpPr>
         <p:spPr>
           <a:xfrm>
-            <a:off x="9957816" y="2533426"/>
-            <a:ext cx="566928" cy="215153"/>
+            <a:off x="9957816" y="2552790"/>
+            <a:ext cx="566928" cy="224835"/>
           </a:xfrm>
           <a:prstGeom prst="rect">
             <a:avLst/>
@@ -12260,8 +12260,8 @@
         </p:nvSpPr>
         <p:spPr>
           <a:xfrm>
-            <a:off x="10524744" y="2533426"/>
-            <a:ext cx="859536" cy="215153"/>
+            <a:off x="10524744" y="2552790"/>
+            <a:ext cx="859536" cy="224835"/>
           </a:xfrm>
           <a:prstGeom prst="rect">
             <a:avLst/>
@@ -12299,8 +12299,8 @@
         </p:nvSpPr>
         <p:spPr>
           <a:xfrm>
-            <a:off x="6135624" y="2748579"/>
-            <a:ext cx="5394960" cy="215153"/>
+            <a:off x="6135624" y="2777624"/>
+            <a:ext cx="5394960" cy="224835"/>
           </a:xfrm>
           <a:prstGeom prst="rect">
             <a:avLst/>
@@ -12319,8 +12319,8 @@
         </p:nvSpPr>
         <p:spPr>
           <a:xfrm>
-            <a:off x="6208776" y="2748579"/>
-            <a:ext cx="2011680" cy="215153"/>
+            <a:off x="6208776" y="2777624"/>
+            <a:ext cx="2011680" cy="224835"/>
           </a:xfrm>
           <a:prstGeom prst="rect">
             <a:avLst/>
@@ -12358,8 +12358,8 @@
         </p:nvSpPr>
         <p:spPr>
           <a:xfrm>
-            <a:off x="8545748" y="2796988"/>
-            <a:ext cx="259924" cy="118334"/>
+            <a:off x="8545748" y="2828212"/>
+            <a:ext cx="259924" cy="123659"/>
           </a:xfrm>
           <a:prstGeom prst="rect">
             <a:avLst/>
@@ -12378,8 +12378,8 @@
         </p:nvSpPr>
         <p:spPr>
           <a:xfrm>
-            <a:off x="9390888" y="2748579"/>
-            <a:ext cx="566928" cy="215153"/>
+            <a:off x="9390888" y="2777624"/>
+            <a:ext cx="566928" cy="224835"/>
           </a:xfrm>
           <a:prstGeom prst="rect">
             <a:avLst/>
@@ -12417,8 +12417,8 @@
         </p:nvSpPr>
         <p:spPr>
           <a:xfrm>
-            <a:off x="9957816" y="2748579"/>
-            <a:ext cx="566928" cy="215153"/>
+            <a:off x="9957816" y="2777624"/>
+            <a:ext cx="566928" cy="224835"/>
           </a:xfrm>
           <a:prstGeom prst="rect">
             <a:avLst/>
@@ -12456,8 +12456,8 @@
         </p:nvSpPr>
         <p:spPr>
           <a:xfrm>
-            <a:off x="10524744" y="2748579"/>
-            <a:ext cx="859536" cy="215153"/>
+            <a:off x="10524744" y="2777624"/>
+            <a:ext cx="859536" cy="224835"/>
           </a:xfrm>
           <a:prstGeom prst="rect">
             <a:avLst/>
@@ -12495,8 +12495,8 @@
         </p:nvSpPr>
         <p:spPr>
           <a:xfrm>
-            <a:off x="6208776" y="2963732"/>
-            <a:ext cx="2011680" cy="215153"/>
+            <a:off x="6208776" y="3002459"/>
+            <a:ext cx="2011680" cy="224835"/>
           </a:xfrm>
           <a:prstGeom prst="rect">
             <a:avLst/>
@@ -12534,8 +12534,8 @@
         </p:nvSpPr>
         <p:spPr>
           <a:xfrm>
-            <a:off x="8541222" y="3012141"/>
-            <a:ext cx="264450" cy="118334"/>
+            <a:off x="8541222" y="3053047"/>
+            <a:ext cx="264450" cy="123659"/>
           </a:xfrm>
           <a:prstGeom prst="rect">
             <a:avLst/>
@@ -12554,8 +12554,8 @@
         </p:nvSpPr>
         <p:spPr>
           <a:xfrm>
-            <a:off x="9390888" y="2963732"/>
-            <a:ext cx="566928" cy="215153"/>
+            <a:off x="9390888" y="3002459"/>
+            <a:ext cx="566928" cy="224835"/>
           </a:xfrm>
           <a:prstGeom prst="rect">
             <a:avLst/>
@@ -12593,8 +12593,8 @@
         </p:nvSpPr>
         <p:spPr>
           <a:xfrm>
-            <a:off x="9957816" y="2963732"/>
-            <a:ext cx="566928" cy="215153"/>
+            <a:off x="9957816" y="3002459"/>
+            <a:ext cx="566928" cy="224835"/>
           </a:xfrm>
           <a:prstGeom prst="rect">
             <a:avLst/>
@@ -12632,8 +12632,8 @@
         </p:nvSpPr>
         <p:spPr>
           <a:xfrm>
-            <a:off x="10524744" y="2963732"/>
-            <a:ext cx="859536" cy="215153"/>
+            <a:off x="10524744" y="3002459"/>
+            <a:ext cx="859536" cy="224835"/>
           </a:xfrm>
           <a:prstGeom prst="rect">
             <a:avLst/>
@@ -12671,8 +12671,8 @@
         </p:nvSpPr>
         <p:spPr>
           <a:xfrm>
-            <a:off x="6135624" y="3178885"/>
-            <a:ext cx="5394960" cy="215153"/>
+            <a:off x="6135624" y="3227294"/>
+            <a:ext cx="5394960" cy="224835"/>
           </a:xfrm>
           <a:prstGeom prst="rect">
             <a:avLst/>
@@ -12691,8 +12691,8 @@
         </p:nvSpPr>
         <p:spPr>
           <a:xfrm>
-            <a:off x="6208776" y="3178885"/>
-            <a:ext cx="2011680" cy="215153"/>
+            <a:off x="6208776" y="3227294"/>
+            <a:ext cx="2011680" cy="224835"/>
           </a:xfrm>
           <a:prstGeom prst="rect">
             <a:avLst/>
@@ -12730,8 +12730,8 @@
         </p:nvSpPr>
         <p:spPr>
           <a:xfrm>
-            <a:off x="8534757" y="3227294"/>
-            <a:ext cx="270915" cy="118334"/>
+            <a:off x="8534757" y="3277882"/>
+            <a:ext cx="270915" cy="123659"/>
           </a:xfrm>
           <a:prstGeom prst="rect">
             <a:avLst/>
@@ -12750,8 +12750,8 @@
         </p:nvSpPr>
         <p:spPr>
           <a:xfrm>
-            <a:off x="9390888" y="3178885"/>
-            <a:ext cx="566928" cy="215153"/>
+            <a:off x="9390888" y="3227294"/>
+            <a:ext cx="566928" cy="224835"/>
           </a:xfrm>
           <a:prstGeom prst="rect">
             <a:avLst/>
@@ -12789,8 +12789,8 @@
         </p:nvSpPr>
         <p:spPr>
           <a:xfrm>
-            <a:off x="9957816" y="3178885"/>
-            <a:ext cx="566928" cy="215153"/>
+            <a:off x="9957816" y="3227294"/>
+            <a:ext cx="566928" cy="224835"/>
           </a:xfrm>
           <a:prstGeom prst="rect">
             <a:avLst/>
@@ -12828,8 +12828,8 @@
         </p:nvSpPr>
         <p:spPr>
           <a:xfrm>
-            <a:off x="10524744" y="3178885"/>
-            <a:ext cx="859536" cy="215153"/>
+            <a:off x="10524744" y="3227294"/>
+            <a:ext cx="859536" cy="224835"/>
           </a:xfrm>
           <a:prstGeom prst="rect">
             <a:avLst/>
@@ -12867,8 +12867,8 @@
         </p:nvSpPr>
         <p:spPr>
           <a:xfrm>
-            <a:off x="6208776" y="3394038"/>
-            <a:ext cx="2011680" cy="215153"/>
+            <a:off x="6208776" y="3452129"/>
+            <a:ext cx="2011680" cy="224835"/>
           </a:xfrm>
           <a:prstGeom prst="rect">
             <a:avLst/>
@@ -12906,8 +12906,8 @@
         </p:nvSpPr>
         <p:spPr>
           <a:xfrm>
-            <a:off x="8499284" y="3442447"/>
-            <a:ext cx="306388" cy="118334"/>
+            <a:off x="8499284" y="3502717"/>
+            <a:ext cx="306388" cy="123659"/>
           </a:xfrm>
           <a:prstGeom prst="rect">
             <a:avLst/>
@@ -12926,8 +12926,8 @@
         </p:nvSpPr>
         <p:spPr>
           <a:xfrm>
-            <a:off x="9390888" y="3394038"/>
-            <a:ext cx="566928" cy="215153"/>
+            <a:off x="9390888" y="3452129"/>
+            <a:ext cx="566928" cy="224835"/>
           </a:xfrm>
           <a:prstGeom prst="rect">
             <a:avLst/>
@@ -12965,8 +12965,8 @@
         </p:nvSpPr>
         <p:spPr>
           <a:xfrm>
-            <a:off x="9957816" y="3394038"/>
-            <a:ext cx="566928" cy="215153"/>
+            <a:off x="9957816" y="3452129"/>
+            <a:ext cx="566928" cy="224835"/>
           </a:xfrm>
           <a:prstGeom prst="rect">
             <a:avLst/>
@@ -13004,8 +13004,8 @@
         </p:nvSpPr>
         <p:spPr>
           <a:xfrm>
-            <a:off x="10524744" y="3394038"/>
-            <a:ext cx="859536" cy="215153"/>
+            <a:off x="10524744" y="3452129"/>
+            <a:ext cx="859536" cy="224835"/>
           </a:xfrm>
           <a:prstGeom prst="rect">
             <a:avLst/>
@@ -13043,8 +13043,8 @@
         </p:nvSpPr>
         <p:spPr>
           <a:xfrm>
-            <a:off x="6135624" y="3609191"/>
-            <a:ext cx="5394960" cy="215153"/>
+            <a:off x="6135624" y="3676964"/>
+            <a:ext cx="5394960" cy="224835"/>
           </a:xfrm>
           <a:prstGeom prst="rect">
             <a:avLst/>
@@ -13063,8 +13063,8 @@
         </p:nvSpPr>
         <p:spPr>
           <a:xfrm>
-            <a:off x="6208776" y="3609191"/>
-            <a:ext cx="2011680" cy="215153"/>
+            <a:off x="6208776" y="3676964"/>
+            <a:ext cx="2011680" cy="224835"/>
           </a:xfrm>
           <a:prstGeom prst="rect">
             <a:avLst/>
@@ -13102,8 +13102,8 @@
         </p:nvSpPr>
         <p:spPr>
           <a:xfrm>
-            <a:off x="8496238" y="3657600"/>
-            <a:ext cx="309434" cy="118334"/>
+            <a:off x="8496238" y="3727552"/>
+            <a:ext cx="309434" cy="123659"/>
           </a:xfrm>
           <a:prstGeom prst="rect">
             <a:avLst/>
@@ -13122,8 +13122,8 @@
         </p:nvSpPr>
         <p:spPr>
           <a:xfrm>
-            <a:off x="9390888" y="3609191"/>
-            <a:ext cx="566928" cy="215153"/>
+            <a:off x="9390888" y="3676964"/>
+            <a:ext cx="566928" cy="224835"/>
           </a:xfrm>
           <a:prstGeom prst="rect">
             <a:avLst/>
@@ -13161,8 +13161,8 @@
         </p:nvSpPr>
         <p:spPr>
           <a:xfrm>
-            <a:off x="9957816" y="3609191"/>
-            <a:ext cx="566928" cy="215153"/>
+            <a:off x="9957816" y="3676964"/>
+            <a:ext cx="566928" cy="224835"/>
           </a:xfrm>
           <a:prstGeom prst="rect">
             <a:avLst/>
@@ -13200,8 +13200,8 @@
         </p:nvSpPr>
         <p:spPr>
           <a:xfrm>
-            <a:off x="10524744" y="3609191"/>
-            <a:ext cx="859536" cy="215153"/>
+            <a:off x="10524744" y="3676964"/>
+            <a:ext cx="859536" cy="224835"/>
           </a:xfrm>
           <a:prstGeom prst="rect">
             <a:avLst/>
@@ -13239,8 +13239,8 @@
         </p:nvSpPr>
         <p:spPr>
           <a:xfrm>
-            <a:off x="6208776" y="3824344"/>
-            <a:ext cx="2011680" cy="215153"/>
+            <a:off x="6208776" y="3901799"/>
+            <a:ext cx="2011680" cy="224835"/>
           </a:xfrm>
           <a:prstGeom prst="rect">
             <a:avLst/>
@@ -13278,8 +13278,8 @@
         </p:nvSpPr>
         <p:spPr>
           <a:xfrm>
-            <a:off x="8493166" y="3872753"/>
-            <a:ext cx="312506" cy="118334"/>
+            <a:off x="8493166" y="3952386"/>
+            <a:ext cx="312506" cy="123659"/>
           </a:xfrm>
           <a:prstGeom prst="rect">
             <a:avLst/>
@@ -13298,8 +13298,8 @@
         </p:nvSpPr>
         <p:spPr>
           <a:xfrm>
-            <a:off x="9390888" y="3824344"/>
-            <a:ext cx="566928" cy="215153"/>
+            <a:off x="9390888" y="3901799"/>
+            <a:ext cx="566928" cy="224835"/>
           </a:xfrm>
           <a:prstGeom prst="rect">
             <a:avLst/>
@@ -13337,8 +13337,8 @@
         </p:nvSpPr>
         <p:spPr>
           <a:xfrm>
-            <a:off x="9957816" y="3824344"/>
-            <a:ext cx="566928" cy="215153"/>
+            <a:off x="9957816" y="3901799"/>
+            <a:ext cx="566928" cy="224835"/>
           </a:xfrm>
           <a:prstGeom prst="rect">
             <a:avLst/>
@@ -13376,8 +13376,8 @@
         </p:nvSpPr>
         <p:spPr>
           <a:xfrm>
-            <a:off x="10524744" y="3824344"/>
-            <a:ext cx="859536" cy="215153"/>
+            <a:off x="10524744" y="3901799"/>
+            <a:ext cx="859536" cy="224835"/>
           </a:xfrm>
           <a:prstGeom prst="rect">
             <a:avLst/>
@@ -13415,8 +13415,8 @@
         </p:nvSpPr>
         <p:spPr>
           <a:xfrm>
-            <a:off x="6135624" y="4039496"/>
-            <a:ext cx="5394960" cy="215153"/>
+            <a:off x="6135624" y="4126633"/>
+            <a:ext cx="5394960" cy="224835"/>
           </a:xfrm>
           <a:prstGeom prst="rect">
             <a:avLst/>
@@ -13435,8 +13435,8 @@
         </p:nvSpPr>
         <p:spPr>
           <a:xfrm>
-            <a:off x="6208776" y="4039496"/>
-            <a:ext cx="2011680" cy="215153"/>
+            <a:off x="6208776" y="4126633"/>
+            <a:ext cx="2011680" cy="224835"/>
           </a:xfrm>
           <a:prstGeom prst="rect">
             <a:avLst/>
@@ -13474,8 +13474,8 @@
         </p:nvSpPr>
         <p:spPr>
           <a:xfrm>
-            <a:off x="8491434" y="4087906"/>
-            <a:ext cx="314238" cy="118334"/>
+            <a:off x="8491434" y="4177221"/>
+            <a:ext cx="314238" cy="123659"/>
           </a:xfrm>
           <a:prstGeom prst="rect">
             <a:avLst/>
@@ -13494,8 +13494,8 @@
         </p:nvSpPr>
         <p:spPr>
           <a:xfrm>
-            <a:off x="9390888" y="4039496"/>
-            <a:ext cx="566928" cy="215153"/>
+            <a:off x="9390888" y="4126633"/>
+            <a:ext cx="566928" cy="224835"/>
           </a:xfrm>
           <a:prstGeom prst="rect">
             <a:avLst/>
@@ -13533,8 +13533,8 @@
         </p:nvSpPr>
         <p:spPr>
           <a:xfrm>
-            <a:off x="9957816" y="4039496"/>
-            <a:ext cx="566928" cy="215153"/>
+            <a:off x="9957816" y="4126633"/>
+            <a:ext cx="566928" cy="224835"/>
           </a:xfrm>
           <a:prstGeom prst="rect">
             <a:avLst/>
@@ -13572,8 +13572,8 @@
         </p:nvSpPr>
         <p:spPr>
           <a:xfrm>
-            <a:off x="10524744" y="4039496"/>
-            <a:ext cx="859536" cy="215153"/>
+            <a:off x="10524744" y="4126633"/>
+            <a:ext cx="859536" cy="224835"/>
           </a:xfrm>
           <a:prstGeom prst="rect">
             <a:avLst/>
@@ -13611,8 +13611,8 @@
         </p:nvSpPr>
         <p:spPr>
           <a:xfrm>
-            <a:off x="6208776" y="4254649"/>
-            <a:ext cx="2011680" cy="215153"/>
+            <a:off x="6208776" y="4351468"/>
+            <a:ext cx="2011680" cy="224835"/>
           </a:xfrm>
           <a:prstGeom prst="rect">
             <a:avLst/>
@@ -13650,8 +13650,8 @@
         </p:nvSpPr>
         <p:spPr>
           <a:xfrm>
-            <a:off x="8472728" y="4303059"/>
-            <a:ext cx="332944" cy="118334"/>
+            <a:off x="8472728" y="4402056"/>
+            <a:ext cx="332944" cy="123659"/>
           </a:xfrm>
           <a:prstGeom prst="rect">
             <a:avLst/>
@@ -13670,8 +13670,8 @@
         </p:nvSpPr>
         <p:spPr>
           <a:xfrm>
-            <a:off x="9390888" y="4254649"/>
-            <a:ext cx="566928" cy="215153"/>
+            <a:off x="9390888" y="4351468"/>
+            <a:ext cx="566928" cy="224835"/>
           </a:xfrm>
           <a:prstGeom prst="rect">
             <a:avLst/>
@@ -13709,8 +13709,8 @@
         </p:nvSpPr>
         <p:spPr>
           <a:xfrm>
-            <a:off x="9957816" y="4254649"/>
-            <a:ext cx="566928" cy="215153"/>
+            <a:off x="9957816" y="4351468"/>
+            <a:ext cx="566928" cy="224835"/>
           </a:xfrm>
           <a:prstGeom prst="rect">
             <a:avLst/>
@@ -13748,8 +13748,8 @@
         </p:nvSpPr>
         <p:spPr>
           <a:xfrm>
-            <a:off x="10524744" y="4254649"/>
-            <a:ext cx="859536" cy="215153"/>
+            <a:off x="10524744" y="4351468"/>
+            <a:ext cx="859536" cy="224835"/>
           </a:xfrm>
           <a:prstGeom prst="rect">
             <a:avLst/>
@@ -13787,8 +13787,8 @@
         </p:nvSpPr>
         <p:spPr>
           <a:xfrm>
-            <a:off x="6135624" y="4469802"/>
-            <a:ext cx="5394960" cy="215153"/>
+            <a:off x="6135624" y="4576303"/>
+            <a:ext cx="5394960" cy="224835"/>
           </a:xfrm>
           <a:prstGeom prst="rect">
             <a:avLst/>
@@ -13807,8 +13807,8 @@
         </p:nvSpPr>
         <p:spPr>
           <a:xfrm>
-            <a:off x="6208776" y="4469802"/>
-            <a:ext cx="2011680" cy="215153"/>
+            <a:off x="6208776" y="4576303"/>
+            <a:ext cx="2011680" cy="224835"/>
           </a:xfrm>
           <a:prstGeom prst="rect">
             <a:avLst/>
@@ -13846,8 +13846,8 @@
         </p:nvSpPr>
         <p:spPr>
           <a:xfrm>
-            <a:off x="8461553" y="4518212"/>
-            <a:ext cx="344119" cy="118334"/>
+            <a:off x="8461553" y="4626891"/>
+            <a:ext cx="344119" cy="123659"/>
           </a:xfrm>
           <a:prstGeom prst="rect">
             <a:avLst/>
@@ -13866,8 +13866,8 @@
         </p:nvSpPr>
         <p:spPr>
           <a:xfrm>
-            <a:off x="9390888" y="4469802"/>
-            <a:ext cx="566928" cy="215153"/>
+            <a:off x="9390888" y="4576303"/>
+            <a:ext cx="566928" cy="224835"/>
           </a:xfrm>
           <a:prstGeom prst="rect">
             <a:avLst/>
@@ -13905,8 +13905,8 @@
         </p:nvSpPr>
         <p:spPr>
           <a:xfrm>
-            <a:off x="9957816" y="4469802"/>
-            <a:ext cx="566928" cy="215153"/>
+            <a:off x="9957816" y="4576303"/>
+            <a:ext cx="566928" cy="224835"/>
           </a:xfrm>
           <a:prstGeom prst="rect">
             <a:avLst/>
@@ -13944,8 +13944,8 @@
         </p:nvSpPr>
         <p:spPr>
           <a:xfrm>
-            <a:off x="10524744" y="4469802"/>
-            <a:ext cx="859536" cy="215153"/>
+            <a:off x="10524744" y="4576303"/>
+            <a:ext cx="859536" cy="224835"/>
           </a:xfrm>
           <a:prstGeom prst="rect">
             <a:avLst/>
@@ -13983,8 +13983,8 @@
         </p:nvSpPr>
         <p:spPr>
           <a:xfrm>
-            <a:off x="6208776" y="4684955"/>
-            <a:ext cx="2011680" cy="215153"/>
+            <a:off x="6208776" y="4801138"/>
+            <a:ext cx="2011680" cy="224835"/>
           </a:xfrm>
           <a:prstGeom prst="rect">
             <a:avLst/>
@@ -14022,8 +14022,8 @@
         </p:nvSpPr>
         <p:spPr>
           <a:xfrm>
-            <a:off x="8358802" y="4733365"/>
-            <a:ext cx="446870" cy="118334"/>
+            <a:off x="8358802" y="4851726"/>
+            <a:ext cx="446870" cy="123659"/>
           </a:xfrm>
           <a:prstGeom prst="rect">
             <a:avLst/>
@@ -14042,8 +14042,8 @@
         </p:nvSpPr>
         <p:spPr>
           <a:xfrm>
-            <a:off x="9390888" y="4684955"/>
-            <a:ext cx="566928" cy="215153"/>
+            <a:off x="9390888" y="4801138"/>
+            <a:ext cx="566928" cy="224835"/>
           </a:xfrm>
           <a:prstGeom prst="rect">
             <a:avLst/>
@@ -14081,8 +14081,8 @@
         </p:nvSpPr>
         <p:spPr>
           <a:xfrm>
-            <a:off x="9957816" y="4684955"/>
-            <a:ext cx="566928" cy="215153"/>
+            <a:off x="9957816" y="4801138"/>
+            <a:ext cx="566928" cy="224835"/>
           </a:xfrm>
           <a:prstGeom prst="rect">
             <a:avLst/>
@@ -14120,8 +14120,8 @@
         </p:nvSpPr>
         <p:spPr>
           <a:xfrm>
-            <a:off x="10524744" y="4684955"/>
-            <a:ext cx="859536" cy="215153"/>
+            <a:off x="10524744" y="4801138"/>
+            <a:ext cx="859536" cy="224835"/>
           </a:xfrm>
           <a:prstGeom prst="rect">
             <a:avLst/>
@@ -14159,8 +14159,8 @@
         </p:nvSpPr>
         <p:spPr>
           <a:xfrm>
-            <a:off x="6135624" y="4900108"/>
-            <a:ext cx="5394960" cy="215153"/>
+            <a:off x="6135624" y="5025973"/>
+            <a:ext cx="5394960" cy="224835"/>
           </a:xfrm>
           <a:prstGeom prst="rect">
             <a:avLst/>
@@ -14179,8 +14179,8 @@
         </p:nvSpPr>
         <p:spPr>
           <a:xfrm>
-            <a:off x="6208776" y="4900108"/>
-            <a:ext cx="2011680" cy="215153"/>
+            <a:off x="6208776" y="5025973"/>
+            <a:ext cx="2011680" cy="224835"/>
           </a:xfrm>
           <a:prstGeom prst="rect">
             <a:avLst/>
@@ -14218,8 +14218,8 @@
         </p:nvSpPr>
         <p:spPr>
           <a:xfrm>
-            <a:off x="8352988" y="4948518"/>
-            <a:ext cx="452684" cy="118334"/>
+            <a:off x="8352988" y="5076561"/>
+            <a:ext cx="452684" cy="123659"/>
           </a:xfrm>
           <a:prstGeom prst="rect">
             <a:avLst/>
@@ -14238,8 +14238,8 @@
         </p:nvSpPr>
         <p:spPr>
           <a:xfrm>
-            <a:off x="9390888" y="4900108"/>
-            <a:ext cx="566928" cy="215153"/>
+            <a:off x="9390888" y="5025973"/>
+            <a:ext cx="566928" cy="224835"/>
           </a:xfrm>
           <a:prstGeom prst="rect">
             <a:avLst/>
@@ -14277,8 +14277,8 @@
         </p:nvSpPr>
         <p:spPr>
           <a:xfrm>
-            <a:off x="9957816" y="4900108"/>
-            <a:ext cx="566928" cy="215153"/>
+            <a:off x="9957816" y="5025973"/>
+            <a:ext cx="566928" cy="224835"/>
           </a:xfrm>
           <a:prstGeom prst="rect">
             <a:avLst/>
@@ -14316,8 +14316,8 @@
         </p:nvSpPr>
         <p:spPr>
           <a:xfrm>
-            <a:off x="10524744" y="4900108"/>
-            <a:ext cx="859536" cy="215153"/>
+            <a:off x="10524744" y="5025973"/>
+            <a:ext cx="859536" cy="224835"/>
           </a:xfrm>
           <a:prstGeom prst="rect">
             <a:avLst/>
@@ -14355,8 +14355,8 @@
         </p:nvSpPr>
         <p:spPr>
           <a:xfrm>
-            <a:off x="6208776" y="5115261"/>
-            <a:ext cx="2011680" cy="215153"/>
+            <a:off x="6208776" y="5250808"/>
+            <a:ext cx="2011680" cy="224835"/>
           </a:xfrm>
           <a:prstGeom prst="rect">
             <a:avLst/>
@@ -14394,8 +14394,8 @@
         </p:nvSpPr>
         <p:spPr>
           <a:xfrm>
-            <a:off x="8331777" y="5163671"/>
-            <a:ext cx="473895" cy="118334"/>
+            <a:off x="8331777" y="5301395"/>
+            <a:ext cx="473895" cy="123659"/>
           </a:xfrm>
           <a:prstGeom prst="rect">
             <a:avLst/>
@@ -14414,8 +14414,8 @@
         </p:nvSpPr>
         <p:spPr>
           <a:xfrm>
-            <a:off x="9390888" y="5115261"/>
-            <a:ext cx="566928" cy="215153"/>
+            <a:off x="9390888" y="5250808"/>
+            <a:ext cx="566928" cy="224835"/>
           </a:xfrm>
           <a:prstGeom prst="rect">
             <a:avLst/>
@@ -14453,8 +14453,8 @@
         </p:nvSpPr>
         <p:spPr>
           <a:xfrm>
-            <a:off x="9957816" y="5115261"/>
-            <a:ext cx="566928" cy="215153"/>
+            <a:off x="9957816" y="5250808"/>
+            <a:ext cx="566928" cy="224835"/>
           </a:xfrm>
           <a:prstGeom prst="rect">
             <a:avLst/>
@@ -14492,8 +14492,8 @@
         </p:nvSpPr>
         <p:spPr>
           <a:xfrm>
-            <a:off x="10524744" y="5115261"/>
-            <a:ext cx="859536" cy="215153"/>
+            <a:off x="10524744" y="5250808"/>
+            <a:ext cx="859536" cy="224835"/>
           </a:xfrm>
           <a:prstGeom prst="rect">
             <a:avLst/>
@@ -14531,8 +14531,8 @@
         </p:nvSpPr>
         <p:spPr>
           <a:xfrm>
-            <a:off x="6135624" y="5330414"/>
-            <a:ext cx="5394960" cy="215153"/>
+            <a:off x="6135624" y="5475642"/>
+            <a:ext cx="5394960" cy="224835"/>
           </a:xfrm>
           <a:prstGeom prst="rect">
             <a:avLst/>
@@ -14551,8 +14551,8 @@
         </p:nvSpPr>
         <p:spPr>
           <a:xfrm>
-            <a:off x="6208776" y="5330414"/>
-            <a:ext cx="2011680" cy="215153"/>
+            <a:off x="6208776" y="5475642"/>
+            <a:ext cx="2011680" cy="224835"/>
           </a:xfrm>
           <a:prstGeom prst="rect">
             <a:avLst/>
@@ -14590,8 +14590,8 @@
         </p:nvSpPr>
         <p:spPr>
           <a:xfrm>
-            <a:off x="8266176" y="5378824"/>
-            <a:ext cx="539496" cy="118334"/>
+            <a:off x="8266176" y="5526230"/>
+            <a:ext cx="539496" cy="123659"/>
           </a:xfrm>
           <a:prstGeom prst="rect">
             <a:avLst/>
@@ -14610,8 +14610,8 @@
         </p:nvSpPr>
         <p:spPr>
           <a:xfrm>
-            <a:off x="9390888" y="5330414"/>
-            <a:ext cx="566928" cy="215153"/>
+            <a:off x="9390888" y="5475642"/>
+            <a:ext cx="566928" cy="224835"/>
           </a:xfrm>
           <a:prstGeom prst="rect">
             <a:avLst/>
@@ -14649,8 +14649,8 @@
         </p:nvSpPr>
         <p:spPr>
           <a:xfrm>
-            <a:off x="9957816" y="5330414"/>
-            <a:ext cx="566928" cy="215153"/>
+            <a:off x="9957816" y="5475642"/>
+            <a:ext cx="566928" cy="224835"/>
           </a:xfrm>
           <a:prstGeom prst="rect">
             <a:avLst/>
@@ -14688,8 +14688,8 @@
         </p:nvSpPr>
         <p:spPr>
           <a:xfrm>
-            <a:off x="10524744" y="5330414"/>
-            <a:ext cx="859536" cy="215153"/>
+            <a:off x="10524744" y="5475642"/>
+            <a:ext cx="859536" cy="224835"/>
           </a:xfrm>
           <a:prstGeom prst="rect">
             <a:avLst/>
@@ -14727,8 +14727,8 @@
         </p:nvSpPr>
         <p:spPr>
           <a:xfrm>
-            <a:off x="457200" y="5961888"/>
-            <a:ext cx="11274552" cy="548640"/>
+            <a:off x="457200" y="6126480"/>
+            <a:ext cx="11274552" cy="600456"/>
           </a:xfrm>
           <a:prstGeom prst="rect">
             <a:avLst/>
@@ -14747,8 +14747,8 @@
         </p:nvSpPr>
         <p:spPr>
           <a:xfrm>
-            <a:off x="658368" y="5980176"/>
-            <a:ext cx="10927080" cy="512064"/>
+            <a:off x="658368" y="6144768"/>
+            <a:ext cx="10927080" cy="563880"/>
           </a:xfrm>
           <a:prstGeom prst="rect">
             <a:avLst/>
@@ -14764,7 +14764,7 @@
               <a:buNone/>
             </a:pPr>
             <a:r>
-              <a:rPr lang="en-US" sz="1600" b="1" dirty="0">
+              <a:rPr lang="en-US" sz="1550" b="1" dirty="0">
                 <a:solidFill>
                   <a:srgbClr val="0B2C4A"/>
                 </a:solidFill>
@@ -14772,9 +14772,9 @@
                 <a:ea typeface="Inter" pitchFamily="34" charset="-122"/>
                 <a:cs typeface="Inter" pitchFamily="34" charset="-120"/>
               </a:rPr>
-              <a:t>Internal parts margin runs 4.2 pts below customer pay across the group; 11 of 33 stores are at or better than that gap. Widest: LR LV (−17.6 pts), HONDA FLAGSTAFF (−15.4 pts) and AUDI RENO (−14.7 pts).</a:t>
-            </a:r>
-            <a:endParaRPr lang="en-US" sz="1600" dirty="0"/>
+              <a:t>Internal parts margin runs 4.2 pts below customer pay across the group; 11 of 33 stores are at or better than that gap. Widest: LR LV (−17.6 pts), Honda Flagstaff (−15.4 pts) and Audi Reno (−14.7 pts).</a:t>
+            </a:r>
+            <a:endParaRPr lang="en-US" sz="1550" dirty="0"/>
           </a:p>
         </p:txBody>
       </p:sp>
@@ -14917,7 +14917,7 @@
         <p:spPr>
           <a:xfrm>
             <a:off x="457200" y="1207008"/>
-            <a:ext cx="11274552" cy="4645152"/>
+            <a:ext cx="11274552" cy="4782312"/>
           </a:xfrm>
           <a:prstGeom prst="rect">
             <a:avLst/>
@@ -15348,7 +15348,7 @@
         <p:spPr>
           <a:xfrm>
             <a:off x="658368" y="2103120"/>
-            <a:ext cx="2011680" cy="215153"/>
+            <a:ext cx="2011680" cy="224835"/>
           </a:xfrm>
           <a:prstGeom prst="rect">
             <a:avLst/>
@@ -15386,7 +15386,7 @@
         </p:nvSpPr>
         <p:spPr>
           <a:xfrm>
-            <a:off x="3402139" y="2196980"/>
+            <a:off x="3402139" y="2201821"/>
             <a:ext cx="148555" cy="27432"/>
           </a:xfrm>
           <a:prstGeom prst="rect">
@@ -15406,7 +15406,7 @@
         </p:nvSpPr>
         <p:spPr>
           <a:xfrm>
-            <a:off x="3333559" y="2142116"/>
+            <a:off x="3333559" y="2146957"/>
             <a:ext cx="137160" cy="137160"/>
           </a:xfrm>
           <a:prstGeom prst="ellipse">
@@ -15426,7 +15426,7 @@
         </p:nvSpPr>
         <p:spPr>
           <a:xfrm>
-            <a:off x="3482114" y="2142116"/>
+            <a:off x="3482114" y="2146957"/>
             <a:ext cx="137160" cy="137160"/>
           </a:xfrm>
           <a:prstGeom prst="ellipse">
@@ -15447,7 +15447,7 @@
         <p:spPr>
           <a:xfrm>
             <a:off x="3840480" y="2103120"/>
-            <a:ext cx="566928" cy="215153"/>
+            <a:ext cx="566928" cy="224835"/>
           </a:xfrm>
           <a:prstGeom prst="rect">
             <a:avLst/>
@@ -15486,7 +15486,7 @@
         <p:spPr>
           <a:xfrm>
             <a:off x="4407408" y="2103120"/>
-            <a:ext cx="566928" cy="215153"/>
+            <a:ext cx="566928" cy="224835"/>
           </a:xfrm>
           <a:prstGeom prst="rect">
             <a:avLst/>
@@ -15525,7 +15525,7 @@
         <p:spPr>
           <a:xfrm>
             <a:off x="4974336" y="2103120"/>
-            <a:ext cx="859536" cy="215153"/>
+            <a:ext cx="859536" cy="224835"/>
           </a:xfrm>
           <a:prstGeom prst="rect">
             <a:avLst/>
@@ -15563,8 +15563,8 @@
         </p:nvSpPr>
         <p:spPr>
           <a:xfrm>
-            <a:off x="585216" y="2318273"/>
-            <a:ext cx="5394960" cy="215153"/>
+            <a:off x="585216" y="2327955"/>
+            <a:ext cx="5394960" cy="224835"/>
           </a:xfrm>
           <a:prstGeom prst="rect">
             <a:avLst/>
@@ -15583,8 +15583,8 @@
         </p:nvSpPr>
         <p:spPr>
           <a:xfrm>
-            <a:off x="658368" y="2318273"/>
-            <a:ext cx="2011680" cy="215153"/>
+            <a:off x="658368" y="2327955"/>
+            <a:ext cx="2011680" cy="224835"/>
           </a:xfrm>
           <a:prstGeom prst="rect">
             <a:avLst/>
@@ -15622,7 +15622,7 @@
         </p:nvSpPr>
         <p:spPr>
           <a:xfrm>
-            <a:off x="3108087" y="2412133"/>
+            <a:off x="3108087" y="2426656"/>
             <a:ext cx="148043" cy="27432"/>
           </a:xfrm>
           <a:prstGeom prst="rect">
@@ -15642,7 +15642,7 @@
         </p:nvSpPr>
         <p:spPr>
           <a:xfrm>
-            <a:off x="3039507" y="2357269"/>
+            <a:off x="3039507" y="2371792"/>
             <a:ext cx="137160" cy="137160"/>
           </a:xfrm>
           <a:prstGeom prst="ellipse">
@@ -15662,7 +15662,7 @@
         </p:nvSpPr>
         <p:spPr>
           <a:xfrm>
-            <a:off x="3187550" y="2357269"/>
+            <a:off x="3187550" y="2371792"/>
             <a:ext cx="137160" cy="137160"/>
           </a:xfrm>
           <a:prstGeom prst="ellipse">
@@ -15682,8 +15682,8 @@
         </p:nvSpPr>
         <p:spPr>
           <a:xfrm>
-            <a:off x="3840480" y="2318273"/>
-            <a:ext cx="566928" cy="215153"/>
+            <a:off x="3840480" y="2327955"/>
+            <a:ext cx="566928" cy="224835"/>
           </a:xfrm>
           <a:prstGeom prst="rect">
             <a:avLst/>
@@ -15721,8 +15721,8 @@
         </p:nvSpPr>
         <p:spPr>
           <a:xfrm>
-            <a:off x="4407408" y="2318273"/>
-            <a:ext cx="566928" cy="215153"/>
+            <a:off x="4407408" y="2327955"/>
+            <a:ext cx="566928" cy="224835"/>
           </a:xfrm>
           <a:prstGeom prst="rect">
             <a:avLst/>
@@ -15760,8 +15760,8 @@
         </p:nvSpPr>
         <p:spPr>
           <a:xfrm>
-            <a:off x="4974336" y="2318273"/>
-            <a:ext cx="859536" cy="215153"/>
+            <a:off x="4974336" y="2327955"/>
+            <a:ext cx="859536" cy="224835"/>
           </a:xfrm>
           <a:prstGeom prst="rect">
             <a:avLst/>
@@ -15799,8 +15799,8 @@
         </p:nvSpPr>
         <p:spPr>
           <a:xfrm>
-            <a:off x="658368" y="2533426"/>
-            <a:ext cx="2011680" cy="215153"/>
+            <a:off x="658368" y="2552790"/>
+            <a:ext cx="2011680" cy="224835"/>
           </a:xfrm>
           <a:prstGeom prst="rect">
             <a:avLst/>
@@ -15838,7 +15838,7 @@
         </p:nvSpPr>
         <p:spPr>
           <a:xfrm>
-            <a:off x="3469490" y="2627286"/>
+            <a:off x="3469490" y="2651491"/>
             <a:ext cx="119074" cy="27432"/>
           </a:xfrm>
           <a:prstGeom prst="rect">
@@ -15858,7 +15858,7 @@
         </p:nvSpPr>
         <p:spPr>
           <a:xfrm>
-            <a:off x="3400910" y="2572422"/>
+            <a:off x="3400910" y="2596627"/>
             <a:ext cx="137160" cy="137160"/>
           </a:xfrm>
           <a:prstGeom prst="ellipse">
@@ -15878,7 +15878,7 @@
         </p:nvSpPr>
         <p:spPr>
           <a:xfrm>
-            <a:off x="3519983" y="2572422"/>
+            <a:off x="3519983" y="2596627"/>
             <a:ext cx="137160" cy="137160"/>
           </a:xfrm>
           <a:prstGeom prst="ellipse">
@@ -15898,8 +15898,8 @@
         </p:nvSpPr>
         <p:spPr>
           <a:xfrm>
-            <a:off x="3840480" y="2533426"/>
-            <a:ext cx="566928" cy="215153"/>
+            <a:off x="3840480" y="2552790"/>
+            <a:ext cx="566928" cy="224835"/>
           </a:xfrm>
           <a:prstGeom prst="rect">
             <a:avLst/>
@@ -15937,8 +15937,8 @@
         </p:nvSpPr>
         <p:spPr>
           <a:xfrm>
-            <a:off x="4407408" y="2533426"/>
-            <a:ext cx="566928" cy="215153"/>
+            <a:off x="4407408" y="2552790"/>
+            <a:ext cx="566928" cy="224835"/>
           </a:xfrm>
           <a:prstGeom prst="rect">
             <a:avLst/>
@@ -15976,8 +15976,8 @@
         </p:nvSpPr>
         <p:spPr>
           <a:xfrm>
-            <a:off x="4974336" y="2533426"/>
-            <a:ext cx="859536" cy="215153"/>
+            <a:off x="4974336" y="2552790"/>
+            <a:ext cx="859536" cy="224835"/>
           </a:xfrm>
           <a:prstGeom prst="rect">
             <a:avLst/>
@@ -16015,8 +16015,8 @@
         </p:nvSpPr>
         <p:spPr>
           <a:xfrm>
-            <a:off x="585216" y="2748579"/>
-            <a:ext cx="5394960" cy="215153"/>
+            <a:off x="585216" y="2777624"/>
+            <a:ext cx="5394960" cy="224835"/>
           </a:xfrm>
           <a:prstGeom prst="rect">
             <a:avLst/>
@@ -16035,8 +16035,8 @@
         </p:nvSpPr>
         <p:spPr>
           <a:xfrm>
-            <a:off x="658368" y="2748579"/>
-            <a:ext cx="2011680" cy="215153"/>
+            <a:off x="658368" y="2777624"/>
+            <a:ext cx="2011680" cy="224835"/>
           </a:xfrm>
           <a:prstGeom prst="rect">
             <a:avLst/>
@@ -16074,7 +16074,7 @@
         </p:nvSpPr>
         <p:spPr>
           <a:xfrm>
-            <a:off x="3246206" y="2842439"/>
+            <a:off x="3246206" y="2876326"/>
             <a:ext cx="110169" cy="27432"/>
           </a:xfrm>
           <a:prstGeom prst="rect">
@@ -16094,7 +16094,7 @@
         </p:nvSpPr>
         <p:spPr>
           <a:xfrm>
-            <a:off x="3177626" y="2787575"/>
+            <a:off x="3177626" y="2821462"/>
             <a:ext cx="137160" cy="137160"/>
           </a:xfrm>
           <a:prstGeom prst="ellipse">
@@ -16114,7 +16114,7 @@
         </p:nvSpPr>
         <p:spPr>
           <a:xfrm>
-            <a:off x="3287794" y="2787575"/>
+            <a:off x="3287794" y="2821462"/>
             <a:ext cx="137160" cy="137160"/>
           </a:xfrm>
           <a:prstGeom prst="ellipse">
@@ -16134,8 +16134,8 @@
         </p:nvSpPr>
         <p:spPr>
           <a:xfrm>
-            <a:off x="3840480" y="2748579"/>
-            <a:ext cx="566928" cy="215153"/>
+            <a:off x="3840480" y="2777624"/>
+            <a:ext cx="566928" cy="224835"/>
           </a:xfrm>
           <a:prstGeom prst="rect">
             <a:avLst/>
@@ -16173,8 +16173,8 @@
         </p:nvSpPr>
         <p:spPr>
           <a:xfrm>
-            <a:off x="4407408" y="2748579"/>
-            <a:ext cx="566928" cy="215153"/>
+            <a:off x="4407408" y="2777624"/>
+            <a:ext cx="566928" cy="224835"/>
           </a:xfrm>
           <a:prstGeom prst="rect">
             <a:avLst/>
@@ -16212,8 +16212,8 @@
         </p:nvSpPr>
         <p:spPr>
           <a:xfrm>
-            <a:off x="4974336" y="2748579"/>
-            <a:ext cx="859536" cy="215153"/>
+            <a:off x="4974336" y="2777624"/>
+            <a:ext cx="859536" cy="224835"/>
           </a:xfrm>
           <a:prstGeom prst="rect">
             <a:avLst/>
@@ -16251,8 +16251,8 @@
         </p:nvSpPr>
         <p:spPr>
           <a:xfrm>
-            <a:off x="658368" y="2963732"/>
-            <a:ext cx="2011680" cy="215153"/>
+            <a:off x="658368" y="3002459"/>
+            <a:ext cx="2011680" cy="224835"/>
           </a:xfrm>
           <a:prstGeom prst="rect">
             <a:avLst/>
@@ -16290,7 +16290,7 @@
         </p:nvSpPr>
         <p:spPr>
           <a:xfrm>
-            <a:off x="3445098" y="3057592"/>
+            <a:off x="3445098" y="3101161"/>
             <a:ext cx="88343" cy="27432"/>
           </a:xfrm>
           <a:prstGeom prst="rect">
@@ -16310,7 +16310,7 @@
         </p:nvSpPr>
         <p:spPr>
           <a:xfrm>
-            <a:off x="3376518" y="3002728"/>
+            <a:off x="3376518" y="3046297"/>
             <a:ext cx="137160" cy="137160"/>
           </a:xfrm>
           <a:prstGeom prst="ellipse">
@@ -16330,7 +16330,7 @@
         </p:nvSpPr>
         <p:spPr>
           <a:xfrm>
-            <a:off x="3464861" y="3002728"/>
+            <a:off x="3464861" y="3046297"/>
             <a:ext cx="137160" cy="137160"/>
           </a:xfrm>
           <a:prstGeom prst="ellipse">
@@ -16350,8 +16350,8 @@
         </p:nvSpPr>
         <p:spPr>
           <a:xfrm>
-            <a:off x="3840480" y="2963732"/>
-            <a:ext cx="566928" cy="215153"/>
+            <a:off x="3840480" y="3002459"/>
+            <a:ext cx="566928" cy="224835"/>
           </a:xfrm>
           <a:prstGeom prst="rect">
             <a:avLst/>
@@ -16389,8 +16389,8 @@
         </p:nvSpPr>
         <p:spPr>
           <a:xfrm>
-            <a:off x="4407408" y="2963732"/>
-            <a:ext cx="566928" cy="215153"/>
+            <a:off x="4407408" y="3002459"/>
+            <a:ext cx="566928" cy="224835"/>
           </a:xfrm>
           <a:prstGeom prst="rect">
             <a:avLst/>
@@ -16428,8 +16428,8 @@
         </p:nvSpPr>
         <p:spPr>
           <a:xfrm>
-            <a:off x="4974336" y="2963732"/>
-            <a:ext cx="859536" cy="215153"/>
+            <a:off x="4974336" y="3002459"/>
+            <a:ext cx="859536" cy="224835"/>
           </a:xfrm>
           <a:prstGeom prst="rect">
             <a:avLst/>
@@ -16467,8 +16467,8 @@
         </p:nvSpPr>
         <p:spPr>
           <a:xfrm>
-            <a:off x="585216" y="3178885"/>
-            <a:ext cx="5394960" cy="215153"/>
+            <a:off x="585216" y="3227294"/>
+            <a:ext cx="5394960" cy="224835"/>
           </a:xfrm>
           <a:prstGeom prst="rect">
             <a:avLst/>
@@ -16487,8 +16487,8 @@
         </p:nvSpPr>
         <p:spPr>
           <a:xfrm>
-            <a:off x="658368" y="3178885"/>
-            <a:ext cx="2011680" cy="215153"/>
+            <a:off x="658368" y="3227294"/>
+            <a:ext cx="2011680" cy="224835"/>
           </a:xfrm>
           <a:prstGeom prst="rect">
             <a:avLst/>
@@ -16526,7 +16526,7 @@
         </p:nvSpPr>
         <p:spPr>
           <a:xfrm>
-            <a:off x="3575605" y="3272745"/>
+            <a:off x="3575605" y="3325996"/>
             <a:ext cx="75044" cy="27432"/>
           </a:xfrm>
           <a:prstGeom prst="rect">
@@ -16546,7 +16546,7 @@
         </p:nvSpPr>
         <p:spPr>
           <a:xfrm>
-            <a:off x="3507025" y="3217881"/>
+            <a:off x="3507025" y="3271132"/>
             <a:ext cx="137160" cy="137160"/>
           </a:xfrm>
           <a:prstGeom prst="ellipse">
@@ -16566,7 +16566,7 @@
         </p:nvSpPr>
         <p:spPr>
           <a:xfrm>
-            <a:off x="3582070" y="3217881"/>
+            <a:off x="3582070" y="3271132"/>
             <a:ext cx="137160" cy="137160"/>
           </a:xfrm>
           <a:prstGeom prst="ellipse">
@@ -16586,8 +16586,8 @@
         </p:nvSpPr>
         <p:spPr>
           <a:xfrm>
-            <a:off x="3840480" y="3178885"/>
-            <a:ext cx="566928" cy="215153"/>
+            <a:off x="3840480" y="3227294"/>
+            <a:ext cx="566928" cy="224835"/>
           </a:xfrm>
           <a:prstGeom prst="rect">
             <a:avLst/>
@@ -16625,8 +16625,8 @@
         </p:nvSpPr>
         <p:spPr>
           <a:xfrm>
-            <a:off x="4407408" y="3178885"/>
-            <a:ext cx="566928" cy="215153"/>
+            <a:off x="4407408" y="3227294"/>
+            <a:ext cx="566928" cy="224835"/>
           </a:xfrm>
           <a:prstGeom prst="rect">
             <a:avLst/>
@@ -16664,8 +16664,8 @@
         </p:nvSpPr>
         <p:spPr>
           <a:xfrm>
-            <a:off x="4974336" y="3178885"/>
-            <a:ext cx="859536" cy="215153"/>
+            <a:off x="4974336" y="3227294"/>
+            <a:ext cx="859536" cy="224835"/>
           </a:xfrm>
           <a:prstGeom prst="rect">
             <a:avLst/>
@@ -16703,8 +16703,8 @@
         </p:nvSpPr>
         <p:spPr>
           <a:xfrm>
-            <a:off x="658368" y="3394038"/>
-            <a:ext cx="2011680" cy="215153"/>
+            <a:off x="658368" y="3452129"/>
+            <a:ext cx="2011680" cy="224835"/>
           </a:xfrm>
           <a:prstGeom prst="rect">
             <a:avLst/>
@@ -16742,7 +16742,7 @@
         </p:nvSpPr>
         <p:spPr>
           <a:xfrm>
-            <a:off x="3470065" y="3487898"/>
+            <a:off x="3470065" y="3550830"/>
             <a:ext cx="74235" cy="27432"/>
           </a:xfrm>
           <a:prstGeom prst="rect">
@@ -16762,7 +16762,7 @@
         </p:nvSpPr>
         <p:spPr>
           <a:xfrm>
-            <a:off x="3401485" y="3433034"/>
+            <a:off x="3401485" y="3495966"/>
             <a:ext cx="137160" cy="137160"/>
           </a:xfrm>
           <a:prstGeom prst="ellipse">
@@ -16782,7 +16782,7 @@
         </p:nvSpPr>
         <p:spPr>
           <a:xfrm>
-            <a:off x="3475720" y="3433034"/>
+            <a:off x="3475720" y="3495966"/>
             <a:ext cx="137160" cy="137160"/>
           </a:xfrm>
           <a:prstGeom prst="ellipse">
@@ -16802,8 +16802,8 @@
         </p:nvSpPr>
         <p:spPr>
           <a:xfrm>
-            <a:off x="3840480" y="3394038"/>
-            <a:ext cx="566928" cy="215153"/>
+            <a:off x="3840480" y="3452129"/>
+            <a:ext cx="566928" cy="224835"/>
           </a:xfrm>
           <a:prstGeom prst="rect">
             <a:avLst/>
@@ -16841,8 +16841,8 @@
         </p:nvSpPr>
         <p:spPr>
           <a:xfrm>
-            <a:off x="4407408" y="3394038"/>
-            <a:ext cx="566928" cy="215153"/>
+            <a:off x="4407408" y="3452129"/>
+            <a:ext cx="566928" cy="224835"/>
           </a:xfrm>
           <a:prstGeom prst="rect">
             <a:avLst/>
@@ -16880,8 +16880,8 @@
         </p:nvSpPr>
         <p:spPr>
           <a:xfrm>
-            <a:off x="4974336" y="3394038"/>
-            <a:ext cx="859536" cy="215153"/>
+            <a:off x="4974336" y="3452129"/>
+            <a:ext cx="859536" cy="224835"/>
           </a:xfrm>
           <a:prstGeom prst="rect">
             <a:avLst/>
@@ -16919,8 +16919,8 @@
         </p:nvSpPr>
         <p:spPr>
           <a:xfrm>
-            <a:off x="585216" y="3609191"/>
-            <a:ext cx="5394960" cy="215153"/>
+            <a:off x="585216" y="3676964"/>
+            <a:ext cx="5394960" cy="224835"/>
           </a:xfrm>
           <a:prstGeom prst="rect">
             <a:avLst/>
@@ -16939,8 +16939,8 @@
         </p:nvSpPr>
         <p:spPr>
           <a:xfrm>
-            <a:off x="658368" y="3609191"/>
-            <a:ext cx="2011680" cy="215153"/>
+            <a:off x="658368" y="3676964"/>
+            <a:ext cx="2011680" cy="224835"/>
           </a:xfrm>
           <a:prstGeom prst="rect">
             <a:avLst/>
@@ -16978,7 +16978,7 @@
         </p:nvSpPr>
         <p:spPr>
           <a:xfrm>
-            <a:off x="3467609" y="3703051"/>
+            <a:off x="3467609" y="3775665"/>
             <a:ext cx="26393" cy="27432"/>
           </a:xfrm>
           <a:prstGeom prst="rect">
@@ -16998,7 +16998,7 @@
         </p:nvSpPr>
         <p:spPr>
           <a:xfrm>
-            <a:off x="3399029" y="3648187"/>
+            <a:off x="3399029" y="3720801"/>
             <a:ext cx="137160" cy="137160"/>
           </a:xfrm>
           <a:prstGeom prst="ellipse">
@@ -17018,7 +17018,7 @@
         </p:nvSpPr>
         <p:spPr>
           <a:xfrm>
-            <a:off x="3425422" y="3648187"/>
+            <a:off x="3425422" y="3720801"/>
             <a:ext cx="137160" cy="137160"/>
           </a:xfrm>
           <a:prstGeom prst="ellipse">
@@ -17038,8 +17038,8 @@
         </p:nvSpPr>
         <p:spPr>
           <a:xfrm>
-            <a:off x="3840480" y="3609191"/>
-            <a:ext cx="566928" cy="215153"/>
+            <a:off x="3840480" y="3676964"/>
+            <a:ext cx="566928" cy="224835"/>
           </a:xfrm>
           <a:prstGeom prst="rect">
             <a:avLst/>
@@ -17077,8 +17077,8 @@
         </p:nvSpPr>
         <p:spPr>
           <a:xfrm>
-            <a:off x="4407408" y="3609191"/>
-            <a:ext cx="566928" cy="215153"/>
+            <a:off x="4407408" y="3676964"/>
+            <a:ext cx="566928" cy="224835"/>
           </a:xfrm>
           <a:prstGeom prst="rect">
             <a:avLst/>
@@ -17116,8 +17116,8 @@
         </p:nvSpPr>
         <p:spPr>
           <a:xfrm>
-            <a:off x="4974336" y="3609191"/>
-            <a:ext cx="859536" cy="215153"/>
+            <a:off x="4974336" y="3676964"/>
+            <a:ext cx="859536" cy="224835"/>
           </a:xfrm>
           <a:prstGeom prst="rect">
             <a:avLst/>
@@ -17155,8 +17155,8 @@
         </p:nvSpPr>
         <p:spPr>
           <a:xfrm>
-            <a:off x="658368" y="3824344"/>
-            <a:ext cx="2011680" cy="215153"/>
+            <a:off x="658368" y="3901799"/>
+            <a:ext cx="2011680" cy="224835"/>
           </a:xfrm>
           <a:prstGeom prst="rect">
             <a:avLst/>
@@ -17194,7 +17194,7 @@
         </p:nvSpPr>
         <p:spPr>
           <a:xfrm>
-            <a:off x="3478988" y="3918204"/>
+            <a:off x="3478988" y="4000500"/>
             <a:ext cx="9144" cy="27432"/>
           </a:xfrm>
           <a:prstGeom prst="rect">
@@ -17214,7 +17214,7 @@
         </p:nvSpPr>
         <p:spPr>
           <a:xfrm>
-            <a:off x="3412024" y="3863340"/>
+            <a:off x="3412024" y="3945636"/>
             <a:ext cx="137160" cy="137160"/>
           </a:xfrm>
           <a:prstGeom prst="ellipse">
@@ -17234,7 +17234,7 @@
         </p:nvSpPr>
         <p:spPr>
           <a:xfrm>
-            <a:off x="3410408" y="3863340"/>
+            <a:off x="3410408" y="3945636"/>
             <a:ext cx="137160" cy="137160"/>
           </a:xfrm>
           <a:prstGeom prst="ellipse">
@@ -17254,8 +17254,8 @@
         </p:nvSpPr>
         <p:spPr>
           <a:xfrm>
-            <a:off x="3840480" y="3824344"/>
-            <a:ext cx="566928" cy="215153"/>
+            <a:off x="3840480" y="3901799"/>
+            <a:ext cx="566928" cy="224835"/>
           </a:xfrm>
           <a:prstGeom prst="rect">
             <a:avLst/>
@@ -17293,8 +17293,8 @@
         </p:nvSpPr>
         <p:spPr>
           <a:xfrm>
-            <a:off x="4407408" y="3824344"/>
-            <a:ext cx="566928" cy="215153"/>
+            <a:off x="4407408" y="3901799"/>
+            <a:ext cx="566928" cy="224835"/>
           </a:xfrm>
           <a:prstGeom prst="rect">
             <a:avLst/>
@@ -17332,8 +17332,8 @@
         </p:nvSpPr>
         <p:spPr>
           <a:xfrm>
-            <a:off x="4974336" y="3824344"/>
-            <a:ext cx="859536" cy="215153"/>
+            <a:off x="4974336" y="3901799"/>
+            <a:ext cx="859536" cy="224835"/>
           </a:xfrm>
           <a:prstGeom prst="rect">
             <a:avLst/>
@@ -17371,8 +17371,8 @@
         </p:nvSpPr>
         <p:spPr>
           <a:xfrm>
-            <a:off x="585216" y="4039496"/>
-            <a:ext cx="5394960" cy="215153"/>
+            <a:off x="585216" y="4126633"/>
+            <a:ext cx="5394960" cy="224835"/>
           </a:xfrm>
           <a:prstGeom prst="rect">
             <a:avLst/>
@@ -17391,8 +17391,8 @@
         </p:nvSpPr>
         <p:spPr>
           <a:xfrm>
-            <a:off x="658368" y="4039496"/>
-            <a:ext cx="2011680" cy="215153"/>
+            <a:off x="658368" y="4126633"/>
+            <a:ext cx="2011680" cy="224835"/>
           </a:xfrm>
           <a:prstGeom prst="rect">
             <a:avLst/>
@@ -17430,7 +17430,7 @@
         </p:nvSpPr>
         <p:spPr>
           <a:xfrm>
-            <a:off x="3668137" y="4133357"/>
+            <a:off x="3668137" y="4225335"/>
             <a:ext cx="9144" cy="27432"/>
           </a:xfrm>
           <a:prstGeom prst="rect">
@@ -17450,7 +17450,7 @@
         </p:nvSpPr>
         <p:spPr>
           <a:xfrm>
-            <a:off x="3605342" y="4078493"/>
+            <a:off x="3605342" y="4170471"/>
             <a:ext cx="137160" cy="137160"/>
           </a:xfrm>
           <a:prstGeom prst="ellipse">
@@ -17470,7 +17470,7 @@
         </p:nvSpPr>
         <p:spPr>
           <a:xfrm>
-            <a:off x="3599557" y="4078493"/>
+            <a:off x="3599557" y="4170471"/>
             <a:ext cx="137160" cy="137160"/>
           </a:xfrm>
           <a:prstGeom prst="ellipse">
@@ -17490,8 +17490,8 @@
         </p:nvSpPr>
         <p:spPr>
           <a:xfrm>
-            <a:off x="3840480" y="4039496"/>
-            <a:ext cx="566928" cy="215153"/>
+            <a:off x="3840480" y="4126633"/>
+            <a:ext cx="566928" cy="224835"/>
           </a:xfrm>
           <a:prstGeom prst="rect">
             <a:avLst/>
@@ -17529,8 +17529,8 @@
         </p:nvSpPr>
         <p:spPr>
           <a:xfrm>
-            <a:off x="4407408" y="4039496"/>
-            <a:ext cx="566928" cy="215153"/>
+            <a:off x="4407408" y="4126633"/>
+            <a:ext cx="566928" cy="224835"/>
           </a:xfrm>
           <a:prstGeom prst="rect">
             <a:avLst/>
@@ -17568,8 +17568,8 @@
         </p:nvSpPr>
         <p:spPr>
           <a:xfrm>
-            <a:off x="4974336" y="4039496"/>
-            <a:ext cx="859536" cy="215153"/>
+            <a:off x="4974336" y="4126633"/>
+            <a:ext cx="859536" cy="224835"/>
           </a:xfrm>
           <a:prstGeom prst="rect">
             <a:avLst/>
@@ -17607,8 +17607,8 @@
         </p:nvSpPr>
         <p:spPr>
           <a:xfrm>
-            <a:off x="658368" y="4254649"/>
-            <a:ext cx="2011680" cy="215153"/>
+            <a:off x="658368" y="4351468"/>
+            <a:ext cx="2011680" cy="224835"/>
           </a:xfrm>
           <a:prstGeom prst="rect">
             <a:avLst/>
@@ -17646,7 +17646,7 @@
         </p:nvSpPr>
         <p:spPr>
           <a:xfrm>
-            <a:off x="3573014" y="4348510"/>
+            <a:off x="3573014" y="4450170"/>
             <a:ext cx="10631" cy="27432"/>
           </a:xfrm>
           <a:prstGeom prst="rect">
@@ -17666,7 +17666,7 @@
         </p:nvSpPr>
         <p:spPr>
           <a:xfrm>
-            <a:off x="3515065" y="4293646"/>
+            <a:off x="3515065" y="4395306"/>
             <a:ext cx="137160" cy="137160"/>
           </a:xfrm>
           <a:prstGeom prst="ellipse">
@@ -17686,7 +17686,7 @@
         </p:nvSpPr>
         <p:spPr>
           <a:xfrm>
-            <a:off x="3504434" y="4293646"/>
+            <a:off x="3504434" y="4395306"/>
             <a:ext cx="137160" cy="137160"/>
           </a:xfrm>
           <a:prstGeom prst="ellipse">
@@ -17706,8 +17706,8 @@
         </p:nvSpPr>
         <p:spPr>
           <a:xfrm>
-            <a:off x="3840480" y="4254649"/>
-            <a:ext cx="566928" cy="215153"/>
+            <a:off x="3840480" y="4351468"/>
+            <a:ext cx="566928" cy="224835"/>
           </a:xfrm>
           <a:prstGeom prst="rect">
             <a:avLst/>
@@ -17745,8 +17745,8 @@
         </p:nvSpPr>
         <p:spPr>
           <a:xfrm>
-            <a:off x="4407408" y="4254649"/>
-            <a:ext cx="566928" cy="215153"/>
+            <a:off x="4407408" y="4351468"/>
+            <a:ext cx="566928" cy="224835"/>
           </a:xfrm>
           <a:prstGeom prst="rect">
             <a:avLst/>
@@ -17784,8 +17784,8 @@
         </p:nvSpPr>
         <p:spPr>
           <a:xfrm>
-            <a:off x="4974336" y="4254649"/>
-            <a:ext cx="859536" cy="215153"/>
+            <a:off x="4974336" y="4351468"/>
+            <a:ext cx="859536" cy="224835"/>
           </a:xfrm>
           <a:prstGeom prst="rect">
             <a:avLst/>
@@ -17823,8 +17823,8 @@
         </p:nvSpPr>
         <p:spPr>
           <a:xfrm>
-            <a:off x="585216" y="4469802"/>
-            <a:ext cx="5394960" cy="215153"/>
+            <a:off x="585216" y="4576303"/>
+            <a:ext cx="5394960" cy="224835"/>
           </a:xfrm>
           <a:prstGeom prst="rect">
             <a:avLst/>
@@ -17843,8 +17843,8 @@
         </p:nvSpPr>
         <p:spPr>
           <a:xfrm>
-            <a:off x="658368" y="4469802"/>
-            <a:ext cx="2011680" cy="215153"/>
+            <a:off x="658368" y="4576303"/>
+            <a:ext cx="2011680" cy="224835"/>
           </a:xfrm>
           <a:prstGeom prst="rect">
             <a:avLst/>
@@ -17882,7 +17882,7 @@
         </p:nvSpPr>
         <p:spPr>
           <a:xfrm>
-            <a:off x="3293888" y="4563663"/>
+            <a:off x="3293888" y="4675004"/>
             <a:ext cx="11833" cy="27432"/>
           </a:xfrm>
           <a:prstGeom prst="rect">
@@ -17902,7 +17902,7 @@
         </p:nvSpPr>
         <p:spPr>
           <a:xfrm>
-            <a:off x="3237141" y="4508799"/>
+            <a:off x="3237141" y="4620140"/>
             <a:ext cx="137160" cy="137160"/>
           </a:xfrm>
           <a:prstGeom prst="ellipse">
@@ -17922,7 +17922,7 @@
         </p:nvSpPr>
         <p:spPr>
           <a:xfrm>
-            <a:off x="3225308" y="4508799"/>
+            <a:off x="3225308" y="4620140"/>
             <a:ext cx="137160" cy="137160"/>
           </a:xfrm>
           <a:prstGeom prst="ellipse">
@@ -17942,8 +17942,8 @@
         </p:nvSpPr>
         <p:spPr>
           <a:xfrm>
-            <a:off x="3840480" y="4469802"/>
-            <a:ext cx="566928" cy="215153"/>
+            <a:off x="3840480" y="4576303"/>
+            <a:ext cx="566928" cy="224835"/>
           </a:xfrm>
           <a:prstGeom prst="rect">
             <a:avLst/>
@@ -17981,8 +17981,8 @@
         </p:nvSpPr>
         <p:spPr>
           <a:xfrm>
-            <a:off x="4407408" y="4469802"/>
-            <a:ext cx="566928" cy="215153"/>
+            <a:off x="4407408" y="4576303"/>
+            <a:ext cx="566928" cy="224835"/>
           </a:xfrm>
           <a:prstGeom prst="rect">
             <a:avLst/>
@@ -18020,8 +18020,8 @@
         </p:nvSpPr>
         <p:spPr>
           <a:xfrm>
-            <a:off x="4974336" y="4469802"/>
-            <a:ext cx="859536" cy="215153"/>
+            <a:off x="4974336" y="4576303"/>
+            <a:ext cx="859536" cy="224835"/>
           </a:xfrm>
           <a:prstGeom prst="rect">
             <a:avLst/>
@@ -18059,8 +18059,8 @@
         </p:nvSpPr>
         <p:spPr>
           <a:xfrm>
-            <a:off x="658368" y="4684955"/>
-            <a:ext cx="2011680" cy="215153"/>
+            <a:off x="658368" y="4801138"/>
+            <a:ext cx="2011680" cy="224835"/>
           </a:xfrm>
           <a:prstGeom prst="rect">
             <a:avLst/>
@@ -18098,7 +18098,7 @@
         </p:nvSpPr>
         <p:spPr>
           <a:xfrm>
-            <a:off x="3429695" y="4778816"/>
+            <a:off x="3429695" y="4899839"/>
             <a:ext cx="38117" cy="27432"/>
           </a:xfrm>
           <a:prstGeom prst="rect">
@@ -18118,7 +18118,7 @@
         </p:nvSpPr>
         <p:spPr>
           <a:xfrm>
-            <a:off x="3399231" y="4723952"/>
+            <a:off x="3399231" y="4844975"/>
             <a:ext cx="137160" cy="137160"/>
           </a:xfrm>
           <a:prstGeom prst="ellipse">
@@ -18138,7 +18138,7 @@
         </p:nvSpPr>
         <p:spPr>
           <a:xfrm>
-            <a:off x="3361115" y="4723952"/>
+            <a:off x="3361115" y="4844975"/>
             <a:ext cx="137160" cy="137160"/>
           </a:xfrm>
           <a:prstGeom prst="ellipse">
@@ -18158,8 +18158,8 @@
         </p:nvSpPr>
         <p:spPr>
           <a:xfrm>
-            <a:off x="3840480" y="4684955"/>
-            <a:ext cx="566928" cy="215153"/>
+            <a:off x="3840480" y="4801138"/>
+            <a:ext cx="566928" cy="224835"/>
           </a:xfrm>
           <a:prstGeom prst="rect">
             <a:avLst/>
@@ -18197,8 +18197,8 @@
         </p:nvSpPr>
         <p:spPr>
           <a:xfrm>
-            <a:off x="4407408" y="4684955"/>
-            <a:ext cx="566928" cy="215153"/>
+            <a:off x="4407408" y="4801138"/>
+            <a:ext cx="566928" cy="224835"/>
           </a:xfrm>
           <a:prstGeom prst="rect">
             <a:avLst/>
@@ -18236,8 +18236,8 @@
         </p:nvSpPr>
         <p:spPr>
           <a:xfrm>
-            <a:off x="4974336" y="4684955"/>
-            <a:ext cx="859536" cy="215153"/>
+            <a:off x="4974336" y="4801138"/>
+            <a:ext cx="859536" cy="224835"/>
           </a:xfrm>
           <a:prstGeom prst="rect">
             <a:avLst/>
@@ -18275,8 +18275,8 @@
         </p:nvSpPr>
         <p:spPr>
           <a:xfrm>
-            <a:off x="585216" y="4900108"/>
-            <a:ext cx="5394960" cy="215153"/>
+            <a:off x="585216" y="5025973"/>
+            <a:ext cx="5394960" cy="224835"/>
           </a:xfrm>
           <a:prstGeom prst="rect">
             <a:avLst/>
@@ -18295,8 +18295,8 @@
         </p:nvSpPr>
         <p:spPr>
           <a:xfrm>
-            <a:off x="658368" y="4900108"/>
-            <a:ext cx="2011680" cy="215153"/>
+            <a:off x="658368" y="5025973"/>
+            <a:ext cx="2011680" cy="224835"/>
           </a:xfrm>
           <a:prstGeom prst="rect">
             <a:avLst/>
@@ -18334,7 +18334,7 @@
         </p:nvSpPr>
         <p:spPr>
           <a:xfrm>
-            <a:off x="3400294" y="4993969"/>
+            <a:off x="3400294" y="5124674"/>
             <a:ext cx="64817" cy="27432"/>
           </a:xfrm>
           <a:prstGeom prst="rect">
@@ -18354,7 +18354,7 @@
         </p:nvSpPr>
         <p:spPr>
           <a:xfrm>
-            <a:off x="3396530" y="4939105"/>
+            <a:off x="3396530" y="5069810"/>
             <a:ext cx="137160" cy="137160"/>
           </a:xfrm>
           <a:prstGeom prst="ellipse">
@@ -18374,7 +18374,7 @@
         </p:nvSpPr>
         <p:spPr>
           <a:xfrm>
-            <a:off x="3331714" y="4939105"/>
+            <a:off x="3331714" y="5069810"/>
             <a:ext cx="137160" cy="137160"/>
           </a:xfrm>
           <a:prstGeom prst="ellipse">
@@ -18394,8 +18394,8 @@
         </p:nvSpPr>
         <p:spPr>
           <a:xfrm>
-            <a:off x="3840480" y="4900108"/>
-            <a:ext cx="566928" cy="215153"/>
+            <a:off x="3840480" y="5025973"/>
+            <a:ext cx="566928" cy="224835"/>
           </a:xfrm>
           <a:prstGeom prst="rect">
             <a:avLst/>
@@ -18433,8 +18433,8 @@
         </p:nvSpPr>
         <p:spPr>
           <a:xfrm>
-            <a:off x="4407408" y="4900108"/>
-            <a:ext cx="566928" cy="215153"/>
+            <a:off x="4407408" y="5025973"/>
+            <a:ext cx="566928" cy="224835"/>
           </a:xfrm>
           <a:prstGeom prst="rect">
             <a:avLst/>
@@ -18472,8 +18472,8 @@
         </p:nvSpPr>
         <p:spPr>
           <a:xfrm>
-            <a:off x="4974336" y="4900108"/>
-            <a:ext cx="859536" cy="215153"/>
+            <a:off x="4974336" y="5025973"/>
+            <a:ext cx="859536" cy="224835"/>
           </a:xfrm>
           <a:prstGeom prst="rect">
             <a:avLst/>
@@ -18511,8 +18511,8 @@
         </p:nvSpPr>
         <p:spPr>
           <a:xfrm>
-            <a:off x="658368" y="5115261"/>
-            <a:ext cx="2011680" cy="215153"/>
+            <a:off x="658368" y="5250808"/>
+            <a:ext cx="2011680" cy="224835"/>
           </a:xfrm>
           <a:prstGeom prst="rect">
             <a:avLst/>
@@ -18550,7 +18550,7 @@
         </p:nvSpPr>
         <p:spPr>
           <a:xfrm>
-            <a:off x="3373993" y="5209122"/>
+            <a:off x="3373993" y="5349509"/>
             <a:ext cx="65007" cy="27432"/>
           </a:xfrm>
           <a:prstGeom prst="rect">
@@ -18570,7 +18570,7 @@
         </p:nvSpPr>
         <p:spPr>
           <a:xfrm>
-            <a:off x="3370420" y="5154258"/>
+            <a:off x="3370420" y="5294645"/>
             <a:ext cx="137160" cy="137160"/>
           </a:xfrm>
           <a:prstGeom prst="ellipse">
@@ -18590,7 +18590,7 @@
         </p:nvSpPr>
         <p:spPr>
           <a:xfrm>
-            <a:off x="3305413" y="5154258"/>
+            <a:off x="3305413" y="5294645"/>
             <a:ext cx="137160" cy="137160"/>
           </a:xfrm>
           <a:prstGeom prst="ellipse">
@@ -18610,8 +18610,8 @@
         </p:nvSpPr>
         <p:spPr>
           <a:xfrm>
-            <a:off x="3840480" y="5115261"/>
-            <a:ext cx="566928" cy="215153"/>
+            <a:off x="3840480" y="5250808"/>
+            <a:ext cx="566928" cy="224835"/>
           </a:xfrm>
           <a:prstGeom prst="rect">
             <a:avLst/>
@@ -18649,8 +18649,8 @@
         </p:nvSpPr>
         <p:spPr>
           <a:xfrm>
-            <a:off x="4407408" y="5115261"/>
-            <a:ext cx="566928" cy="215153"/>
+            <a:off x="4407408" y="5250808"/>
+            <a:ext cx="566928" cy="224835"/>
           </a:xfrm>
           <a:prstGeom prst="rect">
             <a:avLst/>
@@ -18688,8 +18688,8 @@
         </p:nvSpPr>
         <p:spPr>
           <a:xfrm>
-            <a:off x="4974336" y="5115261"/>
-            <a:ext cx="859536" cy="215153"/>
+            <a:off x="4974336" y="5250808"/>
+            <a:ext cx="859536" cy="224835"/>
           </a:xfrm>
           <a:prstGeom prst="rect">
             <a:avLst/>
@@ -18727,8 +18727,8 @@
         </p:nvSpPr>
         <p:spPr>
           <a:xfrm>
-            <a:off x="585216" y="5330414"/>
-            <a:ext cx="5394960" cy="215153"/>
+            <a:off x="585216" y="5475642"/>
+            <a:ext cx="5394960" cy="224835"/>
           </a:xfrm>
           <a:prstGeom prst="rect">
             <a:avLst/>
@@ -18747,8 +18747,8 @@
         </p:nvSpPr>
         <p:spPr>
           <a:xfrm>
-            <a:off x="658368" y="5330414"/>
-            <a:ext cx="2011680" cy="215153"/>
+            <a:off x="658368" y="5475642"/>
+            <a:ext cx="2011680" cy="224835"/>
           </a:xfrm>
           <a:prstGeom prst="rect">
             <a:avLst/>
@@ -18786,7 +18786,7 @@
         </p:nvSpPr>
         <p:spPr>
           <a:xfrm>
-            <a:off x="3557028" y="5424275"/>
+            <a:off x="3557028" y="5574344"/>
             <a:ext cx="65731" cy="27432"/>
           </a:xfrm>
           <a:prstGeom prst="rect">
@@ -18806,7 +18806,7 @@
         </p:nvSpPr>
         <p:spPr>
           <a:xfrm>
-            <a:off x="3554179" y="5369411"/>
+            <a:off x="3554179" y="5519480"/>
             <a:ext cx="137160" cy="137160"/>
           </a:xfrm>
           <a:prstGeom prst="ellipse">
@@ -18826,7 +18826,7 @@
         </p:nvSpPr>
         <p:spPr>
           <a:xfrm>
-            <a:off x="3488448" y="5369411"/>
+            <a:off x="3488448" y="5519480"/>
             <a:ext cx="137160" cy="137160"/>
           </a:xfrm>
           <a:prstGeom prst="ellipse">
@@ -18846,8 +18846,8 @@
         </p:nvSpPr>
         <p:spPr>
           <a:xfrm>
-            <a:off x="3840480" y="5330414"/>
-            <a:ext cx="566928" cy="215153"/>
+            <a:off x="3840480" y="5475642"/>
+            <a:ext cx="566928" cy="224835"/>
           </a:xfrm>
           <a:prstGeom prst="rect">
             <a:avLst/>
@@ -18885,8 +18885,8 @@
         </p:nvSpPr>
         <p:spPr>
           <a:xfrm>
-            <a:off x="4407408" y="5330414"/>
-            <a:ext cx="566928" cy="215153"/>
+            <a:off x="4407408" y="5475642"/>
+            <a:ext cx="566928" cy="224835"/>
           </a:xfrm>
           <a:prstGeom prst="rect">
             <a:avLst/>
@@ -18924,8 +18924,8 @@
         </p:nvSpPr>
         <p:spPr>
           <a:xfrm>
-            <a:off x="4974336" y="5330414"/>
-            <a:ext cx="859536" cy="215153"/>
+            <a:off x="4974336" y="5475642"/>
+            <a:ext cx="859536" cy="224835"/>
           </a:xfrm>
           <a:prstGeom prst="rect">
             <a:avLst/>
@@ -18963,8 +18963,8 @@
         </p:nvSpPr>
         <p:spPr>
           <a:xfrm>
-            <a:off x="658368" y="5545567"/>
-            <a:ext cx="2011680" cy="215153"/>
+            <a:off x="658368" y="5700477"/>
+            <a:ext cx="2011680" cy="224835"/>
           </a:xfrm>
           <a:prstGeom prst="rect">
             <a:avLst/>
@@ -19002,7 +19002,7 @@
         </p:nvSpPr>
         <p:spPr>
           <a:xfrm>
-            <a:off x="3229189" y="5639428"/>
+            <a:off x="3229189" y="5799179"/>
             <a:ext cx="67698" cy="27432"/>
           </a:xfrm>
           <a:prstGeom prst="rect">
@@ -19022,7 +19022,7 @@
         </p:nvSpPr>
         <p:spPr>
           <a:xfrm>
-            <a:off x="3228307" y="5584564"/>
+            <a:off x="3228307" y="5744315"/>
             <a:ext cx="137160" cy="137160"/>
           </a:xfrm>
           <a:prstGeom prst="ellipse">
@@ -19042,7 +19042,7 @@
         </p:nvSpPr>
         <p:spPr>
           <a:xfrm>
-            <a:off x="3160609" y="5584564"/>
+            <a:off x="3160609" y="5744315"/>
             <a:ext cx="137160" cy="137160"/>
           </a:xfrm>
           <a:prstGeom prst="ellipse">
@@ -19062,8 +19062,8 @@
         </p:nvSpPr>
         <p:spPr>
           <a:xfrm>
-            <a:off x="3840480" y="5545567"/>
-            <a:ext cx="566928" cy="215153"/>
+            <a:off x="3840480" y="5700477"/>
+            <a:ext cx="566928" cy="224835"/>
           </a:xfrm>
           <a:prstGeom prst="rect">
             <a:avLst/>
@@ -19101,8 +19101,8 @@
         </p:nvSpPr>
         <p:spPr>
           <a:xfrm>
-            <a:off x="4407408" y="5545567"/>
-            <a:ext cx="566928" cy="215153"/>
+            <a:off x="4407408" y="5700477"/>
+            <a:ext cx="566928" cy="224835"/>
           </a:xfrm>
           <a:prstGeom prst="rect">
             <a:avLst/>
@@ -19140,8 +19140,8 @@
         </p:nvSpPr>
         <p:spPr>
           <a:xfrm>
-            <a:off x="4974336" y="5545567"/>
-            <a:ext cx="859536" cy="215153"/>
+            <a:off x="4974336" y="5700477"/>
+            <a:ext cx="859536" cy="224835"/>
           </a:xfrm>
           <a:prstGeom prst="rect">
             <a:avLst/>
@@ -19180,7 +19180,7 @@
         <p:spPr>
           <a:xfrm>
             <a:off x="6208776" y="2103120"/>
-            <a:ext cx="2011680" cy="215153"/>
+            <a:ext cx="2011680" cy="224835"/>
           </a:xfrm>
           <a:prstGeom prst="rect">
             <a:avLst/>
@@ -19218,7 +19218,7 @@
         </p:nvSpPr>
         <p:spPr>
           <a:xfrm>
-            <a:off x="8912269" y="2196980"/>
+            <a:off x="8912269" y="2201821"/>
             <a:ext cx="80862" cy="27432"/>
           </a:xfrm>
           <a:prstGeom prst="rect">
@@ -19238,7 +19238,7 @@
         </p:nvSpPr>
         <p:spPr>
           <a:xfrm>
-            <a:off x="8924551" y="2142116"/>
+            <a:off x="8924551" y="2146957"/>
             <a:ext cx="137160" cy="137160"/>
           </a:xfrm>
           <a:prstGeom prst="ellipse">
@@ -19258,7 +19258,7 @@
         </p:nvSpPr>
         <p:spPr>
           <a:xfrm>
-            <a:off x="8843689" y="2142116"/>
+            <a:off x="8843689" y="2146957"/>
             <a:ext cx="137160" cy="137160"/>
           </a:xfrm>
           <a:prstGeom prst="ellipse">
@@ -19279,7 +19279,7 @@
         <p:spPr>
           <a:xfrm>
             <a:off x="9390888" y="2103120"/>
-            <a:ext cx="566928" cy="215153"/>
+            <a:ext cx="566928" cy="224835"/>
           </a:xfrm>
           <a:prstGeom prst="rect">
             <a:avLst/>
@@ -19318,7 +19318,7 @@
         <p:spPr>
           <a:xfrm>
             <a:off x="9957816" y="2103120"/>
-            <a:ext cx="566928" cy="215153"/>
+            <a:ext cx="566928" cy="224835"/>
           </a:xfrm>
           <a:prstGeom prst="rect">
             <a:avLst/>
@@ -19357,7 +19357,7 @@
         <p:spPr>
           <a:xfrm>
             <a:off x="10524744" y="2103120"/>
-            <a:ext cx="859536" cy="215153"/>
+            <a:ext cx="859536" cy="224835"/>
           </a:xfrm>
           <a:prstGeom prst="rect">
             <a:avLst/>
@@ -19395,8 +19395,8 @@
         </p:nvSpPr>
         <p:spPr>
           <a:xfrm>
-            <a:off x="6135624" y="2318273"/>
-            <a:ext cx="5394960" cy="215153"/>
+            <a:off x="6135624" y="2327955"/>
+            <a:ext cx="5394960" cy="224835"/>
           </a:xfrm>
           <a:prstGeom prst="rect">
             <a:avLst/>
@@ -19415,8 +19415,8 @@
         </p:nvSpPr>
         <p:spPr>
           <a:xfrm>
-            <a:off x="6208776" y="2318273"/>
-            <a:ext cx="2011680" cy="215153"/>
+            <a:off x="6208776" y="2327955"/>
+            <a:ext cx="2011680" cy="224835"/>
           </a:xfrm>
           <a:prstGeom prst="rect">
             <a:avLst/>
@@ -19454,7 +19454,7 @@
         </p:nvSpPr>
         <p:spPr>
           <a:xfrm>
-            <a:off x="9104456" y="2412133"/>
+            <a:off x="9104456" y="2426656"/>
             <a:ext cx="85364" cy="27432"/>
           </a:xfrm>
           <a:prstGeom prst="rect">
@@ -19474,7 +19474,7 @@
         </p:nvSpPr>
         <p:spPr>
           <a:xfrm>
-            <a:off x="9121240" y="2357269"/>
+            <a:off x="9121240" y="2371792"/>
             <a:ext cx="137160" cy="137160"/>
           </a:xfrm>
           <a:prstGeom prst="ellipse">
@@ -19494,7 +19494,7 @@
         </p:nvSpPr>
         <p:spPr>
           <a:xfrm>
-            <a:off x="9035876" y="2357269"/>
+            <a:off x="9035876" y="2371792"/>
             <a:ext cx="137160" cy="137160"/>
           </a:xfrm>
           <a:prstGeom prst="ellipse">
@@ -19514,8 +19514,8 @@
         </p:nvSpPr>
         <p:spPr>
           <a:xfrm>
-            <a:off x="9390888" y="2318273"/>
-            <a:ext cx="566928" cy="215153"/>
+            <a:off x="9390888" y="2327955"/>
+            <a:ext cx="566928" cy="224835"/>
           </a:xfrm>
           <a:prstGeom prst="rect">
             <a:avLst/>
@@ -19553,8 +19553,8 @@
         </p:nvSpPr>
         <p:spPr>
           <a:xfrm>
-            <a:off x="9957816" y="2318273"/>
-            <a:ext cx="566928" cy="215153"/>
+            <a:off x="9957816" y="2327955"/>
+            <a:ext cx="566928" cy="224835"/>
           </a:xfrm>
           <a:prstGeom prst="rect">
             <a:avLst/>
@@ -19592,8 +19592,8 @@
         </p:nvSpPr>
         <p:spPr>
           <a:xfrm>
-            <a:off x="10524744" y="2318273"/>
-            <a:ext cx="859536" cy="215153"/>
+            <a:off x="10524744" y="2327955"/>
+            <a:ext cx="859536" cy="224835"/>
           </a:xfrm>
           <a:prstGeom prst="rect">
             <a:avLst/>
@@ -19631,8 +19631,8 @@
         </p:nvSpPr>
         <p:spPr>
           <a:xfrm>
-            <a:off x="6208776" y="2533426"/>
-            <a:ext cx="2011680" cy="215153"/>
+            <a:off x="6208776" y="2552790"/>
+            <a:ext cx="2011680" cy="224835"/>
           </a:xfrm>
           <a:prstGeom prst="rect">
             <a:avLst/>
@@ -19670,7 +19670,7 @@
         </p:nvSpPr>
         <p:spPr>
           <a:xfrm>
-            <a:off x="8801530" y="2627286"/>
+            <a:off x="8801530" y="2651491"/>
             <a:ext cx="101285" cy="27432"/>
           </a:xfrm>
           <a:prstGeom prst="rect">
@@ -19690,7 +19690,7 @@
         </p:nvSpPr>
         <p:spPr>
           <a:xfrm>
-            <a:off x="8834235" y="2572422"/>
+            <a:off x="8834235" y="2596627"/>
             <a:ext cx="137160" cy="137160"/>
           </a:xfrm>
           <a:prstGeom prst="ellipse">
@@ -19710,7 +19710,7 @@
         </p:nvSpPr>
         <p:spPr>
           <a:xfrm>
-            <a:off x="8732950" y="2572422"/>
+            <a:off x="8732950" y="2596627"/>
             <a:ext cx="137160" cy="137160"/>
           </a:xfrm>
           <a:prstGeom prst="ellipse">
@@ -19730,8 +19730,8 @@
         </p:nvSpPr>
         <p:spPr>
           <a:xfrm>
-            <a:off x="9390888" y="2533426"/>
-            <a:ext cx="566928" cy="215153"/>
+            <a:off x="9390888" y="2552790"/>
+            <a:ext cx="566928" cy="224835"/>
           </a:xfrm>
           <a:prstGeom prst="rect">
             <a:avLst/>
@@ -19769,8 +19769,8 @@
         </p:nvSpPr>
         <p:spPr>
           <a:xfrm>
-            <a:off x="9957816" y="2533426"/>
-            <a:ext cx="566928" cy="215153"/>
+            <a:off x="9957816" y="2552790"/>
+            <a:ext cx="566928" cy="224835"/>
           </a:xfrm>
           <a:prstGeom prst="rect">
             <a:avLst/>
@@ -19808,8 +19808,8 @@
         </p:nvSpPr>
         <p:spPr>
           <a:xfrm>
-            <a:off x="10524744" y="2533426"/>
-            <a:ext cx="859536" cy="215153"/>
+            <a:off x="10524744" y="2552790"/>
+            <a:ext cx="859536" cy="224835"/>
           </a:xfrm>
           <a:prstGeom prst="rect">
             <a:avLst/>
@@ -19847,8 +19847,8 @@
         </p:nvSpPr>
         <p:spPr>
           <a:xfrm>
-            <a:off x="6135624" y="2748579"/>
-            <a:ext cx="5394960" cy="215153"/>
+            <a:off x="6135624" y="2777624"/>
+            <a:ext cx="5394960" cy="224835"/>
           </a:xfrm>
           <a:prstGeom prst="rect">
             <a:avLst/>
@@ -19867,8 +19867,8 @@
         </p:nvSpPr>
         <p:spPr>
           <a:xfrm>
-            <a:off x="6208776" y="2748579"/>
-            <a:ext cx="2011680" cy="215153"/>
+            <a:off x="6208776" y="2777624"/>
+            <a:ext cx="2011680" cy="224835"/>
           </a:xfrm>
           <a:prstGeom prst="rect">
             <a:avLst/>
@@ -19906,7 +19906,7 @@
         </p:nvSpPr>
         <p:spPr>
           <a:xfrm>
-            <a:off x="9060644" y="2842439"/>
+            <a:off x="9060644" y="2876326"/>
             <a:ext cx="107688" cy="27432"/>
           </a:xfrm>
           <a:prstGeom prst="rect">
@@ -19926,7 +19926,7 @@
         </p:nvSpPr>
         <p:spPr>
           <a:xfrm>
-            <a:off x="9099752" y="2787575"/>
+            <a:off x="9099752" y="2821462"/>
             <a:ext cx="137160" cy="137160"/>
           </a:xfrm>
           <a:prstGeom prst="ellipse">
@@ -19946,7 +19946,7 @@
         </p:nvSpPr>
         <p:spPr>
           <a:xfrm>
-            <a:off x="8992064" y="2787575"/>
+            <a:off x="8992064" y="2821462"/>
             <a:ext cx="137160" cy="137160"/>
           </a:xfrm>
           <a:prstGeom prst="ellipse">
@@ -19966,8 +19966,8 @@
         </p:nvSpPr>
         <p:spPr>
           <a:xfrm>
-            <a:off x="9390888" y="2748579"/>
-            <a:ext cx="566928" cy="215153"/>
+            <a:off x="9390888" y="2777624"/>
+            <a:ext cx="566928" cy="224835"/>
           </a:xfrm>
           <a:prstGeom prst="rect">
             <a:avLst/>
@@ -20005,8 +20005,8 @@
         </p:nvSpPr>
         <p:spPr>
           <a:xfrm>
-            <a:off x="9957816" y="2748579"/>
-            <a:ext cx="566928" cy="215153"/>
+            <a:off x="9957816" y="2777624"/>
+            <a:ext cx="566928" cy="224835"/>
           </a:xfrm>
           <a:prstGeom prst="rect">
             <a:avLst/>
@@ -20044,8 +20044,8 @@
         </p:nvSpPr>
         <p:spPr>
           <a:xfrm>
-            <a:off x="10524744" y="2748579"/>
-            <a:ext cx="859536" cy="215153"/>
+            <a:off x="10524744" y="2777624"/>
+            <a:ext cx="859536" cy="224835"/>
           </a:xfrm>
           <a:prstGeom prst="rect">
             <a:avLst/>
@@ -20083,8 +20083,8 @@
         </p:nvSpPr>
         <p:spPr>
           <a:xfrm>
-            <a:off x="6208776" y="2963732"/>
-            <a:ext cx="2011680" cy="215153"/>
+            <a:off x="6208776" y="3002459"/>
+            <a:ext cx="2011680" cy="224835"/>
           </a:xfrm>
           <a:prstGeom prst="rect">
             <a:avLst/>
@@ -20122,7 +20122,7 @@
         </p:nvSpPr>
         <p:spPr>
           <a:xfrm>
-            <a:off x="9185604" y="3057592"/>
+            <a:off x="9185604" y="3101161"/>
             <a:ext cx="116115" cy="27432"/>
           </a:xfrm>
           <a:prstGeom prst="rect">
@@ -20142,7 +20142,7 @@
         </p:nvSpPr>
         <p:spPr>
           <a:xfrm>
-            <a:off x="9233139" y="3002728"/>
+            <a:off x="9233139" y="3046297"/>
             <a:ext cx="137160" cy="137160"/>
           </a:xfrm>
           <a:prstGeom prst="ellipse">
@@ -20162,7 +20162,7 @@
         </p:nvSpPr>
         <p:spPr>
           <a:xfrm>
-            <a:off x="9117024" y="3002728"/>
+            <a:off x="9117024" y="3046297"/>
             <a:ext cx="137160" cy="137160"/>
           </a:xfrm>
           <a:prstGeom prst="ellipse">
@@ -20182,8 +20182,8 @@
         </p:nvSpPr>
         <p:spPr>
           <a:xfrm>
-            <a:off x="9390888" y="2963732"/>
-            <a:ext cx="566928" cy="215153"/>
+            <a:off x="9390888" y="3002459"/>
+            <a:ext cx="566928" cy="224835"/>
           </a:xfrm>
           <a:prstGeom prst="rect">
             <a:avLst/>
@@ -20221,8 +20221,8 @@
         </p:nvSpPr>
         <p:spPr>
           <a:xfrm>
-            <a:off x="9957816" y="2963732"/>
-            <a:ext cx="566928" cy="215153"/>
+            <a:off x="9957816" y="3002459"/>
+            <a:ext cx="566928" cy="224835"/>
           </a:xfrm>
           <a:prstGeom prst="rect">
             <a:avLst/>
@@ -20260,8 +20260,8 @@
         </p:nvSpPr>
         <p:spPr>
           <a:xfrm>
-            <a:off x="10524744" y="2963732"/>
-            <a:ext cx="859536" cy="215153"/>
+            <a:off x="10524744" y="3002459"/>
+            <a:ext cx="859536" cy="224835"/>
           </a:xfrm>
           <a:prstGeom prst="rect">
             <a:avLst/>
@@ -20299,8 +20299,8 @@
         </p:nvSpPr>
         <p:spPr>
           <a:xfrm>
-            <a:off x="6135624" y="3178885"/>
-            <a:ext cx="5394960" cy="215153"/>
+            <a:off x="6135624" y="3227294"/>
+            <a:ext cx="5394960" cy="224835"/>
           </a:xfrm>
           <a:prstGeom prst="rect">
             <a:avLst/>
@@ -20319,8 +20319,8 @@
         </p:nvSpPr>
         <p:spPr>
           <a:xfrm>
-            <a:off x="6208776" y="3178885"/>
-            <a:ext cx="2011680" cy="215153"/>
+            <a:off x="6208776" y="3227294"/>
+            <a:ext cx="2011680" cy="224835"/>
           </a:xfrm>
           <a:prstGeom prst="rect">
             <a:avLst/>
@@ -20358,7 +20358,7 @@
         </p:nvSpPr>
         <p:spPr>
           <a:xfrm>
-            <a:off x="8903365" y="3272745"/>
+            <a:off x="8903365" y="3325996"/>
             <a:ext cx="118492" cy="27432"/>
           </a:xfrm>
           <a:prstGeom prst="rect">
@@ -20378,7 +20378,7 @@
         </p:nvSpPr>
         <p:spPr>
           <a:xfrm>
-            <a:off x="8953277" y="3217881"/>
+            <a:off x="8953277" y="3271132"/>
             <a:ext cx="137160" cy="137160"/>
           </a:xfrm>
           <a:prstGeom prst="ellipse">
@@ -20398,7 +20398,7 @@
         </p:nvSpPr>
         <p:spPr>
           <a:xfrm>
-            <a:off x="8834785" y="3217881"/>
+            <a:off x="8834785" y="3271132"/>
             <a:ext cx="137160" cy="137160"/>
           </a:xfrm>
           <a:prstGeom prst="ellipse">
@@ -20418,8 +20418,8 @@
         </p:nvSpPr>
         <p:spPr>
           <a:xfrm>
-            <a:off x="9390888" y="3178885"/>
-            <a:ext cx="566928" cy="215153"/>
+            <a:off x="9390888" y="3227294"/>
+            <a:ext cx="566928" cy="224835"/>
           </a:xfrm>
           <a:prstGeom prst="rect">
             <a:avLst/>
@@ -20457,8 +20457,8 @@
         </p:nvSpPr>
         <p:spPr>
           <a:xfrm>
-            <a:off x="9957816" y="3178885"/>
-            <a:ext cx="566928" cy="215153"/>
+            <a:off x="9957816" y="3227294"/>
+            <a:ext cx="566928" cy="224835"/>
           </a:xfrm>
           <a:prstGeom prst="rect">
             <a:avLst/>
@@ -20496,8 +20496,8 @@
         </p:nvSpPr>
         <p:spPr>
           <a:xfrm>
-            <a:off x="10524744" y="3178885"/>
-            <a:ext cx="859536" cy="215153"/>
+            <a:off x="10524744" y="3227294"/>
+            <a:ext cx="859536" cy="224835"/>
           </a:xfrm>
           <a:prstGeom prst="rect">
             <a:avLst/>
@@ -20535,8 +20535,8 @@
         </p:nvSpPr>
         <p:spPr>
           <a:xfrm>
-            <a:off x="6208776" y="3394038"/>
-            <a:ext cx="2011680" cy="215153"/>
+            <a:off x="6208776" y="3452129"/>
+            <a:ext cx="2011680" cy="224835"/>
           </a:xfrm>
           <a:prstGeom prst="rect">
             <a:avLst/>
@@ -20574,7 +20574,7 @@
         </p:nvSpPr>
         <p:spPr>
           <a:xfrm>
-            <a:off x="9029152" y="3487898"/>
+            <a:off x="9029152" y="3550830"/>
             <a:ext cx="144120" cy="27432"/>
           </a:xfrm>
           <a:prstGeom prst="rect">
@@ -20594,7 +20594,7 @@
         </p:nvSpPr>
         <p:spPr>
           <a:xfrm>
-            <a:off x="9104691" y="3433034"/>
+            <a:off x="9104691" y="3495966"/>
             <a:ext cx="137160" cy="137160"/>
           </a:xfrm>
           <a:prstGeom prst="ellipse">
@@ -20614,7 +20614,7 @@
         </p:nvSpPr>
         <p:spPr>
           <a:xfrm>
-            <a:off x="8960572" y="3433034"/>
+            <a:off x="8960572" y="3495966"/>
             <a:ext cx="137160" cy="137160"/>
           </a:xfrm>
           <a:prstGeom prst="ellipse">
@@ -20634,8 +20634,8 @@
         </p:nvSpPr>
         <p:spPr>
           <a:xfrm>
-            <a:off x="9390888" y="3394038"/>
-            <a:ext cx="566928" cy="215153"/>
+            <a:off x="9390888" y="3452129"/>
+            <a:ext cx="566928" cy="224835"/>
           </a:xfrm>
           <a:prstGeom prst="rect">
             <a:avLst/>
@@ -20673,8 +20673,8 @@
         </p:nvSpPr>
         <p:spPr>
           <a:xfrm>
-            <a:off x="9957816" y="3394038"/>
-            <a:ext cx="566928" cy="215153"/>
+            <a:off x="9957816" y="3452129"/>
+            <a:ext cx="566928" cy="224835"/>
           </a:xfrm>
           <a:prstGeom prst="rect">
             <a:avLst/>
@@ -20712,8 +20712,8 @@
         </p:nvSpPr>
         <p:spPr>
           <a:xfrm>
-            <a:off x="10524744" y="3394038"/>
-            <a:ext cx="859536" cy="215153"/>
+            <a:off x="10524744" y="3452129"/>
+            <a:ext cx="859536" cy="224835"/>
           </a:xfrm>
           <a:prstGeom prst="rect">
             <a:avLst/>
@@ -20751,8 +20751,8 @@
         </p:nvSpPr>
         <p:spPr>
           <a:xfrm>
-            <a:off x="6135624" y="3609191"/>
-            <a:ext cx="5394960" cy="215153"/>
+            <a:off x="6135624" y="3676964"/>
+            <a:ext cx="5394960" cy="224835"/>
           </a:xfrm>
           <a:prstGeom prst="rect">
             <a:avLst/>
@@ -20771,8 +20771,8 @@
         </p:nvSpPr>
         <p:spPr>
           <a:xfrm>
-            <a:off x="6208776" y="3609191"/>
-            <a:ext cx="2011680" cy="215153"/>
+            <a:off x="6208776" y="3676964"/>
+            <a:ext cx="2011680" cy="224835"/>
           </a:xfrm>
           <a:prstGeom prst="rect">
             <a:avLst/>
@@ -20810,7 +20810,7 @@
         </p:nvSpPr>
         <p:spPr>
           <a:xfrm>
-            <a:off x="8857207" y="3703051"/>
+            <a:off x="8857207" y="3775665"/>
             <a:ext cx="152397" cy="27432"/>
           </a:xfrm>
           <a:prstGeom prst="rect">
@@ -20830,7 +20830,7 @@
         </p:nvSpPr>
         <p:spPr>
           <a:xfrm>
-            <a:off x="8941024" y="3648187"/>
+            <a:off x="8941024" y="3720801"/>
             <a:ext cx="137160" cy="137160"/>
           </a:xfrm>
           <a:prstGeom prst="ellipse">
@@ -20850,7 +20850,7 @@
         </p:nvSpPr>
         <p:spPr>
           <a:xfrm>
-            <a:off x="8788627" y="3648187"/>
+            <a:off x="8788627" y="3720801"/>
             <a:ext cx="137160" cy="137160"/>
           </a:xfrm>
           <a:prstGeom prst="ellipse">
@@ -20870,8 +20870,8 @@
         </p:nvSpPr>
         <p:spPr>
           <a:xfrm>
-            <a:off x="9390888" y="3609191"/>
-            <a:ext cx="566928" cy="215153"/>
+            <a:off x="9390888" y="3676964"/>
+            <a:ext cx="566928" cy="224835"/>
           </a:xfrm>
           <a:prstGeom prst="rect">
             <a:avLst/>
@@ -20909,8 +20909,8 @@
         </p:nvSpPr>
         <p:spPr>
           <a:xfrm>
-            <a:off x="9957816" y="3609191"/>
-            <a:ext cx="566928" cy="215153"/>
+            <a:off x="9957816" y="3676964"/>
+            <a:ext cx="566928" cy="224835"/>
           </a:xfrm>
           <a:prstGeom prst="rect">
             <a:avLst/>
@@ -20948,8 +20948,8 @@
         </p:nvSpPr>
         <p:spPr>
           <a:xfrm>
-            <a:off x="10524744" y="3609191"/>
-            <a:ext cx="859536" cy="215153"/>
+            <a:off x="10524744" y="3676964"/>
+            <a:ext cx="859536" cy="224835"/>
           </a:xfrm>
           <a:prstGeom prst="rect">
             <a:avLst/>
@@ -20987,8 +20987,8 @@
         </p:nvSpPr>
         <p:spPr>
           <a:xfrm>
-            <a:off x="6208776" y="3824344"/>
-            <a:ext cx="2011680" cy="215153"/>
+            <a:off x="6208776" y="3901799"/>
+            <a:ext cx="2011680" cy="224835"/>
           </a:xfrm>
           <a:prstGeom prst="rect">
             <a:avLst/>
@@ -21026,7 +21026,7 @@
         </p:nvSpPr>
         <p:spPr>
           <a:xfrm>
-            <a:off x="8890071" y="3918204"/>
+            <a:off x="8890071" y="4000500"/>
             <a:ext cx="207231" cy="27432"/>
           </a:xfrm>
           <a:prstGeom prst="rect">
@@ -21046,7 +21046,7 @@
         </p:nvSpPr>
         <p:spPr>
           <a:xfrm>
-            <a:off x="9028721" y="3863340"/>
+            <a:off x="9028721" y="3945636"/>
             <a:ext cx="137160" cy="137160"/>
           </a:xfrm>
           <a:prstGeom prst="ellipse">
@@ -21066,7 +21066,7 @@
         </p:nvSpPr>
         <p:spPr>
           <a:xfrm>
-            <a:off x="8821491" y="3863340"/>
+            <a:off x="8821491" y="3945636"/>
             <a:ext cx="137160" cy="137160"/>
           </a:xfrm>
           <a:prstGeom prst="ellipse">
@@ -21086,8 +21086,8 @@
         </p:nvSpPr>
         <p:spPr>
           <a:xfrm>
-            <a:off x="9390888" y="3824344"/>
-            <a:ext cx="566928" cy="215153"/>
+            <a:off x="9390888" y="3901799"/>
+            <a:ext cx="566928" cy="224835"/>
           </a:xfrm>
           <a:prstGeom prst="rect">
             <a:avLst/>
@@ -21125,8 +21125,8 @@
         </p:nvSpPr>
         <p:spPr>
           <a:xfrm>
-            <a:off x="9957816" y="3824344"/>
-            <a:ext cx="566928" cy="215153"/>
+            <a:off x="9957816" y="3901799"/>
+            <a:ext cx="566928" cy="224835"/>
           </a:xfrm>
           <a:prstGeom prst="rect">
             <a:avLst/>
@@ -21164,8 +21164,8 @@
         </p:nvSpPr>
         <p:spPr>
           <a:xfrm>
-            <a:off x="10524744" y="3824344"/>
-            <a:ext cx="859536" cy="215153"/>
+            <a:off x="10524744" y="3901799"/>
+            <a:ext cx="859536" cy="224835"/>
           </a:xfrm>
           <a:prstGeom prst="rect">
             <a:avLst/>
@@ -21203,8 +21203,8 @@
         </p:nvSpPr>
         <p:spPr>
           <a:xfrm>
-            <a:off x="6135624" y="4039496"/>
-            <a:ext cx="5394960" cy="215153"/>
+            <a:off x="6135624" y="4126633"/>
+            <a:ext cx="5394960" cy="224835"/>
           </a:xfrm>
           <a:prstGeom prst="rect">
             <a:avLst/>
@@ -21223,8 +21223,8 @@
         </p:nvSpPr>
         <p:spPr>
           <a:xfrm>
-            <a:off x="6208776" y="4039496"/>
-            <a:ext cx="2011680" cy="215153"/>
+            <a:off x="6208776" y="4126633"/>
+            <a:ext cx="2011680" cy="224835"/>
           </a:xfrm>
           <a:prstGeom prst="rect">
             <a:avLst/>
@@ -21262,7 +21262,7 @@
         </p:nvSpPr>
         <p:spPr>
           <a:xfrm>
-            <a:off x="9004765" y="4133357"/>
+            <a:off x="9004765" y="4225335"/>
             <a:ext cx="215671" cy="27432"/>
           </a:xfrm>
           <a:prstGeom prst="rect">
@@ -21282,7 +21282,7 @@
         </p:nvSpPr>
         <p:spPr>
           <a:xfrm>
-            <a:off x="9151856" y="4078493"/>
+            <a:off x="9151856" y="4170471"/>
             <a:ext cx="137160" cy="137160"/>
           </a:xfrm>
           <a:prstGeom prst="ellipse">
@@ -21302,7 +21302,7 @@
         </p:nvSpPr>
         <p:spPr>
           <a:xfrm>
-            <a:off x="8936185" y="4078493"/>
+            <a:off x="8936185" y="4170471"/>
             <a:ext cx="137160" cy="137160"/>
           </a:xfrm>
           <a:prstGeom prst="ellipse">
@@ -21322,8 +21322,8 @@
         </p:nvSpPr>
         <p:spPr>
           <a:xfrm>
-            <a:off x="9390888" y="4039496"/>
-            <a:ext cx="566928" cy="215153"/>
+            <a:off x="9390888" y="4126633"/>
+            <a:ext cx="566928" cy="224835"/>
           </a:xfrm>
           <a:prstGeom prst="rect">
             <a:avLst/>
@@ -21361,8 +21361,8 @@
         </p:nvSpPr>
         <p:spPr>
           <a:xfrm>
-            <a:off x="9957816" y="4039496"/>
-            <a:ext cx="566928" cy="215153"/>
+            <a:off x="9957816" y="4126633"/>
+            <a:ext cx="566928" cy="224835"/>
           </a:xfrm>
           <a:prstGeom prst="rect">
             <a:avLst/>
@@ -21400,8 +21400,8 @@
         </p:nvSpPr>
         <p:spPr>
           <a:xfrm>
-            <a:off x="10524744" y="4039496"/>
-            <a:ext cx="859536" cy="215153"/>
+            <a:off x="10524744" y="4126633"/>
+            <a:ext cx="859536" cy="224835"/>
           </a:xfrm>
           <a:prstGeom prst="rect">
             <a:avLst/>
@@ -21439,8 +21439,8 @@
         </p:nvSpPr>
         <p:spPr>
           <a:xfrm>
-            <a:off x="6208776" y="4254649"/>
-            <a:ext cx="2011680" cy="215153"/>
+            <a:off x="6208776" y="4351468"/>
+            <a:ext cx="2011680" cy="224835"/>
           </a:xfrm>
           <a:prstGeom prst="rect">
             <a:avLst/>
@@ -21478,7 +21478,7 @@
         </p:nvSpPr>
         <p:spPr>
           <a:xfrm>
-            <a:off x="8898070" y="4348510"/>
+            <a:off x="8898070" y="4450170"/>
             <a:ext cx="245847" cy="27432"/>
           </a:xfrm>
           <a:prstGeom prst="rect">
@@ -21498,7 +21498,7 @@
         </p:nvSpPr>
         <p:spPr>
           <a:xfrm>
-            <a:off x="9075337" y="4293646"/>
+            <a:off x="9075337" y="4395306"/>
             <a:ext cx="137160" cy="137160"/>
           </a:xfrm>
           <a:prstGeom prst="ellipse">
@@ -21518,7 +21518,7 @@
         </p:nvSpPr>
         <p:spPr>
           <a:xfrm>
-            <a:off x="8829490" y="4293646"/>
+            <a:off x="8829490" y="4395306"/>
             <a:ext cx="137160" cy="137160"/>
           </a:xfrm>
           <a:prstGeom prst="ellipse">
@@ -21538,8 +21538,8 @@
         </p:nvSpPr>
         <p:spPr>
           <a:xfrm>
-            <a:off x="9390888" y="4254649"/>
-            <a:ext cx="566928" cy="215153"/>
+            <a:off x="9390888" y="4351468"/>
+            <a:ext cx="566928" cy="224835"/>
           </a:xfrm>
           <a:prstGeom prst="rect">
             <a:avLst/>
@@ -21577,8 +21577,8 @@
         </p:nvSpPr>
         <p:spPr>
           <a:xfrm>
-            <a:off x="9957816" y="4254649"/>
-            <a:ext cx="566928" cy="215153"/>
+            <a:off x="9957816" y="4351468"/>
+            <a:ext cx="566928" cy="224835"/>
           </a:xfrm>
           <a:prstGeom prst="rect">
             <a:avLst/>
@@ -21616,8 +21616,8 @@
         </p:nvSpPr>
         <p:spPr>
           <a:xfrm>
-            <a:off x="10524744" y="4254649"/>
-            <a:ext cx="859536" cy="215153"/>
+            <a:off x="10524744" y="4351468"/>
+            <a:ext cx="859536" cy="224835"/>
           </a:xfrm>
           <a:prstGeom prst="rect">
             <a:avLst/>
@@ -21655,8 +21655,8 @@
         </p:nvSpPr>
         <p:spPr>
           <a:xfrm>
-            <a:off x="6135624" y="4469802"/>
-            <a:ext cx="5394960" cy="215153"/>
+            <a:off x="6135624" y="4576303"/>
+            <a:ext cx="5394960" cy="224835"/>
           </a:xfrm>
           <a:prstGeom prst="rect">
             <a:avLst/>
@@ -21675,8 +21675,8 @@
         </p:nvSpPr>
         <p:spPr>
           <a:xfrm>
-            <a:off x="6208776" y="4469802"/>
-            <a:ext cx="2011680" cy="215153"/>
+            <a:off x="6208776" y="4576303"/>
+            <a:ext cx="2011680" cy="224835"/>
           </a:xfrm>
           <a:prstGeom prst="rect">
             <a:avLst/>
@@ -21714,7 +21714,7 @@
         </p:nvSpPr>
         <p:spPr>
           <a:xfrm>
-            <a:off x="8692698" y="4563663"/>
+            <a:off x="8692698" y="4675004"/>
             <a:ext cx="277116" cy="27432"/>
           </a:xfrm>
           <a:prstGeom prst="rect">
@@ -21734,7 +21734,7 @@
         </p:nvSpPr>
         <p:spPr>
           <a:xfrm>
-            <a:off x="8901234" y="4508799"/>
+            <a:off x="8901234" y="4620140"/>
             <a:ext cx="137160" cy="137160"/>
           </a:xfrm>
           <a:prstGeom prst="ellipse">
@@ -21754,7 +21754,7 @@
         </p:nvSpPr>
         <p:spPr>
           <a:xfrm>
-            <a:off x="8624118" y="4508799"/>
+            <a:off x="8624118" y="4620140"/>
             <a:ext cx="137160" cy="137160"/>
           </a:xfrm>
           <a:prstGeom prst="ellipse">
@@ -21774,8 +21774,8 @@
         </p:nvSpPr>
         <p:spPr>
           <a:xfrm>
-            <a:off x="9390888" y="4469802"/>
-            <a:ext cx="566928" cy="215153"/>
+            <a:off x="9390888" y="4576303"/>
+            <a:ext cx="566928" cy="224835"/>
           </a:xfrm>
           <a:prstGeom prst="rect">
             <a:avLst/>
@@ -21813,8 +21813,8 @@
         </p:nvSpPr>
         <p:spPr>
           <a:xfrm>
-            <a:off x="9957816" y="4469802"/>
-            <a:ext cx="566928" cy="215153"/>
+            <a:off x="9957816" y="4576303"/>
+            <a:ext cx="566928" cy="224835"/>
           </a:xfrm>
           <a:prstGeom prst="rect">
             <a:avLst/>
@@ -21852,8 +21852,8 @@
         </p:nvSpPr>
         <p:spPr>
           <a:xfrm>
-            <a:off x="10524744" y="4469802"/>
-            <a:ext cx="859536" cy="215153"/>
+            <a:off x="10524744" y="4576303"/>
+            <a:ext cx="859536" cy="224835"/>
           </a:xfrm>
           <a:prstGeom prst="rect">
             <a:avLst/>
@@ -21891,8 +21891,8 @@
         </p:nvSpPr>
         <p:spPr>
           <a:xfrm>
-            <a:off x="6208776" y="4684955"/>
-            <a:ext cx="2011680" cy="215153"/>
+            <a:off x="6208776" y="4801138"/>
+            <a:ext cx="2011680" cy="224835"/>
           </a:xfrm>
           <a:prstGeom prst="rect">
             <a:avLst/>
@@ -21930,7 +21930,7 @@
         </p:nvSpPr>
         <p:spPr>
           <a:xfrm>
-            <a:off x="8659621" y="4778816"/>
+            <a:off x="8659621" y="4899839"/>
             <a:ext cx="332360" cy="27432"/>
           </a:xfrm>
           <a:prstGeom prst="rect">
@@ -21950,7 +21950,7 @@
         </p:nvSpPr>
         <p:spPr>
           <a:xfrm>
-            <a:off x="8923402" y="4723952"/>
+            <a:off x="8923402" y="4844975"/>
             <a:ext cx="137160" cy="137160"/>
           </a:xfrm>
           <a:prstGeom prst="ellipse">
@@ -21970,7 +21970,7 @@
         </p:nvSpPr>
         <p:spPr>
           <a:xfrm>
-            <a:off x="8591041" y="4723952"/>
+            <a:off x="8591041" y="4844975"/>
             <a:ext cx="137160" cy="137160"/>
           </a:xfrm>
           <a:prstGeom prst="ellipse">
@@ -21990,8 +21990,8 @@
         </p:nvSpPr>
         <p:spPr>
           <a:xfrm>
-            <a:off x="9390888" y="4684955"/>
-            <a:ext cx="566928" cy="215153"/>
+            <a:off x="9390888" y="4801138"/>
+            <a:ext cx="566928" cy="224835"/>
           </a:xfrm>
           <a:prstGeom prst="rect">
             <a:avLst/>
@@ -22029,8 +22029,8 @@
         </p:nvSpPr>
         <p:spPr>
           <a:xfrm>
-            <a:off x="9957816" y="4684955"/>
-            <a:ext cx="566928" cy="215153"/>
+            <a:off x="9957816" y="4801138"/>
+            <a:ext cx="566928" cy="224835"/>
           </a:xfrm>
           <a:prstGeom prst="rect">
             <a:avLst/>
@@ -22068,8 +22068,8 @@
         </p:nvSpPr>
         <p:spPr>
           <a:xfrm>
-            <a:off x="10524744" y="4684955"/>
-            <a:ext cx="859536" cy="215153"/>
+            <a:off x="10524744" y="4801138"/>
+            <a:ext cx="859536" cy="224835"/>
           </a:xfrm>
           <a:prstGeom prst="rect">
             <a:avLst/>
@@ -22107,8 +22107,8 @@
         </p:nvSpPr>
         <p:spPr>
           <a:xfrm>
-            <a:off x="6135624" y="4900108"/>
-            <a:ext cx="5394960" cy="215153"/>
+            <a:off x="6135624" y="5025973"/>
+            <a:ext cx="5394960" cy="224835"/>
           </a:xfrm>
           <a:prstGeom prst="rect">
             <a:avLst/>
@@ -22127,8 +22127,8 @@
         </p:nvSpPr>
         <p:spPr>
           <a:xfrm>
-            <a:off x="6208776" y="4900108"/>
-            <a:ext cx="2011680" cy="215153"/>
+            <a:off x="6208776" y="5025973"/>
+            <a:ext cx="2011680" cy="224835"/>
           </a:xfrm>
           <a:prstGeom prst="rect">
             <a:avLst/>
@@ -22166,7 +22166,7 @@
         </p:nvSpPr>
         <p:spPr>
           <a:xfrm>
-            <a:off x="8734634" y="4993969"/>
+            <a:off x="8734634" y="5124674"/>
             <a:ext cx="376572" cy="27432"/>
           </a:xfrm>
           <a:prstGeom prst="rect">
@@ -22186,7 +22186,7 @@
         </p:nvSpPr>
         <p:spPr>
           <a:xfrm>
-            <a:off x="9042625" y="4939105"/>
+            <a:off x="9042625" y="5069810"/>
             <a:ext cx="137160" cy="137160"/>
           </a:xfrm>
           <a:prstGeom prst="ellipse">
@@ -22206,7 +22206,7 @@
         </p:nvSpPr>
         <p:spPr>
           <a:xfrm>
-            <a:off x="8666054" y="4939105"/>
+            <a:off x="8666054" y="5069810"/>
             <a:ext cx="137160" cy="137160"/>
           </a:xfrm>
           <a:prstGeom prst="ellipse">
@@ -22226,8 +22226,8 @@
         </p:nvSpPr>
         <p:spPr>
           <a:xfrm>
-            <a:off x="9390888" y="4900108"/>
-            <a:ext cx="566928" cy="215153"/>
+            <a:off x="9390888" y="5025973"/>
+            <a:ext cx="566928" cy="224835"/>
           </a:xfrm>
           <a:prstGeom prst="rect">
             <a:avLst/>
@@ -22265,8 +22265,8 @@
         </p:nvSpPr>
         <p:spPr>
           <a:xfrm>
-            <a:off x="9957816" y="4900108"/>
-            <a:ext cx="566928" cy="215153"/>
+            <a:off x="9957816" y="5025973"/>
+            <a:ext cx="566928" cy="224835"/>
           </a:xfrm>
           <a:prstGeom prst="rect">
             <a:avLst/>
@@ -22304,8 +22304,8 @@
         </p:nvSpPr>
         <p:spPr>
           <a:xfrm>
-            <a:off x="10524744" y="4900108"/>
-            <a:ext cx="859536" cy="215153"/>
+            <a:off x="10524744" y="5025973"/>
+            <a:ext cx="859536" cy="224835"/>
           </a:xfrm>
           <a:prstGeom prst="rect">
             <a:avLst/>
@@ -22343,8 +22343,8 @@
         </p:nvSpPr>
         <p:spPr>
           <a:xfrm>
-            <a:off x="6208776" y="5115261"/>
-            <a:ext cx="2011680" cy="215153"/>
+            <a:off x="6208776" y="5250808"/>
+            <a:ext cx="2011680" cy="224835"/>
           </a:xfrm>
           <a:prstGeom prst="rect">
             <a:avLst/>
@@ -22382,7 +22382,7 @@
         </p:nvSpPr>
         <p:spPr>
           <a:xfrm>
-            <a:off x="8728847" y="5209122"/>
+            <a:off x="8728847" y="5349509"/>
             <a:ext cx="427819" cy="27432"/>
           </a:xfrm>
           <a:prstGeom prst="rect">
@@ -22402,7 +22402,7 @@
         </p:nvSpPr>
         <p:spPr>
           <a:xfrm>
-            <a:off x="9088086" y="5154258"/>
+            <a:off x="9088086" y="5294645"/>
             <a:ext cx="137160" cy="137160"/>
           </a:xfrm>
           <a:prstGeom prst="ellipse">
@@ -22422,7 +22422,7 @@
         </p:nvSpPr>
         <p:spPr>
           <a:xfrm>
-            <a:off x="8660267" y="5154258"/>
+            <a:off x="8660267" y="5294645"/>
             <a:ext cx="137160" cy="137160"/>
           </a:xfrm>
           <a:prstGeom prst="ellipse">
@@ -22442,8 +22442,8 @@
         </p:nvSpPr>
         <p:spPr>
           <a:xfrm>
-            <a:off x="9390888" y="5115261"/>
-            <a:ext cx="566928" cy="215153"/>
+            <a:off x="9390888" y="5250808"/>
+            <a:ext cx="566928" cy="224835"/>
           </a:xfrm>
           <a:prstGeom prst="rect">
             <a:avLst/>
@@ -22481,8 +22481,8 @@
         </p:nvSpPr>
         <p:spPr>
           <a:xfrm>
-            <a:off x="9957816" y="5115261"/>
-            <a:ext cx="566928" cy="215153"/>
+            <a:off x="9957816" y="5250808"/>
+            <a:ext cx="566928" cy="224835"/>
           </a:xfrm>
           <a:prstGeom prst="rect">
             <a:avLst/>
@@ -22520,8 +22520,8 @@
         </p:nvSpPr>
         <p:spPr>
           <a:xfrm>
-            <a:off x="10524744" y="5115261"/>
-            <a:ext cx="859536" cy="215153"/>
+            <a:off x="10524744" y="5250808"/>
+            <a:ext cx="859536" cy="224835"/>
           </a:xfrm>
           <a:prstGeom prst="rect">
             <a:avLst/>
@@ -22559,8 +22559,8 @@
         </p:nvSpPr>
         <p:spPr>
           <a:xfrm>
-            <a:off x="6135624" y="5330414"/>
-            <a:ext cx="5394960" cy="215153"/>
+            <a:off x="6135624" y="5475642"/>
+            <a:ext cx="5394960" cy="224835"/>
           </a:xfrm>
           <a:prstGeom prst="rect">
             <a:avLst/>
@@ -22579,8 +22579,8 @@
         </p:nvSpPr>
         <p:spPr>
           <a:xfrm>
-            <a:off x="6208776" y="5330414"/>
-            <a:ext cx="2011680" cy="215153"/>
+            <a:off x="6208776" y="5475642"/>
+            <a:ext cx="2011680" cy="224835"/>
           </a:xfrm>
           <a:prstGeom prst="rect">
             <a:avLst/>
@@ -22618,7 +22618,7 @@
         </p:nvSpPr>
         <p:spPr>
           <a:xfrm>
-            <a:off x="8383021" y="5424275"/>
+            <a:off x="8383021" y="5574344"/>
             <a:ext cx="615963" cy="27432"/>
           </a:xfrm>
           <a:prstGeom prst="rect">
@@ -22638,7 +22638,7 @@
         </p:nvSpPr>
         <p:spPr>
           <a:xfrm>
-            <a:off x="8930404" y="5369411"/>
+            <a:off x="8930404" y="5519480"/>
             <a:ext cx="137160" cy="137160"/>
           </a:xfrm>
           <a:prstGeom prst="ellipse">
@@ -22658,7 +22658,7 @@
         </p:nvSpPr>
         <p:spPr>
           <a:xfrm>
-            <a:off x="8314441" y="5369411"/>
+            <a:off x="8314441" y="5519480"/>
             <a:ext cx="137160" cy="137160"/>
           </a:xfrm>
           <a:prstGeom prst="ellipse">
@@ -22678,8 +22678,8 @@
         </p:nvSpPr>
         <p:spPr>
           <a:xfrm>
-            <a:off x="9390888" y="5330414"/>
-            <a:ext cx="566928" cy="215153"/>
+            <a:off x="9390888" y="5475642"/>
+            <a:ext cx="566928" cy="224835"/>
           </a:xfrm>
           <a:prstGeom prst="rect">
             <a:avLst/>
@@ -22717,8 +22717,8 @@
         </p:nvSpPr>
         <p:spPr>
           <a:xfrm>
-            <a:off x="9957816" y="5330414"/>
-            <a:ext cx="566928" cy="215153"/>
+            <a:off x="9957816" y="5475642"/>
+            <a:ext cx="566928" cy="224835"/>
           </a:xfrm>
           <a:prstGeom prst="rect">
             <a:avLst/>
@@ -22756,8 +22756,8 @@
         </p:nvSpPr>
         <p:spPr>
           <a:xfrm>
-            <a:off x="10524744" y="5330414"/>
-            <a:ext cx="859536" cy="215153"/>
+            <a:off x="10524744" y="5475642"/>
+            <a:ext cx="859536" cy="224835"/>
           </a:xfrm>
           <a:prstGeom prst="rect">
             <a:avLst/>
@@ -22795,8 +22795,8 @@
         </p:nvSpPr>
         <p:spPr>
           <a:xfrm>
-            <a:off x="457200" y="5961888"/>
-            <a:ext cx="11274552" cy="548640"/>
+            <a:off x="457200" y="6126480"/>
+            <a:ext cx="11274552" cy="615696"/>
           </a:xfrm>
           <a:prstGeom prst="rect">
             <a:avLst/>
@@ -22815,8 +22815,8 @@
         </p:nvSpPr>
         <p:spPr>
           <a:xfrm>
-            <a:off x="658368" y="5980176"/>
-            <a:ext cx="10927080" cy="512064"/>
+            <a:off x="658368" y="6144768"/>
+            <a:ext cx="10927080" cy="579120"/>
           </a:xfrm>
           <a:prstGeom prst="rect">
             <a:avLst/>
@@ -22840,7 +22840,7 @@
                 <a:ea typeface="Inter" pitchFamily="34" charset="-122"/>
                 <a:cs typeface="Inter" pitchFamily="34" charset="-120"/>
               </a:rPr>
-              <a:t>Internal labor margin runs 2.7 pts below customer pay across the group; 18 of 33 stores are at or better than that gap. Widest: AUDI RENO (−20.0 pts), LR LV (−13.9 pts) and LR HENDERSON (−12.2 pts).</a:t>
+              <a:t>Internal labor margin runs 2.7 pts below customer pay across the group; 18 of 33 stores are at or better than that gap. Widest: Audi Reno (−20.0 pts), LR LV (−13.9 pts) and LR Henderson (−12.2 pts).</a:t>
             </a:r>
             <a:endParaRPr lang="en-US" sz="1600" dirty="0"/>
           </a:p>
@@ -22985,7 +22985,7 @@
         <p:spPr>
           <a:xfrm>
             <a:off x="457200" y="1207008"/>
-            <a:ext cx="11274552" cy="4645152"/>
+            <a:ext cx="11274552" cy="4782312"/>
           </a:xfrm>
           <a:prstGeom prst="rect">
             <a:avLst/>
@@ -23416,7 +23416,7 @@
         <p:spPr>
           <a:xfrm>
             <a:off x="658368" y="2103120"/>
-            <a:ext cx="2011680" cy="215153"/>
+            <a:ext cx="2011680" cy="224835"/>
           </a:xfrm>
           <a:prstGeom prst="rect">
             <a:avLst/>
@@ -23454,7 +23454,7 @@
         </p:nvSpPr>
         <p:spPr>
           <a:xfrm>
-            <a:off x="3443130" y="2196980"/>
+            <a:off x="3443130" y="2201821"/>
             <a:ext cx="176044" cy="27432"/>
           </a:xfrm>
           <a:prstGeom prst="rect">
@@ -23474,7 +23474,7 @@
         </p:nvSpPr>
         <p:spPr>
           <a:xfrm>
-            <a:off x="3374550" y="2142116"/>
+            <a:off x="3374550" y="2146957"/>
             <a:ext cx="137160" cy="137160"/>
           </a:xfrm>
           <a:prstGeom prst="ellipse">
@@ -23494,7 +23494,7 @@
         </p:nvSpPr>
         <p:spPr>
           <a:xfrm>
-            <a:off x="3550594" y="2142116"/>
+            <a:off x="3550594" y="2146957"/>
             <a:ext cx="137160" cy="137160"/>
           </a:xfrm>
           <a:prstGeom prst="ellipse">
@@ -23515,7 +23515,7 @@
         <p:spPr>
           <a:xfrm>
             <a:off x="3840480" y="2103120"/>
-            <a:ext cx="566928" cy="215153"/>
+            <a:ext cx="566928" cy="224835"/>
           </a:xfrm>
           <a:prstGeom prst="rect">
             <a:avLst/>
@@ -23554,7 +23554,7 @@
         <p:spPr>
           <a:xfrm>
             <a:off x="4407408" y="2103120"/>
-            <a:ext cx="566928" cy="215153"/>
+            <a:ext cx="566928" cy="224835"/>
           </a:xfrm>
           <a:prstGeom prst="rect">
             <a:avLst/>
@@ -23593,7 +23593,7 @@
         <p:spPr>
           <a:xfrm>
             <a:off x="4974336" y="2103120"/>
-            <a:ext cx="859536" cy="215153"/>
+            <a:ext cx="859536" cy="224835"/>
           </a:xfrm>
           <a:prstGeom prst="rect">
             <a:avLst/>
@@ -23631,8 +23631,8 @@
         </p:nvSpPr>
         <p:spPr>
           <a:xfrm>
-            <a:off x="585216" y="2318273"/>
-            <a:ext cx="5394960" cy="215153"/>
+            <a:off x="585216" y="2327955"/>
+            <a:ext cx="5394960" cy="224835"/>
           </a:xfrm>
           <a:prstGeom prst="rect">
             <a:avLst/>
@@ -23651,8 +23651,8 @@
         </p:nvSpPr>
         <p:spPr>
           <a:xfrm>
-            <a:off x="658368" y="2318273"/>
-            <a:ext cx="2011680" cy="215153"/>
+            <a:off x="658368" y="2327955"/>
+            <a:ext cx="2011680" cy="224835"/>
           </a:xfrm>
           <a:prstGeom prst="rect">
             <a:avLst/>
@@ -23690,7 +23690,7 @@
         </p:nvSpPr>
         <p:spPr>
           <a:xfrm>
-            <a:off x="3246517" y="2412133"/>
+            <a:off x="3246517" y="2426656"/>
             <a:ext cx="82136" cy="27432"/>
           </a:xfrm>
           <a:prstGeom prst="rect">
@@ -23710,7 +23710,7 @@
         </p:nvSpPr>
         <p:spPr>
           <a:xfrm>
-            <a:off x="3177937" y="2357269"/>
+            <a:off x="3177937" y="2371792"/>
             <a:ext cx="137160" cy="137160"/>
           </a:xfrm>
           <a:prstGeom prst="ellipse">
@@ -23730,7 +23730,7 @@
         </p:nvSpPr>
         <p:spPr>
           <a:xfrm>
-            <a:off x="3260074" y="2357269"/>
+            <a:off x="3260074" y="2371792"/>
             <a:ext cx="137160" cy="137160"/>
           </a:xfrm>
           <a:prstGeom prst="ellipse">
@@ -23750,8 +23750,8 @@
         </p:nvSpPr>
         <p:spPr>
           <a:xfrm>
-            <a:off x="3840480" y="2318273"/>
-            <a:ext cx="566928" cy="215153"/>
+            <a:off x="3840480" y="2327955"/>
+            <a:ext cx="566928" cy="224835"/>
           </a:xfrm>
           <a:prstGeom prst="rect">
             <a:avLst/>
@@ -23789,8 +23789,8 @@
         </p:nvSpPr>
         <p:spPr>
           <a:xfrm>
-            <a:off x="4407408" y="2318273"/>
-            <a:ext cx="566928" cy="215153"/>
+            <a:off x="4407408" y="2327955"/>
+            <a:ext cx="566928" cy="224835"/>
           </a:xfrm>
           <a:prstGeom prst="rect">
             <a:avLst/>
@@ -23828,8 +23828,8 @@
         </p:nvSpPr>
         <p:spPr>
           <a:xfrm>
-            <a:off x="4974336" y="2318273"/>
-            <a:ext cx="859536" cy="215153"/>
+            <a:off x="4974336" y="2327955"/>
+            <a:ext cx="859536" cy="224835"/>
           </a:xfrm>
           <a:prstGeom prst="rect">
             <a:avLst/>
@@ -23867,8 +23867,8 @@
         </p:nvSpPr>
         <p:spPr>
           <a:xfrm>
-            <a:off x="658368" y="2533426"/>
-            <a:ext cx="2011680" cy="215153"/>
+            <a:off x="658368" y="2552790"/>
+            <a:ext cx="2011680" cy="224835"/>
           </a:xfrm>
           <a:prstGeom prst="rect">
             <a:avLst/>
@@ -23906,7 +23906,7 @@
         </p:nvSpPr>
         <p:spPr>
           <a:xfrm>
-            <a:off x="3510339" y="2627286"/>
+            <a:off x="3510339" y="2651491"/>
             <a:ext cx="44616" cy="27432"/>
           </a:xfrm>
           <a:prstGeom prst="rect">
@@ -23926,7 +23926,7 @@
         </p:nvSpPr>
         <p:spPr>
           <a:xfrm>
-            <a:off x="3441759" y="2572422"/>
+            <a:off x="3441759" y="2596627"/>
             <a:ext cx="137160" cy="137160"/>
           </a:xfrm>
           <a:prstGeom prst="ellipse">
@@ -23946,7 +23946,7 @@
         </p:nvSpPr>
         <p:spPr>
           <a:xfrm>
-            <a:off x="3486374" y="2572422"/>
+            <a:off x="3486374" y="2596627"/>
             <a:ext cx="137160" cy="137160"/>
           </a:xfrm>
           <a:prstGeom prst="ellipse">
@@ -23966,8 +23966,8 @@
         </p:nvSpPr>
         <p:spPr>
           <a:xfrm>
-            <a:off x="3840480" y="2533426"/>
-            <a:ext cx="566928" cy="215153"/>
+            <a:off x="3840480" y="2552790"/>
+            <a:ext cx="566928" cy="224835"/>
           </a:xfrm>
           <a:prstGeom prst="rect">
             <a:avLst/>
@@ -24005,8 +24005,8 @@
         </p:nvSpPr>
         <p:spPr>
           <a:xfrm>
-            <a:off x="4407408" y="2533426"/>
-            <a:ext cx="566928" cy="215153"/>
+            <a:off x="4407408" y="2552790"/>
+            <a:ext cx="566928" cy="224835"/>
           </a:xfrm>
           <a:prstGeom prst="rect">
             <a:avLst/>
@@ -24044,8 +24044,8 @@
         </p:nvSpPr>
         <p:spPr>
           <a:xfrm>
-            <a:off x="4974336" y="2533426"/>
-            <a:ext cx="859536" cy="215153"/>
+            <a:off x="4974336" y="2552790"/>
+            <a:ext cx="859536" cy="224835"/>
           </a:xfrm>
           <a:prstGeom prst="rect">
             <a:avLst/>
@@ -24083,8 +24083,8 @@
         </p:nvSpPr>
         <p:spPr>
           <a:xfrm>
-            <a:off x="585216" y="2748579"/>
-            <a:ext cx="5394960" cy="215153"/>
+            <a:off x="585216" y="2777624"/>
+            <a:ext cx="5394960" cy="224835"/>
           </a:xfrm>
           <a:prstGeom prst="rect">
             <a:avLst/>
@@ -24103,8 +24103,8 @@
         </p:nvSpPr>
         <p:spPr>
           <a:xfrm>
-            <a:off x="658368" y="2748579"/>
-            <a:ext cx="2011680" cy="215153"/>
+            <a:off x="658368" y="2777624"/>
+            <a:ext cx="2011680" cy="224835"/>
           </a:xfrm>
           <a:prstGeom prst="rect">
             <a:avLst/>
@@ -24142,7 +24142,7 @@
         </p:nvSpPr>
         <p:spPr>
           <a:xfrm>
-            <a:off x="3297045" y="2842439"/>
+            <a:off x="3297045" y="2876326"/>
             <a:ext cx="24021" cy="27432"/>
           </a:xfrm>
           <a:prstGeom prst="rect">
@@ -24162,7 +24162,7 @@
         </p:nvSpPr>
         <p:spPr>
           <a:xfrm>
-            <a:off x="3228465" y="2787575"/>
+            <a:off x="3228465" y="2821462"/>
             <a:ext cx="137160" cy="137160"/>
           </a:xfrm>
           <a:prstGeom prst="ellipse">
@@ -24182,7 +24182,7 @@
         </p:nvSpPr>
         <p:spPr>
           <a:xfrm>
-            <a:off x="3252486" y="2787575"/>
+            <a:off x="3252486" y="2821462"/>
             <a:ext cx="137160" cy="137160"/>
           </a:xfrm>
           <a:prstGeom prst="ellipse">
@@ -24202,8 +24202,8 @@
         </p:nvSpPr>
         <p:spPr>
           <a:xfrm>
-            <a:off x="3840480" y="2748579"/>
-            <a:ext cx="566928" cy="215153"/>
+            <a:off x="3840480" y="2777624"/>
+            <a:ext cx="566928" cy="224835"/>
           </a:xfrm>
           <a:prstGeom prst="rect">
             <a:avLst/>
@@ -24241,8 +24241,8 @@
         </p:nvSpPr>
         <p:spPr>
           <a:xfrm>
-            <a:off x="4407408" y="2748579"/>
-            <a:ext cx="566928" cy="215153"/>
+            <a:off x="4407408" y="2777624"/>
+            <a:ext cx="566928" cy="224835"/>
           </a:xfrm>
           <a:prstGeom prst="rect">
             <a:avLst/>
@@ -24280,8 +24280,8 @@
         </p:nvSpPr>
         <p:spPr>
           <a:xfrm>
-            <a:off x="4974336" y="2748579"/>
-            <a:ext cx="859536" cy="215153"/>
+            <a:off x="4974336" y="2777624"/>
+            <a:ext cx="859536" cy="224835"/>
           </a:xfrm>
           <a:prstGeom prst="rect">
             <a:avLst/>
@@ -24319,8 +24319,8 @@
         </p:nvSpPr>
         <p:spPr>
           <a:xfrm>
-            <a:off x="658368" y="2963732"/>
-            <a:ext cx="2011680" cy="215153"/>
+            <a:off x="658368" y="3002459"/>
+            <a:ext cx="2011680" cy="224835"/>
           </a:xfrm>
           <a:prstGeom prst="rect">
             <a:avLst/>
@@ -24358,7 +24358,7 @@
         </p:nvSpPr>
         <p:spPr>
           <a:xfrm>
-            <a:off x="3525560" y="3057592"/>
+            <a:off x="3525560" y="3101161"/>
             <a:ext cx="9144" cy="27432"/>
           </a:xfrm>
           <a:prstGeom prst="rect">
@@ -24378,7 +24378,7 @@
         </p:nvSpPr>
         <p:spPr>
           <a:xfrm>
-            <a:off x="3456980" y="3002728"/>
+            <a:off x="3456980" y="3046297"/>
             <a:ext cx="137160" cy="137160"/>
           </a:xfrm>
           <a:prstGeom prst="ellipse">
@@ -24398,7 +24398,7 @@
         </p:nvSpPr>
         <p:spPr>
           <a:xfrm>
-            <a:off x="3462180" y="3002728"/>
+            <a:off x="3462180" y="3046297"/>
             <a:ext cx="137160" cy="137160"/>
           </a:xfrm>
           <a:prstGeom prst="ellipse">
@@ -24418,8 +24418,8 @@
         </p:nvSpPr>
         <p:spPr>
           <a:xfrm>
-            <a:off x="3840480" y="2963732"/>
-            <a:ext cx="566928" cy="215153"/>
+            <a:off x="3840480" y="3002459"/>
+            <a:ext cx="566928" cy="224835"/>
           </a:xfrm>
           <a:prstGeom prst="rect">
             <a:avLst/>
@@ -24457,8 +24457,8 @@
         </p:nvSpPr>
         <p:spPr>
           <a:xfrm>
-            <a:off x="4407408" y="2963732"/>
-            <a:ext cx="566928" cy="215153"/>
+            <a:off x="4407408" y="3002459"/>
+            <a:ext cx="566928" cy="224835"/>
           </a:xfrm>
           <a:prstGeom prst="rect">
             <a:avLst/>
@@ -24496,8 +24496,8 @@
         </p:nvSpPr>
         <p:spPr>
           <a:xfrm>
-            <a:off x="4974336" y="2963732"/>
-            <a:ext cx="859536" cy="215153"/>
+            <a:off x="4974336" y="3002459"/>
+            <a:ext cx="859536" cy="224835"/>
           </a:xfrm>
           <a:prstGeom prst="rect">
             <a:avLst/>
@@ -24535,8 +24535,8 @@
         </p:nvSpPr>
         <p:spPr>
           <a:xfrm>
-            <a:off x="585216" y="3178885"/>
-            <a:ext cx="5394960" cy="215153"/>
+            <a:off x="585216" y="3227294"/>
+            <a:ext cx="5394960" cy="224835"/>
           </a:xfrm>
           <a:prstGeom prst="rect">
             <a:avLst/>
@@ -24555,8 +24555,8 @@
         </p:nvSpPr>
         <p:spPr>
           <a:xfrm>
-            <a:off x="658368" y="3178885"/>
-            <a:ext cx="2011680" cy="215153"/>
+            <a:off x="658368" y="3227294"/>
+            <a:ext cx="2011680" cy="224835"/>
           </a:xfrm>
           <a:prstGeom prst="rect">
             <a:avLst/>
@@ -24594,7 +24594,7 @@
         </p:nvSpPr>
         <p:spPr>
           <a:xfrm>
-            <a:off x="3293929" y="3272745"/>
+            <a:off x="3293929" y="3325996"/>
             <a:ext cx="38732" cy="27432"/>
           </a:xfrm>
           <a:prstGeom prst="rect">
@@ -24614,7 +24614,7 @@
         </p:nvSpPr>
         <p:spPr>
           <a:xfrm>
-            <a:off x="3264081" y="3217881"/>
+            <a:off x="3264081" y="3271132"/>
             <a:ext cx="137160" cy="137160"/>
           </a:xfrm>
           <a:prstGeom prst="ellipse">
@@ -24634,7 +24634,7 @@
         </p:nvSpPr>
         <p:spPr>
           <a:xfrm>
-            <a:off x="3225349" y="3217881"/>
+            <a:off x="3225349" y="3271132"/>
             <a:ext cx="137160" cy="137160"/>
           </a:xfrm>
           <a:prstGeom prst="ellipse">
@@ -24654,8 +24654,8 @@
         </p:nvSpPr>
         <p:spPr>
           <a:xfrm>
-            <a:off x="3840480" y="3178885"/>
-            <a:ext cx="566928" cy="215153"/>
+            <a:off x="3840480" y="3227294"/>
+            <a:ext cx="566928" cy="224835"/>
           </a:xfrm>
           <a:prstGeom prst="rect">
             <a:avLst/>
@@ -24693,8 +24693,8 @@
         </p:nvSpPr>
         <p:spPr>
           <a:xfrm>
-            <a:off x="4407408" y="3178885"/>
-            <a:ext cx="566928" cy="215153"/>
+            <a:off x="4407408" y="3227294"/>
+            <a:ext cx="566928" cy="224835"/>
           </a:xfrm>
           <a:prstGeom prst="rect">
             <a:avLst/>
@@ -24732,8 +24732,8 @@
         </p:nvSpPr>
         <p:spPr>
           <a:xfrm>
-            <a:off x="4974336" y="3178885"/>
-            <a:ext cx="859536" cy="215153"/>
+            <a:off x="4974336" y="3227294"/>
+            <a:ext cx="859536" cy="224835"/>
           </a:xfrm>
           <a:prstGeom prst="rect">
             <a:avLst/>
@@ -24771,8 +24771,8 @@
         </p:nvSpPr>
         <p:spPr>
           <a:xfrm>
-            <a:off x="658368" y="3394038"/>
-            <a:ext cx="2011680" cy="215153"/>
+            <a:off x="658368" y="3452129"/>
+            <a:ext cx="2011680" cy="224835"/>
           </a:xfrm>
           <a:prstGeom prst="rect">
             <a:avLst/>
@@ -24810,7 +24810,7 @@
         </p:nvSpPr>
         <p:spPr>
           <a:xfrm>
-            <a:off x="3326510" y="3487898"/>
+            <a:off x="3326510" y="3550830"/>
             <a:ext cx="88590" cy="27432"/>
           </a:xfrm>
           <a:prstGeom prst="rect">
@@ -24830,7 +24830,7 @@
         </p:nvSpPr>
         <p:spPr>
           <a:xfrm>
-            <a:off x="3346520" y="3433034"/>
+            <a:off x="3346520" y="3495966"/>
             <a:ext cx="137160" cy="137160"/>
           </a:xfrm>
           <a:prstGeom prst="ellipse">
@@ -24850,7 +24850,7 @@
         </p:nvSpPr>
         <p:spPr>
           <a:xfrm>
-            <a:off x="3257930" y="3433034"/>
+            <a:off x="3257930" y="3495966"/>
             <a:ext cx="137160" cy="137160"/>
           </a:xfrm>
           <a:prstGeom prst="ellipse">
@@ -24870,8 +24870,8 @@
         </p:nvSpPr>
         <p:spPr>
           <a:xfrm>
-            <a:off x="3840480" y="3394038"/>
-            <a:ext cx="566928" cy="215153"/>
+            <a:off x="3840480" y="3452129"/>
+            <a:ext cx="566928" cy="224835"/>
           </a:xfrm>
           <a:prstGeom prst="rect">
             <a:avLst/>
@@ -24909,8 +24909,8 @@
         </p:nvSpPr>
         <p:spPr>
           <a:xfrm>
-            <a:off x="4407408" y="3394038"/>
-            <a:ext cx="566928" cy="215153"/>
+            <a:off x="4407408" y="3452129"/>
+            <a:ext cx="566928" cy="224835"/>
           </a:xfrm>
           <a:prstGeom prst="rect">
             <a:avLst/>
@@ -24948,8 +24948,8 @@
         </p:nvSpPr>
         <p:spPr>
           <a:xfrm>
-            <a:off x="4974336" y="3394038"/>
-            <a:ext cx="859536" cy="215153"/>
+            <a:off x="4974336" y="3452129"/>
+            <a:ext cx="859536" cy="224835"/>
           </a:xfrm>
           <a:prstGeom prst="rect">
             <a:avLst/>
@@ -24987,8 +24987,8 @@
         </p:nvSpPr>
         <p:spPr>
           <a:xfrm>
-            <a:off x="585216" y="3609191"/>
-            <a:ext cx="5394960" cy="215153"/>
+            <a:off x="585216" y="3676964"/>
+            <a:ext cx="5394960" cy="224835"/>
           </a:xfrm>
           <a:prstGeom prst="rect">
             <a:avLst/>
@@ -25007,8 +25007,8 @@
         </p:nvSpPr>
         <p:spPr>
           <a:xfrm>
-            <a:off x="658368" y="3609191"/>
-            <a:ext cx="2011680" cy="215153"/>
+            <a:off x="658368" y="3676964"/>
+            <a:ext cx="2011680" cy="224835"/>
           </a:xfrm>
           <a:prstGeom prst="rect">
             <a:avLst/>
@@ -25046,7 +25046,7 @@
         </p:nvSpPr>
         <p:spPr>
           <a:xfrm>
-            <a:off x="3236489" y="3703051"/>
+            <a:off x="3236489" y="3775665"/>
             <a:ext cx="90065" cy="27432"/>
           </a:xfrm>
           <a:prstGeom prst="rect">
@@ -25066,7 +25066,7 @@
         </p:nvSpPr>
         <p:spPr>
           <a:xfrm>
-            <a:off x="3257974" y="3648187"/>
+            <a:off x="3257974" y="3720801"/>
             <a:ext cx="137160" cy="137160"/>
           </a:xfrm>
           <a:prstGeom prst="ellipse">
@@ -25086,7 +25086,7 @@
         </p:nvSpPr>
         <p:spPr>
           <a:xfrm>
-            <a:off x="3167909" y="3648187"/>
+            <a:off x="3167909" y="3720801"/>
             <a:ext cx="137160" cy="137160"/>
           </a:xfrm>
           <a:prstGeom prst="ellipse">
@@ -25106,8 +25106,8 @@
         </p:nvSpPr>
         <p:spPr>
           <a:xfrm>
-            <a:off x="3840480" y="3609191"/>
-            <a:ext cx="566928" cy="215153"/>
+            <a:off x="3840480" y="3676964"/>
+            <a:ext cx="566928" cy="224835"/>
           </a:xfrm>
           <a:prstGeom prst="rect">
             <a:avLst/>
@@ -25145,8 +25145,8 @@
         </p:nvSpPr>
         <p:spPr>
           <a:xfrm>
-            <a:off x="4407408" y="3609191"/>
-            <a:ext cx="566928" cy="215153"/>
+            <a:off x="4407408" y="3676964"/>
+            <a:ext cx="566928" cy="224835"/>
           </a:xfrm>
           <a:prstGeom prst="rect">
             <a:avLst/>
@@ -25184,8 +25184,8 @@
         </p:nvSpPr>
         <p:spPr>
           <a:xfrm>
-            <a:off x="4974336" y="3609191"/>
-            <a:ext cx="859536" cy="215153"/>
+            <a:off x="4974336" y="3676964"/>
+            <a:ext cx="859536" cy="224835"/>
           </a:xfrm>
           <a:prstGeom prst="rect">
             <a:avLst/>
@@ -25223,8 +25223,8 @@
         </p:nvSpPr>
         <p:spPr>
           <a:xfrm>
-            <a:off x="658368" y="3824344"/>
-            <a:ext cx="2011680" cy="215153"/>
+            <a:off x="658368" y="3901799"/>
+            <a:ext cx="2011680" cy="224835"/>
           </a:xfrm>
           <a:prstGeom prst="rect">
             <a:avLst/>
@@ -25262,7 +25262,7 @@
         </p:nvSpPr>
         <p:spPr>
           <a:xfrm>
-            <a:off x="3465703" y="3918204"/>
+            <a:off x="3465703" y="4000500"/>
             <a:ext cx="91132" cy="27432"/>
           </a:xfrm>
           <a:prstGeom prst="rect">
@@ -25282,7 +25282,7 @@
         </p:nvSpPr>
         <p:spPr>
           <a:xfrm>
-            <a:off x="3488255" y="3863340"/>
+            <a:off x="3488255" y="3945636"/>
             <a:ext cx="137160" cy="137160"/>
           </a:xfrm>
           <a:prstGeom prst="ellipse">
@@ -25302,7 +25302,7 @@
         </p:nvSpPr>
         <p:spPr>
           <a:xfrm>
-            <a:off x="3397123" y="3863340"/>
+            <a:off x="3397123" y="3945636"/>
             <a:ext cx="137160" cy="137160"/>
           </a:xfrm>
           <a:prstGeom prst="ellipse">
@@ -25322,8 +25322,8 @@
         </p:nvSpPr>
         <p:spPr>
           <a:xfrm>
-            <a:off x="3840480" y="3824344"/>
-            <a:ext cx="566928" cy="215153"/>
+            <a:off x="3840480" y="3901799"/>
+            <a:ext cx="566928" cy="224835"/>
           </a:xfrm>
           <a:prstGeom prst="rect">
             <a:avLst/>
@@ -25361,8 +25361,8 @@
         </p:nvSpPr>
         <p:spPr>
           <a:xfrm>
-            <a:off x="4407408" y="3824344"/>
-            <a:ext cx="566928" cy="215153"/>
+            <a:off x="4407408" y="3901799"/>
+            <a:ext cx="566928" cy="224835"/>
           </a:xfrm>
           <a:prstGeom prst="rect">
             <a:avLst/>
@@ -25400,8 +25400,8 @@
         </p:nvSpPr>
         <p:spPr>
           <a:xfrm>
-            <a:off x="4974336" y="3824344"/>
-            <a:ext cx="859536" cy="215153"/>
+            <a:off x="4974336" y="3901799"/>
+            <a:ext cx="859536" cy="224835"/>
           </a:xfrm>
           <a:prstGeom prst="rect">
             <a:avLst/>
@@ -25439,8 +25439,8 @@
         </p:nvSpPr>
         <p:spPr>
           <a:xfrm>
-            <a:off x="585216" y="4039496"/>
-            <a:ext cx="5394960" cy="215153"/>
+            <a:off x="585216" y="4126633"/>
+            <a:ext cx="5394960" cy="224835"/>
           </a:xfrm>
           <a:prstGeom prst="rect">
             <a:avLst/>
@@ -25459,8 +25459,8 @@
         </p:nvSpPr>
         <p:spPr>
           <a:xfrm>
-            <a:off x="658368" y="4039496"/>
-            <a:ext cx="2011680" cy="215153"/>
+            <a:off x="658368" y="4126633"/>
+            <a:ext cx="2011680" cy="224835"/>
           </a:xfrm>
           <a:prstGeom prst="rect">
             <a:avLst/>
@@ -25498,7 +25498,7 @@
         </p:nvSpPr>
         <p:spPr>
           <a:xfrm>
-            <a:off x="3309192" y="4133357"/>
+            <a:off x="3309192" y="4225335"/>
             <a:ext cx="137893" cy="27432"/>
           </a:xfrm>
           <a:prstGeom prst="rect">
@@ -25518,7 +25518,7 @@
         </p:nvSpPr>
         <p:spPr>
           <a:xfrm>
-            <a:off x="3378505" y="4078493"/>
+            <a:off x="3378505" y="4170471"/>
             <a:ext cx="137160" cy="137160"/>
           </a:xfrm>
           <a:prstGeom prst="ellipse">
@@ -25538,7 +25538,7 @@
         </p:nvSpPr>
         <p:spPr>
           <a:xfrm>
-            <a:off x="3240612" y="4078493"/>
+            <a:off x="3240612" y="4170471"/>
             <a:ext cx="137160" cy="137160"/>
           </a:xfrm>
           <a:prstGeom prst="ellipse">
@@ -25558,8 +25558,8 @@
         </p:nvSpPr>
         <p:spPr>
           <a:xfrm>
-            <a:off x="3840480" y="4039496"/>
-            <a:ext cx="566928" cy="215153"/>
+            <a:off x="3840480" y="4126633"/>
+            <a:ext cx="566928" cy="224835"/>
           </a:xfrm>
           <a:prstGeom prst="rect">
             <a:avLst/>
@@ -25597,8 +25597,8 @@
         </p:nvSpPr>
         <p:spPr>
           <a:xfrm>
-            <a:off x="4407408" y="4039496"/>
-            <a:ext cx="566928" cy="215153"/>
+            <a:off x="4407408" y="4126633"/>
+            <a:ext cx="566928" cy="224835"/>
           </a:xfrm>
           <a:prstGeom prst="rect">
             <a:avLst/>
@@ -25636,8 +25636,8 @@
         </p:nvSpPr>
         <p:spPr>
           <a:xfrm>
-            <a:off x="4974336" y="4039496"/>
-            <a:ext cx="859536" cy="215153"/>
+            <a:off x="4974336" y="4126633"/>
+            <a:ext cx="859536" cy="224835"/>
           </a:xfrm>
           <a:prstGeom prst="rect">
             <a:avLst/>
@@ -25675,8 +25675,8 @@
         </p:nvSpPr>
         <p:spPr>
           <a:xfrm>
-            <a:off x="658368" y="4254649"/>
-            <a:ext cx="2011680" cy="215153"/>
+            <a:off x="658368" y="4351468"/>
+            <a:ext cx="2011680" cy="224835"/>
           </a:xfrm>
           <a:prstGeom prst="rect">
             <a:avLst/>
@@ -25714,7 +25714,7 @@
         </p:nvSpPr>
         <p:spPr>
           <a:xfrm>
-            <a:off x="3302099" y="4348510"/>
+            <a:off x="3302099" y="4450170"/>
             <a:ext cx="138887" cy="27432"/>
           </a:xfrm>
           <a:prstGeom prst="rect">
@@ -25734,7 +25734,7 @@
         </p:nvSpPr>
         <p:spPr>
           <a:xfrm>
-            <a:off x="3372406" y="4293646"/>
+            <a:off x="3372406" y="4395306"/>
             <a:ext cx="137160" cy="137160"/>
           </a:xfrm>
           <a:prstGeom prst="ellipse">
@@ -25754,7 +25754,7 @@
         </p:nvSpPr>
         <p:spPr>
           <a:xfrm>
-            <a:off x="3233519" y="4293646"/>
+            <a:off x="3233519" y="4395306"/>
             <a:ext cx="137160" cy="137160"/>
           </a:xfrm>
           <a:prstGeom prst="ellipse">
@@ -25774,8 +25774,8 @@
         </p:nvSpPr>
         <p:spPr>
           <a:xfrm>
-            <a:off x="3840480" y="4254649"/>
-            <a:ext cx="566928" cy="215153"/>
+            <a:off x="3840480" y="4351468"/>
+            <a:ext cx="566928" cy="224835"/>
           </a:xfrm>
           <a:prstGeom prst="rect">
             <a:avLst/>
@@ -25813,8 +25813,8 @@
         </p:nvSpPr>
         <p:spPr>
           <a:xfrm>
-            <a:off x="4407408" y="4254649"/>
-            <a:ext cx="566928" cy="215153"/>
+            <a:off x="4407408" y="4351468"/>
+            <a:ext cx="566928" cy="224835"/>
           </a:xfrm>
           <a:prstGeom prst="rect">
             <a:avLst/>
@@ -25852,8 +25852,8 @@
         </p:nvSpPr>
         <p:spPr>
           <a:xfrm>
-            <a:off x="4974336" y="4254649"/>
-            <a:ext cx="859536" cy="215153"/>
+            <a:off x="4974336" y="4351468"/>
+            <a:ext cx="859536" cy="224835"/>
           </a:xfrm>
           <a:prstGeom prst="rect">
             <a:avLst/>
@@ -25891,8 +25891,8 @@
         </p:nvSpPr>
         <p:spPr>
           <a:xfrm>
-            <a:off x="585216" y="4469802"/>
-            <a:ext cx="5394960" cy="215153"/>
+            <a:off x="585216" y="4576303"/>
+            <a:ext cx="5394960" cy="224835"/>
           </a:xfrm>
           <a:prstGeom prst="rect">
             <a:avLst/>
@@ -25911,8 +25911,8 @@
         </p:nvSpPr>
         <p:spPr>
           <a:xfrm>
-            <a:off x="658368" y="4469802"/>
-            <a:ext cx="2011680" cy="215153"/>
+            <a:off x="658368" y="4576303"/>
+            <a:ext cx="2011680" cy="224835"/>
           </a:xfrm>
           <a:prstGeom prst="rect">
             <a:avLst/>
@@ -25950,7 +25950,7 @@
         </p:nvSpPr>
         <p:spPr>
           <a:xfrm>
-            <a:off x="3317186" y="4563663"/>
+            <a:off x="3317186" y="4675004"/>
             <a:ext cx="185749" cy="27432"/>
           </a:xfrm>
           <a:prstGeom prst="rect">
@@ -25970,7 +25970,7 @@
         </p:nvSpPr>
         <p:spPr>
           <a:xfrm>
-            <a:off x="3434355" y="4508799"/>
+            <a:off x="3434355" y="4620140"/>
             <a:ext cx="137160" cy="137160"/>
           </a:xfrm>
           <a:prstGeom prst="ellipse">
@@ -25990,7 +25990,7 @@
         </p:nvSpPr>
         <p:spPr>
           <a:xfrm>
-            <a:off x="3248606" y="4508799"/>
+            <a:off x="3248606" y="4620140"/>
             <a:ext cx="137160" cy="137160"/>
           </a:xfrm>
           <a:prstGeom prst="ellipse">
@@ -26010,8 +26010,8 @@
         </p:nvSpPr>
         <p:spPr>
           <a:xfrm>
-            <a:off x="3840480" y="4469802"/>
-            <a:ext cx="566928" cy="215153"/>
+            <a:off x="3840480" y="4576303"/>
+            <a:ext cx="566928" cy="224835"/>
           </a:xfrm>
           <a:prstGeom prst="rect">
             <a:avLst/>
@@ -26049,8 +26049,8 @@
         </p:nvSpPr>
         <p:spPr>
           <a:xfrm>
-            <a:off x="4407408" y="4469802"/>
-            <a:ext cx="566928" cy="215153"/>
+            <a:off x="4407408" y="4576303"/>
+            <a:ext cx="566928" cy="224835"/>
           </a:xfrm>
           <a:prstGeom prst="rect">
             <a:avLst/>
@@ -26088,8 +26088,8 @@
         </p:nvSpPr>
         <p:spPr>
           <a:xfrm>
-            <a:off x="4974336" y="4469802"/>
-            <a:ext cx="859536" cy="215153"/>
+            <a:off x="4974336" y="4576303"/>
+            <a:ext cx="859536" cy="224835"/>
           </a:xfrm>
           <a:prstGeom prst="rect">
             <a:avLst/>
@@ -26127,8 +26127,8 @@
         </p:nvSpPr>
         <p:spPr>
           <a:xfrm>
-            <a:off x="658368" y="4684955"/>
-            <a:ext cx="2011680" cy="215153"/>
+            <a:off x="658368" y="4801138"/>
+            <a:ext cx="2011680" cy="224835"/>
           </a:xfrm>
           <a:prstGeom prst="rect">
             <a:avLst/>
@@ -26166,7 +26166,7 @@
         </p:nvSpPr>
         <p:spPr>
           <a:xfrm>
-            <a:off x="3123543" y="4778816"/>
+            <a:off x="3123543" y="4899839"/>
             <a:ext cx="203752" cy="27432"/>
           </a:xfrm>
           <a:prstGeom prst="rect">
@@ -26186,7 +26186,7 @@
         </p:nvSpPr>
         <p:spPr>
           <a:xfrm>
-            <a:off x="3258715" y="4723952"/>
+            <a:off x="3258715" y="4844975"/>
             <a:ext cx="137160" cy="137160"/>
           </a:xfrm>
           <a:prstGeom prst="ellipse">
@@ -26206,7 +26206,7 @@
         </p:nvSpPr>
         <p:spPr>
           <a:xfrm>
-            <a:off x="3054963" y="4723952"/>
+            <a:off x="3054963" y="4844975"/>
             <a:ext cx="137160" cy="137160"/>
           </a:xfrm>
           <a:prstGeom prst="ellipse">
@@ -26226,8 +26226,8 @@
         </p:nvSpPr>
         <p:spPr>
           <a:xfrm>
-            <a:off x="3840480" y="4684955"/>
-            <a:ext cx="566928" cy="215153"/>
+            <a:off x="3840480" y="4801138"/>
+            <a:ext cx="566928" cy="224835"/>
           </a:xfrm>
           <a:prstGeom prst="rect">
             <a:avLst/>
@@ -26265,8 +26265,8 @@
         </p:nvSpPr>
         <p:spPr>
           <a:xfrm>
-            <a:off x="4407408" y="4684955"/>
-            <a:ext cx="566928" cy="215153"/>
+            <a:off x="4407408" y="4801138"/>
+            <a:ext cx="566928" cy="224835"/>
           </a:xfrm>
           <a:prstGeom prst="rect">
             <a:avLst/>
@@ -26304,8 +26304,8 @@
         </p:nvSpPr>
         <p:spPr>
           <a:xfrm>
-            <a:off x="4974336" y="4684955"/>
-            <a:ext cx="859536" cy="215153"/>
+            <a:off x="4974336" y="4801138"/>
+            <a:ext cx="859536" cy="224835"/>
           </a:xfrm>
           <a:prstGeom prst="rect">
             <a:avLst/>
@@ -26343,8 +26343,8 @@
         </p:nvSpPr>
         <p:spPr>
           <a:xfrm>
-            <a:off x="585216" y="4900108"/>
-            <a:ext cx="5394960" cy="215153"/>
+            <a:off x="585216" y="5025973"/>
+            <a:ext cx="5394960" cy="224835"/>
           </a:xfrm>
           <a:prstGeom prst="rect">
             <a:avLst/>
@@ -26363,8 +26363,8 @@
         </p:nvSpPr>
         <p:spPr>
           <a:xfrm>
-            <a:off x="658368" y="4900108"/>
-            <a:ext cx="2011680" cy="215153"/>
+            <a:off x="658368" y="5025973"/>
+            <a:ext cx="2011680" cy="224835"/>
           </a:xfrm>
           <a:prstGeom prst="rect">
             <a:avLst/>
@@ -26402,7 +26402,7 @@
         </p:nvSpPr>
         <p:spPr>
           <a:xfrm>
-            <a:off x="3323749" y="4993969"/>
+            <a:off x="3323749" y="5124674"/>
             <a:ext cx="208184" cy="27432"/>
           </a:xfrm>
           <a:prstGeom prst="rect">
@@ -26422,7 +26422,7 @@
         </p:nvSpPr>
         <p:spPr>
           <a:xfrm>
-            <a:off x="3463352" y="4939105"/>
+            <a:off x="3463352" y="5069810"/>
             <a:ext cx="137160" cy="137160"/>
           </a:xfrm>
           <a:prstGeom prst="ellipse">
@@ -26442,7 +26442,7 @@
         </p:nvSpPr>
         <p:spPr>
           <a:xfrm>
-            <a:off x="3255169" y="4939105"/>
+            <a:off x="3255169" y="5069810"/>
             <a:ext cx="137160" cy="137160"/>
           </a:xfrm>
           <a:prstGeom prst="ellipse">
@@ -26462,8 +26462,8 @@
         </p:nvSpPr>
         <p:spPr>
           <a:xfrm>
-            <a:off x="3840480" y="4900108"/>
-            <a:ext cx="566928" cy="215153"/>
+            <a:off x="3840480" y="5025973"/>
+            <a:ext cx="566928" cy="224835"/>
           </a:xfrm>
           <a:prstGeom prst="rect">
             <a:avLst/>
@@ -26501,8 +26501,8 @@
         </p:nvSpPr>
         <p:spPr>
           <a:xfrm>
-            <a:off x="4407408" y="4900108"/>
-            <a:ext cx="566928" cy="215153"/>
+            <a:off x="4407408" y="5025973"/>
+            <a:ext cx="566928" cy="224835"/>
           </a:xfrm>
           <a:prstGeom prst="rect">
             <a:avLst/>
@@ -26540,8 +26540,8 @@
         </p:nvSpPr>
         <p:spPr>
           <a:xfrm>
-            <a:off x="4974336" y="4900108"/>
-            <a:ext cx="859536" cy="215153"/>
+            <a:off x="4974336" y="5025973"/>
+            <a:ext cx="859536" cy="224835"/>
           </a:xfrm>
           <a:prstGeom prst="rect">
             <a:avLst/>
@@ -26579,8 +26579,8 @@
         </p:nvSpPr>
         <p:spPr>
           <a:xfrm>
-            <a:off x="658368" y="5115261"/>
-            <a:ext cx="2011680" cy="215153"/>
+            <a:off x="658368" y="5250808"/>
+            <a:ext cx="2011680" cy="224835"/>
           </a:xfrm>
           <a:prstGeom prst="rect">
             <a:avLst/>
@@ -26618,7 +26618,7 @@
         </p:nvSpPr>
         <p:spPr>
           <a:xfrm>
-            <a:off x="3196577" y="5209122"/>
+            <a:off x="3196577" y="5349509"/>
             <a:ext cx="215767" cy="27432"/>
           </a:xfrm>
           <a:prstGeom prst="rect">
@@ -26638,7 +26638,7 @@
         </p:nvSpPr>
         <p:spPr>
           <a:xfrm>
-            <a:off x="3343763" y="5154258"/>
+            <a:off x="3343763" y="5294645"/>
             <a:ext cx="137160" cy="137160"/>
           </a:xfrm>
           <a:prstGeom prst="ellipse">
@@ -26658,7 +26658,7 @@
         </p:nvSpPr>
         <p:spPr>
           <a:xfrm>
-            <a:off x="3127997" y="5154258"/>
+            <a:off x="3127997" y="5294645"/>
             <a:ext cx="137160" cy="137160"/>
           </a:xfrm>
           <a:prstGeom prst="ellipse">
@@ -26678,8 +26678,8 @@
         </p:nvSpPr>
         <p:spPr>
           <a:xfrm>
-            <a:off x="3840480" y="5115261"/>
-            <a:ext cx="566928" cy="215153"/>
+            <a:off x="3840480" y="5250808"/>
+            <a:ext cx="566928" cy="224835"/>
           </a:xfrm>
           <a:prstGeom prst="rect">
             <a:avLst/>
@@ -26717,8 +26717,8 @@
         </p:nvSpPr>
         <p:spPr>
           <a:xfrm>
-            <a:off x="4407408" y="5115261"/>
-            <a:ext cx="566928" cy="215153"/>
+            <a:off x="4407408" y="5250808"/>
+            <a:ext cx="566928" cy="224835"/>
           </a:xfrm>
           <a:prstGeom prst="rect">
             <a:avLst/>
@@ -26756,8 +26756,8 @@
         </p:nvSpPr>
         <p:spPr>
           <a:xfrm>
-            <a:off x="4974336" y="5115261"/>
-            <a:ext cx="859536" cy="215153"/>
+            <a:off x="4974336" y="5250808"/>
+            <a:ext cx="859536" cy="224835"/>
           </a:xfrm>
           <a:prstGeom prst="rect">
             <a:avLst/>
@@ -26795,8 +26795,8 @@
         </p:nvSpPr>
         <p:spPr>
           <a:xfrm>
-            <a:off x="585216" y="5330414"/>
-            <a:ext cx="5394960" cy="215153"/>
+            <a:off x="585216" y="5475642"/>
+            <a:ext cx="5394960" cy="224835"/>
           </a:xfrm>
           <a:prstGeom prst="rect">
             <a:avLst/>
@@ -26815,8 +26815,8 @@
         </p:nvSpPr>
         <p:spPr>
           <a:xfrm>
-            <a:off x="658368" y="5330414"/>
-            <a:ext cx="2011680" cy="215153"/>
+            <a:off x="658368" y="5475642"/>
+            <a:ext cx="2011680" cy="224835"/>
           </a:xfrm>
           <a:prstGeom prst="rect">
             <a:avLst/>
@@ -26854,7 +26854,7 @@
         </p:nvSpPr>
         <p:spPr>
           <a:xfrm>
-            <a:off x="3094741" y="5424275"/>
+            <a:off x="3094741" y="5574344"/>
             <a:ext cx="228552" cy="27432"/>
           </a:xfrm>
           <a:prstGeom prst="rect">
@@ -26874,7 +26874,7 @@
         </p:nvSpPr>
         <p:spPr>
           <a:xfrm>
-            <a:off x="3254713" y="5369411"/>
+            <a:off x="3254713" y="5519480"/>
             <a:ext cx="137160" cy="137160"/>
           </a:xfrm>
           <a:prstGeom prst="ellipse">
@@ -26894,7 +26894,7 @@
         </p:nvSpPr>
         <p:spPr>
           <a:xfrm>
-            <a:off x="3026161" y="5369411"/>
+            <a:off x="3026161" y="5519480"/>
             <a:ext cx="137160" cy="137160"/>
           </a:xfrm>
           <a:prstGeom prst="ellipse">
@@ -26914,8 +26914,8 @@
         </p:nvSpPr>
         <p:spPr>
           <a:xfrm>
-            <a:off x="3840480" y="5330414"/>
-            <a:ext cx="566928" cy="215153"/>
+            <a:off x="3840480" y="5475642"/>
+            <a:ext cx="566928" cy="224835"/>
           </a:xfrm>
           <a:prstGeom prst="rect">
             <a:avLst/>
@@ -26953,8 +26953,8 @@
         </p:nvSpPr>
         <p:spPr>
           <a:xfrm>
-            <a:off x="4407408" y="5330414"/>
-            <a:ext cx="566928" cy="215153"/>
+            <a:off x="4407408" y="5475642"/>
+            <a:ext cx="566928" cy="224835"/>
           </a:xfrm>
           <a:prstGeom prst="rect">
             <a:avLst/>
@@ -26992,8 +26992,8 @@
         </p:nvSpPr>
         <p:spPr>
           <a:xfrm>
-            <a:off x="4974336" y="5330414"/>
-            <a:ext cx="859536" cy="215153"/>
+            <a:off x="4974336" y="5475642"/>
+            <a:ext cx="859536" cy="224835"/>
           </a:xfrm>
           <a:prstGeom prst="rect">
             <a:avLst/>
@@ -27031,8 +27031,8 @@
         </p:nvSpPr>
         <p:spPr>
           <a:xfrm>
-            <a:off x="658368" y="5545567"/>
-            <a:ext cx="2011680" cy="215153"/>
+            <a:off x="658368" y="5700477"/>
+            <a:ext cx="2011680" cy="224835"/>
           </a:xfrm>
           <a:prstGeom prst="rect">
             <a:avLst/>
@@ -27070,7 +27070,7 @@
         </p:nvSpPr>
         <p:spPr>
           <a:xfrm>
-            <a:off x="3425612" y="5639428"/>
+            <a:off x="3425612" y="5799179"/>
             <a:ext cx="259829" cy="27432"/>
           </a:xfrm>
           <a:prstGeom prst="rect">
@@ -27090,7 +27090,7 @@
         </p:nvSpPr>
         <p:spPr>
           <a:xfrm>
-            <a:off x="3616861" y="5584564"/>
+            <a:off x="3616861" y="5744315"/>
             <a:ext cx="137160" cy="137160"/>
           </a:xfrm>
           <a:prstGeom prst="ellipse">
@@ -27110,7 +27110,7 @@
         </p:nvSpPr>
         <p:spPr>
           <a:xfrm>
-            <a:off x="3357032" y="5584564"/>
+            <a:off x="3357032" y="5744315"/>
             <a:ext cx="137160" cy="137160"/>
           </a:xfrm>
           <a:prstGeom prst="ellipse">
@@ -27130,8 +27130,8 @@
         </p:nvSpPr>
         <p:spPr>
           <a:xfrm>
-            <a:off x="3840480" y="5545567"/>
-            <a:ext cx="566928" cy="215153"/>
+            <a:off x="3840480" y="5700477"/>
+            <a:ext cx="566928" cy="224835"/>
           </a:xfrm>
           <a:prstGeom prst="rect">
             <a:avLst/>
@@ -27169,8 +27169,8 @@
         </p:nvSpPr>
         <p:spPr>
           <a:xfrm>
-            <a:off x="4407408" y="5545567"/>
-            <a:ext cx="566928" cy="215153"/>
+            <a:off x="4407408" y="5700477"/>
+            <a:ext cx="566928" cy="224835"/>
           </a:xfrm>
           <a:prstGeom prst="rect">
             <a:avLst/>
@@ -27208,8 +27208,8 @@
         </p:nvSpPr>
         <p:spPr>
           <a:xfrm>
-            <a:off x="4974336" y="5545567"/>
-            <a:ext cx="859536" cy="215153"/>
+            <a:off x="4974336" y="5700477"/>
+            <a:ext cx="859536" cy="224835"/>
           </a:xfrm>
           <a:prstGeom prst="rect">
             <a:avLst/>
@@ -27248,7 +27248,7 @@
         <p:spPr>
           <a:xfrm>
             <a:off x="6208776" y="2103120"/>
-            <a:ext cx="2011680" cy="215153"/>
+            <a:ext cx="2011680" cy="224835"/>
           </a:xfrm>
           <a:prstGeom prst="rect">
             <a:avLst/>
@@ -27286,7 +27286,7 @@
         </p:nvSpPr>
         <p:spPr>
           <a:xfrm>
-            <a:off x="8487596" y="2196980"/>
+            <a:off x="8487596" y="2201821"/>
             <a:ext cx="269238" cy="27432"/>
           </a:xfrm>
           <a:prstGeom prst="rect">
@@ -27306,7 +27306,7 @@
         </p:nvSpPr>
         <p:spPr>
           <a:xfrm>
-            <a:off x="8688254" y="2142116"/>
+            <a:off x="8688254" y="2146957"/>
             <a:ext cx="137160" cy="137160"/>
           </a:xfrm>
           <a:prstGeom prst="ellipse">
@@ -27326,7 +27326,7 @@
         </p:nvSpPr>
         <p:spPr>
           <a:xfrm>
-            <a:off x="8419016" y="2142116"/>
+            <a:off x="8419016" y="2146957"/>
             <a:ext cx="137160" cy="137160"/>
           </a:xfrm>
           <a:prstGeom prst="ellipse">
@@ -27347,7 +27347,7 @@
         <p:spPr>
           <a:xfrm>
             <a:off x="9390888" y="2103120"/>
-            <a:ext cx="566928" cy="215153"/>
+            <a:ext cx="566928" cy="224835"/>
           </a:xfrm>
           <a:prstGeom prst="rect">
             <a:avLst/>
@@ -27386,7 +27386,7 @@
         <p:spPr>
           <a:xfrm>
             <a:off x="9957816" y="2103120"/>
-            <a:ext cx="566928" cy="215153"/>
+            <a:ext cx="566928" cy="224835"/>
           </a:xfrm>
           <a:prstGeom prst="rect">
             <a:avLst/>
@@ -27425,7 +27425,7 @@
         <p:spPr>
           <a:xfrm>
             <a:off x="10524744" y="2103120"/>
-            <a:ext cx="859536" cy="215153"/>
+            <a:ext cx="859536" cy="224835"/>
           </a:xfrm>
           <a:prstGeom prst="rect">
             <a:avLst/>
@@ -27463,8 +27463,8 @@
         </p:nvSpPr>
         <p:spPr>
           <a:xfrm>
-            <a:off x="6135624" y="2318273"/>
-            <a:ext cx="5394960" cy="215153"/>
+            <a:off x="6135624" y="2327955"/>
+            <a:ext cx="5394960" cy="224835"/>
           </a:xfrm>
           <a:prstGeom prst="rect">
             <a:avLst/>
@@ -27483,8 +27483,8 @@
         </p:nvSpPr>
         <p:spPr>
           <a:xfrm>
-            <a:off x="6208776" y="2318273"/>
-            <a:ext cx="2011680" cy="215153"/>
+            <a:off x="6208776" y="2327955"/>
+            <a:ext cx="2011680" cy="224835"/>
           </a:xfrm>
           <a:prstGeom prst="rect">
             <a:avLst/>
@@ -27522,7 +27522,7 @@
         </p:nvSpPr>
         <p:spPr>
           <a:xfrm>
-            <a:off x="8864741" y="2412133"/>
+            <a:off x="8864741" y="2426656"/>
             <a:ext cx="281040" cy="27432"/>
           </a:xfrm>
           <a:prstGeom prst="rect">
@@ -27542,7 +27542,7 @@
         </p:nvSpPr>
         <p:spPr>
           <a:xfrm>
-            <a:off x="9077201" y="2357269"/>
+            <a:off x="9077201" y="2371792"/>
             <a:ext cx="137160" cy="137160"/>
           </a:xfrm>
           <a:prstGeom prst="ellipse">
@@ -27562,7 +27562,7 @@
         </p:nvSpPr>
         <p:spPr>
           <a:xfrm>
-            <a:off x="8796161" y="2357269"/>
+            <a:off x="8796161" y="2371792"/>
             <a:ext cx="137160" cy="137160"/>
           </a:xfrm>
           <a:prstGeom prst="ellipse">
@@ -27582,8 +27582,8 @@
         </p:nvSpPr>
         <p:spPr>
           <a:xfrm>
-            <a:off x="9390888" y="2318273"/>
-            <a:ext cx="566928" cy="215153"/>
+            <a:off x="9390888" y="2327955"/>
+            <a:ext cx="566928" cy="224835"/>
           </a:xfrm>
           <a:prstGeom prst="rect">
             <a:avLst/>
@@ -27621,8 +27621,8 @@
         </p:nvSpPr>
         <p:spPr>
           <a:xfrm>
-            <a:off x="9957816" y="2318273"/>
-            <a:ext cx="566928" cy="215153"/>
+            <a:off x="9957816" y="2327955"/>
+            <a:ext cx="566928" cy="224835"/>
           </a:xfrm>
           <a:prstGeom prst="rect">
             <a:avLst/>
@@ -27660,8 +27660,8 @@
         </p:nvSpPr>
         <p:spPr>
           <a:xfrm>
-            <a:off x="10524744" y="2318273"/>
-            <a:ext cx="859536" cy="215153"/>
+            <a:off x="10524744" y="2327955"/>
+            <a:ext cx="859536" cy="224835"/>
           </a:xfrm>
           <a:prstGeom prst="rect">
             <a:avLst/>
@@ -27699,8 +27699,8 @@
         </p:nvSpPr>
         <p:spPr>
           <a:xfrm>
-            <a:off x="6208776" y="2533426"/>
-            <a:ext cx="2011680" cy="215153"/>
+            <a:off x="6208776" y="2552790"/>
+            <a:ext cx="2011680" cy="224835"/>
           </a:xfrm>
           <a:prstGeom prst="rect">
             <a:avLst/>
@@ -27738,7 +27738,7 @@
         </p:nvSpPr>
         <p:spPr>
           <a:xfrm>
-            <a:off x="9028280" y="2627286"/>
+            <a:off x="9028280" y="2651491"/>
             <a:ext cx="281876" cy="27432"/>
           </a:xfrm>
           <a:prstGeom prst="rect">
@@ -27758,7 +27758,7 @@
         </p:nvSpPr>
         <p:spPr>
           <a:xfrm>
-            <a:off x="9241576" y="2572422"/>
+            <a:off x="9241576" y="2596627"/>
             <a:ext cx="137160" cy="137160"/>
           </a:xfrm>
           <a:prstGeom prst="ellipse">
@@ -27778,7 +27778,7 @@
         </p:nvSpPr>
         <p:spPr>
           <a:xfrm>
-            <a:off x="8959700" y="2572422"/>
+            <a:off x="8959700" y="2596627"/>
             <a:ext cx="137160" cy="137160"/>
           </a:xfrm>
           <a:prstGeom prst="ellipse">
@@ -27798,8 +27798,8 @@
         </p:nvSpPr>
         <p:spPr>
           <a:xfrm>
-            <a:off x="9390888" y="2533426"/>
-            <a:ext cx="566928" cy="215153"/>
+            <a:off x="9390888" y="2552790"/>
+            <a:ext cx="566928" cy="224835"/>
           </a:xfrm>
           <a:prstGeom prst="rect">
             <a:avLst/>
@@ -27837,8 +27837,8 @@
         </p:nvSpPr>
         <p:spPr>
           <a:xfrm>
-            <a:off x="9957816" y="2533426"/>
-            <a:ext cx="566928" cy="215153"/>
+            <a:off x="9957816" y="2552790"/>
+            <a:ext cx="566928" cy="224835"/>
           </a:xfrm>
           <a:prstGeom prst="rect">
             <a:avLst/>
@@ -27876,8 +27876,8 @@
         </p:nvSpPr>
         <p:spPr>
           <a:xfrm>
-            <a:off x="10524744" y="2533426"/>
-            <a:ext cx="859536" cy="215153"/>
+            <a:off x="10524744" y="2552790"/>
+            <a:ext cx="859536" cy="224835"/>
           </a:xfrm>
           <a:prstGeom prst="rect">
             <a:avLst/>
@@ -27915,8 +27915,8 @@
         </p:nvSpPr>
         <p:spPr>
           <a:xfrm>
-            <a:off x="6135624" y="2748579"/>
-            <a:ext cx="5394960" cy="215153"/>
+            <a:off x="6135624" y="2777624"/>
+            <a:ext cx="5394960" cy="224835"/>
           </a:xfrm>
           <a:prstGeom prst="rect">
             <a:avLst/>
@@ -27935,8 +27935,8 @@
         </p:nvSpPr>
         <p:spPr>
           <a:xfrm>
-            <a:off x="6208776" y="2748579"/>
-            <a:ext cx="2011680" cy="215153"/>
+            <a:off x="6208776" y="2777624"/>
+            <a:ext cx="2011680" cy="224835"/>
           </a:xfrm>
           <a:prstGeom prst="rect">
             <a:avLst/>
@@ -27974,7 +27974,7 @@
         </p:nvSpPr>
         <p:spPr>
           <a:xfrm>
-            <a:off x="8809703" y="2842439"/>
+            <a:off x="8809703" y="2876326"/>
             <a:ext cx="304317" cy="27432"/>
           </a:xfrm>
           <a:prstGeom prst="rect">
@@ -27994,7 +27994,7 @@
         </p:nvSpPr>
         <p:spPr>
           <a:xfrm>
-            <a:off x="9045441" y="2787575"/>
+            <a:off x="9045441" y="2821462"/>
             <a:ext cx="137160" cy="137160"/>
           </a:xfrm>
           <a:prstGeom prst="ellipse">
@@ -28014,7 +28014,7 @@
         </p:nvSpPr>
         <p:spPr>
           <a:xfrm>
-            <a:off x="8741123" y="2787575"/>
+            <a:off x="8741123" y="2821462"/>
             <a:ext cx="137160" cy="137160"/>
           </a:xfrm>
           <a:prstGeom prst="ellipse">
@@ -28034,8 +28034,8 @@
         </p:nvSpPr>
         <p:spPr>
           <a:xfrm>
-            <a:off x="9390888" y="2748579"/>
-            <a:ext cx="566928" cy="215153"/>
+            <a:off x="9390888" y="2777624"/>
+            <a:ext cx="566928" cy="224835"/>
           </a:xfrm>
           <a:prstGeom prst="rect">
             <a:avLst/>
@@ -28073,8 +28073,8 @@
         </p:nvSpPr>
         <p:spPr>
           <a:xfrm>
-            <a:off x="9957816" y="2748579"/>
-            <a:ext cx="566928" cy="215153"/>
+            <a:off x="9957816" y="2777624"/>
+            <a:ext cx="566928" cy="224835"/>
           </a:xfrm>
           <a:prstGeom prst="rect">
             <a:avLst/>
@@ -28112,8 +28112,8 @@
         </p:nvSpPr>
         <p:spPr>
           <a:xfrm>
-            <a:off x="10524744" y="2748579"/>
-            <a:ext cx="859536" cy="215153"/>
+            <a:off x="10524744" y="2777624"/>
+            <a:ext cx="859536" cy="224835"/>
           </a:xfrm>
           <a:prstGeom prst="rect">
             <a:avLst/>
@@ -28151,8 +28151,8 @@
         </p:nvSpPr>
         <p:spPr>
           <a:xfrm>
-            <a:off x="6208776" y="2963732"/>
-            <a:ext cx="2011680" cy="215153"/>
+            <a:off x="6208776" y="3002459"/>
+            <a:ext cx="2011680" cy="224835"/>
           </a:xfrm>
           <a:prstGeom prst="rect">
             <a:avLst/>
@@ -28190,7 +28190,7 @@
         </p:nvSpPr>
         <p:spPr>
           <a:xfrm>
-            <a:off x="8785895" y="3057592"/>
+            <a:off x="8785895" y="3101161"/>
             <a:ext cx="309616" cy="27432"/>
           </a:xfrm>
           <a:prstGeom prst="rect">
@@ -28210,7 +28210,7 @@
         </p:nvSpPr>
         <p:spPr>
           <a:xfrm>
-            <a:off x="9026931" y="3002728"/>
+            <a:off x="9026931" y="3046297"/>
             <a:ext cx="137160" cy="137160"/>
           </a:xfrm>
           <a:prstGeom prst="ellipse">
@@ -28230,7 +28230,7 @@
         </p:nvSpPr>
         <p:spPr>
           <a:xfrm>
-            <a:off x="8717315" y="3002728"/>
+            <a:off x="8717315" y="3046297"/>
             <a:ext cx="137160" cy="137160"/>
           </a:xfrm>
           <a:prstGeom prst="ellipse">
@@ -28250,8 +28250,8 @@
         </p:nvSpPr>
         <p:spPr>
           <a:xfrm>
-            <a:off x="9390888" y="2963732"/>
-            <a:ext cx="566928" cy="215153"/>
+            <a:off x="9390888" y="3002459"/>
+            <a:ext cx="566928" cy="224835"/>
           </a:xfrm>
           <a:prstGeom prst="rect">
             <a:avLst/>
@@ -28289,8 +28289,8 @@
         </p:nvSpPr>
         <p:spPr>
           <a:xfrm>
-            <a:off x="9957816" y="2963732"/>
-            <a:ext cx="566928" cy="215153"/>
+            <a:off x="9957816" y="3002459"/>
+            <a:ext cx="566928" cy="224835"/>
           </a:xfrm>
           <a:prstGeom prst="rect">
             <a:avLst/>
@@ -28328,8 +28328,8 @@
         </p:nvSpPr>
         <p:spPr>
           <a:xfrm>
-            <a:off x="10524744" y="2963732"/>
-            <a:ext cx="859536" cy="215153"/>
+            <a:off x="10524744" y="3002459"/>
+            <a:ext cx="859536" cy="224835"/>
           </a:xfrm>
           <a:prstGeom prst="rect">
             <a:avLst/>
@@ -28367,8 +28367,8 @@
         </p:nvSpPr>
         <p:spPr>
           <a:xfrm>
-            <a:off x="6135624" y="3178885"/>
-            <a:ext cx="5394960" cy="215153"/>
+            <a:off x="6135624" y="3227294"/>
+            <a:ext cx="5394960" cy="224835"/>
           </a:xfrm>
           <a:prstGeom prst="rect">
             <a:avLst/>
@@ -28387,8 +28387,8 @@
         </p:nvSpPr>
         <p:spPr>
           <a:xfrm>
-            <a:off x="6208776" y="3178885"/>
-            <a:ext cx="2011680" cy="215153"/>
+            <a:off x="6208776" y="3227294"/>
+            <a:ext cx="2011680" cy="224835"/>
           </a:xfrm>
           <a:prstGeom prst="rect">
             <a:avLst/>
@@ -28426,7 +28426,7 @@
         </p:nvSpPr>
         <p:spPr>
           <a:xfrm>
-            <a:off x="8728317" y="3272745"/>
+            <a:off x="8728317" y="3325996"/>
             <a:ext cx="317185" cy="27432"/>
           </a:xfrm>
           <a:prstGeom prst="rect">
@@ -28446,7 +28446,7 @@
         </p:nvSpPr>
         <p:spPr>
           <a:xfrm>
-            <a:off x="8976922" y="3217881"/>
+            <a:off x="8976922" y="3271132"/>
             <a:ext cx="137160" cy="137160"/>
           </a:xfrm>
           <a:prstGeom prst="ellipse">
@@ -28466,7 +28466,7 @@
         </p:nvSpPr>
         <p:spPr>
           <a:xfrm>
-            <a:off x="8659737" y="3217881"/>
+            <a:off x="8659737" y="3271132"/>
             <a:ext cx="137160" cy="137160"/>
           </a:xfrm>
           <a:prstGeom prst="ellipse">
@@ -28486,8 +28486,8 @@
         </p:nvSpPr>
         <p:spPr>
           <a:xfrm>
-            <a:off x="9390888" y="3178885"/>
-            <a:ext cx="566928" cy="215153"/>
+            <a:off x="9390888" y="3227294"/>
+            <a:ext cx="566928" cy="224835"/>
           </a:xfrm>
           <a:prstGeom prst="rect">
             <a:avLst/>
@@ -28525,8 +28525,8 @@
         </p:nvSpPr>
         <p:spPr>
           <a:xfrm>
-            <a:off x="9957816" y="3178885"/>
-            <a:ext cx="566928" cy="215153"/>
+            <a:off x="9957816" y="3227294"/>
+            <a:ext cx="566928" cy="224835"/>
           </a:xfrm>
           <a:prstGeom prst="rect">
             <a:avLst/>
@@ -28564,8 +28564,8 @@
         </p:nvSpPr>
         <p:spPr>
           <a:xfrm>
-            <a:off x="10524744" y="3178885"/>
-            <a:ext cx="859536" cy="215153"/>
+            <a:off x="10524744" y="3227294"/>
+            <a:ext cx="859536" cy="224835"/>
           </a:xfrm>
           <a:prstGeom prst="rect">
             <a:avLst/>
@@ -28603,8 +28603,8 @@
         </p:nvSpPr>
         <p:spPr>
           <a:xfrm>
-            <a:off x="6208776" y="3394038"/>
-            <a:ext cx="2011680" cy="215153"/>
+            <a:off x="6208776" y="3452129"/>
+            <a:ext cx="2011680" cy="224835"/>
           </a:xfrm>
           <a:prstGeom prst="rect">
             <a:avLst/>
@@ -28642,7 +28642,7 @@
         </p:nvSpPr>
         <p:spPr>
           <a:xfrm>
-            <a:off x="8717087" y="3487898"/>
+            <a:off x="8717087" y="3550830"/>
             <a:ext cx="358717" cy="27432"/>
           </a:xfrm>
           <a:prstGeom prst="rect">
@@ -28662,7 +28662,7 @@
         </p:nvSpPr>
         <p:spPr>
           <a:xfrm>
-            <a:off x="9007225" y="3433034"/>
+            <a:off x="9007225" y="3495966"/>
             <a:ext cx="137160" cy="137160"/>
           </a:xfrm>
           <a:prstGeom prst="ellipse">
@@ -28682,7 +28682,7 @@
         </p:nvSpPr>
         <p:spPr>
           <a:xfrm>
-            <a:off x="8648507" y="3433034"/>
+            <a:off x="8648507" y="3495966"/>
             <a:ext cx="137160" cy="137160"/>
           </a:xfrm>
           <a:prstGeom prst="ellipse">
@@ -28702,8 +28702,8 @@
         </p:nvSpPr>
         <p:spPr>
           <a:xfrm>
-            <a:off x="9390888" y="3394038"/>
-            <a:ext cx="566928" cy="215153"/>
+            <a:off x="9390888" y="3452129"/>
+            <a:ext cx="566928" cy="224835"/>
           </a:xfrm>
           <a:prstGeom prst="rect">
             <a:avLst/>
@@ -28741,8 +28741,8 @@
         </p:nvSpPr>
         <p:spPr>
           <a:xfrm>
-            <a:off x="9957816" y="3394038"/>
-            <a:ext cx="566928" cy="215153"/>
+            <a:off x="9957816" y="3452129"/>
+            <a:ext cx="566928" cy="224835"/>
           </a:xfrm>
           <a:prstGeom prst="rect">
             <a:avLst/>
@@ -28780,8 +28780,8 @@
         </p:nvSpPr>
         <p:spPr>
           <a:xfrm>
-            <a:off x="10524744" y="3394038"/>
-            <a:ext cx="859536" cy="215153"/>
+            <a:off x="10524744" y="3452129"/>
+            <a:ext cx="859536" cy="224835"/>
           </a:xfrm>
           <a:prstGeom prst="rect">
             <a:avLst/>
@@ -28819,8 +28819,8 @@
         </p:nvSpPr>
         <p:spPr>
           <a:xfrm>
-            <a:off x="6135624" y="3609191"/>
-            <a:ext cx="5394960" cy="215153"/>
+            <a:off x="6135624" y="3676964"/>
+            <a:ext cx="5394960" cy="224835"/>
           </a:xfrm>
           <a:prstGeom prst="rect">
             <a:avLst/>
@@ -28839,8 +28839,8 @@
         </p:nvSpPr>
         <p:spPr>
           <a:xfrm>
-            <a:off x="6208776" y="3609191"/>
-            <a:ext cx="2011680" cy="215153"/>
+            <a:off x="6208776" y="3676964"/>
+            <a:ext cx="2011680" cy="224835"/>
           </a:xfrm>
           <a:prstGeom prst="rect">
             <a:avLst/>
@@ -28878,7 +28878,7 @@
         </p:nvSpPr>
         <p:spPr>
           <a:xfrm>
-            <a:off x="8512041" y="3703051"/>
+            <a:off x="8512041" y="3775665"/>
             <a:ext cx="362283" cy="27432"/>
           </a:xfrm>
           <a:prstGeom prst="rect">
@@ -28898,7 +28898,7 @@
         </p:nvSpPr>
         <p:spPr>
           <a:xfrm>
-            <a:off x="8805744" y="3648187"/>
+            <a:off x="8805744" y="3720801"/>
             <a:ext cx="137160" cy="137160"/>
           </a:xfrm>
           <a:prstGeom prst="ellipse">
@@ -28918,7 +28918,7 @@
         </p:nvSpPr>
         <p:spPr>
           <a:xfrm>
-            <a:off x="8443461" y="3648187"/>
+            <a:off x="8443461" y="3720801"/>
             <a:ext cx="137160" cy="137160"/>
           </a:xfrm>
           <a:prstGeom prst="ellipse">
@@ -28938,8 +28938,8 @@
         </p:nvSpPr>
         <p:spPr>
           <a:xfrm>
-            <a:off x="9390888" y="3609191"/>
-            <a:ext cx="566928" cy="215153"/>
+            <a:off x="9390888" y="3676964"/>
+            <a:ext cx="566928" cy="224835"/>
           </a:xfrm>
           <a:prstGeom prst="rect">
             <a:avLst/>
@@ -28977,8 +28977,8 @@
         </p:nvSpPr>
         <p:spPr>
           <a:xfrm>
-            <a:off x="9957816" y="3609191"/>
-            <a:ext cx="566928" cy="215153"/>
+            <a:off x="9957816" y="3676964"/>
+            <a:ext cx="566928" cy="224835"/>
           </a:xfrm>
           <a:prstGeom prst="rect">
             <a:avLst/>
@@ -29016,8 +29016,8 @@
         </p:nvSpPr>
         <p:spPr>
           <a:xfrm>
-            <a:off x="10524744" y="3609191"/>
-            <a:ext cx="859536" cy="215153"/>
+            <a:off x="10524744" y="3676964"/>
+            <a:ext cx="859536" cy="224835"/>
           </a:xfrm>
           <a:prstGeom prst="rect">
             <a:avLst/>
@@ -29055,8 +29055,8 @@
         </p:nvSpPr>
         <p:spPr>
           <a:xfrm>
-            <a:off x="6208776" y="3824344"/>
-            <a:ext cx="2011680" cy="215153"/>
+            <a:off x="6208776" y="3901799"/>
+            <a:ext cx="2011680" cy="224835"/>
           </a:xfrm>
           <a:prstGeom prst="rect">
             <a:avLst/>
@@ -29094,7 +29094,7 @@
         </p:nvSpPr>
         <p:spPr>
           <a:xfrm>
-            <a:off x="8687444" y="3918204"/>
+            <a:off x="8687444" y="4000500"/>
             <a:ext cx="365880" cy="27432"/>
           </a:xfrm>
           <a:prstGeom prst="rect">
@@ -29114,7 +29114,7 @@
         </p:nvSpPr>
         <p:spPr>
           <a:xfrm>
-            <a:off x="8984744" y="3863340"/>
+            <a:off x="8984744" y="3945636"/>
             <a:ext cx="137160" cy="137160"/>
           </a:xfrm>
           <a:prstGeom prst="ellipse">
@@ -29134,7 +29134,7 @@
         </p:nvSpPr>
         <p:spPr>
           <a:xfrm>
-            <a:off x="8618864" y="3863340"/>
+            <a:off x="8618864" y="3945636"/>
             <a:ext cx="137160" cy="137160"/>
           </a:xfrm>
           <a:prstGeom prst="ellipse">
@@ -29154,8 +29154,8 @@
         </p:nvSpPr>
         <p:spPr>
           <a:xfrm>
-            <a:off x="9390888" y="3824344"/>
-            <a:ext cx="566928" cy="215153"/>
+            <a:off x="9390888" y="3901799"/>
+            <a:ext cx="566928" cy="224835"/>
           </a:xfrm>
           <a:prstGeom prst="rect">
             <a:avLst/>
@@ -29193,8 +29193,8 @@
         </p:nvSpPr>
         <p:spPr>
           <a:xfrm>
-            <a:off x="9957816" y="3824344"/>
-            <a:ext cx="566928" cy="215153"/>
+            <a:off x="9957816" y="3901799"/>
+            <a:ext cx="566928" cy="224835"/>
           </a:xfrm>
           <a:prstGeom prst="rect">
             <a:avLst/>
@@ -29232,8 +29232,8 @@
         </p:nvSpPr>
         <p:spPr>
           <a:xfrm>
-            <a:off x="10524744" y="3824344"/>
-            <a:ext cx="859536" cy="215153"/>
+            <a:off x="10524744" y="3901799"/>
+            <a:ext cx="859536" cy="224835"/>
           </a:xfrm>
           <a:prstGeom prst="rect">
             <a:avLst/>
@@ -29271,8 +29271,8 @@
         </p:nvSpPr>
         <p:spPr>
           <a:xfrm>
-            <a:off x="6135624" y="4039496"/>
-            <a:ext cx="5394960" cy="215153"/>
+            <a:off x="6135624" y="4126633"/>
+            <a:ext cx="5394960" cy="224835"/>
           </a:xfrm>
           <a:prstGeom prst="rect">
             <a:avLst/>
@@ -29291,8 +29291,8 @@
         </p:nvSpPr>
         <p:spPr>
           <a:xfrm>
-            <a:off x="6208776" y="4039496"/>
-            <a:ext cx="2011680" cy="215153"/>
+            <a:off x="6208776" y="4126633"/>
+            <a:ext cx="2011680" cy="224835"/>
           </a:xfrm>
           <a:prstGeom prst="rect">
             <a:avLst/>
@@ -29330,7 +29330,7 @@
         </p:nvSpPr>
         <p:spPr>
           <a:xfrm>
-            <a:off x="8654442" y="4133357"/>
+            <a:off x="8654442" y="4225335"/>
             <a:ext cx="367907" cy="27432"/>
           </a:xfrm>
           <a:prstGeom prst="rect">
@@ -29350,7 +29350,7 @@
         </p:nvSpPr>
         <p:spPr>
           <a:xfrm>
-            <a:off x="8953769" y="4078493"/>
+            <a:off x="8953769" y="4170471"/>
             <a:ext cx="137160" cy="137160"/>
           </a:xfrm>
           <a:prstGeom prst="ellipse">
@@ -29370,7 +29370,7 @@
         </p:nvSpPr>
         <p:spPr>
           <a:xfrm>
-            <a:off x="8585862" y="4078493"/>
+            <a:off x="8585862" y="4170471"/>
             <a:ext cx="137160" cy="137160"/>
           </a:xfrm>
           <a:prstGeom prst="ellipse">
@@ -29390,8 +29390,8 @@
         </p:nvSpPr>
         <p:spPr>
           <a:xfrm>
-            <a:off x="9390888" y="4039496"/>
-            <a:ext cx="566928" cy="215153"/>
+            <a:off x="9390888" y="4126633"/>
+            <a:ext cx="566928" cy="224835"/>
           </a:xfrm>
           <a:prstGeom prst="rect">
             <a:avLst/>
@@ -29429,8 +29429,8 @@
         </p:nvSpPr>
         <p:spPr>
           <a:xfrm>
-            <a:off x="9957816" y="4039496"/>
-            <a:ext cx="566928" cy="215153"/>
+            <a:off x="9957816" y="4126633"/>
+            <a:ext cx="566928" cy="224835"/>
           </a:xfrm>
           <a:prstGeom prst="rect">
             <a:avLst/>
@@ -29468,8 +29468,8 @@
         </p:nvSpPr>
         <p:spPr>
           <a:xfrm>
-            <a:off x="10524744" y="4039496"/>
-            <a:ext cx="859536" cy="215153"/>
+            <a:off x="10524744" y="4126633"/>
+            <a:ext cx="859536" cy="224835"/>
           </a:xfrm>
           <a:prstGeom prst="rect">
             <a:avLst/>
@@ -29507,8 +29507,8 @@
         </p:nvSpPr>
         <p:spPr>
           <a:xfrm>
-            <a:off x="6208776" y="4254649"/>
-            <a:ext cx="2011680" cy="215153"/>
+            <a:off x="6208776" y="4351468"/>
+            <a:ext cx="2011680" cy="224835"/>
           </a:xfrm>
           <a:prstGeom prst="rect">
             <a:avLst/>
@@ -29546,7 +29546,7 @@
         </p:nvSpPr>
         <p:spPr>
           <a:xfrm>
-            <a:off x="8770408" y="4348510"/>
+            <a:off x="8770408" y="4450170"/>
             <a:ext cx="389809" cy="27432"/>
           </a:xfrm>
           <a:prstGeom prst="rect">
@@ -29566,7 +29566,7 @@
         </p:nvSpPr>
         <p:spPr>
           <a:xfrm>
-            <a:off x="9091637" y="4293646"/>
+            <a:off x="9091637" y="4395306"/>
             <a:ext cx="137160" cy="137160"/>
           </a:xfrm>
           <a:prstGeom prst="ellipse">
@@ -29586,7 +29586,7 @@
         </p:nvSpPr>
         <p:spPr>
           <a:xfrm>
-            <a:off x="8701828" y="4293646"/>
+            <a:off x="8701828" y="4395306"/>
             <a:ext cx="137160" cy="137160"/>
           </a:xfrm>
           <a:prstGeom prst="ellipse">
@@ -29606,8 +29606,8 @@
         </p:nvSpPr>
         <p:spPr>
           <a:xfrm>
-            <a:off x="9390888" y="4254649"/>
-            <a:ext cx="566928" cy="215153"/>
+            <a:off x="9390888" y="4351468"/>
+            <a:ext cx="566928" cy="224835"/>
           </a:xfrm>
           <a:prstGeom prst="rect">
             <a:avLst/>
@@ -29645,8 +29645,8 @@
         </p:nvSpPr>
         <p:spPr>
           <a:xfrm>
-            <a:off x="9957816" y="4254649"/>
-            <a:ext cx="566928" cy="215153"/>
+            <a:off x="9957816" y="4351468"/>
+            <a:ext cx="566928" cy="224835"/>
           </a:xfrm>
           <a:prstGeom prst="rect">
             <a:avLst/>
@@ -29684,8 +29684,8 @@
         </p:nvSpPr>
         <p:spPr>
           <a:xfrm>
-            <a:off x="10524744" y="4254649"/>
-            <a:ext cx="859536" cy="215153"/>
+            <a:off x="10524744" y="4351468"/>
+            <a:ext cx="859536" cy="224835"/>
           </a:xfrm>
           <a:prstGeom prst="rect">
             <a:avLst/>
@@ -29723,8 +29723,8 @@
         </p:nvSpPr>
         <p:spPr>
           <a:xfrm>
-            <a:off x="6135624" y="4469802"/>
-            <a:ext cx="5394960" cy="215153"/>
+            <a:off x="6135624" y="4576303"/>
+            <a:ext cx="5394960" cy="224835"/>
           </a:xfrm>
           <a:prstGeom prst="rect">
             <a:avLst/>
@@ -29743,8 +29743,8 @@
         </p:nvSpPr>
         <p:spPr>
           <a:xfrm>
-            <a:off x="6208776" y="4469802"/>
-            <a:ext cx="2011680" cy="215153"/>
+            <a:off x="6208776" y="4576303"/>
+            <a:ext cx="2011680" cy="224835"/>
           </a:xfrm>
           <a:prstGeom prst="rect">
             <a:avLst/>
@@ -29782,7 +29782,7 @@
         </p:nvSpPr>
         <p:spPr>
           <a:xfrm>
-            <a:off x="8425794" y="4563663"/>
+            <a:off x="8425794" y="4675004"/>
             <a:ext cx="402892" cy="27432"/>
           </a:xfrm>
           <a:prstGeom prst="rect">
@@ -29802,7 +29802,7 @@
         </p:nvSpPr>
         <p:spPr>
           <a:xfrm>
-            <a:off x="8760105" y="4508799"/>
+            <a:off x="8760105" y="4620140"/>
             <a:ext cx="137160" cy="137160"/>
           </a:xfrm>
           <a:prstGeom prst="ellipse">
@@ -29822,7 +29822,7 @@
         </p:nvSpPr>
         <p:spPr>
           <a:xfrm>
-            <a:off x="8357214" y="4508799"/>
+            <a:off x="8357214" y="4620140"/>
             <a:ext cx="137160" cy="137160"/>
           </a:xfrm>
           <a:prstGeom prst="ellipse">
@@ -29842,8 +29842,8 @@
         </p:nvSpPr>
         <p:spPr>
           <a:xfrm>
-            <a:off x="9390888" y="4469802"/>
-            <a:ext cx="566928" cy="215153"/>
+            <a:off x="9390888" y="4576303"/>
+            <a:ext cx="566928" cy="224835"/>
           </a:xfrm>
           <a:prstGeom prst="rect">
             <a:avLst/>
@@ -29881,8 +29881,8 @@
         </p:nvSpPr>
         <p:spPr>
           <a:xfrm>
-            <a:off x="9957816" y="4469802"/>
-            <a:ext cx="566928" cy="215153"/>
+            <a:off x="9957816" y="4576303"/>
+            <a:ext cx="566928" cy="224835"/>
           </a:xfrm>
           <a:prstGeom prst="rect">
             <a:avLst/>
@@ -29920,8 +29920,8 @@
         </p:nvSpPr>
         <p:spPr>
           <a:xfrm>
-            <a:off x="10524744" y="4469802"/>
-            <a:ext cx="859536" cy="215153"/>
+            <a:off x="10524744" y="4576303"/>
+            <a:ext cx="859536" cy="224835"/>
           </a:xfrm>
           <a:prstGeom prst="rect">
             <a:avLst/>
@@ -29959,8 +29959,8 @@
         </p:nvSpPr>
         <p:spPr>
           <a:xfrm>
-            <a:off x="6208776" y="4684955"/>
-            <a:ext cx="2011680" cy="215153"/>
+            <a:off x="6208776" y="4801138"/>
+            <a:ext cx="2011680" cy="224835"/>
           </a:xfrm>
           <a:prstGeom prst="rect">
             <a:avLst/>
@@ -29998,7 +29998,7 @@
         </p:nvSpPr>
         <p:spPr>
           <a:xfrm>
-            <a:off x="8627876" y="4778816"/>
+            <a:off x="8627876" y="4899839"/>
             <a:ext cx="523192" cy="27432"/>
           </a:xfrm>
           <a:prstGeom prst="rect">
@@ -30018,7 +30018,7 @@
         </p:nvSpPr>
         <p:spPr>
           <a:xfrm>
-            <a:off x="9082487" y="4723952"/>
+            <a:off x="9082487" y="4844975"/>
             <a:ext cx="137160" cy="137160"/>
           </a:xfrm>
           <a:prstGeom prst="ellipse">
@@ -30038,7 +30038,7 @@
         </p:nvSpPr>
         <p:spPr>
           <a:xfrm>
-            <a:off x="8559296" y="4723952"/>
+            <a:off x="8559296" y="4844975"/>
             <a:ext cx="137160" cy="137160"/>
           </a:xfrm>
           <a:prstGeom prst="ellipse">
@@ -30058,8 +30058,8 @@
         </p:nvSpPr>
         <p:spPr>
           <a:xfrm>
-            <a:off x="9390888" y="4684955"/>
-            <a:ext cx="566928" cy="215153"/>
+            <a:off x="9390888" y="4801138"/>
+            <a:ext cx="566928" cy="224835"/>
           </a:xfrm>
           <a:prstGeom prst="rect">
             <a:avLst/>
@@ -30097,8 +30097,8 @@
         </p:nvSpPr>
         <p:spPr>
           <a:xfrm>
-            <a:off x="9957816" y="4684955"/>
-            <a:ext cx="566928" cy="215153"/>
+            <a:off x="9957816" y="4801138"/>
+            <a:ext cx="566928" cy="224835"/>
           </a:xfrm>
           <a:prstGeom prst="rect">
             <a:avLst/>
@@ -30136,8 +30136,8 @@
         </p:nvSpPr>
         <p:spPr>
           <a:xfrm>
-            <a:off x="10524744" y="4684955"/>
-            <a:ext cx="859536" cy="215153"/>
+            <a:off x="10524744" y="4801138"/>
+            <a:ext cx="859536" cy="224835"/>
           </a:xfrm>
           <a:prstGeom prst="rect">
             <a:avLst/>
@@ -30175,8 +30175,8 @@
         </p:nvSpPr>
         <p:spPr>
           <a:xfrm>
-            <a:off x="6135624" y="4900108"/>
-            <a:ext cx="5394960" cy="215153"/>
+            <a:off x="6135624" y="5025973"/>
+            <a:ext cx="5394960" cy="224835"/>
           </a:xfrm>
           <a:prstGeom prst="rect">
             <a:avLst/>
@@ -30195,8 +30195,8 @@
         </p:nvSpPr>
         <p:spPr>
           <a:xfrm>
-            <a:off x="6208776" y="4900108"/>
-            <a:ext cx="2011680" cy="215153"/>
+            <a:off x="6208776" y="5025973"/>
+            <a:ext cx="2011680" cy="224835"/>
           </a:xfrm>
           <a:prstGeom prst="rect">
             <a:avLst/>
@@ -30234,7 +30234,7 @@
         </p:nvSpPr>
         <p:spPr>
           <a:xfrm>
-            <a:off x="8579382" y="4993969"/>
+            <a:off x="8579382" y="5124674"/>
             <a:ext cx="529999" cy="27432"/>
           </a:xfrm>
           <a:prstGeom prst="rect">
@@ -30254,7 +30254,7 @@
         </p:nvSpPr>
         <p:spPr>
           <a:xfrm>
-            <a:off x="9040801" y="4939105"/>
+            <a:off x="9040801" y="5069810"/>
             <a:ext cx="137160" cy="137160"/>
           </a:xfrm>
           <a:prstGeom prst="ellipse">
@@ -30274,7 +30274,7 @@
         </p:nvSpPr>
         <p:spPr>
           <a:xfrm>
-            <a:off x="8510802" y="4939105"/>
+            <a:off x="8510802" y="5069810"/>
             <a:ext cx="137160" cy="137160"/>
           </a:xfrm>
           <a:prstGeom prst="ellipse">
@@ -30294,8 +30294,8 @@
         </p:nvSpPr>
         <p:spPr>
           <a:xfrm>
-            <a:off x="9390888" y="4900108"/>
-            <a:ext cx="566928" cy="215153"/>
+            <a:off x="9390888" y="5025973"/>
+            <a:ext cx="566928" cy="224835"/>
           </a:xfrm>
           <a:prstGeom prst="rect">
             <a:avLst/>
@@ -30333,8 +30333,8 @@
         </p:nvSpPr>
         <p:spPr>
           <a:xfrm>
-            <a:off x="9957816" y="4900108"/>
-            <a:ext cx="566928" cy="215153"/>
+            <a:off x="9957816" y="5025973"/>
+            <a:ext cx="566928" cy="224835"/>
           </a:xfrm>
           <a:prstGeom prst="rect">
             <a:avLst/>
@@ -30372,8 +30372,8 @@
         </p:nvSpPr>
         <p:spPr>
           <a:xfrm>
-            <a:off x="10524744" y="4900108"/>
-            <a:ext cx="859536" cy="215153"/>
+            <a:off x="10524744" y="5025973"/>
+            <a:ext cx="859536" cy="224835"/>
           </a:xfrm>
           <a:prstGeom prst="rect">
             <a:avLst/>
@@ -30411,8 +30411,8 @@
         </p:nvSpPr>
         <p:spPr>
           <a:xfrm>
-            <a:off x="6208776" y="5115261"/>
-            <a:ext cx="2011680" cy="215153"/>
+            <a:off x="6208776" y="5250808"/>
+            <a:ext cx="2011680" cy="224835"/>
           </a:xfrm>
           <a:prstGeom prst="rect">
             <a:avLst/>
@@ -30450,7 +30450,7 @@
         </p:nvSpPr>
         <p:spPr>
           <a:xfrm>
-            <a:off x="8614506" y="5209122"/>
+            <a:off x="8614506" y="5349509"/>
             <a:ext cx="554833" cy="27432"/>
           </a:xfrm>
           <a:prstGeom prst="rect">
@@ -30470,7 +30470,7 @@
         </p:nvSpPr>
         <p:spPr>
           <a:xfrm>
-            <a:off x="9100759" y="5154258"/>
+            <a:off x="9100759" y="5294645"/>
             <a:ext cx="137160" cy="137160"/>
           </a:xfrm>
           <a:prstGeom prst="ellipse">
@@ -30490,7 +30490,7 @@
         </p:nvSpPr>
         <p:spPr>
           <a:xfrm>
-            <a:off x="8545926" y="5154258"/>
+            <a:off x="8545926" y="5294645"/>
             <a:ext cx="137160" cy="137160"/>
           </a:xfrm>
           <a:prstGeom prst="ellipse">
@@ -30510,8 +30510,8 @@
         </p:nvSpPr>
         <p:spPr>
           <a:xfrm>
-            <a:off x="9390888" y="5115261"/>
-            <a:ext cx="566928" cy="215153"/>
+            <a:off x="9390888" y="5250808"/>
+            <a:ext cx="566928" cy="224835"/>
           </a:xfrm>
           <a:prstGeom prst="rect">
             <a:avLst/>
@@ -30549,8 +30549,8 @@
         </p:nvSpPr>
         <p:spPr>
           <a:xfrm>
-            <a:off x="9957816" y="5115261"/>
-            <a:ext cx="566928" cy="215153"/>
+            <a:off x="9957816" y="5250808"/>
+            <a:ext cx="566928" cy="224835"/>
           </a:xfrm>
           <a:prstGeom prst="rect">
             <a:avLst/>
@@ -30588,8 +30588,8 @@
         </p:nvSpPr>
         <p:spPr>
           <a:xfrm>
-            <a:off x="10524744" y="5115261"/>
-            <a:ext cx="859536" cy="215153"/>
+            <a:off x="10524744" y="5250808"/>
+            <a:ext cx="859536" cy="224835"/>
           </a:xfrm>
           <a:prstGeom prst="rect">
             <a:avLst/>
@@ -30627,8 +30627,8 @@
         </p:nvSpPr>
         <p:spPr>
           <a:xfrm>
-            <a:off x="6135624" y="5330414"/>
-            <a:ext cx="5394960" cy="215153"/>
+            <a:off x="6135624" y="5475642"/>
+            <a:ext cx="5394960" cy="224835"/>
           </a:xfrm>
           <a:prstGeom prst="rect">
             <a:avLst/>
@@ -30647,8 +30647,8 @@
         </p:nvSpPr>
         <p:spPr>
           <a:xfrm>
-            <a:off x="6208776" y="5330414"/>
-            <a:ext cx="2011680" cy="215153"/>
+            <a:off x="6208776" y="5475642"/>
+            <a:ext cx="2011680" cy="224835"/>
           </a:xfrm>
           <a:prstGeom prst="rect">
             <a:avLst/>
@@ -30686,7 +30686,7 @@
         </p:nvSpPr>
         <p:spPr>
           <a:xfrm>
-            <a:off x="8453821" y="5424275"/>
+            <a:off x="8453821" y="5574344"/>
             <a:ext cx="631638" cy="27432"/>
           </a:xfrm>
           <a:prstGeom prst="rect">
@@ -30706,7 +30706,7 @@
         </p:nvSpPr>
         <p:spPr>
           <a:xfrm>
-            <a:off x="9016879" y="5369411"/>
+            <a:off x="9016879" y="5519480"/>
             <a:ext cx="137160" cy="137160"/>
           </a:xfrm>
           <a:prstGeom prst="ellipse">
@@ -30726,7 +30726,7 @@
         </p:nvSpPr>
         <p:spPr>
           <a:xfrm>
-            <a:off x="8385241" y="5369411"/>
+            <a:off x="8385241" y="5519480"/>
             <a:ext cx="137160" cy="137160"/>
           </a:xfrm>
           <a:prstGeom prst="ellipse">
@@ -30746,8 +30746,8 @@
         </p:nvSpPr>
         <p:spPr>
           <a:xfrm>
-            <a:off x="9390888" y="5330414"/>
-            <a:ext cx="566928" cy="215153"/>
+            <a:off x="9390888" y="5475642"/>
+            <a:ext cx="566928" cy="224835"/>
           </a:xfrm>
           <a:prstGeom prst="rect">
             <a:avLst/>
@@ -30785,8 +30785,8 @@
         </p:nvSpPr>
         <p:spPr>
           <a:xfrm>
-            <a:off x="9957816" y="5330414"/>
-            <a:ext cx="566928" cy="215153"/>
+            <a:off x="9957816" y="5475642"/>
+            <a:ext cx="566928" cy="224835"/>
           </a:xfrm>
           <a:prstGeom prst="rect">
             <a:avLst/>
@@ -30824,8 +30824,8 @@
         </p:nvSpPr>
         <p:spPr>
           <a:xfrm>
-            <a:off x="10524744" y="5330414"/>
-            <a:ext cx="859536" cy="215153"/>
+            <a:off x="10524744" y="5475642"/>
+            <a:ext cx="859536" cy="224835"/>
           </a:xfrm>
           <a:prstGeom prst="rect">
             <a:avLst/>
@@ -30863,8 +30863,8 @@
         </p:nvSpPr>
         <p:spPr>
           <a:xfrm>
-            <a:off x="457200" y="5961888"/>
-            <a:ext cx="11274552" cy="548640"/>
+            <a:off x="457200" y="6126480"/>
+            <a:ext cx="11274552" cy="600456"/>
           </a:xfrm>
           <a:prstGeom prst="rect">
             <a:avLst/>
@@ -30883,8 +30883,8 @@
         </p:nvSpPr>
         <p:spPr>
           <a:xfrm>
-            <a:off x="658368" y="5980176"/>
-            <a:ext cx="10927080" cy="512064"/>
+            <a:off x="658368" y="6144768"/>
+            <a:ext cx="10927080" cy="563880"/>
           </a:xfrm>
           <a:prstGeom prst="rect">
             <a:avLst/>
@@ -30900,7 +30900,7 @@
               <a:buNone/>
             </a:pPr>
             <a:r>
-              <a:rPr lang="en-US" sz="1600" b="1" dirty="0">
+              <a:rPr lang="en-US" sz="1550" b="1" dirty="0">
                 <a:solidFill>
                   <a:srgbClr val="0B2C4A"/>
                 </a:solidFill>
@@ -30908,9 +30908,9 @@
                 <a:ea typeface="Inter" pitchFamily="34" charset="-122"/>
                 <a:cs typeface="Inter" pitchFamily="34" charset="-120"/>
               </a:rPr>
-              <a:t>Internal parts margin runs 4.2 pts below customer pay across the group; 11 of 33 stores are at or better than that gap. Widest: LR LV (−17.6 pts), HONDA FLAGSTAFF (−15.4 pts) and AUDI RENO (−14.7 pts).</a:t>
-            </a:r>
-            <a:endParaRPr lang="en-US" sz="1600" dirty="0"/>
+              <a:t>Internal parts margin runs 4.2 pts below customer pay across the group; 11 of 33 stores are at or better than that gap. Widest: LR LV (−17.6 pts), Honda Flagstaff (−15.4 pts) and Audi Reno (−14.7 pts).</a:t>
+            </a:r>
+            <a:endParaRPr lang="en-US" sz="1550" dirty="0"/>
           </a:p>
         </p:txBody>
       </p:sp>

--- a/day2-deck/decks/CP vs Internal GP - Review.pptx
+++ b/day2-deck/decks/CP vs Internal GP - Review.pptx
@@ -503,7 +503,7 @@
           <a:p>
             <a:r>
               <a:rPr lang="en-US" dirty="0"/>
-              <a:t>Source: Qlik - Closed Repair Orders. Jan-Sep 2026 by close month. Same-store, INEOS excluded (opened 2026). GMC Prescott body shop labor types excluded. Gap = internal GP% minus customer-pay GP%, in points. Green: internal at or above the store's own customer-pay rate; red: below. Dashed line: the group gap (−2.7 pts). At or above customer pay: Cadillac, Chevy GMC Bullhead, GMC Prescott, Hyundai Prescott, Hyundai St George, Kia LV, Kia St George and VW St George. A gap can be a policy (internal detail, used-car recon pricing) rather than a miss; confirm with the store before calling it out.</a:t>
+              <a:t>Takeaway (off the slide): 25 of 33 stores collect less labor margin on internal work than on customer pay; the group is −2.7 pts. Widest: Audi Reno (−20.0 pts), LR LV (−13.9 pts) and LR Henderson (−12.2 pts).Source: Qlik - Closed Repair Orders. Jan-Sep 2026 by close month. Same-store, INEOS excluded (opened 2026). GMC Prescott body shop labor types excluded. Gap = internal GP% minus customer-pay GP%, in points. Green: internal at or above the store's own customer-pay rate; red: below. Dashed line: the group gap (−2.7 pts). At or above customer pay: Cadillac, Chevy GMC Bullhead, GMC Prescott, Hyundai Prescott, Hyundai St George, Kia LV, Kia St George and VW St George. A gap can be a policy (internal detail, used-car recon pricing) rather than a miss; confirm with the store before calling it out.</a:t>
             </a:r>
             <a:endParaRPr lang="en-US" dirty="0"/>
           </a:p>
@@ -591,7 +591,7 @@
           <a:p>
             <a:r>
               <a:rPr lang="en-US" dirty="0"/>
-              <a:t>Source: Qlik - Closed Repair Orders. Jan-Sep 2026 by close month. Same-store, INEOS excluded (opened 2026). GMC Prescott body shop labor types excluded. Gap = internal GP% minus customer-pay GP%, in points. Green: internal at or above the store's own customer-pay rate; red: below. Dashed line: the group gap (−4.2 pts). At or above customer pay: Chevy LV, Honda Henderson, Subaru Prescott, Toyota Henderson and Volvo. A gap can be a policy (internal detail, used-car recon pricing) rather than a miss; confirm with the store before calling it out.</a:t>
+              <a:t>Takeaway (off the slide): 28 of 33 stores collect less parts margin on internal work than on customer pay; the group is −4.2 pts. Widest: LR LV (−17.6 pts), Honda Flagstaff (−15.4 pts) and Audi Reno (−14.7 pts).Source: Qlik - Closed Repair Orders. Jan-Sep 2026 by close month. Same-store, INEOS excluded (opened 2026). GMC Prescott body shop labor types excluded. Gap = internal GP% minus customer-pay GP%, in points. Green: internal at or above the store's own customer-pay rate; red: below. Dashed line: the group gap (−4.2 pts). At or above customer pay: Chevy LV, Honda Henderson, Subaru Prescott, Toyota Henderson and Volvo. A gap can be a policy (internal detail, used-car recon pricing) rather than a miss; confirm with the store before calling it out.</a:t>
             </a:r>
             <a:endParaRPr lang="en-US" dirty="0"/>
           </a:p>
@@ -1071,7 +1071,7 @@
         <p:spPr>
           <a:xfrm>
             <a:off x="457200" y="1207008"/>
-            <a:ext cx="11274552" cy="4782312"/>
+            <a:ext cx="11274552" cy="5148072"/>
           </a:xfrm>
           <a:prstGeom prst="rect">
             <a:avLst/>
@@ -1357,7 +1357,7 @@
         <p:spPr>
           <a:xfrm>
             <a:off x="3249778" y="2103120"/>
-            <a:ext cx="10973" cy="3822192"/>
+            <a:ext cx="10973" cy="4187952"/>
           </a:xfrm>
           <a:prstGeom prst="rect">
             <a:avLst/>
@@ -1377,7 +1377,7 @@
         <p:spPr>
           <a:xfrm>
             <a:off x="3183188" y="2103120"/>
-            <a:ext cx="0" cy="3822192"/>
+            <a:ext cx="0" cy="4187952"/>
           </a:xfrm>
           <a:prstGeom prst="line">
             <a:avLst/>
@@ -1545,7 +1545,7 @@
         <p:spPr>
           <a:xfrm>
             <a:off x="8800186" y="2103120"/>
-            <a:ext cx="10973" cy="3597357"/>
+            <a:ext cx="10973" cy="3941602"/>
           </a:xfrm>
           <a:prstGeom prst="rect">
             <a:avLst/>
@@ -1565,7 +1565,7 @@
         <p:spPr>
           <a:xfrm>
             <a:off x="8733596" y="2103120"/>
-            <a:ext cx="0" cy="3597357"/>
+            <a:ext cx="0" cy="3941602"/>
           </a:xfrm>
           <a:prstGeom prst="line">
             <a:avLst/>
@@ -1588,7 +1588,7 @@
         <p:spPr>
           <a:xfrm>
             <a:off x="658368" y="2103120"/>
-            <a:ext cx="2011680" cy="224835"/>
+            <a:ext cx="2011680" cy="246350"/>
           </a:xfrm>
           <a:prstGeom prst="rect">
             <a:avLst/>
@@ -1626,8 +1626,8 @@
         </p:nvSpPr>
         <p:spPr>
           <a:xfrm>
-            <a:off x="3255264" y="2153708"/>
-            <a:ext cx="130113" cy="123659"/>
+            <a:off x="3255264" y="2158549"/>
+            <a:ext cx="130113" cy="135493"/>
           </a:xfrm>
           <a:prstGeom prst="rect">
             <a:avLst/>
@@ -1647,7 +1647,7 @@
         <p:spPr>
           <a:xfrm>
             <a:off x="3840480" y="2103120"/>
-            <a:ext cx="566928" cy="224835"/>
+            <a:ext cx="566928" cy="246350"/>
           </a:xfrm>
           <a:prstGeom prst="rect">
             <a:avLst/>
@@ -1686,7 +1686,7 @@
         <p:spPr>
           <a:xfrm>
             <a:off x="4407408" y="2103120"/>
-            <a:ext cx="566928" cy="224835"/>
+            <a:ext cx="566928" cy="246350"/>
           </a:xfrm>
           <a:prstGeom prst="rect">
             <a:avLst/>
@@ -1725,7 +1725,7 @@
         <p:spPr>
           <a:xfrm>
             <a:off x="4974336" y="2103120"/>
-            <a:ext cx="859536" cy="224835"/>
+            <a:ext cx="859536" cy="246350"/>
           </a:xfrm>
           <a:prstGeom prst="rect">
             <a:avLst/>
@@ -1763,8 +1763,8 @@
         </p:nvSpPr>
         <p:spPr>
           <a:xfrm>
-            <a:off x="585216" y="2327955"/>
-            <a:ext cx="5394960" cy="224835"/>
+            <a:off x="585216" y="2349470"/>
+            <a:ext cx="5394960" cy="246350"/>
           </a:xfrm>
           <a:prstGeom prst="rect">
             <a:avLst/>
@@ -1783,8 +1783,8 @@
         </p:nvSpPr>
         <p:spPr>
           <a:xfrm>
-            <a:off x="658368" y="2327955"/>
-            <a:ext cx="2011680" cy="224835"/>
+            <a:off x="658368" y="2349470"/>
+            <a:ext cx="2011680" cy="246350"/>
           </a:xfrm>
           <a:prstGeom prst="rect">
             <a:avLst/>
@@ -1822,8 +1822,8 @@
         </p:nvSpPr>
         <p:spPr>
           <a:xfrm>
-            <a:off x="3255264" y="2378543"/>
-            <a:ext cx="129665" cy="123659"/>
+            <a:off x="3255264" y="2404899"/>
+            <a:ext cx="129665" cy="135493"/>
           </a:xfrm>
           <a:prstGeom prst="rect">
             <a:avLst/>
@@ -1842,8 +1842,8 @@
         </p:nvSpPr>
         <p:spPr>
           <a:xfrm>
-            <a:off x="3840480" y="2327955"/>
-            <a:ext cx="566928" cy="224835"/>
+            <a:off x="3840480" y="2349470"/>
+            <a:ext cx="566928" cy="246350"/>
           </a:xfrm>
           <a:prstGeom prst="rect">
             <a:avLst/>
@@ -1881,8 +1881,8 @@
         </p:nvSpPr>
         <p:spPr>
           <a:xfrm>
-            <a:off x="4407408" y="2327955"/>
-            <a:ext cx="566928" cy="224835"/>
+            <a:off x="4407408" y="2349470"/>
+            <a:ext cx="566928" cy="246350"/>
           </a:xfrm>
           <a:prstGeom prst="rect">
             <a:avLst/>
@@ -1920,8 +1920,8 @@
         </p:nvSpPr>
         <p:spPr>
           <a:xfrm>
-            <a:off x="4974336" y="2327955"/>
-            <a:ext cx="859536" cy="224835"/>
+            <a:off x="4974336" y="2349470"/>
+            <a:ext cx="859536" cy="246350"/>
           </a:xfrm>
           <a:prstGeom prst="rect">
             <a:avLst/>
@@ -1959,8 +1959,8 @@
         </p:nvSpPr>
         <p:spPr>
           <a:xfrm>
-            <a:off x="658368" y="2552790"/>
-            <a:ext cx="2011680" cy="224835"/>
+            <a:off x="658368" y="2595820"/>
+            <a:ext cx="2011680" cy="246350"/>
           </a:xfrm>
           <a:prstGeom prst="rect">
             <a:avLst/>
@@ -1998,8 +1998,8 @@
         </p:nvSpPr>
         <p:spPr>
           <a:xfrm>
-            <a:off x="3255264" y="2603377"/>
-            <a:ext cx="104292" cy="123659"/>
+            <a:off x="3255264" y="2651249"/>
+            <a:ext cx="104292" cy="135493"/>
           </a:xfrm>
           <a:prstGeom prst="rect">
             <a:avLst/>
@@ -2018,8 +2018,8 @@
         </p:nvSpPr>
         <p:spPr>
           <a:xfrm>
-            <a:off x="3840480" y="2552790"/>
-            <a:ext cx="566928" cy="224835"/>
+            <a:off x="3840480" y="2595820"/>
+            <a:ext cx="566928" cy="246350"/>
           </a:xfrm>
           <a:prstGeom prst="rect">
             <a:avLst/>
@@ -2057,8 +2057,8 @@
         </p:nvSpPr>
         <p:spPr>
           <a:xfrm>
-            <a:off x="4407408" y="2552790"/>
-            <a:ext cx="566928" cy="224835"/>
+            <a:off x="4407408" y="2595820"/>
+            <a:ext cx="566928" cy="246350"/>
           </a:xfrm>
           <a:prstGeom prst="rect">
             <a:avLst/>
@@ -2096,8 +2096,8 @@
         </p:nvSpPr>
         <p:spPr>
           <a:xfrm>
-            <a:off x="4974336" y="2552790"/>
-            <a:ext cx="859536" cy="224835"/>
+            <a:off x="4974336" y="2595820"/>
+            <a:ext cx="859536" cy="246350"/>
           </a:xfrm>
           <a:prstGeom prst="rect">
             <a:avLst/>
@@ -2135,8 +2135,8 @@
         </p:nvSpPr>
         <p:spPr>
           <a:xfrm>
-            <a:off x="585216" y="2777624"/>
-            <a:ext cx="5394960" cy="224835"/>
+            <a:off x="585216" y="2842170"/>
+            <a:ext cx="5394960" cy="246350"/>
           </a:xfrm>
           <a:prstGeom prst="rect">
             <a:avLst/>
@@ -2155,8 +2155,8 @@
         </p:nvSpPr>
         <p:spPr>
           <a:xfrm>
-            <a:off x="658368" y="2777624"/>
-            <a:ext cx="2011680" cy="224835"/>
+            <a:off x="658368" y="2842170"/>
+            <a:ext cx="2011680" cy="246350"/>
           </a:xfrm>
           <a:prstGeom prst="rect">
             <a:avLst/>
@@ -2194,8 +2194,8 @@
         </p:nvSpPr>
         <p:spPr>
           <a:xfrm>
-            <a:off x="3255264" y="2828212"/>
-            <a:ext cx="96492" cy="123659"/>
+            <a:off x="3255264" y="2897599"/>
+            <a:ext cx="96492" cy="135493"/>
           </a:xfrm>
           <a:prstGeom prst="rect">
             <a:avLst/>
@@ -2214,8 +2214,8 @@
         </p:nvSpPr>
         <p:spPr>
           <a:xfrm>
-            <a:off x="3840480" y="2777624"/>
-            <a:ext cx="566928" cy="224835"/>
+            <a:off x="3840480" y="2842170"/>
+            <a:ext cx="566928" cy="246350"/>
           </a:xfrm>
           <a:prstGeom prst="rect">
             <a:avLst/>
@@ -2253,8 +2253,8 @@
         </p:nvSpPr>
         <p:spPr>
           <a:xfrm>
-            <a:off x="4407408" y="2777624"/>
-            <a:ext cx="566928" cy="224835"/>
+            <a:off x="4407408" y="2842170"/>
+            <a:ext cx="566928" cy="246350"/>
           </a:xfrm>
           <a:prstGeom prst="rect">
             <a:avLst/>
@@ -2292,8 +2292,8 @@
         </p:nvSpPr>
         <p:spPr>
           <a:xfrm>
-            <a:off x="4974336" y="2777624"/>
-            <a:ext cx="859536" cy="224835"/>
+            <a:off x="4974336" y="2842170"/>
+            <a:ext cx="859536" cy="246350"/>
           </a:xfrm>
           <a:prstGeom prst="rect">
             <a:avLst/>
@@ -2331,8 +2331,8 @@
         </p:nvSpPr>
         <p:spPr>
           <a:xfrm>
-            <a:off x="658368" y="3002459"/>
-            <a:ext cx="2011680" cy="224835"/>
+            <a:off x="658368" y="3088520"/>
+            <a:ext cx="2011680" cy="246350"/>
           </a:xfrm>
           <a:prstGeom prst="rect">
             <a:avLst/>
@@ -2370,8 +2370,8 @@
         </p:nvSpPr>
         <p:spPr>
           <a:xfrm>
-            <a:off x="3255264" y="3053047"/>
-            <a:ext cx="77376" cy="123659"/>
+            <a:off x="3255264" y="3143949"/>
+            <a:ext cx="77376" cy="135493"/>
           </a:xfrm>
           <a:prstGeom prst="rect">
             <a:avLst/>
@@ -2390,8 +2390,8 @@
         </p:nvSpPr>
         <p:spPr>
           <a:xfrm>
-            <a:off x="3840480" y="3002459"/>
-            <a:ext cx="566928" cy="224835"/>
+            <a:off x="3840480" y="3088520"/>
+            <a:ext cx="566928" cy="246350"/>
           </a:xfrm>
           <a:prstGeom prst="rect">
             <a:avLst/>
@@ -2429,8 +2429,8 @@
         </p:nvSpPr>
         <p:spPr>
           <a:xfrm>
-            <a:off x="4407408" y="3002459"/>
-            <a:ext cx="566928" cy="224835"/>
+            <a:off x="4407408" y="3088520"/>
+            <a:ext cx="566928" cy="246350"/>
           </a:xfrm>
           <a:prstGeom prst="rect">
             <a:avLst/>
@@ -2468,8 +2468,8 @@
         </p:nvSpPr>
         <p:spPr>
           <a:xfrm>
-            <a:off x="4974336" y="3002459"/>
-            <a:ext cx="859536" cy="224835"/>
+            <a:off x="4974336" y="3088520"/>
+            <a:ext cx="859536" cy="246350"/>
           </a:xfrm>
           <a:prstGeom prst="rect">
             <a:avLst/>
@@ -2507,8 +2507,8 @@
         </p:nvSpPr>
         <p:spPr>
           <a:xfrm>
-            <a:off x="585216" y="3227294"/>
-            <a:ext cx="5394960" cy="224835"/>
+            <a:off x="585216" y="3334871"/>
+            <a:ext cx="5394960" cy="246350"/>
           </a:xfrm>
           <a:prstGeom prst="rect">
             <a:avLst/>
@@ -2527,8 +2527,8 @@
         </p:nvSpPr>
         <p:spPr>
           <a:xfrm>
-            <a:off x="658368" y="3227294"/>
-            <a:ext cx="2011680" cy="224835"/>
+            <a:off x="658368" y="3334871"/>
+            <a:ext cx="2011680" cy="246350"/>
           </a:xfrm>
           <a:prstGeom prst="rect">
             <a:avLst/>
@@ -2566,8 +2566,8 @@
         </p:nvSpPr>
         <p:spPr>
           <a:xfrm>
-            <a:off x="3255264" y="3277882"/>
-            <a:ext cx="65728" cy="123659"/>
+            <a:off x="3255264" y="3390299"/>
+            <a:ext cx="65728" cy="135493"/>
           </a:xfrm>
           <a:prstGeom prst="rect">
             <a:avLst/>
@@ -2586,8 +2586,8 @@
         </p:nvSpPr>
         <p:spPr>
           <a:xfrm>
-            <a:off x="3840480" y="3227294"/>
-            <a:ext cx="566928" cy="224835"/>
+            <a:off x="3840480" y="3334871"/>
+            <a:ext cx="566928" cy="246350"/>
           </a:xfrm>
           <a:prstGeom prst="rect">
             <a:avLst/>
@@ -2625,8 +2625,8 @@
         </p:nvSpPr>
         <p:spPr>
           <a:xfrm>
-            <a:off x="4407408" y="3227294"/>
-            <a:ext cx="566928" cy="224835"/>
+            <a:off x="4407408" y="3334871"/>
+            <a:ext cx="566928" cy="246350"/>
           </a:xfrm>
           <a:prstGeom prst="rect">
             <a:avLst/>
@@ -2664,8 +2664,8 @@
         </p:nvSpPr>
         <p:spPr>
           <a:xfrm>
-            <a:off x="4974336" y="3227294"/>
-            <a:ext cx="859536" cy="224835"/>
+            <a:off x="4974336" y="3334871"/>
+            <a:ext cx="859536" cy="246350"/>
           </a:xfrm>
           <a:prstGeom prst="rect">
             <a:avLst/>
@@ -2703,8 +2703,8 @@
         </p:nvSpPr>
         <p:spPr>
           <a:xfrm>
-            <a:off x="658368" y="3452129"/>
-            <a:ext cx="2011680" cy="224835"/>
+            <a:off x="658368" y="3581221"/>
+            <a:ext cx="2011680" cy="246350"/>
           </a:xfrm>
           <a:prstGeom prst="rect">
             <a:avLst/>
@@ -2742,8 +2742,8 @@
         </p:nvSpPr>
         <p:spPr>
           <a:xfrm>
-            <a:off x="3255264" y="3502717"/>
-            <a:ext cx="65019" cy="123659"/>
+            <a:off x="3255264" y="3636649"/>
+            <a:ext cx="65019" cy="135493"/>
           </a:xfrm>
           <a:prstGeom prst="rect">
             <a:avLst/>
@@ -2762,8 +2762,8 @@
         </p:nvSpPr>
         <p:spPr>
           <a:xfrm>
-            <a:off x="3840480" y="3452129"/>
-            <a:ext cx="566928" cy="224835"/>
+            <a:off x="3840480" y="3581221"/>
+            <a:ext cx="566928" cy="246350"/>
           </a:xfrm>
           <a:prstGeom prst="rect">
             <a:avLst/>
@@ -2801,8 +2801,8 @@
         </p:nvSpPr>
         <p:spPr>
           <a:xfrm>
-            <a:off x="4407408" y="3452129"/>
-            <a:ext cx="566928" cy="224835"/>
+            <a:off x="4407408" y="3581221"/>
+            <a:ext cx="566928" cy="246350"/>
           </a:xfrm>
           <a:prstGeom prst="rect">
             <a:avLst/>
@@ -2840,8 +2840,8 @@
         </p:nvSpPr>
         <p:spPr>
           <a:xfrm>
-            <a:off x="4974336" y="3452129"/>
-            <a:ext cx="859536" cy="224835"/>
+            <a:off x="4974336" y="3581221"/>
+            <a:ext cx="859536" cy="246350"/>
           </a:xfrm>
           <a:prstGeom prst="rect">
             <a:avLst/>
@@ -2879,8 +2879,8 @@
         </p:nvSpPr>
         <p:spPr>
           <a:xfrm>
-            <a:off x="585216" y="3676964"/>
-            <a:ext cx="5394960" cy="224835"/>
+            <a:off x="585216" y="3827571"/>
+            <a:ext cx="5394960" cy="246350"/>
           </a:xfrm>
           <a:prstGeom prst="rect">
             <a:avLst/>
@@ -2899,8 +2899,8 @@
         </p:nvSpPr>
         <p:spPr>
           <a:xfrm>
-            <a:off x="658368" y="3676964"/>
-            <a:ext cx="2011680" cy="224835"/>
+            <a:off x="658368" y="3827571"/>
+            <a:ext cx="2011680" cy="246350"/>
           </a:xfrm>
           <a:prstGeom prst="rect">
             <a:avLst/>
@@ -2938,8 +2938,8 @@
         </p:nvSpPr>
         <p:spPr>
           <a:xfrm>
-            <a:off x="3255264" y="3727552"/>
-            <a:ext cx="23117" cy="123659"/>
+            <a:off x="3255264" y="3883000"/>
+            <a:ext cx="23117" cy="135493"/>
           </a:xfrm>
           <a:prstGeom prst="rect">
             <a:avLst/>
@@ -2958,8 +2958,8 @@
         </p:nvSpPr>
         <p:spPr>
           <a:xfrm>
-            <a:off x="3840480" y="3676964"/>
-            <a:ext cx="566928" cy="224835"/>
+            <a:off x="3840480" y="3827571"/>
+            <a:ext cx="566928" cy="246350"/>
           </a:xfrm>
           <a:prstGeom prst="rect">
             <a:avLst/>
@@ -2997,8 +2997,8 @@
         </p:nvSpPr>
         <p:spPr>
           <a:xfrm>
-            <a:off x="4407408" y="3676964"/>
-            <a:ext cx="566928" cy="224835"/>
+            <a:off x="4407408" y="3827571"/>
+            <a:ext cx="566928" cy="246350"/>
           </a:xfrm>
           <a:prstGeom prst="rect">
             <a:avLst/>
@@ -3036,8 +3036,8 @@
         </p:nvSpPr>
         <p:spPr>
           <a:xfrm>
-            <a:off x="4974336" y="3676964"/>
-            <a:ext cx="859536" cy="224835"/>
+            <a:off x="4974336" y="3827571"/>
+            <a:ext cx="859536" cy="246350"/>
           </a:xfrm>
           <a:prstGeom prst="rect">
             <a:avLst/>
@@ -3075,8 +3075,8 @@
         </p:nvSpPr>
         <p:spPr>
           <a:xfrm>
-            <a:off x="658368" y="3901799"/>
-            <a:ext cx="2011680" cy="224835"/>
+            <a:off x="658368" y="4073921"/>
+            <a:ext cx="2011680" cy="246350"/>
           </a:xfrm>
           <a:prstGeom prst="rect">
             <a:avLst/>
@@ -3114,8 +3114,8 @@
         </p:nvSpPr>
         <p:spPr>
           <a:xfrm>
-            <a:off x="3253849" y="3952386"/>
-            <a:ext cx="9144" cy="123659"/>
+            <a:off x="3253849" y="4129350"/>
+            <a:ext cx="9144" cy="135493"/>
           </a:xfrm>
           <a:prstGeom prst="rect">
             <a:avLst/>
@@ -3134,8 +3134,8 @@
         </p:nvSpPr>
         <p:spPr>
           <a:xfrm>
-            <a:off x="3840480" y="3901799"/>
-            <a:ext cx="566928" cy="224835"/>
+            <a:off x="3840480" y="4073921"/>
+            <a:ext cx="566928" cy="246350"/>
           </a:xfrm>
           <a:prstGeom prst="rect">
             <a:avLst/>
@@ -3173,8 +3173,8 @@
         </p:nvSpPr>
         <p:spPr>
           <a:xfrm>
-            <a:off x="4407408" y="3901799"/>
-            <a:ext cx="566928" cy="224835"/>
+            <a:off x="4407408" y="4073921"/>
+            <a:ext cx="566928" cy="246350"/>
           </a:xfrm>
           <a:prstGeom prst="rect">
             <a:avLst/>
@@ -3212,8 +3212,8 @@
         </p:nvSpPr>
         <p:spPr>
           <a:xfrm>
-            <a:off x="4974336" y="3901799"/>
-            <a:ext cx="859536" cy="224835"/>
+            <a:off x="4974336" y="4073921"/>
+            <a:ext cx="859536" cy="246350"/>
           </a:xfrm>
           <a:prstGeom prst="rect">
             <a:avLst/>
@@ -3251,8 +3251,8 @@
         </p:nvSpPr>
         <p:spPr>
           <a:xfrm>
-            <a:off x="585216" y="4126633"/>
-            <a:ext cx="5394960" cy="224835"/>
+            <a:off x="585216" y="4320271"/>
+            <a:ext cx="5394960" cy="246350"/>
           </a:xfrm>
           <a:prstGeom prst="rect">
             <a:avLst/>
@@ -3271,8 +3271,8 @@
         </p:nvSpPr>
         <p:spPr>
           <a:xfrm>
-            <a:off x="658368" y="4126633"/>
-            <a:ext cx="2011680" cy="224835"/>
+            <a:off x="658368" y="4320271"/>
+            <a:ext cx="2011680" cy="246350"/>
           </a:xfrm>
           <a:prstGeom prst="rect">
             <a:avLst/>
@@ -3310,8 +3310,8 @@
         </p:nvSpPr>
         <p:spPr>
           <a:xfrm>
-            <a:off x="3250197" y="4177221"/>
-            <a:ext cx="9144" cy="123659"/>
+            <a:off x="3250197" y="4375700"/>
+            <a:ext cx="9144" cy="135493"/>
           </a:xfrm>
           <a:prstGeom prst="rect">
             <a:avLst/>
@@ -3330,8 +3330,8 @@
         </p:nvSpPr>
         <p:spPr>
           <a:xfrm>
-            <a:off x="3840480" y="4126633"/>
-            <a:ext cx="566928" cy="224835"/>
+            <a:off x="3840480" y="4320271"/>
+            <a:ext cx="566928" cy="246350"/>
           </a:xfrm>
           <a:prstGeom prst="rect">
             <a:avLst/>
@@ -3369,8 +3369,8 @@
         </p:nvSpPr>
         <p:spPr>
           <a:xfrm>
-            <a:off x="4407408" y="4126633"/>
-            <a:ext cx="566928" cy="224835"/>
+            <a:off x="4407408" y="4320271"/>
+            <a:ext cx="566928" cy="246350"/>
           </a:xfrm>
           <a:prstGeom prst="rect">
             <a:avLst/>
@@ -3408,8 +3408,8 @@
         </p:nvSpPr>
         <p:spPr>
           <a:xfrm>
-            <a:off x="4974336" y="4126633"/>
-            <a:ext cx="859536" cy="224835"/>
+            <a:off x="4974336" y="4320271"/>
+            <a:ext cx="859536" cy="246350"/>
           </a:xfrm>
           <a:prstGeom prst="rect">
             <a:avLst/>
@@ -3447,8 +3447,8 @@
         </p:nvSpPr>
         <p:spPr>
           <a:xfrm>
-            <a:off x="658368" y="4351468"/>
-            <a:ext cx="2011680" cy="224835"/>
+            <a:off x="658368" y="4566621"/>
+            <a:ext cx="2011680" cy="246350"/>
           </a:xfrm>
           <a:prstGeom prst="rect">
             <a:avLst/>
@@ -3486,8 +3486,8 @@
         </p:nvSpPr>
         <p:spPr>
           <a:xfrm>
-            <a:off x="3245953" y="4402056"/>
-            <a:ext cx="9311" cy="123659"/>
+            <a:off x="3245953" y="4622050"/>
+            <a:ext cx="9311" cy="135493"/>
           </a:xfrm>
           <a:prstGeom prst="rect">
             <a:avLst/>
@@ -3506,8 +3506,8 @@
         </p:nvSpPr>
         <p:spPr>
           <a:xfrm>
-            <a:off x="3840480" y="4351468"/>
-            <a:ext cx="566928" cy="224835"/>
+            <a:off x="3840480" y="4566621"/>
+            <a:ext cx="566928" cy="246350"/>
           </a:xfrm>
           <a:prstGeom prst="rect">
             <a:avLst/>
@@ -3545,8 +3545,8 @@
         </p:nvSpPr>
         <p:spPr>
           <a:xfrm>
-            <a:off x="4407408" y="4351468"/>
-            <a:ext cx="566928" cy="224835"/>
+            <a:off x="4407408" y="4566621"/>
+            <a:ext cx="566928" cy="246350"/>
           </a:xfrm>
           <a:prstGeom prst="rect">
             <a:avLst/>
@@ -3584,8 +3584,8 @@
         </p:nvSpPr>
         <p:spPr>
           <a:xfrm>
-            <a:off x="4974336" y="4351468"/>
-            <a:ext cx="859536" cy="224835"/>
+            <a:off x="4974336" y="4566621"/>
+            <a:ext cx="859536" cy="246350"/>
           </a:xfrm>
           <a:prstGeom prst="rect">
             <a:avLst/>
@@ -3623,8 +3623,8 @@
         </p:nvSpPr>
         <p:spPr>
           <a:xfrm>
-            <a:off x="585216" y="4576303"/>
-            <a:ext cx="5394960" cy="224835"/>
+            <a:off x="585216" y="4812971"/>
+            <a:ext cx="5394960" cy="246350"/>
           </a:xfrm>
           <a:prstGeom prst="rect">
             <a:avLst/>
@@ -3643,8 +3643,8 @@
         </p:nvSpPr>
         <p:spPr>
           <a:xfrm>
-            <a:off x="658368" y="4576303"/>
-            <a:ext cx="2011680" cy="224835"/>
+            <a:off x="658368" y="4812971"/>
+            <a:ext cx="2011680" cy="246350"/>
           </a:xfrm>
           <a:prstGeom prst="rect">
             <a:avLst/>
@@ -3682,8 +3682,8 @@
         </p:nvSpPr>
         <p:spPr>
           <a:xfrm>
-            <a:off x="3244900" y="4626891"/>
-            <a:ext cx="10364" cy="123659"/>
+            <a:off x="3244900" y="4868400"/>
+            <a:ext cx="10364" cy="135493"/>
           </a:xfrm>
           <a:prstGeom prst="rect">
             <a:avLst/>
@@ -3702,8 +3702,8 @@
         </p:nvSpPr>
         <p:spPr>
           <a:xfrm>
-            <a:off x="3840480" y="4576303"/>
-            <a:ext cx="566928" cy="224835"/>
+            <a:off x="3840480" y="4812971"/>
+            <a:ext cx="566928" cy="246350"/>
           </a:xfrm>
           <a:prstGeom prst="rect">
             <a:avLst/>
@@ -3741,8 +3741,8 @@
         </p:nvSpPr>
         <p:spPr>
           <a:xfrm>
-            <a:off x="4407408" y="4576303"/>
-            <a:ext cx="566928" cy="224835"/>
+            <a:off x="4407408" y="4812971"/>
+            <a:ext cx="566928" cy="246350"/>
           </a:xfrm>
           <a:prstGeom prst="rect">
             <a:avLst/>
@@ -3780,8 +3780,8 @@
         </p:nvSpPr>
         <p:spPr>
           <a:xfrm>
-            <a:off x="4974336" y="4576303"/>
-            <a:ext cx="859536" cy="224835"/>
+            <a:off x="4974336" y="4812971"/>
+            <a:ext cx="859536" cy="246350"/>
           </a:xfrm>
           <a:prstGeom prst="rect">
             <a:avLst/>
@@ -3819,8 +3819,8 @@
         </p:nvSpPr>
         <p:spPr>
           <a:xfrm>
-            <a:off x="658368" y="4801138"/>
-            <a:ext cx="2011680" cy="224835"/>
+            <a:off x="658368" y="5059321"/>
+            <a:ext cx="2011680" cy="246350"/>
           </a:xfrm>
           <a:prstGeom prst="rect">
             <a:avLst/>
@@ -3858,8 +3858,8 @@
         </p:nvSpPr>
         <p:spPr>
           <a:xfrm>
-            <a:off x="3221879" y="4851726"/>
-            <a:ext cx="33385" cy="123659"/>
+            <a:off x="3221879" y="5114750"/>
+            <a:ext cx="33385" cy="135493"/>
           </a:xfrm>
           <a:prstGeom prst="rect">
             <a:avLst/>
@@ -3878,8 +3878,8 @@
         </p:nvSpPr>
         <p:spPr>
           <a:xfrm>
-            <a:off x="3840480" y="4801138"/>
-            <a:ext cx="566928" cy="224835"/>
+            <a:off x="3840480" y="5059321"/>
+            <a:ext cx="566928" cy="246350"/>
           </a:xfrm>
           <a:prstGeom prst="rect">
             <a:avLst/>
@@ -3917,8 +3917,8 @@
         </p:nvSpPr>
         <p:spPr>
           <a:xfrm>
-            <a:off x="4407408" y="4801138"/>
-            <a:ext cx="566928" cy="224835"/>
+            <a:off x="4407408" y="5059321"/>
+            <a:ext cx="566928" cy="246350"/>
           </a:xfrm>
           <a:prstGeom prst="rect">
             <a:avLst/>
@@ -3956,8 +3956,8 @@
         </p:nvSpPr>
         <p:spPr>
           <a:xfrm>
-            <a:off x="4974336" y="4801138"/>
-            <a:ext cx="859536" cy="224835"/>
+            <a:off x="4974336" y="5059321"/>
+            <a:ext cx="859536" cy="246350"/>
           </a:xfrm>
           <a:prstGeom prst="rect">
             <a:avLst/>
@@ -3995,8 +3995,8 @@
         </p:nvSpPr>
         <p:spPr>
           <a:xfrm>
-            <a:off x="585216" y="5025973"/>
-            <a:ext cx="5394960" cy="224835"/>
+            <a:off x="585216" y="5305672"/>
+            <a:ext cx="5394960" cy="246350"/>
           </a:xfrm>
           <a:prstGeom prst="rect">
             <a:avLst/>
@@ -4015,8 +4015,8 @@
         </p:nvSpPr>
         <p:spPr>
           <a:xfrm>
-            <a:off x="658368" y="5025973"/>
-            <a:ext cx="2011680" cy="224835"/>
+            <a:off x="658368" y="5305672"/>
+            <a:ext cx="2011680" cy="246350"/>
           </a:xfrm>
           <a:prstGeom prst="rect">
             <a:avLst/>
@@ -4054,8 +4054,8 @@
         </p:nvSpPr>
         <p:spPr>
           <a:xfrm>
-            <a:off x="3198494" y="5076561"/>
-            <a:ext cx="56770" cy="123659"/>
+            <a:off x="3198494" y="5361100"/>
+            <a:ext cx="56770" cy="135493"/>
           </a:xfrm>
           <a:prstGeom prst="rect">
             <a:avLst/>
@@ -4074,8 +4074,8 @@
         </p:nvSpPr>
         <p:spPr>
           <a:xfrm>
-            <a:off x="3840480" y="5025973"/>
-            <a:ext cx="566928" cy="224835"/>
+            <a:off x="3840480" y="5305672"/>
+            <a:ext cx="566928" cy="246350"/>
           </a:xfrm>
           <a:prstGeom prst="rect">
             <a:avLst/>
@@ -4113,8 +4113,8 @@
         </p:nvSpPr>
         <p:spPr>
           <a:xfrm>
-            <a:off x="4407408" y="5025973"/>
-            <a:ext cx="566928" cy="224835"/>
+            <a:off x="4407408" y="5305672"/>
+            <a:ext cx="566928" cy="246350"/>
           </a:xfrm>
           <a:prstGeom prst="rect">
             <a:avLst/>
@@ -4152,8 +4152,8 @@
         </p:nvSpPr>
         <p:spPr>
           <a:xfrm>
-            <a:off x="4974336" y="5025973"/>
-            <a:ext cx="859536" cy="224835"/>
+            <a:off x="4974336" y="5305672"/>
+            <a:ext cx="859536" cy="246350"/>
           </a:xfrm>
           <a:prstGeom prst="rect">
             <a:avLst/>
@@ -4191,8 +4191,8 @@
         </p:nvSpPr>
         <p:spPr>
           <a:xfrm>
-            <a:off x="658368" y="5250808"/>
-            <a:ext cx="2011680" cy="224835"/>
+            <a:off x="658368" y="5552022"/>
+            <a:ext cx="2011680" cy="246350"/>
           </a:xfrm>
           <a:prstGeom prst="rect">
             <a:avLst/>
@@ -4230,8 +4230,8 @@
         </p:nvSpPr>
         <p:spPr>
           <a:xfrm>
-            <a:off x="3198327" y="5301395"/>
-            <a:ext cx="56937" cy="123659"/>
+            <a:off x="3198327" y="5607450"/>
+            <a:ext cx="56937" cy="135493"/>
           </a:xfrm>
           <a:prstGeom prst="rect">
             <a:avLst/>
@@ -4250,8 +4250,8 @@
         </p:nvSpPr>
         <p:spPr>
           <a:xfrm>
-            <a:off x="3840480" y="5250808"/>
-            <a:ext cx="566928" cy="224835"/>
+            <a:off x="3840480" y="5552022"/>
+            <a:ext cx="566928" cy="246350"/>
           </a:xfrm>
           <a:prstGeom prst="rect">
             <a:avLst/>
@@ -4289,8 +4289,8 @@
         </p:nvSpPr>
         <p:spPr>
           <a:xfrm>
-            <a:off x="4407408" y="5250808"/>
-            <a:ext cx="566928" cy="224835"/>
+            <a:off x="4407408" y="5552022"/>
+            <a:ext cx="566928" cy="246350"/>
           </a:xfrm>
           <a:prstGeom prst="rect">
             <a:avLst/>
@@ -4328,8 +4328,8 @@
         </p:nvSpPr>
         <p:spPr>
           <a:xfrm>
-            <a:off x="4974336" y="5250808"/>
-            <a:ext cx="859536" cy="224835"/>
+            <a:off x="4974336" y="5552022"/>
+            <a:ext cx="859536" cy="246350"/>
           </a:xfrm>
           <a:prstGeom prst="rect">
             <a:avLst/>
@@ -4367,8 +4367,8 @@
         </p:nvSpPr>
         <p:spPr>
           <a:xfrm>
-            <a:off x="585216" y="5475642"/>
-            <a:ext cx="5394960" cy="224835"/>
+            <a:off x="585216" y="5798372"/>
+            <a:ext cx="5394960" cy="246350"/>
           </a:xfrm>
           <a:prstGeom prst="rect">
             <a:avLst/>
@@ -4387,8 +4387,8 @@
         </p:nvSpPr>
         <p:spPr>
           <a:xfrm>
-            <a:off x="658368" y="5475642"/>
-            <a:ext cx="2011680" cy="224835"/>
+            <a:off x="658368" y="5798372"/>
+            <a:ext cx="2011680" cy="246350"/>
           </a:xfrm>
           <a:prstGeom prst="rect">
             <a:avLst/>
@@ -4426,8 +4426,8 @@
         </p:nvSpPr>
         <p:spPr>
           <a:xfrm>
-            <a:off x="3197693" y="5526230"/>
-            <a:ext cx="57571" cy="123659"/>
+            <a:off x="3197693" y="5853801"/>
+            <a:ext cx="57571" cy="135493"/>
           </a:xfrm>
           <a:prstGeom prst="rect">
             <a:avLst/>
@@ -4446,8 +4446,8 @@
         </p:nvSpPr>
         <p:spPr>
           <a:xfrm>
-            <a:off x="3840480" y="5475642"/>
-            <a:ext cx="566928" cy="224835"/>
+            <a:off x="3840480" y="5798372"/>
+            <a:ext cx="566928" cy="246350"/>
           </a:xfrm>
           <a:prstGeom prst="rect">
             <a:avLst/>
@@ -4485,8 +4485,8 @@
         </p:nvSpPr>
         <p:spPr>
           <a:xfrm>
-            <a:off x="4407408" y="5475642"/>
-            <a:ext cx="566928" cy="224835"/>
+            <a:off x="4407408" y="5798372"/>
+            <a:ext cx="566928" cy="246350"/>
           </a:xfrm>
           <a:prstGeom prst="rect">
             <a:avLst/>
@@ -4524,8 +4524,8 @@
         </p:nvSpPr>
         <p:spPr>
           <a:xfrm>
-            <a:off x="4974336" y="5475642"/>
-            <a:ext cx="859536" cy="224835"/>
+            <a:off x="4974336" y="5798372"/>
+            <a:ext cx="859536" cy="246350"/>
           </a:xfrm>
           <a:prstGeom prst="rect">
             <a:avLst/>
@@ -4563,8 +4563,8 @@
         </p:nvSpPr>
         <p:spPr>
           <a:xfrm>
-            <a:off x="658368" y="5700477"/>
-            <a:ext cx="2011680" cy="224835"/>
+            <a:off x="658368" y="6044722"/>
+            <a:ext cx="2011680" cy="246350"/>
           </a:xfrm>
           <a:prstGeom prst="rect">
             <a:avLst/>
@@ -4602,8 +4602,8 @@
         </p:nvSpPr>
         <p:spPr>
           <a:xfrm>
-            <a:off x="3195970" y="5751065"/>
-            <a:ext cx="59294" cy="123659"/>
+            <a:off x="3195970" y="6100151"/>
+            <a:ext cx="59294" cy="135493"/>
           </a:xfrm>
           <a:prstGeom prst="rect">
             <a:avLst/>
@@ -4622,8 +4622,8 @@
         </p:nvSpPr>
         <p:spPr>
           <a:xfrm>
-            <a:off x="3840480" y="5700477"/>
-            <a:ext cx="566928" cy="224835"/>
+            <a:off x="3840480" y="6044722"/>
+            <a:ext cx="566928" cy="246350"/>
           </a:xfrm>
           <a:prstGeom prst="rect">
             <a:avLst/>
@@ -4661,8 +4661,8 @@
         </p:nvSpPr>
         <p:spPr>
           <a:xfrm>
-            <a:off x="4407408" y="5700477"/>
-            <a:ext cx="566928" cy="224835"/>
+            <a:off x="4407408" y="6044722"/>
+            <a:ext cx="566928" cy="246350"/>
           </a:xfrm>
           <a:prstGeom prst="rect">
             <a:avLst/>
@@ -4700,8 +4700,8 @@
         </p:nvSpPr>
         <p:spPr>
           <a:xfrm>
-            <a:off x="4974336" y="5700477"/>
-            <a:ext cx="859536" cy="224835"/>
+            <a:off x="4974336" y="6044722"/>
+            <a:ext cx="859536" cy="246350"/>
           </a:xfrm>
           <a:prstGeom prst="rect">
             <a:avLst/>
@@ -4740,7 +4740,7 @@
         <p:spPr>
           <a:xfrm>
             <a:off x="6208776" y="2103120"/>
-            <a:ext cx="2011680" cy="224835"/>
+            <a:ext cx="2011680" cy="246350"/>
           </a:xfrm>
           <a:prstGeom prst="rect">
             <a:avLst/>
@@ -4778,8 +4778,8 @@
         </p:nvSpPr>
         <p:spPr>
           <a:xfrm>
-            <a:off x="8734848" y="2153708"/>
-            <a:ext cx="70824" cy="123659"/>
+            <a:off x="8734848" y="2158549"/>
+            <a:ext cx="70824" cy="135493"/>
           </a:xfrm>
           <a:prstGeom prst="rect">
             <a:avLst/>
@@ -4799,7 +4799,7 @@
         <p:spPr>
           <a:xfrm>
             <a:off x="9390888" y="2103120"/>
-            <a:ext cx="566928" cy="224835"/>
+            <a:ext cx="566928" cy="246350"/>
           </a:xfrm>
           <a:prstGeom prst="rect">
             <a:avLst/>
@@ -4838,7 +4838,7 @@
         <p:spPr>
           <a:xfrm>
             <a:off x="9957816" y="2103120"/>
-            <a:ext cx="566928" cy="224835"/>
+            <a:ext cx="566928" cy="246350"/>
           </a:xfrm>
           <a:prstGeom prst="rect">
             <a:avLst/>
@@ -4877,7 +4877,7 @@
         <p:spPr>
           <a:xfrm>
             <a:off x="10524744" y="2103120"/>
-            <a:ext cx="859536" cy="224835"/>
+            <a:ext cx="859536" cy="246350"/>
           </a:xfrm>
           <a:prstGeom prst="rect">
             <a:avLst/>
@@ -4915,8 +4915,8 @@
         </p:nvSpPr>
         <p:spPr>
           <a:xfrm>
-            <a:off x="6135624" y="2327955"/>
-            <a:ext cx="5394960" cy="224835"/>
+            <a:off x="6135624" y="2349470"/>
+            <a:ext cx="5394960" cy="246350"/>
           </a:xfrm>
           <a:prstGeom prst="rect">
             <a:avLst/>
@@ -4935,8 +4935,8 @@
         </p:nvSpPr>
         <p:spPr>
           <a:xfrm>
-            <a:off x="6208776" y="2327955"/>
-            <a:ext cx="2011680" cy="224835"/>
+            <a:off x="6208776" y="2349470"/>
+            <a:ext cx="2011680" cy="246350"/>
           </a:xfrm>
           <a:prstGeom prst="rect">
             <a:avLst/>
@@ -4974,8 +4974,8 @@
         </p:nvSpPr>
         <p:spPr>
           <a:xfrm>
-            <a:off x="8730906" y="2378543"/>
-            <a:ext cx="74766" cy="123659"/>
+            <a:off x="8730906" y="2404899"/>
+            <a:ext cx="74766" cy="135493"/>
           </a:xfrm>
           <a:prstGeom prst="rect">
             <a:avLst/>
@@ -4994,8 +4994,8 @@
         </p:nvSpPr>
         <p:spPr>
           <a:xfrm>
-            <a:off x="9390888" y="2327955"/>
-            <a:ext cx="566928" cy="224835"/>
+            <a:off x="9390888" y="2349470"/>
+            <a:ext cx="566928" cy="246350"/>
           </a:xfrm>
           <a:prstGeom prst="rect">
             <a:avLst/>
@@ -5033,8 +5033,8 @@
         </p:nvSpPr>
         <p:spPr>
           <a:xfrm>
-            <a:off x="9957816" y="2327955"/>
-            <a:ext cx="566928" cy="224835"/>
+            <a:off x="9957816" y="2349470"/>
+            <a:ext cx="566928" cy="246350"/>
           </a:xfrm>
           <a:prstGeom prst="rect">
             <a:avLst/>
@@ -5072,8 +5072,8 @@
         </p:nvSpPr>
         <p:spPr>
           <a:xfrm>
-            <a:off x="10524744" y="2327955"/>
-            <a:ext cx="859536" cy="224835"/>
+            <a:off x="10524744" y="2349470"/>
+            <a:ext cx="859536" cy="246350"/>
           </a:xfrm>
           <a:prstGeom prst="rect">
             <a:avLst/>
@@ -5111,8 +5111,8 @@
         </p:nvSpPr>
         <p:spPr>
           <a:xfrm>
-            <a:off x="6208776" y="2552790"/>
-            <a:ext cx="2011680" cy="224835"/>
+            <a:off x="6208776" y="2595820"/>
+            <a:ext cx="2011680" cy="246350"/>
           </a:xfrm>
           <a:prstGeom prst="rect">
             <a:avLst/>
@@ -5150,8 +5150,8 @@
         </p:nvSpPr>
         <p:spPr>
           <a:xfrm>
-            <a:off x="8716961" y="2603377"/>
-            <a:ext cx="88711" cy="123659"/>
+            <a:off x="8716961" y="2651249"/>
+            <a:ext cx="88711" cy="135493"/>
           </a:xfrm>
           <a:prstGeom prst="rect">
             <a:avLst/>
@@ -5170,8 +5170,8 @@
         </p:nvSpPr>
         <p:spPr>
           <a:xfrm>
-            <a:off x="9390888" y="2552790"/>
-            <a:ext cx="566928" cy="224835"/>
+            <a:off x="9390888" y="2595820"/>
+            <a:ext cx="566928" cy="246350"/>
           </a:xfrm>
           <a:prstGeom prst="rect">
             <a:avLst/>
@@ -5209,8 +5209,8 @@
         </p:nvSpPr>
         <p:spPr>
           <a:xfrm>
-            <a:off x="9957816" y="2552790"/>
-            <a:ext cx="566928" cy="224835"/>
+            <a:off x="9957816" y="2595820"/>
+            <a:ext cx="566928" cy="246350"/>
           </a:xfrm>
           <a:prstGeom prst="rect">
             <a:avLst/>
@@ -5248,8 +5248,8 @@
         </p:nvSpPr>
         <p:spPr>
           <a:xfrm>
-            <a:off x="10524744" y="2552790"/>
-            <a:ext cx="859536" cy="224835"/>
+            <a:off x="10524744" y="2595820"/>
+            <a:ext cx="859536" cy="246350"/>
           </a:xfrm>
           <a:prstGeom prst="rect">
             <a:avLst/>
@@ -5287,8 +5287,8 @@
         </p:nvSpPr>
         <p:spPr>
           <a:xfrm>
-            <a:off x="6135624" y="2777624"/>
-            <a:ext cx="5394960" cy="224835"/>
+            <a:off x="6135624" y="2842170"/>
+            <a:ext cx="5394960" cy="246350"/>
           </a:xfrm>
           <a:prstGeom prst="rect">
             <a:avLst/>
@@ -5307,8 +5307,8 @@
         </p:nvSpPr>
         <p:spPr>
           <a:xfrm>
-            <a:off x="6208776" y="2777624"/>
-            <a:ext cx="2011680" cy="224835"/>
+            <a:off x="6208776" y="2842170"/>
+            <a:ext cx="2011680" cy="246350"/>
           </a:xfrm>
           <a:prstGeom prst="rect">
             <a:avLst/>
@@ -5346,8 +5346,8 @@
         </p:nvSpPr>
         <p:spPr>
           <a:xfrm>
-            <a:off x="8711353" y="2828212"/>
-            <a:ext cx="94319" cy="123659"/>
+            <a:off x="8711353" y="2897599"/>
+            <a:ext cx="94319" cy="135493"/>
           </a:xfrm>
           <a:prstGeom prst="rect">
             <a:avLst/>
@@ -5366,8 +5366,8 @@
         </p:nvSpPr>
         <p:spPr>
           <a:xfrm>
-            <a:off x="9390888" y="2777624"/>
-            <a:ext cx="566928" cy="224835"/>
+            <a:off x="9390888" y="2842170"/>
+            <a:ext cx="566928" cy="246350"/>
           </a:xfrm>
           <a:prstGeom prst="rect">
             <a:avLst/>
@@ -5405,8 +5405,8 @@
         </p:nvSpPr>
         <p:spPr>
           <a:xfrm>
-            <a:off x="9957816" y="2777624"/>
-            <a:ext cx="566928" cy="224835"/>
+            <a:off x="9957816" y="2842170"/>
+            <a:ext cx="566928" cy="246350"/>
           </a:xfrm>
           <a:prstGeom prst="rect">
             <a:avLst/>
@@ -5444,8 +5444,8 @@
         </p:nvSpPr>
         <p:spPr>
           <a:xfrm>
-            <a:off x="10524744" y="2777624"/>
-            <a:ext cx="859536" cy="224835"/>
+            <a:off x="10524744" y="2842170"/>
+            <a:ext cx="859536" cy="246350"/>
           </a:xfrm>
           <a:prstGeom prst="rect">
             <a:avLst/>
@@ -5483,8 +5483,8 @@
         </p:nvSpPr>
         <p:spPr>
           <a:xfrm>
-            <a:off x="6208776" y="3002459"/>
-            <a:ext cx="2011680" cy="224835"/>
+            <a:off x="6208776" y="3088520"/>
+            <a:ext cx="2011680" cy="246350"/>
           </a:xfrm>
           <a:prstGeom prst="rect">
             <a:avLst/>
@@ -5522,8 +5522,8 @@
         </p:nvSpPr>
         <p:spPr>
           <a:xfrm>
-            <a:off x="8703971" y="3053047"/>
-            <a:ext cx="101701" cy="123659"/>
+            <a:off x="8703971" y="3143949"/>
+            <a:ext cx="101701" cy="135493"/>
           </a:xfrm>
           <a:prstGeom prst="rect">
             <a:avLst/>
@@ -5542,8 +5542,8 @@
         </p:nvSpPr>
         <p:spPr>
           <a:xfrm>
-            <a:off x="9390888" y="3002459"/>
-            <a:ext cx="566928" cy="224835"/>
+            <a:off x="9390888" y="3088520"/>
+            <a:ext cx="566928" cy="246350"/>
           </a:xfrm>
           <a:prstGeom prst="rect">
             <a:avLst/>
@@ -5581,8 +5581,8 @@
         </p:nvSpPr>
         <p:spPr>
           <a:xfrm>
-            <a:off x="9957816" y="3002459"/>
-            <a:ext cx="566928" cy="224835"/>
+            <a:off x="9957816" y="3088520"/>
+            <a:ext cx="566928" cy="246350"/>
           </a:xfrm>
           <a:prstGeom prst="rect">
             <a:avLst/>
@@ -5620,8 +5620,8 @@
         </p:nvSpPr>
         <p:spPr>
           <a:xfrm>
-            <a:off x="10524744" y="3002459"/>
-            <a:ext cx="859536" cy="224835"/>
+            <a:off x="10524744" y="3088520"/>
+            <a:ext cx="859536" cy="246350"/>
           </a:xfrm>
           <a:prstGeom prst="rect">
             <a:avLst/>
@@ -5659,8 +5659,8 @@
         </p:nvSpPr>
         <p:spPr>
           <a:xfrm>
-            <a:off x="6135624" y="3227294"/>
-            <a:ext cx="5394960" cy="224835"/>
+            <a:off x="6135624" y="3334871"/>
+            <a:ext cx="5394960" cy="246350"/>
           </a:xfrm>
           <a:prstGeom prst="rect">
             <a:avLst/>
@@ -5679,8 +5679,8 @@
         </p:nvSpPr>
         <p:spPr>
           <a:xfrm>
-            <a:off x="6208776" y="3227294"/>
-            <a:ext cx="2011680" cy="224835"/>
+            <a:off x="6208776" y="3334871"/>
+            <a:ext cx="2011680" cy="246350"/>
           </a:xfrm>
           <a:prstGeom prst="rect">
             <a:avLst/>
@@ -5718,8 +5718,8 @@
         </p:nvSpPr>
         <p:spPr>
           <a:xfrm>
-            <a:off x="8701890" y="3277882"/>
-            <a:ext cx="103782" cy="123659"/>
+            <a:off x="8701890" y="3390299"/>
+            <a:ext cx="103782" cy="135493"/>
           </a:xfrm>
           <a:prstGeom prst="rect">
             <a:avLst/>
@@ -5738,8 +5738,8 @@
         </p:nvSpPr>
         <p:spPr>
           <a:xfrm>
-            <a:off x="9390888" y="3227294"/>
-            <a:ext cx="566928" cy="224835"/>
+            <a:off x="9390888" y="3334871"/>
+            <a:ext cx="566928" cy="246350"/>
           </a:xfrm>
           <a:prstGeom prst="rect">
             <a:avLst/>
@@ -5777,8 +5777,8 @@
         </p:nvSpPr>
         <p:spPr>
           <a:xfrm>
-            <a:off x="9957816" y="3227294"/>
-            <a:ext cx="566928" cy="224835"/>
+            <a:off x="9957816" y="3334871"/>
+            <a:ext cx="566928" cy="246350"/>
           </a:xfrm>
           <a:prstGeom prst="rect">
             <a:avLst/>
@@ -5816,8 +5816,8 @@
         </p:nvSpPr>
         <p:spPr>
           <a:xfrm>
-            <a:off x="10524744" y="3227294"/>
-            <a:ext cx="859536" cy="224835"/>
+            <a:off x="10524744" y="3334871"/>
+            <a:ext cx="859536" cy="246350"/>
           </a:xfrm>
           <a:prstGeom prst="rect">
             <a:avLst/>
@@ -5855,8 +5855,8 @@
         </p:nvSpPr>
         <p:spPr>
           <a:xfrm>
-            <a:off x="6208776" y="3452129"/>
-            <a:ext cx="2011680" cy="224835"/>
+            <a:off x="6208776" y="3581221"/>
+            <a:ext cx="2011680" cy="246350"/>
           </a:xfrm>
           <a:prstGeom prst="rect">
             <a:avLst/>
@@ -5894,8 +5894,8 @@
         </p:nvSpPr>
         <p:spPr>
           <a:xfrm>
-            <a:off x="8679444" y="3502717"/>
-            <a:ext cx="126228" cy="123659"/>
+            <a:off x="8679444" y="3636649"/>
+            <a:ext cx="126228" cy="135493"/>
           </a:xfrm>
           <a:prstGeom prst="rect">
             <a:avLst/>
@@ -5914,8 +5914,8 @@
         </p:nvSpPr>
         <p:spPr>
           <a:xfrm>
-            <a:off x="9390888" y="3452129"/>
-            <a:ext cx="566928" cy="224835"/>
+            <a:off x="9390888" y="3581221"/>
+            <a:ext cx="566928" cy="246350"/>
           </a:xfrm>
           <a:prstGeom prst="rect">
             <a:avLst/>
@@ -5953,8 +5953,8 @@
         </p:nvSpPr>
         <p:spPr>
           <a:xfrm>
-            <a:off x="9957816" y="3452129"/>
-            <a:ext cx="566928" cy="224835"/>
+            <a:off x="9957816" y="3581221"/>
+            <a:ext cx="566928" cy="246350"/>
           </a:xfrm>
           <a:prstGeom prst="rect">
             <a:avLst/>
@@ -5992,8 +5992,8 @@
         </p:nvSpPr>
         <p:spPr>
           <a:xfrm>
-            <a:off x="10524744" y="3452129"/>
-            <a:ext cx="859536" cy="224835"/>
+            <a:off x="10524744" y="3581221"/>
+            <a:ext cx="859536" cy="246350"/>
           </a:xfrm>
           <a:prstGeom prst="rect">
             <a:avLst/>
@@ -6031,8 +6031,8 @@
         </p:nvSpPr>
         <p:spPr>
           <a:xfrm>
-            <a:off x="6135624" y="3676964"/>
-            <a:ext cx="5394960" cy="224835"/>
+            <a:off x="6135624" y="3827571"/>
+            <a:ext cx="5394960" cy="246350"/>
           </a:xfrm>
           <a:prstGeom prst="rect">
             <a:avLst/>
@@ -6051,8 +6051,8 @@
         </p:nvSpPr>
         <p:spPr>
           <a:xfrm>
-            <a:off x="6208776" y="3676964"/>
-            <a:ext cx="2011680" cy="224835"/>
+            <a:off x="6208776" y="3827571"/>
+            <a:ext cx="2011680" cy="246350"/>
           </a:xfrm>
           <a:prstGeom prst="rect">
             <a:avLst/>
@@ -6090,8 +6090,8 @@
         </p:nvSpPr>
         <p:spPr>
           <a:xfrm>
-            <a:off x="8672194" y="3727552"/>
-            <a:ext cx="133478" cy="123659"/>
+            <a:off x="8672194" y="3883000"/>
+            <a:ext cx="133478" cy="135493"/>
           </a:xfrm>
           <a:prstGeom prst="rect">
             <a:avLst/>
@@ -6110,8 +6110,8 @@
         </p:nvSpPr>
         <p:spPr>
           <a:xfrm>
-            <a:off x="9390888" y="3676964"/>
-            <a:ext cx="566928" cy="224835"/>
+            <a:off x="9390888" y="3827571"/>
+            <a:ext cx="566928" cy="246350"/>
           </a:xfrm>
           <a:prstGeom prst="rect">
             <a:avLst/>
@@ -6149,8 +6149,8 @@
         </p:nvSpPr>
         <p:spPr>
           <a:xfrm>
-            <a:off x="9957816" y="3676964"/>
-            <a:ext cx="566928" cy="224835"/>
+            <a:off x="9957816" y="3827571"/>
+            <a:ext cx="566928" cy="246350"/>
           </a:xfrm>
           <a:prstGeom prst="rect">
             <a:avLst/>
@@ -6188,8 +6188,8 @@
         </p:nvSpPr>
         <p:spPr>
           <a:xfrm>
-            <a:off x="10524744" y="3676964"/>
-            <a:ext cx="859536" cy="224835"/>
+            <a:off x="10524744" y="3827571"/>
+            <a:ext cx="859536" cy="246350"/>
           </a:xfrm>
           <a:prstGeom prst="rect">
             <a:avLst/>
@@ -6227,8 +6227,8 @@
         </p:nvSpPr>
         <p:spPr>
           <a:xfrm>
-            <a:off x="6208776" y="3901799"/>
-            <a:ext cx="2011680" cy="224835"/>
+            <a:off x="6208776" y="4073921"/>
+            <a:ext cx="2011680" cy="246350"/>
           </a:xfrm>
           <a:prstGeom prst="rect">
             <a:avLst/>
@@ -6266,8 +6266,8 @@
         </p:nvSpPr>
         <p:spPr>
           <a:xfrm>
-            <a:off x="8624168" y="3952386"/>
-            <a:ext cx="181504" cy="123659"/>
+            <a:off x="8624168" y="4129350"/>
+            <a:ext cx="181504" cy="135493"/>
           </a:xfrm>
           <a:prstGeom prst="rect">
             <a:avLst/>
@@ -6286,8 +6286,8 @@
         </p:nvSpPr>
         <p:spPr>
           <a:xfrm>
-            <a:off x="9390888" y="3901799"/>
-            <a:ext cx="566928" cy="224835"/>
+            <a:off x="9390888" y="4073921"/>
+            <a:ext cx="566928" cy="246350"/>
           </a:xfrm>
           <a:prstGeom prst="rect">
             <a:avLst/>
@@ -6325,8 +6325,8 @@
         </p:nvSpPr>
         <p:spPr>
           <a:xfrm>
-            <a:off x="9957816" y="3901799"/>
-            <a:ext cx="566928" cy="224835"/>
+            <a:off x="9957816" y="4073921"/>
+            <a:ext cx="566928" cy="246350"/>
           </a:xfrm>
           <a:prstGeom prst="rect">
             <a:avLst/>
@@ -6364,8 +6364,8 @@
         </p:nvSpPr>
         <p:spPr>
           <a:xfrm>
-            <a:off x="10524744" y="3901799"/>
-            <a:ext cx="859536" cy="224835"/>
+            <a:off x="10524744" y="4073921"/>
+            <a:ext cx="859536" cy="246350"/>
           </a:xfrm>
           <a:prstGeom prst="rect">
             <a:avLst/>
@@ -6403,8 +6403,8 @@
         </p:nvSpPr>
         <p:spPr>
           <a:xfrm>
-            <a:off x="6135624" y="4126633"/>
-            <a:ext cx="5394960" cy="224835"/>
+            <a:off x="6135624" y="4320271"/>
+            <a:ext cx="5394960" cy="246350"/>
           </a:xfrm>
           <a:prstGeom prst="rect">
             <a:avLst/>
@@ -6423,8 +6423,8 @@
         </p:nvSpPr>
         <p:spPr>
           <a:xfrm>
-            <a:off x="6208776" y="4126633"/>
-            <a:ext cx="2011680" cy="224835"/>
+            <a:off x="6208776" y="4320271"/>
+            <a:ext cx="2011680" cy="246350"/>
           </a:xfrm>
           <a:prstGeom prst="rect">
             <a:avLst/>
@@ -6462,8 +6462,8 @@
         </p:nvSpPr>
         <p:spPr>
           <a:xfrm>
-            <a:off x="8616775" y="4177221"/>
-            <a:ext cx="188897" cy="123659"/>
+            <a:off x="8616775" y="4375700"/>
+            <a:ext cx="188897" cy="135493"/>
           </a:xfrm>
           <a:prstGeom prst="rect">
             <a:avLst/>
@@ -6482,8 +6482,8 @@
         </p:nvSpPr>
         <p:spPr>
           <a:xfrm>
-            <a:off x="9390888" y="4126633"/>
-            <a:ext cx="566928" cy="224835"/>
+            <a:off x="9390888" y="4320271"/>
+            <a:ext cx="566928" cy="246350"/>
           </a:xfrm>
           <a:prstGeom prst="rect">
             <a:avLst/>
@@ -6521,8 +6521,8 @@
         </p:nvSpPr>
         <p:spPr>
           <a:xfrm>
-            <a:off x="9957816" y="4126633"/>
-            <a:ext cx="566928" cy="224835"/>
+            <a:off x="9957816" y="4320271"/>
+            <a:ext cx="566928" cy="246350"/>
           </a:xfrm>
           <a:prstGeom prst="rect">
             <a:avLst/>
@@ -6560,8 +6560,8 @@
         </p:nvSpPr>
         <p:spPr>
           <a:xfrm>
-            <a:off x="10524744" y="4126633"/>
-            <a:ext cx="859536" cy="224835"/>
+            <a:off x="10524744" y="4320271"/>
+            <a:ext cx="859536" cy="246350"/>
           </a:xfrm>
           <a:prstGeom prst="rect">
             <a:avLst/>
@@ -6599,8 +6599,8 @@
         </p:nvSpPr>
         <p:spPr>
           <a:xfrm>
-            <a:off x="6208776" y="4351468"/>
-            <a:ext cx="2011680" cy="224835"/>
+            <a:off x="6208776" y="4566621"/>
+            <a:ext cx="2011680" cy="246350"/>
           </a:xfrm>
           <a:prstGeom prst="rect">
             <a:avLst/>
@@ -6638,8 +6638,8 @@
         </p:nvSpPr>
         <p:spPr>
           <a:xfrm>
-            <a:off x="8590345" y="4402056"/>
-            <a:ext cx="215327" cy="123659"/>
+            <a:off x="8590345" y="4622050"/>
+            <a:ext cx="215327" cy="135493"/>
           </a:xfrm>
           <a:prstGeom prst="rect">
             <a:avLst/>
@@ -6658,8 +6658,8 @@
         </p:nvSpPr>
         <p:spPr>
           <a:xfrm>
-            <a:off x="9390888" y="4351468"/>
-            <a:ext cx="566928" cy="224835"/>
+            <a:off x="9390888" y="4566621"/>
+            <a:ext cx="566928" cy="246350"/>
           </a:xfrm>
           <a:prstGeom prst="rect">
             <a:avLst/>
@@ -6697,8 +6697,8 @@
         </p:nvSpPr>
         <p:spPr>
           <a:xfrm>
-            <a:off x="9957816" y="4351468"/>
-            <a:ext cx="566928" cy="224835"/>
+            <a:off x="9957816" y="4566621"/>
+            <a:ext cx="566928" cy="246350"/>
           </a:xfrm>
           <a:prstGeom prst="rect">
             <a:avLst/>
@@ -6736,8 +6736,8 @@
         </p:nvSpPr>
         <p:spPr>
           <a:xfrm>
-            <a:off x="10524744" y="4351468"/>
-            <a:ext cx="859536" cy="224835"/>
+            <a:off x="10524744" y="4566621"/>
+            <a:ext cx="859536" cy="246350"/>
           </a:xfrm>
           <a:prstGeom prst="rect">
             <a:avLst/>
@@ -6775,8 +6775,8 @@
         </p:nvSpPr>
         <p:spPr>
           <a:xfrm>
-            <a:off x="6135624" y="4576303"/>
-            <a:ext cx="5394960" cy="224835"/>
+            <a:off x="6135624" y="4812971"/>
+            <a:ext cx="5394960" cy="246350"/>
           </a:xfrm>
           <a:prstGeom prst="rect">
             <a:avLst/>
@@ -6795,8 +6795,8 @@
         </p:nvSpPr>
         <p:spPr>
           <a:xfrm>
-            <a:off x="6208776" y="4576303"/>
-            <a:ext cx="2011680" cy="224835"/>
+            <a:off x="6208776" y="4812971"/>
+            <a:ext cx="2011680" cy="246350"/>
           </a:xfrm>
           <a:prstGeom prst="rect">
             <a:avLst/>
@@ -6834,8 +6834,8 @@
         </p:nvSpPr>
         <p:spPr>
           <a:xfrm>
-            <a:off x="8562958" y="4626891"/>
-            <a:ext cx="242714" cy="123659"/>
+            <a:off x="8562958" y="4868400"/>
+            <a:ext cx="242714" cy="135493"/>
           </a:xfrm>
           <a:prstGeom prst="rect">
             <a:avLst/>
@@ -6854,8 +6854,8 @@
         </p:nvSpPr>
         <p:spPr>
           <a:xfrm>
-            <a:off x="9390888" y="4576303"/>
-            <a:ext cx="566928" cy="224835"/>
+            <a:off x="9390888" y="4812971"/>
+            <a:ext cx="566928" cy="246350"/>
           </a:xfrm>
           <a:prstGeom prst="rect">
             <a:avLst/>
@@ -6893,8 +6893,8 @@
         </p:nvSpPr>
         <p:spPr>
           <a:xfrm>
-            <a:off x="9957816" y="4576303"/>
-            <a:ext cx="566928" cy="224835"/>
+            <a:off x="9957816" y="4812971"/>
+            <a:ext cx="566928" cy="246350"/>
           </a:xfrm>
           <a:prstGeom prst="rect">
             <a:avLst/>
@@ -6932,8 +6932,8 @@
         </p:nvSpPr>
         <p:spPr>
           <a:xfrm>
-            <a:off x="10524744" y="4576303"/>
-            <a:ext cx="859536" cy="224835"/>
+            <a:off x="10524744" y="4812971"/>
+            <a:ext cx="859536" cy="246350"/>
           </a:xfrm>
           <a:prstGeom prst="rect">
             <a:avLst/>
@@ -6971,8 +6971,8 @@
         </p:nvSpPr>
         <p:spPr>
           <a:xfrm>
-            <a:off x="6208776" y="4801138"/>
-            <a:ext cx="2011680" cy="224835"/>
+            <a:off x="6208776" y="5059321"/>
+            <a:ext cx="2011680" cy="246350"/>
           </a:xfrm>
           <a:prstGeom prst="rect">
             <a:avLst/>
@@ -7010,8 +7010,8 @@
         </p:nvSpPr>
         <p:spPr>
           <a:xfrm>
-            <a:off x="8514572" y="4851726"/>
-            <a:ext cx="291100" cy="123659"/>
+            <a:off x="8514572" y="5114750"/>
+            <a:ext cx="291100" cy="135493"/>
           </a:xfrm>
           <a:prstGeom prst="rect">
             <a:avLst/>
@@ -7030,8 +7030,8 @@
         </p:nvSpPr>
         <p:spPr>
           <a:xfrm>
-            <a:off x="9390888" y="4801138"/>
-            <a:ext cx="566928" cy="224835"/>
+            <a:off x="9390888" y="5059321"/>
+            <a:ext cx="566928" cy="246350"/>
           </a:xfrm>
           <a:prstGeom prst="rect">
             <a:avLst/>
@@ -7069,8 +7069,8 @@
         </p:nvSpPr>
         <p:spPr>
           <a:xfrm>
-            <a:off x="9957816" y="4801138"/>
-            <a:ext cx="566928" cy="224835"/>
+            <a:off x="9957816" y="5059321"/>
+            <a:ext cx="566928" cy="246350"/>
           </a:xfrm>
           <a:prstGeom prst="rect">
             <a:avLst/>
@@ -7108,8 +7108,8 @@
         </p:nvSpPr>
         <p:spPr>
           <a:xfrm>
-            <a:off x="10524744" y="4801138"/>
-            <a:ext cx="859536" cy="224835"/>
+            <a:off x="10524744" y="5059321"/>
+            <a:ext cx="859536" cy="246350"/>
           </a:xfrm>
           <a:prstGeom prst="rect">
             <a:avLst/>
@@ -7147,8 +7147,8 @@
         </p:nvSpPr>
         <p:spPr>
           <a:xfrm>
-            <a:off x="6135624" y="5025973"/>
-            <a:ext cx="5394960" cy="224835"/>
+            <a:off x="6135624" y="5305672"/>
+            <a:ext cx="5394960" cy="246350"/>
           </a:xfrm>
           <a:prstGeom prst="rect">
             <a:avLst/>
@@ -7167,8 +7167,8 @@
         </p:nvSpPr>
         <p:spPr>
           <a:xfrm>
-            <a:off x="6208776" y="5025973"/>
-            <a:ext cx="2011680" cy="224835"/>
+            <a:off x="6208776" y="5305672"/>
+            <a:ext cx="2011680" cy="246350"/>
           </a:xfrm>
           <a:prstGeom prst="rect">
             <a:avLst/>
@@ -7206,8 +7206,8 @@
         </p:nvSpPr>
         <p:spPr>
           <a:xfrm>
-            <a:off x="8475849" y="5076561"/>
-            <a:ext cx="329823" cy="123659"/>
+            <a:off x="8475849" y="5361100"/>
+            <a:ext cx="329823" cy="135493"/>
           </a:xfrm>
           <a:prstGeom prst="rect">
             <a:avLst/>
@@ -7226,8 +7226,8 @@
         </p:nvSpPr>
         <p:spPr>
           <a:xfrm>
-            <a:off x="9390888" y="5025973"/>
-            <a:ext cx="566928" cy="224835"/>
+            <a:off x="9390888" y="5305672"/>
+            <a:ext cx="566928" cy="246350"/>
           </a:xfrm>
           <a:prstGeom prst="rect">
             <a:avLst/>
@@ -7265,8 +7265,8 @@
         </p:nvSpPr>
         <p:spPr>
           <a:xfrm>
-            <a:off x="9957816" y="5025973"/>
-            <a:ext cx="566928" cy="224835"/>
+            <a:off x="9957816" y="5305672"/>
+            <a:ext cx="566928" cy="246350"/>
           </a:xfrm>
           <a:prstGeom prst="rect">
             <a:avLst/>
@@ -7304,8 +7304,8 @@
         </p:nvSpPr>
         <p:spPr>
           <a:xfrm>
-            <a:off x="10524744" y="5025973"/>
-            <a:ext cx="859536" cy="224835"/>
+            <a:off x="10524744" y="5305672"/>
+            <a:ext cx="859536" cy="246350"/>
           </a:xfrm>
           <a:prstGeom prst="rect">
             <a:avLst/>
@@ -7343,8 +7343,8 @@
         </p:nvSpPr>
         <p:spPr>
           <a:xfrm>
-            <a:off x="6208776" y="5250808"/>
-            <a:ext cx="2011680" cy="224835"/>
+            <a:off x="6208776" y="5552022"/>
+            <a:ext cx="2011680" cy="246350"/>
           </a:xfrm>
           <a:prstGeom prst="rect">
             <a:avLst/>
@@ -7382,8 +7382,8 @@
         </p:nvSpPr>
         <p:spPr>
           <a:xfrm>
-            <a:off x="8430963" y="5301395"/>
-            <a:ext cx="374709" cy="123659"/>
+            <a:off x="8430963" y="5607450"/>
+            <a:ext cx="374709" cy="135493"/>
           </a:xfrm>
           <a:prstGeom prst="rect">
             <a:avLst/>
@@ -7402,8 +7402,8 @@
         </p:nvSpPr>
         <p:spPr>
           <a:xfrm>
-            <a:off x="9390888" y="5250808"/>
-            <a:ext cx="566928" cy="224835"/>
+            <a:off x="9390888" y="5552022"/>
+            <a:ext cx="566928" cy="246350"/>
           </a:xfrm>
           <a:prstGeom prst="rect">
             <a:avLst/>
@@ -7441,8 +7441,8 @@
         </p:nvSpPr>
         <p:spPr>
           <a:xfrm>
-            <a:off x="9957816" y="5250808"/>
-            <a:ext cx="566928" cy="224835"/>
+            <a:off x="9957816" y="5552022"/>
+            <a:ext cx="566928" cy="246350"/>
           </a:xfrm>
           <a:prstGeom prst="rect">
             <a:avLst/>
@@ -7480,8 +7480,8 @@
         </p:nvSpPr>
         <p:spPr>
           <a:xfrm>
-            <a:off x="10524744" y="5250808"/>
-            <a:ext cx="859536" cy="224835"/>
+            <a:off x="10524744" y="5552022"/>
+            <a:ext cx="859536" cy="246350"/>
           </a:xfrm>
           <a:prstGeom prst="rect">
             <a:avLst/>
@@ -7519,8 +7519,8 @@
         </p:nvSpPr>
         <p:spPr>
           <a:xfrm>
-            <a:off x="6135624" y="5475642"/>
-            <a:ext cx="5394960" cy="224835"/>
+            <a:off x="6135624" y="5798372"/>
+            <a:ext cx="5394960" cy="246350"/>
           </a:xfrm>
           <a:prstGeom prst="rect">
             <a:avLst/>
@@ -7539,8 +7539,8 @@
         </p:nvSpPr>
         <p:spPr>
           <a:xfrm>
-            <a:off x="6208776" y="5475642"/>
-            <a:ext cx="2011680" cy="224835"/>
+            <a:off x="6208776" y="5798372"/>
+            <a:ext cx="2011680" cy="246350"/>
           </a:xfrm>
           <a:prstGeom prst="rect">
             <a:avLst/>
@@ -7578,8 +7578,8 @@
         </p:nvSpPr>
         <p:spPr>
           <a:xfrm>
-            <a:off x="8266176" y="5526230"/>
-            <a:ext cx="539496" cy="123659"/>
+            <a:off x="8266176" y="5853801"/>
+            <a:ext cx="539496" cy="135493"/>
           </a:xfrm>
           <a:prstGeom prst="rect">
             <a:avLst/>
@@ -7598,8 +7598,8 @@
         </p:nvSpPr>
         <p:spPr>
           <a:xfrm>
-            <a:off x="9390888" y="5475642"/>
-            <a:ext cx="566928" cy="224835"/>
+            <a:off x="9390888" y="5798372"/>
+            <a:ext cx="566928" cy="246350"/>
           </a:xfrm>
           <a:prstGeom prst="rect">
             <a:avLst/>
@@ -7637,8 +7637,8 @@
         </p:nvSpPr>
         <p:spPr>
           <a:xfrm>
-            <a:off x="9957816" y="5475642"/>
-            <a:ext cx="566928" cy="224835"/>
+            <a:off x="9957816" y="5798372"/>
+            <a:ext cx="566928" cy="246350"/>
           </a:xfrm>
           <a:prstGeom prst="rect">
             <a:avLst/>
@@ -7676,8 +7676,8 @@
         </p:nvSpPr>
         <p:spPr>
           <a:xfrm>
-            <a:off x="10524744" y="5475642"/>
-            <a:ext cx="859536" cy="224835"/>
+            <a:off x="10524744" y="5798372"/>
+            <a:ext cx="859536" cy="246350"/>
           </a:xfrm>
           <a:prstGeom prst="rect">
             <a:avLst/>
@@ -7704,65 +7704,6 @@
               <a:t>−20.0 pts</a:t>
             </a:r>
             <a:endParaRPr lang="en-US" sz="1300" dirty="0"/>
-          </a:p>
-        </p:txBody>
-      </p:sp>
-      <p:sp>
-        <p:nvSpPr>
-          <p:cNvPr id="202" name="Shape 200"/>
-          <p:cNvSpPr/>
-          <p:nvPr/>
-        </p:nvSpPr>
-        <p:spPr>
-          <a:xfrm>
-            <a:off x="457200" y="6126480"/>
-            <a:ext cx="11274552" cy="615696"/>
-          </a:xfrm>
-          <a:prstGeom prst="rect">
-            <a:avLst/>
-          </a:prstGeom>
-          <a:solidFill>
-            <a:srgbClr val="EDF4FA"/>
-          </a:solidFill>
-          <a:ln/>
-        </p:spPr>
-      </p:sp>
-      <p:sp>
-        <p:nvSpPr>
-          <p:cNvPr id="203" name="Text 201"/>
-          <p:cNvSpPr txBox="1"/>
-          <p:nvPr/>
-        </p:nvSpPr>
-        <p:spPr>
-          <a:xfrm>
-            <a:off x="658368" y="6144768"/>
-            <a:ext cx="10927080" cy="579120"/>
-          </a:xfrm>
-          <a:prstGeom prst="rect">
-            <a:avLst/>
-          </a:prstGeom>
-          <a:noFill/>
-          <a:ln/>
-        </p:spPr>
-        <p:txBody>
-          <a:bodyPr wrap="square" lIns="0" tIns="0" rIns="0" bIns="0" rtlCol="0" anchor="ctr"/>
-          <a:lstStyle/>
-          <a:p>
-            <a:pPr indent="0" marL="0">
-              <a:buNone/>
-            </a:pPr>
-            <a:r>
-              <a:rPr lang="en-US" sz="1600" b="1" dirty="0">
-                <a:solidFill>
-                  <a:srgbClr val="0B2C4A"/>
-                </a:solidFill>
-                <a:latin typeface="Inter" pitchFamily="34" charset="0"/>
-                <a:ea typeface="Inter" pitchFamily="34" charset="-122"/>
-                <a:cs typeface="Inter" pitchFamily="34" charset="-120"/>
-              </a:rPr>
-              <a:t>25 of 33 stores collect less labor margin on internal work than on customer pay; the group is −2.7 pts. Widest: Audi Reno (−20.0 pts), LR LV (−13.9 pts) and LR Henderson (−12.2 pts).</a:t>
-            </a:r>
-            <a:endParaRPr lang="en-US" sz="1600" dirty="0"/>
           </a:p>
         </p:txBody>
       </p:sp>
@@ -7905,7 +7846,7 @@
         <p:spPr>
           <a:xfrm>
             <a:off x="457200" y="1207008"/>
-            <a:ext cx="11274552" cy="4782312"/>
+            <a:ext cx="11274552" cy="5148072"/>
           </a:xfrm>
           <a:prstGeom prst="rect">
             <a:avLst/>
@@ -8191,7 +8132,7 @@
         <p:spPr>
           <a:xfrm>
             <a:off x="3249778" y="2103120"/>
-            <a:ext cx="10973" cy="3822192"/>
+            <a:ext cx="10973" cy="4187952"/>
           </a:xfrm>
           <a:prstGeom prst="rect">
             <a:avLst/>
@@ -8211,7 +8152,7 @@
         <p:spPr>
           <a:xfrm>
             <a:off x="3125947" y="2103120"/>
-            <a:ext cx="0" cy="3822192"/>
+            <a:ext cx="0" cy="4187952"/>
           </a:xfrm>
           <a:prstGeom prst="line">
             <a:avLst/>
@@ -8379,7 +8320,7 @@
         <p:spPr>
           <a:xfrm>
             <a:off x="8800186" y="2103120"/>
-            <a:ext cx="10973" cy="3597357"/>
+            <a:ext cx="10973" cy="3941602"/>
           </a:xfrm>
           <a:prstGeom prst="rect">
             <a:avLst/>
@@ -8399,7 +8340,7 @@
         <p:spPr>
           <a:xfrm>
             <a:off x="8676355" y="2103120"/>
-            <a:ext cx="0" cy="3597357"/>
+            <a:ext cx="0" cy="3941602"/>
           </a:xfrm>
           <a:prstGeom prst="line">
             <a:avLst/>
@@ -8422,7 +8363,7 @@
         <p:spPr>
           <a:xfrm>
             <a:off x="658368" y="2103120"/>
-            <a:ext cx="2011680" cy="224835"/>
+            <a:ext cx="2011680" cy="246350"/>
           </a:xfrm>
           <a:prstGeom prst="rect">
             <a:avLst/>
@@ -8460,8 +8401,8 @@
         </p:nvSpPr>
         <p:spPr>
           <a:xfrm>
-            <a:off x="3255264" y="2153708"/>
-            <a:ext cx="150363" cy="123659"/>
+            <a:off x="3255264" y="2158549"/>
+            <a:ext cx="150363" cy="135493"/>
           </a:xfrm>
           <a:prstGeom prst="rect">
             <a:avLst/>
@@ -8481,7 +8422,7 @@
         <p:spPr>
           <a:xfrm>
             <a:off x="3840480" y="2103120"/>
-            <a:ext cx="566928" cy="224835"/>
+            <a:ext cx="566928" cy="246350"/>
           </a:xfrm>
           <a:prstGeom prst="rect">
             <a:avLst/>
@@ -8520,7 +8461,7 @@
         <p:spPr>
           <a:xfrm>
             <a:off x="4407408" y="2103120"/>
-            <a:ext cx="566928" cy="224835"/>
+            <a:ext cx="566928" cy="246350"/>
           </a:xfrm>
           <a:prstGeom prst="rect">
             <a:avLst/>
@@ -8559,7 +8500,7 @@
         <p:spPr>
           <a:xfrm>
             <a:off x="4974336" y="2103120"/>
-            <a:ext cx="859536" cy="224835"/>
+            <a:ext cx="859536" cy="246350"/>
           </a:xfrm>
           <a:prstGeom prst="rect">
             <a:avLst/>
@@ -8597,8 +8538,8 @@
         </p:nvSpPr>
         <p:spPr>
           <a:xfrm>
-            <a:off x="585216" y="2327955"/>
-            <a:ext cx="5394960" cy="224835"/>
+            <a:off x="585216" y="2349470"/>
+            <a:ext cx="5394960" cy="246350"/>
           </a:xfrm>
           <a:prstGeom prst="rect">
             <a:avLst/>
@@ -8617,8 +8558,8 @@
         </p:nvSpPr>
         <p:spPr>
           <a:xfrm>
-            <a:off x="658368" y="2327955"/>
-            <a:ext cx="2011680" cy="224835"/>
+            <a:off x="658368" y="2349470"/>
+            <a:ext cx="2011680" cy="246350"/>
           </a:xfrm>
           <a:prstGeom prst="rect">
             <a:avLst/>
@@ -8656,8 +8597,8 @@
         </p:nvSpPr>
         <p:spPr>
           <a:xfrm>
-            <a:off x="3255264" y="2378543"/>
-            <a:ext cx="70154" cy="123659"/>
+            <a:off x="3255264" y="2404899"/>
+            <a:ext cx="70154" cy="135493"/>
           </a:xfrm>
           <a:prstGeom prst="rect">
             <a:avLst/>
@@ -8676,8 +8617,8 @@
         </p:nvSpPr>
         <p:spPr>
           <a:xfrm>
-            <a:off x="3840480" y="2327955"/>
-            <a:ext cx="566928" cy="224835"/>
+            <a:off x="3840480" y="2349470"/>
+            <a:ext cx="566928" cy="246350"/>
           </a:xfrm>
           <a:prstGeom prst="rect">
             <a:avLst/>
@@ -8715,8 +8656,8 @@
         </p:nvSpPr>
         <p:spPr>
           <a:xfrm>
-            <a:off x="4407408" y="2327955"/>
-            <a:ext cx="566928" cy="224835"/>
+            <a:off x="4407408" y="2349470"/>
+            <a:ext cx="566928" cy="246350"/>
           </a:xfrm>
           <a:prstGeom prst="rect">
             <a:avLst/>
@@ -8754,8 +8695,8 @@
         </p:nvSpPr>
         <p:spPr>
           <a:xfrm>
-            <a:off x="4974336" y="2327955"/>
-            <a:ext cx="859536" cy="224835"/>
+            <a:off x="4974336" y="2349470"/>
+            <a:ext cx="859536" cy="246350"/>
           </a:xfrm>
           <a:prstGeom prst="rect">
             <a:avLst/>
@@ -8793,8 +8734,8 @@
         </p:nvSpPr>
         <p:spPr>
           <a:xfrm>
-            <a:off x="658368" y="2552790"/>
-            <a:ext cx="2011680" cy="224835"/>
+            <a:off x="658368" y="2595820"/>
+            <a:ext cx="2011680" cy="246350"/>
           </a:xfrm>
           <a:prstGeom prst="rect">
             <a:avLst/>
@@ -8832,8 +8773,8 @@
         </p:nvSpPr>
         <p:spPr>
           <a:xfrm>
-            <a:off x="3255264" y="2603377"/>
-            <a:ext cx="38107" cy="123659"/>
+            <a:off x="3255264" y="2651249"/>
+            <a:ext cx="38107" cy="135493"/>
           </a:xfrm>
           <a:prstGeom prst="rect">
             <a:avLst/>
@@ -8852,8 +8793,8 @@
         </p:nvSpPr>
         <p:spPr>
           <a:xfrm>
-            <a:off x="3840480" y="2552790"/>
-            <a:ext cx="566928" cy="224835"/>
+            <a:off x="3840480" y="2595820"/>
+            <a:ext cx="566928" cy="246350"/>
           </a:xfrm>
           <a:prstGeom prst="rect">
             <a:avLst/>
@@ -8891,8 +8832,8 @@
         </p:nvSpPr>
         <p:spPr>
           <a:xfrm>
-            <a:off x="4407408" y="2552790"/>
-            <a:ext cx="566928" cy="224835"/>
+            <a:off x="4407408" y="2595820"/>
+            <a:ext cx="566928" cy="246350"/>
           </a:xfrm>
           <a:prstGeom prst="rect">
             <a:avLst/>
@@ -8930,8 +8871,8 @@
         </p:nvSpPr>
         <p:spPr>
           <a:xfrm>
-            <a:off x="4974336" y="2552790"/>
-            <a:ext cx="859536" cy="224835"/>
+            <a:off x="4974336" y="2595820"/>
+            <a:ext cx="859536" cy="246350"/>
           </a:xfrm>
           <a:prstGeom prst="rect">
             <a:avLst/>
@@ -8969,8 +8910,8 @@
         </p:nvSpPr>
         <p:spPr>
           <a:xfrm>
-            <a:off x="585216" y="2777624"/>
-            <a:ext cx="5394960" cy="224835"/>
+            <a:off x="585216" y="2842170"/>
+            <a:ext cx="5394960" cy="246350"/>
           </a:xfrm>
           <a:prstGeom prst="rect">
             <a:avLst/>
@@ -8989,8 +8930,8 @@
         </p:nvSpPr>
         <p:spPr>
           <a:xfrm>
-            <a:off x="658368" y="2777624"/>
-            <a:ext cx="2011680" cy="224835"/>
+            <a:off x="658368" y="2842170"/>
+            <a:ext cx="2011680" cy="246350"/>
           </a:xfrm>
           <a:prstGeom prst="rect">
             <a:avLst/>
@@ -9028,8 +8969,8 @@
         </p:nvSpPr>
         <p:spPr>
           <a:xfrm>
-            <a:off x="3255264" y="2828212"/>
-            <a:ext cx="20517" cy="123659"/>
+            <a:off x="3255264" y="2897599"/>
+            <a:ext cx="20517" cy="135493"/>
           </a:xfrm>
           <a:prstGeom prst="rect">
             <a:avLst/>
@@ -9048,8 +8989,8 @@
         </p:nvSpPr>
         <p:spPr>
           <a:xfrm>
-            <a:off x="3840480" y="2777624"/>
-            <a:ext cx="566928" cy="224835"/>
+            <a:off x="3840480" y="2842170"/>
+            <a:ext cx="566928" cy="246350"/>
           </a:xfrm>
           <a:prstGeom prst="rect">
             <a:avLst/>
@@ -9087,8 +9028,8 @@
         </p:nvSpPr>
         <p:spPr>
           <a:xfrm>
-            <a:off x="4407408" y="2777624"/>
-            <a:ext cx="566928" cy="224835"/>
+            <a:off x="4407408" y="2842170"/>
+            <a:ext cx="566928" cy="246350"/>
           </a:xfrm>
           <a:prstGeom prst="rect">
             <a:avLst/>
@@ -9126,8 +9067,8 @@
         </p:nvSpPr>
         <p:spPr>
           <a:xfrm>
-            <a:off x="4974336" y="2777624"/>
-            <a:ext cx="859536" cy="224835"/>
+            <a:off x="4974336" y="2842170"/>
+            <a:ext cx="859536" cy="246350"/>
           </a:xfrm>
           <a:prstGeom prst="rect">
             <a:avLst/>
@@ -9165,8 +9106,8 @@
         </p:nvSpPr>
         <p:spPr>
           <a:xfrm>
-            <a:off x="658368" y="3002459"/>
-            <a:ext cx="2011680" cy="224835"/>
+            <a:off x="658368" y="3088520"/>
+            <a:ext cx="2011680" cy="246350"/>
           </a:xfrm>
           <a:prstGeom prst="rect">
             <a:avLst/>
@@ -9204,8 +9145,8 @@
         </p:nvSpPr>
         <p:spPr>
           <a:xfrm>
-            <a:off x="3255264" y="3053047"/>
-            <a:ext cx="9144" cy="123659"/>
+            <a:off x="3255264" y="3143949"/>
+            <a:ext cx="9144" cy="135493"/>
           </a:xfrm>
           <a:prstGeom prst="rect">
             <a:avLst/>
@@ -9224,8 +9165,8 @@
         </p:nvSpPr>
         <p:spPr>
           <a:xfrm>
-            <a:off x="3840480" y="3002459"/>
-            <a:ext cx="566928" cy="224835"/>
+            <a:off x="3840480" y="3088520"/>
+            <a:ext cx="566928" cy="246350"/>
           </a:xfrm>
           <a:prstGeom prst="rect">
             <a:avLst/>
@@ -9263,8 +9204,8 @@
         </p:nvSpPr>
         <p:spPr>
           <a:xfrm>
-            <a:off x="4407408" y="3002459"/>
-            <a:ext cx="566928" cy="224835"/>
+            <a:off x="4407408" y="3088520"/>
+            <a:ext cx="566928" cy="246350"/>
           </a:xfrm>
           <a:prstGeom prst="rect">
             <a:avLst/>
@@ -9302,8 +9243,8 @@
         </p:nvSpPr>
         <p:spPr>
           <a:xfrm>
-            <a:off x="4974336" y="3002459"/>
-            <a:ext cx="859536" cy="224835"/>
+            <a:off x="4974336" y="3088520"/>
+            <a:ext cx="859536" cy="246350"/>
           </a:xfrm>
           <a:prstGeom prst="rect">
             <a:avLst/>
@@ -9341,8 +9282,8 @@
         </p:nvSpPr>
         <p:spPr>
           <a:xfrm>
-            <a:off x="585216" y="3227294"/>
-            <a:ext cx="5394960" cy="224835"/>
+            <a:off x="585216" y="3334871"/>
+            <a:ext cx="5394960" cy="246350"/>
           </a:xfrm>
           <a:prstGeom prst="rect">
             <a:avLst/>
@@ -9361,8 +9302,8 @@
         </p:nvSpPr>
         <p:spPr>
           <a:xfrm>
-            <a:off x="658368" y="3227294"/>
-            <a:ext cx="2011680" cy="224835"/>
+            <a:off x="658368" y="3334871"/>
+            <a:ext cx="2011680" cy="246350"/>
           </a:xfrm>
           <a:prstGeom prst="rect">
             <a:avLst/>
@@ -9400,8 +9341,8 @@
         </p:nvSpPr>
         <p:spPr>
           <a:xfrm>
-            <a:off x="3222182" y="3277882"/>
-            <a:ext cx="33082" cy="123659"/>
+            <a:off x="3222182" y="3390299"/>
+            <a:ext cx="33082" cy="135493"/>
           </a:xfrm>
           <a:prstGeom prst="rect">
             <a:avLst/>
@@ -9420,8 +9361,8 @@
         </p:nvSpPr>
         <p:spPr>
           <a:xfrm>
-            <a:off x="3840480" y="3227294"/>
-            <a:ext cx="566928" cy="224835"/>
+            <a:off x="3840480" y="3334871"/>
+            <a:ext cx="566928" cy="246350"/>
           </a:xfrm>
           <a:prstGeom prst="rect">
             <a:avLst/>
@@ -9459,8 +9400,8 @@
         </p:nvSpPr>
         <p:spPr>
           <a:xfrm>
-            <a:off x="4407408" y="3227294"/>
-            <a:ext cx="566928" cy="224835"/>
+            <a:off x="4407408" y="3334871"/>
+            <a:ext cx="566928" cy="246350"/>
           </a:xfrm>
           <a:prstGeom prst="rect">
             <a:avLst/>
@@ -9498,8 +9439,8 @@
         </p:nvSpPr>
         <p:spPr>
           <a:xfrm>
-            <a:off x="4974336" y="3227294"/>
-            <a:ext cx="859536" cy="224835"/>
+            <a:off x="4974336" y="3334871"/>
+            <a:ext cx="859536" cy="246350"/>
           </a:xfrm>
           <a:prstGeom prst="rect">
             <a:avLst/>
@@ -9537,8 +9478,8 @@
         </p:nvSpPr>
         <p:spPr>
           <a:xfrm>
-            <a:off x="658368" y="3452129"/>
-            <a:ext cx="2011680" cy="224835"/>
+            <a:off x="658368" y="3581221"/>
+            <a:ext cx="2011680" cy="246350"/>
           </a:xfrm>
           <a:prstGeom prst="rect">
             <a:avLst/>
@@ -9576,8 +9517,8 @@
         </p:nvSpPr>
         <p:spPr>
           <a:xfrm>
-            <a:off x="3179597" y="3502717"/>
-            <a:ext cx="75667" cy="123659"/>
+            <a:off x="3179597" y="3636649"/>
+            <a:ext cx="75667" cy="135493"/>
           </a:xfrm>
           <a:prstGeom prst="rect">
             <a:avLst/>
@@ -9596,8 +9537,8 @@
         </p:nvSpPr>
         <p:spPr>
           <a:xfrm>
-            <a:off x="3840480" y="3452129"/>
-            <a:ext cx="566928" cy="224835"/>
+            <a:off x="3840480" y="3581221"/>
+            <a:ext cx="566928" cy="246350"/>
           </a:xfrm>
           <a:prstGeom prst="rect">
             <a:avLst/>
@@ -9635,8 +9576,8 @@
         </p:nvSpPr>
         <p:spPr>
           <a:xfrm>
-            <a:off x="4407408" y="3452129"/>
-            <a:ext cx="566928" cy="224835"/>
+            <a:off x="4407408" y="3581221"/>
+            <a:ext cx="566928" cy="246350"/>
           </a:xfrm>
           <a:prstGeom prst="rect">
             <a:avLst/>
@@ -9674,8 +9615,8 @@
         </p:nvSpPr>
         <p:spPr>
           <a:xfrm>
-            <a:off x="4974336" y="3452129"/>
-            <a:ext cx="859536" cy="224835"/>
+            <a:off x="4974336" y="3581221"/>
+            <a:ext cx="859536" cy="246350"/>
           </a:xfrm>
           <a:prstGeom prst="rect">
             <a:avLst/>
@@ -9713,8 +9654,8 @@
         </p:nvSpPr>
         <p:spPr>
           <a:xfrm>
-            <a:off x="585216" y="3676964"/>
-            <a:ext cx="5394960" cy="224835"/>
+            <a:off x="585216" y="3827571"/>
+            <a:ext cx="5394960" cy="246350"/>
           </a:xfrm>
           <a:prstGeom prst="rect">
             <a:avLst/>
@@ -9733,8 +9674,8 @@
         </p:nvSpPr>
         <p:spPr>
           <a:xfrm>
-            <a:off x="658368" y="3676964"/>
-            <a:ext cx="2011680" cy="224835"/>
+            <a:off x="658368" y="3827571"/>
+            <a:ext cx="2011680" cy="246350"/>
           </a:xfrm>
           <a:prstGeom prst="rect">
             <a:avLst/>
@@ -9772,8 +9713,8 @@
         </p:nvSpPr>
         <p:spPr>
           <a:xfrm>
-            <a:off x="3178337" y="3727552"/>
-            <a:ext cx="76927" cy="123659"/>
+            <a:off x="3178337" y="3883000"/>
+            <a:ext cx="76927" cy="135493"/>
           </a:xfrm>
           <a:prstGeom prst="rect">
             <a:avLst/>
@@ -9792,8 +9733,8 @@
         </p:nvSpPr>
         <p:spPr>
           <a:xfrm>
-            <a:off x="3840480" y="3676964"/>
-            <a:ext cx="566928" cy="224835"/>
+            <a:off x="3840480" y="3827571"/>
+            <a:ext cx="566928" cy="246350"/>
           </a:xfrm>
           <a:prstGeom prst="rect">
             <a:avLst/>
@@ -9831,8 +9772,8 @@
         </p:nvSpPr>
         <p:spPr>
           <a:xfrm>
-            <a:off x="4407408" y="3676964"/>
-            <a:ext cx="566928" cy="224835"/>
+            <a:off x="4407408" y="3827571"/>
+            <a:ext cx="566928" cy="246350"/>
           </a:xfrm>
           <a:prstGeom prst="rect">
             <a:avLst/>
@@ -9870,8 +9811,8 @@
         </p:nvSpPr>
         <p:spPr>
           <a:xfrm>
-            <a:off x="4974336" y="3676964"/>
-            <a:ext cx="859536" cy="224835"/>
+            <a:off x="4974336" y="3827571"/>
+            <a:ext cx="859536" cy="246350"/>
           </a:xfrm>
           <a:prstGeom prst="rect">
             <a:avLst/>
@@ -9909,8 +9850,8 @@
         </p:nvSpPr>
         <p:spPr>
           <a:xfrm>
-            <a:off x="658368" y="3901799"/>
-            <a:ext cx="2011680" cy="224835"/>
+            <a:off x="658368" y="4073921"/>
+            <a:ext cx="2011680" cy="246350"/>
           </a:xfrm>
           <a:prstGeom prst="rect">
             <a:avLst/>
@@ -9948,8 +9889,8 @@
         </p:nvSpPr>
         <p:spPr>
           <a:xfrm>
-            <a:off x="3177426" y="3952386"/>
-            <a:ext cx="77838" cy="123659"/>
+            <a:off x="3177426" y="4129350"/>
+            <a:ext cx="77838" cy="135493"/>
           </a:xfrm>
           <a:prstGeom prst="rect">
             <a:avLst/>
@@ -9968,8 +9909,8 @@
         </p:nvSpPr>
         <p:spPr>
           <a:xfrm>
-            <a:off x="3840480" y="3901799"/>
-            <a:ext cx="566928" cy="224835"/>
+            <a:off x="3840480" y="4073921"/>
+            <a:ext cx="566928" cy="246350"/>
           </a:xfrm>
           <a:prstGeom prst="rect">
             <a:avLst/>
@@ -10007,8 +9948,8 @@
         </p:nvSpPr>
         <p:spPr>
           <a:xfrm>
-            <a:off x="4407408" y="3901799"/>
-            <a:ext cx="566928" cy="224835"/>
+            <a:off x="4407408" y="4073921"/>
+            <a:ext cx="566928" cy="246350"/>
           </a:xfrm>
           <a:prstGeom prst="rect">
             <a:avLst/>
@@ -10046,8 +9987,8 @@
         </p:nvSpPr>
         <p:spPr>
           <a:xfrm>
-            <a:off x="4974336" y="3901799"/>
-            <a:ext cx="859536" cy="224835"/>
+            <a:off x="4974336" y="4073921"/>
+            <a:ext cx="859536" cy="246350"/>
           </a:xfrm>
           <a:prstGeom prst="rect">
             <a:avLst/>
@@ -10085,8 +10026,8 @@
         </p:nvSpPr>
         <p:spPr>
           <a:xfrm>
-            <a:off x="585216" y="4126633"/>
-            <a:ext cx="5394960" cy="224835"/>
+            <a:off x="585216" y="4320271"/>
+            <a:ext cx="5394960" cy="246350"/>
           </a:xfrm>
           <a:prstGeom prst="rect">
             <a:avLst/>
@@ -10105,8 +10046,8 @@
         </p:nvSpPr>
         <p:spPr>
           <a:xfrm>
-            <a:off x="658368" y="4126633"/>
-            <a:ext cx="2011680" cy="224835"/>
+            <a:off x="658368" y="4320271"/>
+            <a:ext cx="2011680" cy="246350"/>
           </a:xfrm>
           <a:prstGeom prst="rect">
             <a:avLst/>
@@ -10144,8 +10085,8 @@
         </p:nvSpPr>
         <p:spPr>
           <a:xfrm>
-            <a:off x="3137487" y="4177221"/>
-            <a:ext cx="117777" cy="123659"/>
+            <a:off x="3137487" y="4375700"/>
+            <a:ext cx="117777" cy="135493"/>
           </a:xfrm>
           <a:prstGeom prst="rect">
             <a:avLst/>
@@ -10164,8 +10105,8 @@
         </p:nvSpPr>
         <p:spPr>
           <a:xfrm>
-            <a:off x="3840480" y="4126633"/>
-            <a:ext cx="566928" cy="224835"/>
+            <a:off x="3840480" y="4320271"/>
+            <a:ext cx="566928" cy="246350"/>
           </a:xfrm>
           <a:prstGeom prst="rect">
             <a:avLst/>
@@ -10203,8 +10144,8 @@
         </p:nvSpPr>
         <p:spPr>
           <a:xfrm>
-            <a:off x="4407408" y="4126633"/>
-            <a:ext cx="566928" cy="224835"/>
+            <a:off x="4407408" y="4320271"/>
+            <a:ext cx="566928" cy="246350"/>
           </a:xfrm>
           <a:prstGeom prst="rect">
             <a:avLst/>
@@ -10242,8 +10183,8 @@
         </p:nvSpPr>
         <p:spPr>
           <a:xfrm>
-            <a:off x="4974336" y="4126633"/>
-            <a:ext cx="859536" cy="224835"/>
+            <a:off x="4974336" y="4320271"/>
+            <a:ext cx="859536" cy="246350"/>
           </a:xfrm>
           <a:prstGeom prst="rect">
             <a:avLst/>
@@ -10281,8 +10222,8 @@
         </p:nvSpPr>
         <p:spPr>
           <a:xfrm>
-            <a:off x="658368" y="4351468"/>
-            <a:ext cx="2011680" cy="224835"/>
+            <a:off x="658368" y="4566621"/>
+            <a:ext cx="2011680" cy="246350"/>
           </a:xfrm>
           <a:prstGeom prst="rect">
             <a:avLst/>
@@ -10320,8 +10261,8 @@
         </p:nvSpPr>
         <p:spPr>
           <a:xfrm>
-            <a:off x="3136637" y="4402056"/>
-            <a:ext cx="118627" cy="123659"/>
+            <a:off x="3136637" y="4622050"/>
+            <a:ext cx="118627" cy="135493"/>
           </a:xfrm>
           <a:prstGeom prst="rect">
             <a:avLst/>
@@ -10340,8 +10281,8 @@
         </p:nvSpPr>
         <p:spPr>
           <a:xfrm>
-            <a:off x="3840480" y="4351468"/>
-            <a:ext cx="566928" cy="224835"/>
+            <a:off x="3840480" y="4566621"/>
+            <a:ext cx="566928" cy="246350"/>
           </a:xfrm>
           <a:prstGeom prst="rect">
             <a:avLst/>
@@ -10379,8 +10320,8 @@
         </p:nvSpPr>
         <p:spPr>
           <a:xfrm>
-            <a:off x="4407408" y="4351468"/>
-            <a:ext cx="566928" cy="224835"/>
+            <a:off x="4407408" y="4566621"/>
+            <a:ext cx="566928" cy="246350"/>
           </a:xfrm>
           <a:prstGeom prst="rect">
             <a:avLst/>
@@ -10418,8 +10359,8 @@
         </p:nvSpPr>
         <p:spPr>
           <a:xfrm>
-            <a:off x="4974336" y="4351468"/>
-            <a:ext cx="859536" cy="224835"/>
+            <a:off x="4974336" y="4566621"/>
+            <a:ext cx="859536" cy="246350"/>
           </a:xfrm>
           <a:prstGeom prst="rect">
             <a:avLst/>
@@ -10457,8 +10398,8 @@
         </p:nvSpPr>
         <p:spPr>
           <a:xfrm>
-            <a:off x="585216" y="4576303"/>
-            <a:ext cx="5394960" cy="224835"/>
+            <a:off x="585216" y="4812971"/>
+            <a:ext cx="5394960" cy="246350"/>
           </a:xfrm>
           <a:prstGeom prst="rect">
             <a:avLst/>
@@ -10477,8 +10418,8 @@
         </p:nvSpPr>
         <p:spPr>
           <a:xfrm>
-            <a:off x="658368" y="4576303"/>
-            <a:ext cx="2011680" cy="224835"/>
+            <a:off x="658368" y="4812971"/>
+            <a:ext cx="2011680" cy="246350"/>
           </a:xfrm>
           <a:prstGeom prst="rect">
             <a:avLst/>
@@ -10516,8 +10457,8 @@
         </p:nvSpPr>
         <p:spPr>
           <a:xfrm>
-            <a:off x="3096612" y="4626891"/>
-            <a:ext cx="158652" cy="123659"/>
+            <a:off x="3096612" y="4868400"/>
+            <a:ext cx="158652" cy="135493"/>
           </a:xfrm>
           <a:prstGeom prst="rect">
             <a:avLst/>
@@ -10536,8 +10477,8 @@
         </p:nvSpPr>
         <p:spPr>
           <a:xfrm>
-            <a:off x="3840480" y="4576303"/>
-            <a:ext cx="566928" cy="224835"/>
+            <a:off x="3840480" y="4812971"/>
+            <a:ext cx="566928" cy="246350"/>
           </a:xfrm>
           <a:prstGeom prst="rect">
             <a:avLst/>
@@ -10575,8 +10516,8 @@
         </p:nvSpPr>
         <p:spPr>
           <a:xfrm>
-            <a:off x="4407408" y="4576303"/>
-            <a:ext cx="566928" cy="224835"/>
+            <a:off x="4407408" y="4812971"/>
+            <a:ext cx="566928" cy="246350"/>
           </a:xfrm>
           <a:prstGeom prst="rect">
             <a:avLst/>
@@ -10614,8 +10555,8 @@
         </p:nvSpPr>
         <p:spPr>
           <a:xfrm>
-            <a:off x="4974336" y="4576303"/>
-            <a:ext cx="859536" cy="224835"/>
+            <a:off x="4974336" y="4812971"/>
+            <a:ext cx="859536" cy="246350"/>
           </a:xfrm>
           <a:prstGeom prst="rect">
             <a:avLst/>
@@ -10653,8 +10594,8 @@
         </p:nvSpPr>
         <p:spPr>
           <a:xfrm>
-            <a:off x="658368" y="4801138"/>
-            <a:ext cx="2011680" cy="224835"/>
+            <a:off x="658368" y="5059321"/>
+            <a:ext cx="2011680" cy="246350"/>
           </a:xfrm>
           <a:prstGeom prst="rect">
             <a:avLst/>
@@ -10692,8 +10633,8 @@
         </p:nvSpPr>
         <p:spPr>
           <a:xfrm>
-            <a:off x="3081235" y="4851726"/>
-            <a:ext cx="174029" cy="123659"/>
+            <a:off x="3081235" y="5114750"/>
+            <a:ext cx="174029" cy="135493"/>
           </a:xfrm>
           <a:prstGeom prst="rect">
             <a:avLst/>
@@ -10712,8 +10653,8 @@
         </p:nvSpPr>
         <p:spPr>
           <a:xfrm>
-            <a:off x="3840480" y="4801138"/>
-            <a:ext cx="566928" cy="224835"/>
+            <a:off x="3840480" y="5059321"/>
+            <a:ext cx="566928" cy="246350"/>
           </a:xfrm>
           <a:prstGeom prst="rect">
             <a:avLst/>
@@ -10751,8 +10692,8 @@
         </p:nvSpPr>
         <p:spPr>
           <a:xfrm>
-            <a:off x="4407408" y="4801138"/>
-            <a:ext cx="566928" cy="224835"/>
+            <a:off x="4407408" y="5059321"/>
+            <a:ext cx="566928" cy="246350"/>
           </a:xfrm>
           <a:prstGeom prst="rect">
             <a:avLst/>
@@ -10790,8 +10731,8 @@
         </p:nvSpPr>
         <p:spPr>
           <a:xfrm>
-            <a:off x="4974336" y="4801138"/>
-            <a:ext cx="859536" cy="224835"/>
+            <a:off x="4974336" y="5059321"/>
+            <a:ext cx="859536" cy="246350"/>
           </a:xfrm>
           <a:prstGeom prst="rect">
             <a:avLst/>
@@ -10829,8 +10770,8 @@
         </p:nvSpPr>
         <p:spPr>
           <a:xfrm>
-            <a:off x="585216" y="5025973"/>
-            <a:ext cx="5394960" cy="224835"/>
+            <a:off x="585216" y="5305672"/>
+            <a:ext cx="5394960" cy="246350"/>
           </a:xfrm>
           <a:prstGeom prst="rect">
             <a:avLst/>
@@ -10849,8 +10790,8 @@
         </p:nvSpPr>
         <p:spPr>
           <a:xfrm>
-            <a:off x="658368" y="5025973"/>
-            <a:ext cx="2011680" cy="224835"/>
+            <a:off x="658368" y="5305672"/>
+            <a:ext cx="2011680" cy="246350"/>
           </a:xfrm>
           <a:prstGeom prst="rect">
             <a:avLst/>
@@ -10888,8 +10829,8 @@
         </p:nvSpPr>
         <p:spPr>
           <a:xfrm>
-            <a:off x="3077450" y="5076561"/>
-            <a:ext cx="177814" cy="123659"/>
+            <a:off x="3077450" y="5361100"/>
+            <a:ext cx="177814" cy="135493"/>
           </a:xfrm>
           <a:prstGeom prst="rect">
             <a:avLst/>
@@ -10908,8 +10849,8 @@
         </p:nvSpPr>
         <p:spPr>
           <a:xfrm>
-            <a:off x="3840480" y="5025973"/>
-            <a:ext cx="566928" cy="224835"/>
+            <a:off x="3840480" y="5305672"/>
+            <a:ext cx="566928" cy="246350"/>
           </a:xfrm>
           <a:prstGeom prst="rect">
             <a:avLst/>
@@ -10947,8 +10888,8 @@
         </p:nvSpPr>
         <p:spPr>
           <a:xfrm>
-            <a:off x="4407408" y="5025973"/>
-            <a:ext cx="566928" cy="224835"/>
+            <a:off x="4407408" y="5305672"/>
+            <a:ext cx="566928" cy="246350"/>
           </a:xfrm>
           <a:prstGeom prst="rect">
             <a:avLst/>
@@ -10986,8 +10927,8 @@
         </p:nvSpPr>
         <p:spPr>
           <a:xfrm>
-            <a:off x="4974336" y="5025973"/>
-            <a:ext cx="859536" cy="224835"/>
+            <a:off x="4974336" y="5305672"/>
+            <a:ext cx="859536" cy="246350"/>
           </a:xfrm>
           <a:prstGeom prst="rect">
             <a:avLst/>
@@ -11025,8 +10966,8 @@
         </p:nvSpPr>
         <p:spPr>
           <a:xfrm>
-            <a:off x="658368" y="5250808"/>
-            <a:ext cx="2011680" cy="224835"/>
+            <a:off x="658368" y="5552022"/>
+            <a:ext cx="2011680" cy="246350"/>
           </a:xfrm>
           <a:prstGeom prst="rect">
             <a:avLst/>
@@ -11064,8 +11005,8 @@
         </p:nvSpPr>
         <p:spPr>
           <a:xfrm>
-            <a:off x="3070973" y="5301395"/>
-            <a:ext cx="184291" cy="123659"/>
+            <a:off x="3070973" y="5607450"/>
+            <a:ext cx="184291" cy="135493"/>
           </a:xfrm>
           <a:prstGeom prst="rect">
             <a:avLst/>
@@ -11084,8 +11025,8 @@
         </p:nvSpPr>
         <p:spPr>
           <a:xfrm>
-            <a:off x="3840480" y="5250808"/>
-            <a:ext cx="566928" cy="224835"/>
+            <a:off x="3840480" y="5552022"/>
+            <a:ext cx="566928" cy="246350"/>
           </a:xfrm>
           <a:prstGeom prst="rect">
             <a:avLst/>
@@ -11123,8 +11064,8 @@
         </p:nvSpPr>
         <p:spPr>
           <a:xfrm>
-            <a:off x="4407408" y="5250808"/>
-            <a:ext cx="566928" cy="224835"/>
+            <a:off x="4407408" y="5552022"/>
+            <a:ext cx="566928" cy="246350"/>
           </a:xfrm>
           <a:prstGeom prst="rect">
             <a:avLst/>
@@ -11162,8 +11103,8 @@
         </p:nvSpPr>
         <p:spPr>
           <a:xfrm>
-            <a:off x="4974336" y="5250808"/>
-            <a:ext cx="859536" cy="224835"/>
+            <a:off x="4974336" y="5552022"/>
+            <a:ext cx="859536" cy="246350"/>
           </a:xfrm>
           <a:prstGeom prst="rect">
             <a:avLst/>
@@ -11201,8 +11142,8 @@
         </p:nvSpPr>
         <p:spPr>
           <a:xfrm>
-            <a:off x="585216" y="5475642"/>
-            <a:ext cx="5394960" cy="224835"/>
+            <a:off x="585216" y="5798372"/>
+            <a:ext cx="5394960" cy="246350"/>
           </a:xfrm>
           <a:prstGeom prst="rect">
             <a:avLst/>
@@ -11221,8 +11162,8 @@
         </p:nvSpPr>
         <p:spPr>
           <a:xfrm>
-            <a:off x="658368" y="5475642"/>
-            <a:ext cx="2011680" cy="224835"/>
+            <a:off x="658368" y="5798372"/>
+            <a:ext cx="2011680" cy="246350"/>
           </a:xfrm>
           <a:prstGeom prst="rect">
             <a:avLst/>
@@ -11260,8 +11201,8 @@
         </p:nvSpPr>
         <p:spPr>
           <a:xfrm>
-            <a:off x="3060053" y="5526230"/>
-            <a:ext cx="195211" cy="123659"/>
+            <a:off x="3060053" y="5853801"/>
+            <a:ext cx="195211" cy="135493"/>
           </a:xfrm>
           <a:prstGeom prst="rect">
             <a:avLst/>
@@ -11280,8 +11221,8 @@
         </p:nvSpPr>
         <p:spPr>
           <a:xfrm>
-            <a:off x="3840480" y="5475642"/>
-            <a:ext cx="566928" cy="224835"/>
+            <a:off x="3840480" y="5798372"/>
+            <a:ext cx="566928" cy="246350"/>
           </a:xfrm>
           <a:prstGeom prst="rect">
             <a:avLst/>
@@ -11319,8 +11260,8 @@
         </p:nvSpPr>
         <p:spPr>
           <a:xfrm>
-            <a:off x="4407408" y="5475642"/>
-            <a:ext cx="566928" cy="224835"/>
+            <a:off x="4407408" y="5798372"/>
+            <a:ext cx="566928" cy="246350"/>
           </a:xfrm>
           <a:prstGeom prst="rect">
             <a:avLst/>
@@ -11358,8 +11299,8 @@
         </p:nvSpPr>
         <p:spPr>
           <a:xfrm>
-            <a:off x="4974336" y="5475642"/>
-            <a:ext cx="859536" cy="224835"/>
+            <a:off x="4974336" y="5798372"/>
+            <a:ext cx="859536" cy="246350"/>
           </a:xfrm>
           <a:prstGeom prst="rect">
             <a:avLst/>
@@ -11397,8 +11338,8 @@
         </p:nvSpPr>
         <p:spPr>
           <a:xfrm>
-            <a:off x="658368" y="5700477"/>
-            <a:ext cx="2011680" cy="224835"/>
+            <a:off x="658368" y="6044722"/>
+            <a:ext cx="2011680" cy="246350"/>
           </a:xfrm>
           <a:prstGeom prst="rect">
             <a:avLst/>
@@ -11436,8 +11377,8 @@
         </p:nvSpPr>
         <p:spPr>
           <a:xfrm>
-            <a:off x="3033339" y="5751065"/>
-            <a:ext cx="221925" cy="123659"/>
+            <a:off x="3033339" y="6100151"/>
+            <a:ext cx="221925" cy="135493"/>
           </a:xfrm>
           <a:prstGeom prst="rect">
             <a:avLst/>
@@ -11456,8 +11397,8 @@
         </p:nvSpPr>
         <p:spPr>
           <a:xfrm>
-            <a:off x="3840480" y="5700477"/>
-            <a:ext cx="566928" cy="224835"/>
+            <a:off x="3840480" y="6044722"/>
+            <a:ext cx="566928" cy="246350"/>
           </a:xfrm>
           <a:prstGeom prst="rect">
             <a:avLst/>
@@ -11495,8 +11436,8 @@
         </p:nvSpPr>
         <p:spPr>
           <a:xfrm>
-            <a:off x="4407408" y="5700477"/>
-            <a:ext cx="566928" cy="224835"/>
+            <a:off x="4407408" y="6044722"/>
+            <a:ext cx="566928" cy="246350"/>
           </a:xfrm>
           <a:prstGeom prst="rect">
             <a:avLst/>
@@ -11534,8 +11475,8 @@
         </p:nvSpPr>
         <p:spPr>
           <a:xfrm>
-            <a:off x="4974336" y="5700477"/>
-            <a:ext cx="859536" cy="224835"/>
+            <a:off x="4974336" y="6044722"/>
+            <a:ext cx="859536" cy="246350"/>
           </a:xfrm>
           <a:prstGeom prst="rect">
             <a:avLst/>
@@ -11574,7 +11515,7 @@
         <p:spPr>
           <a:xfrm>
             <a:off x="6208776" y="2103120"/>
-            <a:ext cx="2011680" cy="224835"/>
+            <a:ext cx="2011680" cy="246350"/>
           </a:xfrm>
           <a:prstGeom prst="rect">
             <a:avLst/>
@@ -11612,8 +11553,8 @@
         </p:nvSpPr>
         <p:spPr>
           <a:xfrm>
-            <a:off x="8575710" y="2153708"/>
-            <a:ext cx="229962" cy="123659"/>
+            <a:off x="8575710" y="2158549"/>
+            <a:ext cx="229962" cy="135493"/>
           </a:xfrm>
           <a:prstGeom prst="rect">
             <a:avLst/>
@@ -11633,7 +11574,7 @@
         <p:spPr>
           <a:xfrm>
             <a:off x="9390888" y="2103120"/>
-            <a:ext cx="566928" cy="224835"/>
+            <a:ext cx="566928" cy="246350"/>
           </a:xfrm>
           <a:prstGeom prst="rect">
             <a:avLst/>
@@ -11672,7 +11613,7 @@
         <p:spPr>
           <a:xfrm>
             <a:off x="9957816" y="2103120"/>
-            <a:ext cx="566928" cy="224835"/>
+            <a:ext cx="566928" cy="246350"/>
           </a:xfrm>
           <a:prstGeom prst="rect">
             <a:avLst/>
@@ -11711,7 +11652,7 @@
         <p:spPr>
           <a:xfrm>
             <a:off x="10524744" y="2103120"/>
-            <a:ext cx="859536" cy="224835"/>
+            <a:ext cx="859536" cy="246350"/>
           </a:xfrm>
           <a:prstGeom prst="rect">
             <a:avLst/>
@@ -11749,8 +11690,8 @@
         </p:nvSpPr>
         <p:spPr>
           <a:xfrm>
-            <a:off x="6135624" y="2327955"/>
-            <a:ext cx="5394960" cy="224835"/>
+            <a:off x="6135624" y="2349470"/>
+            <a:ext cx="5394960" cy="246350"/>
           </a:xfrm>
           <a:prstGeom prst="rect">
             <a:avLst/>
@@ -11769,8 +11710,8 @@
         </p:nvSpPr>
         <p:spPr>
           <a:xfrm>
-            <a:off x="6208776" y="2327955"/>
-            <a:ext cx="2011680" cy="224835"/>
+            <a:off x="6208776" y="2349470"/>
+            <a:ext cx="2011680" cy="246350"/>
           </a:xfrm>
           <a:prstGeom prst="rect">
             <a:avLst/>
@@ -11808,8 +11749,8 @@
         </p:nvSpPr>
         <p:spPr>
           <a:xfrm>
-            <a:off x="8565630" y="2378543"/>
-            <a:ext cx="240042" cy="123659"/>
+            <a:off x="8565630" y="2404899"/>
+            <a:ext cx="240042" cy="135493"/>
           </a:xfrm>
           <a:prstGeom prst="rect">
             <a:avLst/>
@@ -11828,8 +11769,8 @@
         </p:nvSpPr>
         <p:spPr>
           <a:xfrm>
-            <a:off x="9390888" y="2327955"/>
-            <a:ext cx="566928" cy="224835"/>
+            <a:off x="9390888" y="2349470"/>
+            <a:ext cx="566928" cy="246350"/>
           </a:xfrm>
           <a:prstGeom prst="rect">
             <a:avLst/>
@@ -11867,8 +11808,8 @@
         </p:nvSpPr>
         <p:spPr>
           <a:xfrm>
-            <a:off x="9957816" y="2327955"/>
-            <a:ext cx="566928" cy="224835"/>
+            <a:off x="9957816" y="2349470"/>
+            <a:ext cx="566928" cy="246350"/>
           </a:xfrm>
           <a:prstGeom prst="rect">
             <a:avLst/>
@@ -11906,8 +11847,8 @@
         </p:nvSpPr>
         <p:spPr>
           <a:xfrm>
-            <a:off x="10524744" y="2327955"/>
-            <a:ext cx="859536" cy="224835"/>
+            <a:off x="10524744" y="2349470"/>
+            <a:ext cx="859536" cy="246350"/>
           </a:xfrm>
           <a:prstGeom prst="rect">
             <a:avLst/>
@@ -11945,8 +11886,8 @@
         </p:nvSpPr>
         <p:spPr>
           <a:xfrm>
-            <a:off x="6208776" y="2552790"/>
-            <a:ext cx="2011680" cy="224835"/>
+            <a:off x="6208776" y="2595820"/>
+            <a:ext cx="2011680" cy="246350"/>
           </a:xfrm>
           <a:prstGeom prst="rect">
             <a:avLst/>
@@ -11984,8 +11925,8 @@
         </p:nvSpPr>
         <p:spPr>
           <a:xfrm>
-            <a:off x="8564916" y="2603377"/>
-            <a:ext cx="240756" cy="123659"/>
+            <a:off x="8564916" y="2651249"/>
+            <a:ext cx="240756" cy="135493"/>
           </a:xfrm>
           <a:prstGeom prst="rect">
             <a:avLst/>
@@ -12004,8 +11945,8 @@
         </p:nvSpPr>
         <p:spPr>
           <a:xfrm>
-            <a:off x="9390888" y="2552790"/>
-            <a:ext cx="566928" cy="224835"/>
+            <a:off x="9390888" y="2595820"/>
+            <a:ext cx="566928" cy="246350"/>
           </a:xfrm>
           <a:prstGeom prst="rect">
             <a:avLst/>
@@ -12043,8 +11984,8 @@
         </p:nvSpPr>
         <p:spPr>
           <a:xfrm>
-            <a:off x="9957816" y="2552790"/>
-            <a:ext cx="566928" cy="224835"/>
+            <a:off x="9957816" y="2595820"/>
+            <a:ext cx="566928" cy="246350"/>
           </a:xfrm>
           <a:prstGeom prst="rect">
             <a:avLst/>
@@ -12082,8 +12023,8 @@
         </p:nvSpPr>
         <p:spPr>
           <a:xfrm>
-            <a:off x="10524744" y="2552790"/>
-            <a:ext cx="859536" cy="224835"/>
+            <a:off x="10524744" y="2595820"/>
+            <a:ext cx="859536" cy="246350"/>
           </a:xfrm>
           <a:prstGeom prst="rect">
             <a:avLst/>
@@ -12121,8 +12062,8 @@
         </p:nvSpPr>
         <p:spPr>
           <a:xfrm>
-            <a:off x="6135624" y="2777624"/>
-            <a:ext cx="5394960" cy="224835"/>
+            <a:off x="6135624" y="2842170"/>
+            <a:ext cx="5394960" cy="246350"/>
           </a:xfrm>
           <a:prstGeom prst="rect">
             <a:avLst/>
@@ -12141,8 +12082,8 @@
         </p:nvSpPr>
         <p:spPr>
           <a:xfrm>
-            <a:off x="6208776" y="2777624"/>
-            <a:ext cx="2011680" cy="224835"/>
+            <a:off x="6208776" y="2842170"/>
+            <a:ext cx="2011680" cy="246350"/>
           </a:xfrm>
           <a:prstGeom prst="rect">
             <a:avLst/>
@@ -12180,8 +12121,8 @@
         </p:nvSpPr>
         <p:spPr>
           <a:xfrm>
-            <a:off x="8545748" y="2828212"/>
-            <a:ext cx="259924" cy="123659"/>
+            <a:off x="8545748" y="2897599"/>
+            <a:ext cx="259924" cy="135493"/>
           </a:xfrm>
           <a:prstGeom prst="rect">
             <a:avLst/>
@@ -12200,8 +12141,8 @@
         </p:nvSpPr>
         <p:spPr>
           <a:xfrm>
-            <a:off x="9390888" y="2777624"/>
-            <a:ext cx="566928" cy="224835"/>
+            <a:off x="9390888" y="2842170"/>
+            <a:ext cx="566928" cy="246350"/>
           </a:xfrm>
           <a:prstGeom prst="rect">
             <a:avLst/>
@@ -12239,8 +12180,8 @@
         </p:nvSpPr>
         <p:spPr>
           <a:xfrm>
-            <a:off x="9957816" y="2777624"/>
-            <a:ext cx="566928" cy="224835"/>
+            <a:off x="9957816" y="2842170"/>
+            <a:ext cx="566928" cy="246350"/>
           </a:xfrm>
           <a:prstGeom prst="rect">
             <a:avLst/>
@@ -12278,8 +12219,8 @@
         </p:nvSpPr>
         <p:spPr>
           <a:xfrm>
-            <a:off x="10524744" y="2777624"/>
-            <a:ext cx="859536" cy="224835"/>
+            <a:off x="10524744" y="2842170"/>
+            <a:ext cx="859536" cy="246350"/>
           </a:xfrm>
           <a:prstGeom prst="rect">
             <a:avLst/>
@@ -12317,8 +12258,8 @@
         </p:nvSpPr>
         <p:spPr>
           <a:xfrm>
-            <a:off x="6208776" y="3002459"/>
-            <a:ext cx="2011680" cy="224835"/>
+            <a:off x="6208776" y="3088520"/>
+            <a:ext cx="2011680" cy="246350"/>
           </a:xfrm>
           <a:prstGeom prst="rect">
             <a:avLst/>
@@ -12356,8 +12297,8 @@
         </p:nvSpPr>
         <p:spPr>
           <a:xfrm>
-            <a:off x="8541222" y="3053047"/>
-            <a:ext cx="264450" cy="123659"/>
+            <a:off x="8541222" y="3143949"/>
+            <a:ext cx="264450" cy="135493"/>
           </a:xfrm>
           <a:prstGeom prst="rect">
             <a:avLst/>
@@ -12376,8 +12317,8 @@
         </p:nvSpPr>
         <p:spPr>
           <a:xfrm>
-            <a:off x="9390888" y="3002459"/>
-            <a:ext cx="566928" cy="224835"/>
+            <a:off x="9390888" y="3088520"/>
+            <a:ext cx="566928" cy="246350"/>
           </a:xfrm>
           <a:prstGeom prst="rect">
             <a:avLst/>
@@ -12415,8 +12356,8 @@
         </p:nvSpPr>
         <p:spPr>
           <a:xfrm>
-            <a:off x="9957816" y="3002459"/>
-            <a:ext cx="566928" cy="224835"/>
+            <a:off x="9957816" y="3088520"/>
+            <a:ext cx="566928" cy="246350"/>
           </a:xfrm>
           <a:prstGeom prst="rect">
             <a:avLst/>
@@ -12454,8 +12395,8 @@
         </p:nvSpPr>
         <p:spPr>
           <a:xfrm>
-            <a:off x="10524744" y="3002459"/>
-            <a:ext cx="859536" cy="224835"/>
+            <a:off x="10524744" y="3088520"/>
+            <a:ext cx="859536" cy="246350"/>
           </a:xfrm>
           <a:prstGeom prst="rect">
             <a:avLst/>
@@ -12493,8 +12434,8 @@
         </p:nvSpPr>
         <p:spPr>
           <a:xfrm>
-            <a:off x="6135624" y="3227294"/>
-            <a:ext cx="5394960" cy="224835"/>
+            <a:off x="6135624" y="3334871"/>
+            <a:ext cx="5394960" cy="246350"/>
           </a:xfrm>
           <a:prstGeom prst="rect">
             <a:avLst/>
@@ -12513,8 +12454,8 @@
         </p:nvSpPr>
         <p:spPr>
           <a:xfrm>
-            <a:off x="6208776" y="3227294"/>
-            <a:ext cx="2011680" cy="224835"/>
+            <a:off x="6208776" y="3334871"/>
+            <a:ext cx="2011680" cy="246350"/>
           </a:xfrm>
           <a:prstGeom prst="rect">
             <a:avLst/>
@@ -12552,8 +12493,8 @@
         </p:nvSpPr>
         <p:spPr>
           <a:xfrm>
-            <a:off x="8534757" y="3277882"/>
-            <a:ext cx="270915" cy="123659"/>
+            <a:off x="8534757" y="3390299"/>
+            <a:ext cx="270915" cy="135493"/>
           </a:xfrm>
           <a:prstGeom prst="rect">
             <a:avLst/>
@@ -12572,8 +12513,8 @@
         </p:nvSpPr>
         <p:spPr>
           <a:xfrm>
-            <a:off x="9390888" y="3227294"/>
-            <a:ext cx="566928" cy="224835"/>
+            <a:off x="9390888" y="3334871"/>
+            <a:ext cx="566928" cy="246350"/>
           </a:xfrm>
           <a:prstGeom prst="rect">
             <a:avLst/>
@@ -12611,8 +12552,8 @@
         </p:nvSpPr>
         <p:spPr>
           <a:xfrm>
-            <a:off x="9957816" y="3227294"/>
-            <a:ext cx="566928" cy="224835"/>
+            <a:off x="9957816" y="3334871"/>
+            <a:ext cx="566928" cy="246350"/>
           </a:xfrm>
           <a:prstGeom prst="rect">
             <a:avLst/>
@@ -12650,8 +12591,8 @@
         </p:nvSpPr>
         <p:spPr>
           <a:xfrm>
-            <a:off x="10524744" y="3227294"/>
-            <a:ext cx="859536" cy="224835"/>
+            <a:off x="10524744" y="3334871"/>
+            <a:ext cx="859536" cy="246350"/>
           </a:xfrm>
           <a:prstGeom prst="rect">
             <a:avLst/>
@@ -12689,8 +12630,8 @@
         </p:nvSpPr>
         <p:spPr>
           <a:xfrm>
-            <a:off x="6208776" y="3452129"/>
-            <a:ext cx="2011680" cy="224835"/>
+            <a:off x="6208776" y="3581221"/>
+            <a:ext cx="2011680" cy="246350"/>
           </a:xfrm>
           <a:prstGeom prst="rect">
             <a:avLst/>
@@ -12728,8 +12669,8 @@
         </p:nvSpPr>
         <p:spPr>
           <a:xfrm>
-            <a:off x="8499284" y="3502717"/>
-            <a:ext cx="306388" cy="123659"/>
+            <a:off x="8499284" y="3636649"/>
+            <a:ext cx="306388" cy="135493"/>
           </a:xfrm>
           <a:prstGeom prst="rect">
             <a:avLst/>
@@ -12748,8 +12689,8 @@
         </p:nvSpPr>
         <p:spPr>
           <a:xfrm>
-            <a:off x="9390888" y="3452129"/>
-            <a:ext cx="566928" cy="224835"/>
+            <a:off x="9390888" y="3581221"/>
+            <a:ext cx="566928" cy="246350"/>
           </a:xfrm>
           <a:prstGeom prst="rect">
             <a:avLst/>
@@ -12787,8 +12728,8 @@
         </p:nvSpPr>
         <p:spPr>
           <a:xfrm>
-            <a:off x="9957816" y="3452129"/>
-            <a:ext cx="566928" cy="224835"/>
+            <a:off x="9957816" y="3581221"/>
+            <a:ext cx="566928" cy="246350"/>
           </a:xfrm>
           <a:prstGeom prst="rect">
             <a:avLst/>
@@ -12826,8 +12767,8 @@
         </p:nvSpPr>
         <p:spPr>
           <a:xfrm>
-            <a:off x="10524744" y="3452129"/>
-            <a:ext cx="859536" cy="224835"/>
+            <a:off x="10524744" y="3581221"/>
+            <a:ext cx="859536" cy="246350"/>
           </a:xfrm>
           <a:prstGeom prst="rect">
             <a:avLst/>
@@ -12865,8 +12806,8 @@
         </p:nvSpPr>
         <p:spPr>
           <a:xfrm>
-            <a:off x="6135624" y="3676964"/>
-            <a:ext cx="5394960" cy="224835"/>
+            <a:off x="6135624" y="3827571"/>
+            <a:ext cx="5394960" cy="246350"/>
           </a:xfrm>
           <a:prstGeom prst="rect">
             <a:avLst/>
@@ -12885,8 +12826,8 @@
         </p:nvSpPr>
         <p:spPr>
           <a:xfrm>
-            <a:off x="6208776" y="3676964"/>
-            <a:ext cx="2011680" cy="224835"/>
+            <a:off x="6208776" y="3827571"/>
+            <a:ext cx="2011680" cy="246350"/>
           </a:xfrm>
           <a:prstGeom prst="rect">
             <a:avLst/>
@@ -12924,8 +12865,8 @@
         </p:nvSpPr>
         <p:spPr>
           <a:xfrm>
-            <a:off x="8496238" y="3727552"/>
-            <a:ext cx="309434" cy="123659"/>
+            <a:off x="8496238" y="3883000"/>
+            <a:ext cx="309434" cy="135493"/>
           </a:xfrm>
           <a:prstGeom prst="rect">
             <a:avLst/>
@@ -12944,8 +12885,8 @@
         </p:nvSpPr>
         <p:spPr>
           <a:xfrm>
-            <a:off x="9390888" y="3676964"/>
-            <a:ext cx="566928" cy="224835"/>
+            <a:off x="9390888" y="3827571"/>
+            <a:ext cx="566928" cy="246350"/>
           </a:xfrm>
           <a:prstGeom prst="rect">
             <a:avLst/>
@@ -12983,8 +12924,8 @@
         </p:nvSpPr>
         <p:spPr>
           <a:xfrm>
-            <a:off x="9957816" y="3676964"/>
-            <a:ext cx="566928" cy="224835"/>
+            <a:off x="9957816" y="3827571"/>
+            <a:ext cx="566928" cy="246350"/>
           </a:xfrm>
           <a:prstGeom prst="rect">
             <a:avLst/>
@@ -13022,8 +12963,8 @@
         </p:nvSpPr>
         <p:spPr>
           <a:xfrm>
-            <a:off x="10524744" y="3676964"/>
-            <a:ext cx="859536" cy="224835"/>
+            <a:off x="10524744" y="3827571"/>
+            <a:ext cx="859536" cy="246350"/>
           </a:xfrm>
           <a:prstGeom prst="rect">
             <a:avLst/>
@@ -13061,8 +13002,8 @@
         </p:nvSpPr>
         <p:spPr>
           <a:xfrm>
-            <a:off x="6208776" y="3901799"/>
-            <a:ext cx="2011680" cy="224835"/>
+            <a:off x="6208776" y="4073921"/>
+            <a:ext cx="2011680" cy="246350"/>
           </a:xfrm>
           <a:prstGeom prst="rect">
             <a:avLst/>
@@ -13100,8 +13041,8 @@
         </p:nvSpPr>
         <p:spPr>
           <a:xfrm>
-            <a:off x="8493166" y="3952386"/>
-            <a:ext cx="312506" cy="123659"/>
+            <a:off x="8493166" y="4129350"/>
+            <a:ext cx="312506" cy="135493"/>
           </a:xfrm>
           <a:prstGeom prst="rect">
             <a:avLst/>
@@ -13120,8 +13061,8 @@
         </p:nvSpPr>
         <p:spPr>
           <a:xfrm>
-            <a:off x="9390888" y="3901799"/>
-            <a:ext cx="566928" cy="224835"/>
+            <a:off x="9390888" y="4073921"/>
+            <a:ext cx="566928" cy="246350"/>
           </a:xfrm>
           <a:prstGeom prst="rect">
             <a:avLst/>
@@ -13159,8 +13100,8 @@
         </p:nvSpPr>
         <p:spPr>
           <a:xfrm>
-            <a:off x="9957816" y="3901799"/>
-            <a:ext cx="566928" cy="224835"/>
+            <a:off x="9957816" y="4073921"/>
+            <a:ext cx="566928" cy="246350"/>
           </a:xfrm>
           <a:prstGeom prst="rect">
             <a:avLst/>
@@ -13198,8 +13139,8 @@
         </p:nvSpPr>
         <p:spPr>
           <a:xfrm>
-            <a:off x="10524744" y="3901799"/>
-            <a:ext cx="859536" cy="224835"/>
+            <a:off x="10524744" y="4073921"/>
+            <a:ext cx="859536" cy="246350"/>
           </a:xfrm>
           <a:prstGeom prst="rect">
             <a:avLst/>
@@ -13237,8 +13178,8 @@
         </p:nvSpPr>
         <p:spPr>
           <a:xfrm>
-            <a:off x="6135624" y="4126633"/>
-            <a:ext cx="5394960" cy="224835"/>
+            <a:off x="6135624" y="4320271"/>
+            <a:ext cx="5394960" cy="246350"/>
           </a:xfrm>
           <a:prstGeom prst="rect">
             <a:avLst/>
@@ -13257,8 +13198,8 @@
         </p:nvSpPr>
         <p:spPr>
           <a:xfrm>
-            <a:off x="6208776" y="4126633"/>
-            <a:ext cx="2011680" cy="224835"/>
+            <a:off x="6208776" y="4320271"/>
+            <a:ext cx="2011680" cy="246350"/>
           </a:xfrm>
           <a:prstGeom prst="rect">
             <a:avLst/>
@@ -13296,8 +13237,8 @@
         </p:nvSpPr>
         <p:spPr>
           <a:xfrm>
-            <a:off x="8491434" y="4177221"/>
-            <a:ext cx="314238" cy="123659"/>
+            <a:off x="8491434" y="4375700"/>
+            <a:ext cx="314238" cy="135493"/>
           </a:xfrm>
           <a:prstGeom prst="rect">
             <a:avLst/>
@@ -13316,8 +13257,8 @@
         </p:nvSpPr>
         <p:spPr>
           <a:xfrm>
-            <a:off x="9390888" y="4126633"/>
-            <a:ext cx="566928" cy="224835"/>
+            <a:off x="9390888" y="4320271"/>
+            <a:ext cx="566928" cy="246350"/>
           </a:xfrm>
           <a:prstGeom prst="rect">
             <a:avLst/>
@@ -13355,8 +13296,8 @@
         </p:nvSpPr>
         <p:spPr>
           <a:xfrm>
-            <a:off x="9957816" y="4126633"/>
-            <a:ext cx="566928" cy="224835"/>
+            <a:off x="9957816" y="4320271"/>
+            <a:ext cx="566928" cy="246350"/>
           </a:xfrm>
           <a:prstGeom prst="rect">
             <a:avLst/>
@@ -13394,8 +13335,8 @@
         </p:nvSpPr>
         <p:spPr>
           <a:xfrm>
-            <a:off x="10524744" y="4126633"/>
-            <a:ext cx="859536" cy="224835"/>
+            <a:off x="10524744" y="4320271"/>
+            <a:ext cx="859536" cy="246350"/>
           </a:xfrm>
           <a:prstGeom prst="rect">
             <a:avLst/>
@@ -13433,8 +13374,8 @@
         </p:nvSpPr>
         <p:spPr>
           <a:xfrm>
-            <a:off x="6208776" y="4351468"/>
-            <a:ext cx="2011680" cy="224835"/>
+            <a:off x="6208776" y="4566621"/>
+            <a:ext cx="2011680" cy="246350"/>
           </a:xfrm>
           <a:prstGeom prst="rect">
             <a:avLst/>
@@ -13472,8 +13413,8 @@
         </p:nvSpPr>
         <p:spPr>
           <a:xfrm>
-            <a:off x="8472728" y="4402056"/>
-            <a:ext cx="332944" cy="123659"/>
+            <a:off x="8472728" y="4622050"/>
+            <a:ext cx="332944" cy="135493"/>
           </a:xfrm>
           <a:prstGeom prst="rect">
             <a:avLst/>
@@ -13492,8 +13433,8 @@
         </p:nvSpPr>
         <p:spPr>
           <a:xfrm>
-            <a:off x="9390888" y="4351468"/>
-            <a:ext cx="566928" cy="224835"/>
+            <a:off x="9390888" y="4566621"/>
+            <a:ext cx="566928" cy="246350"/>
           </a:xfrm>
           <a:prstGeom prst="rect">
             <a:avLst/>
@@ -13531,8 +13472,8 @@
         </p:nvSpPr>
         <p:spPr>
           <a:xfrm>
-            <a:off x="9957816" y="4351468"/>
-            <a:ext cx="566928" cy="224835"/>
+            <a:off x="9957816" y="4566621"/>
+            <a:ext cx="566928" cy="246350"/>
           </a:xfrm>
           <a:prstGeom prst="rect">
             <a:avLst/>
@@ -13570,8 +13511,8 @@
         </p:nvSpPr>
         <p:spPr>
           <a:xfrm>
-            <a:off x="10524744" y="4351468"/>
-            <a:ext cx="859536" cy="224835"/>
+            <a:off x="10524744" y="4566621"/>
+            <a:ext cx="859536" cy="246350"/>
           </a:xfrm>
           <a:prstGeom prst="rect">
             <a:avLst/>
@@ -13609,8 +13550,8 @@
         </p:nvSpPr>
         <p:spPr>
           <a:xfrm>
-            <a:off x="6135624" y="4576303"/>
-            <a:ext cx="5394960" cy="224835"/>
+            <a:off x="6135624" y="4812971"/>
+            <a:ext cx="5394960" cy="246350"/>
           </a:xfrm>
           <a:prstGeom prst="rect">
             <a:avLst/>
@@ -13629,8 +13570,8 @@
         </p:nvSpPr>
         <p:spPr>
           <a:xfrm>
-            <a:off x="6208776" y="4576303"/>
-            <a:ext cx="2011680" cy="224835"/>
+            <a:off x="6208776" y="4812971"/>
+            <a:ext cx="2011680" cy="246350"/>
           </a:xfrm>
           <a:prstGeom prst="rect">
             <a:avLst/>
@@ -13668,8 +13609,8 @@
         </p:nvSpPr>
         <p:spPr>
           <a:xfrm>
-            <a:off x="8461553" y="4626891"/>
-            <a:ext cx="344119" cy="123659"/>
+            <a:off x="8461553" y="4868400"/>
+            <a:ext cx="344119" cy="135493"/>
           </a:xfrm>
           <a:prstGeom prst="rect">
             <a:avLst/>
@@ -13688,8 +13629,8 @@
         </p:nvSpPr>
         <p:spPr>
           <a:xfrm>
-            <a:off x="9390888" y="4576303"/>
-            <a:ext cx="566928" cy="224835"/>
+            <a:off x="9390888" y="4812971"/>
+            <a:ext cx="566928" cy="246350"/>
           </a:xfrm>
           <a:prstGeom prst="rect">
             <a:avLst/>
@@ -13727,8 +13668,8 @@
         </p:nvSpPr>
         <p:spPr>
           <a:xfrm>
-            <a:off x="9957816" y="4576303"/>
-            <a:ext cx="566928" cy="224835"/>
+            <a:off x="9957816" y="4812971"/>
+            <a:ext cx="566928" cy="246350"/>
           </a:xfrm>
           <a:prstGeom prst="rect">
             <a:avLst/>
@@ -13766,8 +13707,8 @@
         </p:nvSpPr>
         <p:spPr>
           <a:xfrm>
-            <a:off x="10524744" y="4576303"/>
-            <a:ext cx="859536" cy="224835"/>
+            <a:off x="10524744" y="4812971"/>
+            <a:ext cx="859536" cy="246350"/>
           </a:xfrm>
           <a:prstGeom prst="rect">
             <a:avLst/>
@@ -13805,8 +13746,8 @@
         </p:nvSpPr>
         <p:spPr>
           <a:xfrm>
-            <a:off x="6208776" y="4801138"/>
-            <a:ext cx="2011680" cy="224835"/>
+            <a:off x="6208776" y="5059321"/>
+            <a:ext cx="2011680" cy="246350"/>
           </a:xfrm>
           <a:prstGeom prst="rect">
             <a:avLst/>
@@ -13844,8 +13785,8 @@
         </p:nvSpPr>
         <p:spPr>
           <a:xfrm>
-            <a:off x="8358802" y="4851726"/>
-            <a:ext cx="446870" cy="123659"/>
+            <a:off x="8358802" y="5114750"/>
+            <a:ext cx="446870" cy="135493"/>
           </a:xfrm>
           <a:prstGeom prst="rect">
             <a:avLst/>
@@ -13864,8 +13805,8 @@
         </p:nvSpPr>
         <p:spPr>
           <a:xfrm>
-            <a:off x="9390888" y="4801138"/>
-            <a:ext cx="566928" cy="224835"/>
+            <a:off x="9390888" y="5059321"/>
+            <a:ext cx="566928" cy="246350"/>
           </a:xfrm>
           <a:prstGeom prst="rect">
             <a:avLst/>
@@ -13903,8 +13844,8 @@
         </p:nvSpPr>
         <p:spPr>
           <a:xfrm>
-            <a:off x="9957816" y="4801138"/>
-            <a:ext cx="566928" cy="224835"/>
+            <a:off x="9957816" y="5059321"/>
+            <a:ext cx="566928" cy="246350"/>
           </a:xfrm>
           <a:prstGeom prst="rect">
             <a:avLst/>
@@ -13942,8 +13883,8 @@
         </p:nvSpPr>
         <p:spPr>
           <a:xfrm>
-            <a:off x="10524744" y="4801138"/>
-            <a:ext cx="859536" cy="224835"/>
+            <a:off x="10524744" y="5059321"/>
+            <a:ext cx="859536" cy="246350"/>
           </a:xfrm>
           <a:prstGeom prst="rect">
             <a:avLst/>
@@ -13981,8 +13922,8 @@
         </p:nvSpPr>
         <p:spPr>
           <a:xfrm>
-            <a:off x="6135624" y="5025973"/>
-            <a:ext cx="5394960" cy="224835"/>
+            <a:off x="6135624" y="5305672"/>
+            <a:ext cx="5394960" cy="246350"/>
           </a:xfrm>
           <a:prstGeom prst="rect">
             <a:avLst/>
@@ -14001,8 +13942,8 @@
         </p:nvSpPr>
         <p:spPr>
           <a:xfrm>
-            <a:off x="6208776" y="5025973"/>
-            <a:ext cx="2011680" cy="224835"/>
+            <a:off x="6208776" y="5305672"/>
+            <a:ext cx="2011680" cy="246350"/>
           </a:xfrm>
           <a:prstGeom prst="rect">
             <a:avLst/>
@@ -14040,8 +13981,8 @@
         </p:nvSpPr>
         <p:spPr>
           <a:xfrm>
-            <a:off x="8352988" y="5076561"/>
-            <a:ext cx="452684" cy="123659"/>
+            <a:off x="8352988" y="5361100"/>
+            <a:ext cx="452684" cy="135493"/>
           </a:xfrm>
           <a:prstGeom prst="rect">
             <a:avLst/>
@@ -14060,8 +14001,8 @@
         </p:nvSpPr>
         <p:spPr>
           <a:xfrm>
-            <a:off x="9390888" y="5025973"/>
-            <a:ext cx="566928" cy="224835"/>
+            <a:off x="9390888" y="5305672"/>
+            <a:ext cx="566928" cy="246350"/>
           </a:xfrm>
           <a:prstGeom prst="rect">
             <a:avLst/>
@@ -14099,8 +14040,8 @@
         </p:nvSpPr>
         <p:spPr>
           <a:xfrm>
-            <a:off x="9957816" y="5025973"/>
-            <a:ext cx="566928" cy="224835"/>
+            <a:off x="9957816" y="5305672"/>
+            <a:ext cx="566928" cy="246350"/>
           </a:xfrm>
           <a:prstGeom prst="rect">
             <a:avLst/>
@@ -14138,8 +14079,8 @@
         </p:nvSpPr>
         <p:spPr>
           <a:xfrm>
-            <a:off x="10524744" y="5025973"/>
-            <a:ext cx="859536" cy="224835"/>
+            <a:off x="10524744" y="5305672"/>
+            <a:ext cx="859536" cy="246350"/>
           </a:xfrm>
           <a:prstGeom prst="rect">
             <a:avLst/>
@@ -14177,8 +14118,8 @@
         </p:nvSpPr>
         <p:spPr>
           <a:xfrm>
-            <a:off x="6208776" y="5250808"/>
-            <a:ext cx="2011680" cy="224835"/>
+            <a:off x="6208776" y="5552022"/>
+            <a:ext cx="2011680" cy="246350"/>
           </a:xfrm>
           <a:prstGeom prst="rect">
             <a:avLst/>
@@ -14216,8 +14157,8 @@
         </p:nvSpPr>
         <p:spPr>
           <a:xfrm>
-            <a:off x="8331777" y="5301395"/>
-            <a:ext cx="473895" cy="123659"/>
+            <a:off x="8331777" y="5607450"/>
+            <a:ext cx="473895" cy="135493"/>
           </a:xfrm>
           <a:prstGeom prst="rect">
             <a:avLst/>
@@ -14236,8 +14177,8 @@
         </p:nvSpPr>
         <p:spPr>
           <a:xfrm>
-            <a:off x="9390888" y="5250808"/>
-            <a:ext cx="566928" cy="224835"/>
+            <a:off x="9390888" y="5552022"/>
+            <a:ext cx="566928" cy="246350"/>
           </a:xfrm>
           <a:prstGeom prst="rect">
             <a:avLst/>
@@ -14275,8 +14216,8 @@
         </p:nvSpPr>
         <p:spPr>
           <a:xfrm>
-            <a:off x="9957816" y="5250808"/>
-            <a:ext cx="566928" cy="224835"/>
+            <a:off x="9957816" y="5552022"/>
+            <a:ext cx="566928" cy="246350"/>
           </a:xfrm>
           <a:prstGeom prst="rect">
             <a:avLst/>
@@ -14314,8 +14255,8 @@
         </p:nvSpPr>
         <p:spPr>
           <a:xfrm>
-            <a:off x="10524744" y="5250808"/>
-            <a:ext cx="859536" cy="224835"/>
+            <a:off x="10524744" y="5552022"/>
+            <a:ext cx="859536" cy="246350"/>
           </a:xfrm>
           <a:prstGeom prst="rect">
             <a:avLst/>
@@ -14353,8 +14294,8 @@
         </p:nvSpPr>
         <p:spPr>
           <a:xfrm>
-            <a:off x="6135624" y="5475642"/>
-            <a:ext cx="5394960" cy="224835"/>
+            <a:off x="6135624" y="5798372"/>
+            <a:ext cx="5394960" cy="246350"/>
           </a:xfrm>
           <a:prstGeom prst="rect">
             <a:avLst/>
@@ -14373,8 +14314,8 @@
         </p:nvSpPr>
         <p:spPr>
           <a:xfrm>
-            <a:off x="6208776" y="5475642"/>
-            <a:ext cx="2011680" cy="224835"/>
+            <a:off x="6208776" y="5798372"/>
+            <a:ext cx="2011680" cy="246350"/>
           </a:xfrm>
           <a:prstGeom prst="rect">
             <a:avLst/>
@@ -14412,8 +14353,8 @@
         </p:nvSpPr>
         <p:spPr>
           <a:xfrm>
-            <a:off x="8266176" y="5526230"/>
-            <a:ext cx="539496" cy="123659"/>
+            <a:off x="8266176" y="5853801"/>
+            <a:ext cx="539496" cy="135493"/>
           </a:xfrm>
           <a:prstGeom prst="rect">
             <a:avLst/>
@@ -14432,8 +14373,8 @@
         </p:nvSpPr>
         <p:spPr>
           <a:xfrm>
-            <a:off x="9390888" y="5475642"/>
-            <a:ext cx="566928" cy="224835"/>
+            <a:off x="9390888" y="5798372"/>
+            <a:ext cx="566928" cy="246350"/>
           </a:xfrm>
           <a:prstGeom prst="rect">
             <a:avLst/>
@@ -14471,8 +14412,8 @@
         </p:nvSpPr>
         <p:spPr>
           <a:xfrm>
-            <a:off x="9957816" y="5475642"/>
-            <a:ext cx="566928" cy="224835"/>
+            <a:off x="9957816" y="5798372"/>
+            <a:ext cx="566928" cy="246350"/>
           </a:xfrm>
           <a:prstGeom prst="rect">
             <a:avLst/>
@@ -14510,8 +14451,8 @@
         </p:nvSpPr>
         <p:spPr>
           <a:xfrm>
-            <a:off x="10524744" y="5475642"/>
-            <a:ext cx="859536" cy="224835"/>
+            <a:off x="10524744" y="5798372"/>
+            <a:ext cx="859536" cy="246350"/>
           </a:xfrm>
           <a:prstGeom prst="rect">
             <a:avLst/>
@@ -14538,65 +14479,6 @@
               <a:t>−17.6 pts</a:t>
             </a:r>
             <a:endParaRPr lang="en-US" sz="1300" dirty="0"/>
-          </a:p>
-        </p:txBody>
-      </p:sp>
-      <p:sp>
-        <p:nvSpPr>
-          <p:cNvPr id="202" name="Shape 200"/>
-          <p:cNvSpPr/>
-          <p:nvPr/>
-        </p:nvSpPr>
-        <p:spPr>
-          <a:xfrm>
-            <a:off x="457200" y="6126480"/>
-            <a:ext cx="11274552" cy="615696"/>
-          </a:xfrm>
-          <a:prstGeom prst="rect">
-            <a:avLst/>
-          </a:prstGeom>
-          <a:solidFill>
-            <a:srgbClr val="EDF4FA"/>
-          </a:solidFill>
-          <a:ln/>
-        </p:spPr>
-      </p:sp>
-      <p:sp>
-        <p:nvSpPr>
-          <p:cNvPr id="203" name="Text 201"/>
-          <p:cNvSpPr txBox="1"/>
-          <p:nvPr/>
-        </p:nvSpPr>
-        <p:spPr>
-          <a:xfrm>
-            <a:off x="658368" y="6144768"/>
-            <a:ext cx="10927080" cy="579120"/>
-          </a:xfrm>
-          <a:prstGeom prst="rect">
-            <a:avLst/>
-          </a:prstGeom>
-          <a:noFill/>
-          <a:ln/>
-        </p:spPr>
-        <p:txBody>
-          <a:bodyPr wrap="square" lIns="0" tIns="0" rIns="0" bIns="0" rtlCol="0" anchor="ctr"/>
-          <a:lstStyle/>
-          <a:p>
-            <a:pPr indent="0" marL="0">
-              <a:buNone/>
-            </a:pPr>
-            <a:r>
-              <a:rPr lang="en-US" sz="1600" b="1" dirty="0">
-                <a:solidFill>
-                  <a:srgbClr val="0B2C4A"/>
-                </a:solidFill>
-                <a:latin typeface="Inter" pitchFamily="34" charset="0"/>
-                <a:ea typeface="Inter" pitchFamily="34" charset="-122"/>
-                <a:cs typeface="Inter" pitchFamily="34" charset="-120"/>
-              </a:rPr>
-              <a:t>28 of 33 stores collect less parts margin on internal work than on customer pay; the group is −4.2 pts. Widest: LR LV (−17.6 pts), Honda Flagstaff (−15.4 pts) and Audi Reno (−14.7 pts).</a:t>
-            </a:r>
-            <a:endParaRPr lang="en-US" sz="1600" dirty="0"/>
           </a:p>
         </p:txBody>
       </p:sp>

--- a/day2-deck/decks/CP vs Internal GP - Review.pptx
+++ b/day2-deck/decks/CP vs Internal GP - Review.pptx
@@ -503,7 +503,7 @@
           <a:p>
             <a:r>
               <a:rPr lang="en-US" dirty="0"/>
-              <a:t>Takeaway (off the slide): 25 of 33 stores collect less labor margin on internal work than on customer pay; the group is −2.7 pts. Widest: Audi Reno (−20.0 pts), LR LV (−13.9 pts) and LR Henderson (−12.2 pts).Source: Qlik - Closed Repair Orders. Jan-Sep 2026 by close month. Same-store, INEOS excluded (opened 2026). GMC Prescott body shop labor types excluded. Gap = internal GP% minus customer-pay GP%, in points. Green: internal at or above the store's own customer-pay rate; red: below. Dashed line: the group gap (−2.7 pts). At or above customer pay: Cadillac, Chevy GMC Bullhead, GMC Prescott, Hyundai Prescott, Hyundai St George, Kia LV, Kia St George and VW St George. A gap can be a policy (internal detail, used-car recon pricing) rather than a miss; confirm with the store before calling it out.</a:t>
+              <a:t>Takeaway with the store call-outs (off the slide): 25 of 33 stores collect less labor margin on internal work than on customer pay; the group is −2.7 pts. Widest: Audi Reno (−20.0 pts), LR LV (−13.9 pts) and LR Henderson (−12.2 pts).Source: Qlik - Closed Repair Orders. Jan-Sep 2026 by close month. Same-store, INEOS excluded (opened 2026). GMC Prescott body shop labor types excluded. Gap = internal GP% minus customer-pay GP%, in points. Green: internal at or above the store's own customer-pay rate; red: below. Dashed line: the group gap (−2.7 pts). At or above customer pay: Cadillac, Chevy GMC Bullhead, GMC Prescott, Hyundai Prescott, Hyundai St George, Kia LV, Kia St George and VW St George. A gap can be a policy (internal detail, used-car recon pricing) rather than a miss; confirm with the store before calling it out.</a:t>
             </a:r>
             <a:endParaRPr lang="en-US" dirty="0"/>
           </a:p>
@@ -591,7 +591,7 @@
           <a:p>
             <a:r>
               <a:rPr lang="en-US" dirty="0"/>
-              <a:t>Takeaway (off the slide): 28 of 33 stores collect less parts margin on internal work than on customer pay; the group is −4.2 pts. Widest: LR LV (−17.6 pts), Honda Flagstaff (−15.4 pts) and Audi Reno (−14.7 pts).Source: Qlik - Closed Repair Orders. Jan-Sep 2026 by close month. Same-store, INEOS excluded (opened 2026). GMC Prescott body shop labor types excluded. Gap = internal GP% minus customer-pay GP%, in points. Green: internal at or above the store's own customer-pay rate; red: below. Dashed line: the group gap (−4.2 pts). At or above customer pay: Chevy LV, Honda Henderson, Subaru Prescott, Toyota Henderson and Volvo. A gap can be a policy (internal detail, used-car recon pricing) rather than a miss; confirm with the store before calling it out.</a:t>
+              <a:t>Takeaway with the store call-outs (off the slide): 28 of 33 stores collect less parts margin on internal work than on customer pay; the group is −4.2 pts. Widest: LR LV (−17.6 pts), Honda Flagstaff (−15.4 pts) and Audi Reno (−14.7 pts).Source: Qlik - Closed Repair Orders. Jan-Sep 2026 by close month. Same-store, INEOS excluded (opened 2026). GMC Prescott body shop labor types excluded. Gap = internal GP% minus customer-pay GP%, in points. Green: internal at or above the store's own customer-pay rate; red: below. Dashed line: the group gap (−4.2 pts). At or above customer pay: Chevy LV, Honda Henderson, Subaru Prescott, Toyota Henderson and Volvo. A gap can be a policy (internal detail, used-car recon pricing) rather than a miss; confirm with the store before calling it out.</a:t>
             </a:r>
             <a:endParaRPr lang="en-US" dirty="0"/>
           </a:p>
@@ -1071,7 +1071,7 @@
         <p:spPr>
           <a:xfrm>
             <a:off x="457200" y="1207008"/>
-            <a:ext cx="11274552" cy="5148072"/>
+            <a:ext cx="11274552" cy="4782312"/>
           </a:xfrm>
           <a:prstGeom prst="rect">
             <a:avLst/>
@@ -1357,7 +1357,7 @@
         <p:spPr>
           <a:xfrm>
             <a:off x="3249778" y="2103120"/>
-            <a:ext cx="10973" cy="4187952"/>
+            <a:ext cx="10973" cy="3822192"/>
           </a:xfrm>
           <a:prstGeom prst="rect">
             <a:avLst/>
@@ -1377,7 +1377,7 @@
         <p:spPr>
           <a:xfrm>
             <a:off x="3183188" y="2103120"/>
-            <a:ext cx="0" cy="4187952"/>
+            <a:ext cx="0" cy="3822192"/>
           </a:xfrm>
           <a:prstGeom prst="line">
             <a:avLst/>
@@ -1545,7 +1545,7 @@
         <p:spPr>
           <a:xfrm>
             <a:off x="8800186" y="2103120"/>
-            <a:ext cx="10973" cy="3941602"/>
+            <a:ext cx="10973" cy="3597357"/>
           </a:xfrm>
           <a:prstGeom prst="rect">
             <a:avLst/>
@@ -1565,7 +1565,7 @@
         <p:spPr>
           <a:xfrm>
             <a:off x="8733596" y="2103120"/>
-            <a:ext cx="0" cy="3941602"/>
+            <a:ext cx="0" cy="3597357"/>
           </a:xfrm>
           <a:prstGeom prst="line">
             <a:avLst/>
@@ -1588,7 +1588,7 @@
         <p:spPr>
           <a:xfrm>
             <a:off x="658368" y="2103120"/>
-            <a:ext cx="2011680" cy="246350"/>
+            <a:ext cx="2011680" cy="224835"/>
           </a:xfrm>
           <a:prstGeom prst="rect">
             <a:avLst/>
@@ -1626,8 +1626,8 @@
         </p:nvSpPr>
         <p:spPr>
           <a:xfrm>
-            <a:off x="3255264" y="2158549"/>
-            <a:ext cx="130113" cy="135493"/>
+            <a:off x="3255264" y="2153708"/>
+            <a:ext cx="130113" cy="123659"/>
           </a:xfrm>
           <a:prstGeom prst="rect">
             <a:avLst/>
@@ -1647,7 +1647,7 @@
         <p:spPr>
           <a:xfrm>
             <a:off x="3840480" y="2103120"/>
-            <a:ext cx="566928" cy="246350"/>
+            <a:ext cx="566928" cy="224835"/>
           </a:xfrm>
           <a:prstGeom prst="rect">
             <a:avLst/>
@@ -1686,7 +1686,7 @@
         <p:spPr>
           <a:xfrm>
             <a:off x="4407408" y="2103120"/>
-            <a:ext cx="566928" cy="246350"/>
+            <a:ext cx="566928" cy="224835"/>
           </a:xfrm>
           <a:prstGeom prst="rect">
             <a:avLst/>
@@ -1725,7 +1725,7 @@
         <p:spPr>
           <a:xfrm>
             <a:off x="4974336" y="2103120"/>
-            <a:ext cx="859536" cy="246350"/>
+            <a:ext cx="859536" cy="224835"/>
           </a:xfrm>
           <a:prstGeom prst="rect">
             <a:avLst/>
@@ -1763,8 +1763,8 @@
         </p:nvSpPr>
         <p:spPr>
           <a:xfrm>
-            <a:off x="585216" y="2349470"/>
-            <a:ext cx="5394960" cy="246350"/>
+            <a:off x="585216" y="2327955"/>
+            <a:ext cx="5394960" cy="224835"/>
           </a:xfrm>
           <a:prstGeom prst="rect">
             <a:avLst/>
@@ -1783,8 +1783,8 @@
         </p:nvSpPr>
         <p:spPr>
           <a:xfrm>
-            <a:off x="658368" y="2349470"/>
-            <a:ext cx="2011680" cy="246350"/>
+            <a:off x="658368" y="2327955"/>
+            <a:ext cx="2011680" cy="224835"/>
           </a:xfrm>
           <a:prstGeom prst="rect">
             <a:avLst/>
@@ -1822,8 +1822,8 @@
         </p:nvSpPr>
         <p:spPr>
           <a:xfrm>
-            <a:off x="3255264" y="2404899"/>
-            <a:ext cx="129665" cy="135493"/>
+            <a:off x="3255264" y="2378543"/>
+            <a:ext cx="129665" cy="123659"/>
           </a:xfrm>
           <a:prstGeom prst="rect">
             <a:avLst/>
@@ -1842,8 +1842,8 @@
         </p:nvSpPr>
         <p:spPr>
           <a:xfrm>
-            <a:off x="3840480" y="2349470"/>
-            <a:ext cx="566928" cy="246350"/>
+            <a:off x="3840480" y="2327955"/>
+            <a:ext cx="566928" cy="224835"/>
           </a:xfrm>
           <a:prstGeom prst="rect">
             <a:avLst/>
@@ -1881,8 +1881,8 @@
         </p:nvSpPr>
         <p:spPr>
           <a:xfrm>
-            <a:off x="4407408" y="2349470"/>
-            <a:ext cx="566928" cy="246350"/>
+            <a:off x="4407408" y="2327955"/>
+            <a:ext cx="566928" cy="224835"/>
           </a:xfrm>
           <a:prstGeom prst="rect">
             <a:avLst/>
@@ -1920,8 +1920,8 @@
         </p:nvSpPr>
         <p:spPr>
           <a:xfrm>
-            <a:off x="4974336" y="2349470"/>
-            <a:ext cx="859536" cy="246350"/>
+            <a:off x="4974336" y="2327955"/>
+            <a:ext cx="859536" cy="224835"/>
           </a:xfrm>
           <a:prstGeom prst="rect">
             <a:avLst/>
@@ -1959,8 +1959,8 @@
         </p:nvSpPr>
         <p:spPr>
           <a:xfrm>
-            <a:off x="658368" y="2595820"/>
-            <a:ext cx="2011680" cy="246350"/>
+            <a:off x="658368" y="2552790"/>
+            <a:ext cx="2011680" cy="224835"/>
           </a:xfrm>
           <a:prstGeom prst="rect">
             <a:avLst/>
@@ -1998,8 +1998,8 @@
         </p:nvSpPr>
         <p:spPr>
           <a:xfrm>
-            <a:off x="3255264" y="2651249"/>
-            <a:ext cx="104292" cy="135493"/>
+            <a:off x="3255264" y="2603377"/>
+            <a:ext cx="104292" cy="123659"/>
           </a:xfrm>
           <a:prstGeom prst="rect">
             <a:avLst/>
@@ -2018,8 +2018,8 @@
         </p:nvSpPr>
         <p:spPr>
           <a:xfrm>
-            <a:off x="3840480" y="2595820"/>
-            <a:ext cx="566928" cy="246350"/>
+            <a:off x="3840480" y="2552790"/>
+            <a:ext cx="566928" cy="224835"/>
           </a:xfrm>
           <a:prstGeom prst="rect">
             <a:avLst/>
@@ -2057,8 +2057,8 @@
         </p:nvSpPr>
         <p:spPr>
           <a:xfrm>
-            <a:off x="4407408" y="2595820"/>
-            <a:ext cx="566928" cy="246350"/>
+            <a:off x="4407408" y="2552790"/>
+            <a:ext cx="566928" cy="224835"/>
           </a:xfrm>
           <a:prstGeom prst="rect">
             <a:avLst/>
@@ -2096,8 +2096,8 @@
         </p:nvSpPr>
         <p:spPr>
           <a:xfrm>
-            <a:off x="4974336" y="2595820"/>
-            <a:ext cx="859536" cy="246350"/>
+            <a:off x="4974336" y="2552790"/>
+            <a:ext cx="859536" cy="224835"/>
           </a:xfrm>
           <a:prstGeom prst="rect">
             <a:avLst/>
@@ -2135,8 +2135,8 @@
         </p:nvSpPr>
         <p:spPr>
           <a:xfrm>
-            <a:off x="585216" y="2842170"/>
-            <a:ext cx="5394960" cy="246350"/>
+            <a:off x="585216" y="2777624"/>
+            <a:ext cx="5394960" cy="224835"/>
           </a:xfrm>
           <a:prstGeom prst="rect">
             <a:avLst/>
@@ -2155,8 +2155,8 @@
         </p:nvSpPr>
         <p:spPr>
           <a:xfrm>
-            <a:off x="658368" y="2842170"/>
-            <a:ext cx="2011680" cy="246350"/>
+            <a:off x="658368" y="2777624"/>
+            <a:ext cx="2011680" cy="224835"/>
           </a:xfrm>
           <a:prstGeom prst="rect">
             <a:avLst/>
@@ -2194,8 +2194,8 @@
         </p:nvSpPr>
         <p:spPr>
           <a:xfrm>
-            <a:off x="3255264" y="2897599"/>
-            <a:ext cx="96492" cy="135493"/>
+            <a:off x="3255264" y="2828212"/>
+            <a:ext cx="96492" cy="123659"/>
           </a:xfrm>
           <a:prstGeom prst="rect">
             <a:avLst/>
@@ -2214,8 +2214,8 @@
         </p:nvSpPr>
         <p:spPr>
           <a:xfrm>
-            <a:off x="3840480" y="2842170"/>
-            <a:ext cx="566928" cy="246350"/>
+            <a:off x="3840480" y="2777624"/>
+            <a:ext cx="566928" cy="224835"/>
           </a:xfrm>
           <a:prstGeom prst="rect">
             <a:avLst/>
@@ -2253,8 +2253,8 @@
         </p:nvSpPr>
         <p:spPr>
           <a:xfrm>
-            <a:off x="4407408" y="2842170"/>
-            <a:ext cx="566928" cy="246350"/>
+            <a:off x="4407408" y="2777624"/>
+            <a:ext cx="566928" cy="224835"/>
           </a:xfrm>
           <a:prstGeom prst="rect">
             <a:avLst/>
@@ -2292,8 +2292,8 @@
         </p:nvSpPr>
         <p:spPr>
           <a:xfrm>
-            <a:off x="4974336" y="2842170"/>
-            <a:ext cx="859536" cy="246350"/>
+            <a:off x="4974336" y="2777624"/>
+            <a:ext cx="859536" cy="224835"/>
           </a:xfrm>
           <a:prstGeom prst="rect">
             <a:avLst/>
@@ -2331,8 +2331,8 @@
         </p:nvSpPr>
         <p:spPr>
           <a:xfrm>
-            <a:off x="658368" y="3088520"/>
-            <a:ext cx="2011680" cy="246350"/>
+            <a:off x="658368" y="3002459"/>
+            <a:ext cx="2011680" cy="224835"/>
           </a:xfrm>
           <a:prstGeom prst="rect">
             <a:avLst/>
@@ -2370,8 +2370,8 @@
         </p:nvSpPr>
         <p:spPr>
           <a:xfrm>
-            <a:off x="3255264" y="3143949"/>
-            <a:ext cx="77376" cy="135493"/>
+            <a:off x="3255264" y="3053047"/>
+            <a:ext cx="77376" cy="123659"/>
           </a:xfrm>
           <a:prstGeom prst="rect">
             <a:avLst/>
@@ -2390,8 +2390,8 @@
         </p:nvSpPr>
         <p:spPr>
           <a:xfrm>
-            <a:off x="3840480" y="3088520"/>
-            <a:ext cx="566928" cy="246350"/>
+            <a:off x="3840480" y="3002459"/>
+            <a:ext cx="566928" cy="224835"/>
           </a:xfrm>
           <a:prstGeom prst="rect">
             <a:avLst/>
@@ -2429,8 +2429,8 @@
         </p:nvSpPr>
         <p:spPr>
           <a:xfrm>
-            <a:off x="4407408" y="3088520"/>
-            <a:ext cx="566928" cy="246350"/>
+            <a:off x="4407408" y="3002459"/>
+            <a:ext cx="566928" cy="224835"/>
           </a:xfrm>
           <a:prstGeom prst="rect">
             <a:avLst/>
@@ -2468,8 +2468,8 @@
         </p:nvSpPr>
         <p:spPr>
           <a:xfrm>
-            <a:off x="4974336" y="3088520"/>
-            <a:ext cx="859536" cy="246350"/>
+            <a:off x="4974336" y="3002459"/>
+            <a:ext cx="859536" cy="224835"/>
           </a:xfrm>
           <a:prstGeom prst="rect">
             <a:avLst/>
@@ -2507,8 +2507,8 @@
         </p:nvSpPr>
         <p:spPr>
           <a:xfrm>
-            <a:off x="585216" y="3334871"/>
-            <a:ext cx="5394960" cy="246350"/>
+            <a:off x="585216" y="3227294"/>
+            <a:ext cx="5394960" cy="224835"/>
           </a:xfrm>
           <a:prstGeom prst="rect">
             <a:avLst/>
@@ -2527,8 +2527,8 @@
         </p:nvSpPr>
         <p:spPr>
           <a:xfrm>
-            <a:off x="658368" y="3334871"/>
-            <a:ext cx="2011680" cy="246350"/>
+            <a:off x="658368" y="3227294"/>
+            <a:ext cx="2011680" cy="224835"/>
           </a:xfrm>
           <a:prstGeom prst="rect">
             <a:avLst/>
@@ -2566,8 +2566,8 @@
         </p:nvSpPr>
         <p:spPr>
           <a:xfrm>
-            <a:off x="3255264" y="3390299"/>
-            <a:ext cx="65728" cy="135493"/>
+            <a:off x="3255264" y="3277882"/>
+            <a:ext cx="65728" cy="123659"/>
           </a:xfrm>
           <a:prstGeom prst="rect">
             <a:avLst/>
@@ -2586,8 +2586,8 @@
         </p:nvSpPr>
         <p:spPr>
           <a:xfrm>
-            <a:off x="3840480" y="3334871"/>
-            <a:ext cx="566928" cy="246350"/>
+            <a:off x="3840480" y="3227294"/>
+            <a:ext cx="566928" cy="224835"/>
           </a:xfrm>
           <a:prstGeom prst="rect">
             <a:avLst/>
@@ -2625,8 +2625,8 @@
         </p:nvSpPr>
         <p:spPr>
           <a:xfrm>
-            <a:off x="4407408" y="3334871"/>
-            <a:ext cx="566928" cy="246350"/>
+            <a:off x="4407408" y="3227294"/>
+            <a:ext cx="566928" cy="224835"/>
           </a:xfrm>
           <a:prstGeom prst="rect">
             <a:avLst/>
@@ -2664,8 +2664,8 @@
         </p:nvSpPr>
         <p:spPr>
           <a:xfrm>
-            <a:off x="4974336" y="3334871"/>
-            <a:ext cx="859536" cy="246350"/>
+            <a:off x="4974336" y="3227294"/>
+            <a:ext cx="859536" cy="224835"/>
           </a:xfrm>
           <a:prstGeom prst="rect">
             <a:avLst/>
@@ -2703,8 +2703,8 @@
         </p:nvSpPr>
         <p:spPr>
           <a:xfrm>
-            <a:off x="658368" y="3581221"/>
-            <a:ext cx="2011680" cy="246350"/>
+            <a:off x="658368" y="3452129"/>
+            <a:ext cx="2011680" cy="224835"/>
           </a:xfrm>
           <a:prstGeom prst="rect">
             <a:avLst/>
@@ -2742,8 +2742,8 @@
         </p:nvSpPr>
         <p:spPr>
           <a:xfrm>
-            <a:off x="3255264" y="3636649"/>
-            <a:ext cx="65019" cy="135493"/>
+            <a:off x="3255264" y="3502717"/>
+            <a:ext cx="65019" cy="123659"/>
           </a:xfrm>
           <a:prstGeom prst="rect">
             <a:avLst/>
@@ -2762,8 +2762,8 @@
         </p:nvSpPr>
         <p:spPr>
           <a:xfrm>
-            <a:off x="3840480" y="3581221"/>
-            <a:ext cx="566928" cy="246350"/>
+            <a:off x="3840480" y="3452129"/>
+            <a:ext cx="566928" cy="224835"/>
           </a:xfrm>
           <a:prstGeom prst="rect">
             <a:avLst/>
@@ -2801,8 +2801,8 @@
         </p:nvSpPr>
         <p:spPr>
           <a:xfrm>
-            <a:off x="4407408" y="3581221"/>
-            <a:ext cx="566928" cy="246350"/>
+            <a:off x="4407408" y="3452129"/>
+            <a:ext cx="566928" cy="224835"/>
           </a:xfrm>
           <a:prstGeom prst="rect">
             <a:avLst/>
@@ -2840,8 +2840,8 @@
         </p:nvSpPr>
         <p:spPr>
           <a:xfrm>
-            <a:off x="4974336" y="3581221"/>
-            <a:ext cx="859536" cy="246350"/>
+            <a:off x="4974336" y="3452129"/>
+            <a:ext cx="859536" cy="224835"/>
           </a:xfrm>
           <a:prstGeom prst="rect">
             <a:avLst/>
@@ -2879,8 +2879,8 @@
         </p:nvSpPr>
         <p:spPr>
           <a:xfrm>
-            <a:off x="585216" y="3827571"/>
-            <a:ext cx="5394960" cy="246350"/>
+            <a:off x="585216" y="3676964"/>
+            <a:ext cx="5394960" cy="224835"/>
           </a:xfrm>
           <a:prstGeom prst="rect">
             <a:avLst/>
@@ -2899,8 +2899,8 @@
         </p:nvSpPr>
         <p:spPr>
           <a:xfrm>
-            <a:off x="658368" y="3827571"/>
-            <a:ext cx="2011680" cy="246350"/>
+            <a:off x="658368" y="3676964"/>
+            <a:ext cx="2011680" cy="224835"/>
           </a:xfrm>
           <a:prstGeom prst="rect">
             <a:avLst/>
@@ -2938,8 +2938,8 @@
         </p:nvSpPr>
         <p:spPr>
           <a:xfrm>
-            <a:off x="3255264" y="3883000"/>
-            <a:ext cx="23117" cy="135493"/>
+            <a:off x="3255264" y="3727552"/>
+            <a:ext cx="23117" cy="123659"/>
           </a:xfrm>
           <a:prstGeom prst="rect">
             <a:avLst/>
@@ -2958,8 +2958,8 @@
         </p:nvSpPr>
         <p:spPr>
           <a:xfrm>
-            <a:off x="3840480" y="3827571"/>
-            <a:ext cx="566928" cy="246350"/>
+            <a:off x="3840480" y="3676964"/>
+            <a:ext cx="566928" cy="224835"/>
           </a:xfrm>
           <a:prstGeom prst="rect">
             <a:avLst/>
@@ -2997,8 +2997,8 @@
         </p:nvSpPr>
         <p:spPr>
           <a:xfrm>
-            <a:off x="4407408" y="3827571"/>
-            <a:ext cx="566928" cy="246350"/>
+            <a:off x="4407408" y="3676964"/>
+            <a:ext cx="566928" cy="224835"/>
           </a:xfrm>
           <a:prstGeom prst="rect">
             <a:avLst/>
@@ -3036,8 +3036,8 @@
         </p:nvSpPr>
         <p:spPr>
           <a:xfrm>
-            <a:off x="4974336" y="3827571"/>
-            <a:ext cx="859536" cy="246350"/>
+            <a:off x="4974336" y="3676964"/>
+            <a:ext cx="859536" cy="224835"/>
           </a:xfrm>
           <a:prstGeom prst="rect">
             <a:avLst/>
@@ -3075,8 +3075,8 @@
         </p:nvSpPr>
         <p:spPr>
           <a:xfrm>
-            <a:off x="658368" y="4073921"/>
-            <a:ext cx="2011680" cy="246350"/>
+            <a:off x="658368" y="3901799"/>
+            <a:ext cx="2011680" cy="224835"/>
           </a:xfrm>
           <a:prstGeom prst="rect">
             <a:avLst/>
@@ -3114,8 +3114,8 @@
         </p:nvSpPr>
         <p:spPr>
           <a:xfrm>
-            <a:off x="3253849" y="4129350"/>
-            <a:ext cx="9144" cy="135493"/>
+            <a:off x="3253849" y="3952386"/>
+            <a:ext cx="9144" cy="123659"/>
           </a:xfrm>
           <a:prstGeom prst="rect">
             <a:avLst/>
@@ -3134,8 +3134,8 @@
         </p:nvSpPr>
         <p:spPr>
           <a:xfrm>
-            <a:off x="3840480" y="4073921"/>
-            <a:ext cx="566928" cy="246350"/>
+            <a:off x="3840480" y="3901799"/>
+            <a:ext cx="566928" cy="224835"/>
           </a:xfrm>
           <a:prstGeom prst="rect">
             <a:avLst/>
@@ -3173,8 +3173,8 @@
         </p:nvSpPr>
         <p:spPr>
           <a:xfrm>
-            <a:off x="4407408" y="4073921"/>
-            <a:ext cx="566928" cy="246350"/>
+            <a:off x="4407408" y="3901799"/>
+            <a:ext cx="566928" cy="224835"/>
           </a:xfrm>
           <a:prstGeom prst="rect">
             <a:avLst/>
@@ -3212,8 +3212,8 @@
         </p:nvSpPr>
         <p:spPr>
           <a:xfrm>
-            <a:off x="4974336" y="4073921"/>
-            <a:ext cx="859536" cy="246350"/>
+            <a:off x="4974336" y="3901799"/>
+            <a:ext cx="859536" cy="224835"/>
           </a:xfrm>
           <a:prstGeom prst="rect">
             <a:avLst/>
@@ -3251,8 +3251,8 @@
         </p:nvSpPr>
         <p:spPr>
           <a:xfrm>
-            <a:off x="585216" y="4320271"/>
-            <a:ext cx="5394960" cy="246350"/>
+            <a:off x="585216" y="4126633"/>
+            <a:ext cx="5394960" cy="224835"/>
           </a:xfrm>
           <a:prstGeom prst="rect">
             <a:avLst/>
@@ -3271,8 +3271,8 @@
         </p:nvSpPr>
         <p:spPr>
           <a:xfrm>
-            <a:off x="658368" y="4320271"/>
-            <a:ext cx="2011680" cy="246350"/>
+            <a:off x="658368" y="4126633"/>
+            <a:ext cx="2011680" cy="224835"/>
           </a:xfrm>
           <a:prstGeom prst="rect">
             <a:avLst/>
@@ -3310,8 +3310,8 @@
         </p:nvSpPr>
         <p:spPr>
           <a:xfrm>
-            <a:off x="3250197" y="4375700"/>
-            <a:ext cx="9144" cy="135493"/>
+            <a:off x="3250197" y="4177221"/>
+            <a:ext cx="9144" cy="123659"/>
           </a:xfrm>
           <a:prstGeom prst="rect">
             <a:avLst/>
@@ -3330,8 +3330,8 @@
         </p:nvSpPr>
         <p:spPr>
           <a:xfrm>
-            <a:off x="3840480" y="4320271"/>
-            <a:ext cx="566928" cy="246350"/>
+            <a:off x="3840480" y="4126633"/>
+            <a:ext cx="566928" cy="224835"/>
           </a:xfrm>
           <a:prstGeom prst="rect">
             <a:avLst/>
@@ -3369,8 +3369,8 @@
         </p:nvSpPr>
         <p:spPr>
           <a:xfrm>
-            <a:off x="4407408" y="4320271"/>
-            <a:ext cx="566928" cy="246350"/>
+            <a:off x="4407408" y="4126633"/>
+            <a:ext cx="566928" cy="224835"/>
           </a:xfrm>
           <a:prstGeom prst="rect">
             <a:avLst/>
@@ -3408,8 +3408,8 @@
         </p:nvSpPr>
         <p:spPr>
           <a:xfrm>
-            <a:off x="4974336" y="4320271"/>
-            <a:ext cx="859536" cy="246350"/>
+            <a:off x="4974336" y="4126633"/>
+            <a:ext cx="859536" cy="224835"/>
           </a:xfrm>
           <a:prstGeom prst="rect">
             <a:avLst/>
@@ -3447,8 +3447,8 @@
         </p:nvSpPr>
         <p:spPr>
           <a:xfrm>
-            <a:off x="658368" y="4566621"/>
-            <a:ext cx="2011680" cy="246350"/>
+            <a:off x="658368" y="4351468"/>
+            <a:ext cx="2011680" cy="224835"/>
           </a:xfrm>
           <a:prstGeom prst="rect">
             <a:avLst/>
@@ -3486,8 +3486,8 @@
         </p:nvSpPr>
         <p:spPr>
           <a:xfrm>
-            <a:off x="3245953" y="4622050"/>
-            <a:ext cx="9311" cy="135493"/>
+            <a:off x="3245953" y="4402056"/>
+            <a:ext cx="9311" cy="123659"/>
           </a:xfrm>
           <a:prstGeom prst="rect">
             <a:avLst/>
@@ -3506,8 +3506,8 @@
         </p:nvSpPr>
         <p:spPr>
           <a:xfrm>
-            <a:off x="3840480" y="4566621"/>
-            <a:ext cx="566928" cy="246350"/>
+            <a:off x="3840480" y="4351468"/>
+            <a:ext cx="566928" cy="224835"/>
           </a:xfrm>
           <a:prstGeom prst="rect">
             <a:avLst/>
@@ -3545,8 +3545,8 @@
         </p:nvSpPr>
         <p:spPr>
           <a:xfrm>
-            <a:off x="4407408" y="4566621"/>
-            <a:ext cx="566928" cy="246350"/>
+            <a:off x="4407408" y="4351468"/>
+            <a:ext cx="566928" cy="224835"/>
           </a:xfrm>
           <a:prstGeom prst="rect">
             <a:avLst/>
@@ -3584,8 +3584,8 @@
         </p:nvSpPr>
         <p:spPr>
           <a:xfrm>
-            <a:off x="4974336" y="4566621"/>
-            <a:ext cx="859536" cy="246350"/>
+            <a:off x="4974336" y="4351468"/>
+            <a:ext cx="859536" cy="224835"/>
           </a:xfrm>
           <a:prstGeom prst="rect">
             <a:avLst/>
@@ -3623,8 +3623,8 @@
         </p:nvSpPr>
         <p:spPr>
           <a:xfrm>
-            <a:off x="585216" y="4812971"/>
-            <a:ext cx="5394960" cy="246350"/>
+            <a:off x="585216" y="4576303"/>
+            <a:ext cx="5394960" cy="224835"/>
           </a:xfrm>
           <a:prstGeom prst="rect">
             <a:avLst/>
@@ -3643,8 +3643,8 @@
         </p:nvSpPr>
         <p:spPr>
           <a:xfrm>
-            <a:off x="658368" y="4812971"/>
-            <a:ext cx="2011680" cy="246350"/>
+            <a:off x="658368" y="4576303"/>
+            <a:ext cx="2011680" cy="224835"/>
           </a:xfrm>
           <a:prstGeom prst="rect">
             <a:avLst/>
@@ -3682,8 +3682,8 @@
         </p:nvSpPr>
         <p:spPr>
           <a:xfrm>
-            <a:off x="3244900" y="4868400"/>
-            <a:ext cx="10364" cy="135493"/>
+            <a:off x="3244900" y="4626891"/>
+            <a:ext cx="10364" cy="123659"/>
           </a:xfrm>
           <a:prstGeom prst="rect">
             <a:avLst/>
@@ -3702,8 +3702,8 @@
         </p:nvSpPr>
         <p:spPr>
           <a:xfrm>
-            <a:off x="3840480" y="4812971"/>
-            <a:ext cx="566928" cy="246350"/>
+            <a:off x="3840480" y="4576303"/>
+            <a:ext cx="566928" cy="224835"/>
           </a:xfrm>
           <a:prstGeom prst="rect">
             <a:avLst/>
@@ -3741,8 +3741,8 @@
         </p:nvSpPr>
         <p:spPr>
           <a:xfrm>
-            <a:off x="4407408" y="4812971"/>
-            <a:ext cx="566928" cy="246350"/>
+            <a:off x="4407408" y="4576303"/>
+            <a:ext cx="566928" cy="224835"/>
           </a:xfrm>
           <a:prstGeom prst="rect">
             <a:avLst/>
@@ -3780,8 +3780,8 @@
         </p:nvSpPr>
         <p:spPr>
           <a:xfrm>
-            <a:off x="4974336" y="4812971"/>
-            <a:ext cx="859536" cy="246350"/>
+            <a:off x="4974336" y="4576303"/>
+            <a:ext cx="859536" cy="224835"/>
           </a:xfrm>
           <a:prstGeom prst="rect">
             <a:avLst/>
@@ -3819,8 +3819,8 @@
         </p:nvSpPr>
         <p:spPr>
           <a:xfrm>
-            <a:off x="658368" y="5059321"/>
-            <a:ext cx="2011680" cy="246350"/>
+            <a:off x="658368" y="4801138"/>
+            <a:ext cx="2011680" cy="224835"/>
           </a:xfrm>
           <a:prstGeom prst="rect">
             <a:avLst/>
@@ -3858,8 +3858,8 @@
         </p:nvSpPr>
         <p:spPr>
           <a:xfrm>
-            <a:off x="3221879" y="5114750"/>
-            <a:ext cx="33385" cy="135493"/>
+            <a:off x="3221879" y="4851726"/>
+            <a:ext cx="33385" cy="123659"/>
           </a:xfrm>
           <a:prstGeom prst="rect">
             <a:avLst/>
@@ -3878,8 +3878,8 @@
         </p:nvSpPr>
         <p:spPr>
           <a:xfrm>
-            <a:off x="3840480" y="5059321"/>
-            <a:ext cx="566928" cy="246350"/>
+            <a:off x="3840480" y="4801138"/>
+            <a:ext cx="566928" cy="224835"/>
           </a:xfrm>
           <a:prstGeom prst="rect">
             <a:avLst/>
@@ -3917,8 +3917,8 @@
         </p:nvSpPr>
         <p:spPr>
           <a:xfrm>
-            <a:off x="4407408" y="5059321"/>
-            <a:ext cx="566928" cy="246350"/>
+            <a:off x="4407408" y="4801138"/>
+            <a:ext cx="566928" cy="224835"/>
           </a:xfrm>
           <a:prstGeom prst="rect">
             <a:avLst/>
@@ -3956,8 +3956,8 @@
         </p:nvSpPr>
         <p:spPr>
           <a:xfrm>
-            <a:off x="4974336" y="5059321"/>
-            <a:ext cx="859536" cy="246350"/>
+            <a:off x="4974336" y="4801138"/>
+            <a:ext cx="859536" cy="224835"/>
           </a:xfrm>
           <a:prstGeom prst="rect">
             <a:avLst/>
@@ -3995,8 +3995,8 @@
         </p:nvSpPr>
         <p:spPr>
           <a:xfrm>
-            <a:off x="585216" y="5305672"/>
-            <a:ext cx="5394960" cy="246350"/>
+            <a:off x="585216" y="5025973"/>
+            <a:ext cx="5394960" cy="224835"/>
           </a:xfrm>
           <a:prstGeom prst="rect">
             <a:avLst/>
@@ -4015,8 +4015,8 @@
         </p:nvSpPr>
         <p:spPr>
           <a:xfrm>
-            <a:off x="658368" y="5305672"/>
-            <a:ext cx="2011680" cy="246350"/>
+            <a:off x="658368" y="5025973"/>
+            <a:ext cx="2011680" cy="224835"/>
           </a:xfrm>
           <a:prstGeom prst="rect">
             <a:avLst/>
@@ -4054,8 +4054,8 @@
         </p:nvSpPr>
         <p:spPr>
           <a:xfrm>
-            <a:off x="3198494" y="5361100"/>
-            <a:ext cx="56770" cy="135493"/>
+            <a:off x="3198494" y="5076561"/>
+            <a:ext cx="56770" cy="123659"/>
           </a:xfrm>
           <a:prstGeom prst="rect">
             <a:avLst/>
@@ -4074,8 +4074,8 @@
         </p:nvSpPr>
         <p:spPr>
           <a:xfrm>
-            <a:off x="3840480" y="5305672"/>
-            <a:ext cx="566928" cy="246350"/>
+            <a:off x="3840480" y="5025973"/>
+            <a:ext cx="566928" cy="224835"/>
           </a:xfrm>
           <a:prstGeom prst="rect">
             <a:avLst/>
@@ -4113,8 +4113,8 @@
         </p:nvSpPr>
         <p:spPr>
           <a:xfrm>
-            <a:off x="4407408" y="5305672"/>
-            <a:ext cx="566928" cy="246350"/>
+            <a:off x="4407408" y="5025973"/>
+            <a:ext cx="566928" cy="224835"/>
           </a:xfrm>
           <a:prstGeom prst="rect">
             <a:avLst/>
@@ -4152,8 +4152,8 @@
         </p:nvSpPr>
         <p:spPr>
           <a:xfrm>
-            <a:off x="4974336" y="5305672"/>
-            <a:ext cx="859536" cy="246350"/>
+            <a:off x="4974336" y="5025973"/>
+            <a:ext cx="859536" cy="224835"/>
           </a:xfrm>
           <a:prstGeom prst="rect">
             <a:avLst/>
@@ -4191,8 +4191,8 @@
         </p:nvSpPr>
         <p:spPr>
           <a:xfrm>
-            <a:off x="658368" y="5552022"/>
-            <a:ext cx="2011680" cy="246350"/>
+            <a:off x="658368" y="5250808"/>
+            <a:ext cx="2011680" cy="224835"/>
           </a:xfrm>
           <a:prstGeom prst="rect">
             <a:avLst/>
@@ -4230,8 +4230,8 @@
         </p:nvSpPr>
         <p:spPr>
           <a:xfrm>
-            <a:off x="3198327" y="5607450"/>
-            <a:ext cx="56937" cy="135493"/>
+            <a:off x="3198327" y="5301395"/>
+            <a:ext cx="56937" cy="123659"/>
           </a:xfrm>
           <a:prstGeom prst="rect">
             <a:avLst/>
@@ -4250,8 +4250,8 @@
         </p:nvSpPr>
         <p:spPr>
           <a:xfrm>
-            <a:off x="3840480" y="5552022"/>
-            <a:ext cx="566928" cy="246350"/>
+            <a:off x="3840480" y="5250808"/>
+            <a:ext cx="566928" cy="224835"/>
           </a:xfrm>
           <a:prstGeom prst="rect">
             <a:avLst/>
@@ -4289,8 +4289,8 @@
         </p:nvSpPr>
         <p:spPr>
           <a:xfrm>
-            <a:off x="4407408" y="5552022"/>
-            <a:ext cx="566928" cy="246350"/>
+            <a:off x="4407408" y="5250808"/>
+            <a:ext cx="566928" cy="224835"/>
           </a:xfrm>
           <a:prstGeom prst="rect">
             <a:avLst/>
@@ -4328,8 +4328,8 @@
         </p:nvSpPr>
         <p:spPr>
           <a:xfrm>
-            <a:off x="4974336" y="5552022"/>
-            <a:ext cx="859536" cy="246350"/>
+            <a:off x="4974336" y="5250808"/>
+            <a:ext cx="859536" cy="224835"/>
           </a:xfrm>
           <a:prstGeom prst="rect">
             <a:avLst/>
@@ -4367,8 +4367,8 @@
         </p:nvSpPr>
         <p:spPr>
           <a:xfrm>
-            <a:off x="585216" y="5798372"/>
-            <a:ext cx="5394960" cy="246350"/>
+            <a:off x="585216" y="5475642"/>
+            <a:ext cx="5394960" cy="224835"/>
           </a:xfrm>
           <a:prstGeom prst="rect">
             <a:avLst/>
@@ -4387,8 +4387,8 @@
         </p:nvSpPr>
         <p:spPr>
           <a:xfrm>
-            <a:off x="658368" y="5798372"/>
-            <a:ext cx="2011680" cy="246350"/>
+            <a:off x="658368" y="5475642"/>
+            <a:ext cx="2011680" cy="224835"/>
           </a:xfrm>
           <a:prstGeom prst="rect">
             <a:avLst/>
@@ -4426,8 +4426,8 @@
         </p:nvSpPr>
         <p:spPr>
           <a:xfrm>
-            <a:off x="3197693" y="5853801"/>
-            <a:ext cx="57571" cy="135493"/>
+            <a:off x="3197693" y="5526230"/>
+            <a:ext cx="57571" cy="123659"/>
           </a:xfrm>
           <a:prstGeom prst="rect">
             <a:avLst/>
@@ -4446,8 +4446,8 @@
         </p:nvSpPr>
         <p:spPr>
           <a:xfrm>
-            <a:off x="3840480" y="5798372"/>
-            <a:ext cx="566928" cy="246350"/>
+            <a:off x="3840480" y="5475642"/>
+            <a:ext cx="566928" cy="224835"/>
           </a:xfrm>
           <a:prstGeom prst="rect">
             <a:avLst/>
@@ -4485,8 +4485,8 @@
         </p:nvSpPr>
         <p:spPr>
           <a:xfrm>
-            <a:off x="4407408" y="5798372"/>
-            <a:ext cx="566928" cy="246350"/>
+            <a:off x="4407408" y="5475642"/>
+            <a:ext cx="566928" cy="224835"/>
           </a:xfrm>
           <a:prstGeom prst="rect">
             <a:avLst/>
@@ -4524,8 +4524,8 @@
         </p:nvSpPr>
         <p:spPr>
           <a:xfrm>
-            <a:off x="4974336" y="5798372"/>
-            <a:ext cx="859536" cy="246350"/>
+            <a:off x="4974336" y="5475642"/>
+            <a:ext cx="859536" cy="224835"/>
           </a:xfrm>
           <a:prstGeom prst="rect">
             <a:avLst/>
@@ -4563,8 +4563,8 @@
         </p:nvSpPr>
         <p:spPr>
           <a:xfrm>
-            <a:off x="658368" y="6044722"/>
-            <a:ext cx="2011680" cy="246350"/>
+            <a:off x="658368" y="5700477"/>
+            <a:ext cx="2011680" cy="224835"/>
           </a:xfrm>
           <a:prstGeom prst="rect">
             <a:avLst/>
@@ -4602,8 +4602,8 @@
         </p:nvSpPr>
         <p:spPr>
           <a:xfrm>
-            <a:off x="3195970" y="6100151"/>
-            <a:ext cx="59294" cy="135493"/>
+            <a:off x="3195970" y="5751065"/>
+            <a:ext cx="59294" cy="123659"/>
           </a:xfrm>
           <a:prstGeom prst="rect">
             <a:avLst/>
@@ -4622,8 +4622,8 @@
         </p:nvSpPr>
         <p:spPr>
           <a:xfrm>
-            <a:off x="3840480" y="6044722"/>
-            <a:ext cx="566928" cy="246350"/>
+            <a:off x="3840480" y="5700477"/>
+            <a:ext cx="566928" cy="224835"/>
           </a:xfrm>
           <a:prstGeom prst="rect">
             <a:avLst/>
@@ -4661,8 +4661,8 @@
         </p:nvSpPr>
         <p:spPr>
           <a:xfrm>
-            <a:off x="4407408" y="6044722"/>
-            <a:ext cx="566928" cy="246350"/>
+            <a:off x="4407408" y="5700477"/>
+            <a:ext cx="566928" cy="224835"/>
           </a:xfrm>
           <a:prstGeom prst="rect">
             <a:avLst/>
@@ -4700,8 +4700,8 @@
         </p:nvSpPr>
         <p:spPr>
           <a:xfrm>
-            <a:off x="4974336" y="6044722"/>
-            <a:ext cx="859536" cy="246350"/>
+            <a:off x="4974336" y="5700477"/>
+            <a:ext cx="859536" cy="224835"/>
           </a:xfrm>
           <a:prstGeom prst="rect">
             <a:avLst/>
@@ -4740,7 +4740,7 @@
         <p:spPr>
           <a:xfrm>
             <a:off x="6208776" y="2103120"/>
-            <a:ext cx="2011680" cy="246350"/>
+            <a:ext cx="2011680" cy="224835"/>
           </a:xfrm>
           <a:prstGeom prst="rect">
             <a:avLst/>
@@ -4778,8 +4778,8 @@
         </p:nvSpPr>
         <p:spPr>
           <a:xfrm>
-            <a:off x="8734848" y="2158549"/>
-            <a:ext cx="70824" cy="135493"/>
+            <a:off x="8734848" y="2153708"/>
+            <a:ext cx="70824" cy="123659"/>
           </a:xfrm>
           <a:prstGeom prst="rect">
             <a:avLst/>
@@ -4799,7 +4799,7 @@
         <p:spPr>
           <a:xfrm>
             <a:off x="9390888" y="2103120"/>
-            <a:ext cx="566928" cy="246350"/>
+            <a:ext cx="566928" cy="224835"/>
           </a:xfrm>
           <a:prstGeom prst="rect">
             <a:avLst/>
@@ -4838,7 +4838,7 @@
         <p:spPr>
           <a:xfrm>
             <a:off x="9957816" y="2103120"/>
-            <a:ext cx="566928" cy="246350"/>
+            <a:ext cx="566928" cy="224835"/>
           </a:xfrm>
           <a:prstGeom prst="rect">
             <a:avLst/>
@@ -4877,7 +4877,7 @@
         <p:spPr>
           <a:xfrm>
             <a:off x="10524744" y="2103120"/>
-            <a:ext cx="859536" cy="246350"/>
+            <a:ext cx="859536" cy="224835"/>
           </a:xfrm>
           <a:prstGeom prst="rect">
             <a:avLst/>
@@ -4915,8 +4915,8 @@
         </p:nvSpPr>
         <p:spPr>
           <a:xfrm>
-            <a:off x="6135624" y="2349470"/>
-            <a:ext cx="5394960" cy="246350"/>
+            <a:off x="6135624" y="2327955"/>
+            <a:ext cx="5394960" cy="224835"/>
           </a:xfrm>
           <a:prstGeom prst="rect">
             <a:avLst/>
@@ -4935,8 +4935,8 @@
         </p:nvSpPr>
         <p:spPr>
           <a:xfrm>
-            <a:off x="6208776" y="2349470"/>
-            <a:ext cx="2011680" cy="246350"/>
+            <a:off x="6208776" y="2327955"/>
+            <a:ext cx="2011680" cy="224835"/>
           </a:xfrm>
           <a:prstGeom prst="rect">
             <a:avLst/>
@@ -4974,8 +4974,8 @@
         </p:nvSpPr>
         <p:spPr>
           <a:xfrm>
-            <a:off x="8730906" y="2404899"/>
-            <a:ext cx="74766" cy="135493"/>
+            <a:off x="8730906" y="2378543"/>
+            <a:ext cx="74766" cy="123659"/>
           </a:xfrm>
           <a:prstGeom prst="rect">
             <a:avLst/>
@@ -4994,8 +4994,8 @@
         </p:nvSpPr>
         <p:spPr>
           <a:xfrm>
-            <a:off x="9390888" y="2349470"/>
-            <a:ext cx="566928" cy="246350"/>
+            <a:off x="9390888" y="2327955"/>
+            <a:ext cx="566928" cy="224835"/>
           </a:xfrm>
           <a:prstGeom prst="rect">
             <a:avLst/>
@@ -5033,8 +5033,8 @@
         </p:nvSpPr>
         <p:spPr>
           <a:xfrm>
-            <a:off x="9957816" y="2349470"/>
-            <a:ext cx="566928" cy="246350"/>
+            <a:off x="9957816" y="2327955"/>
+            <a:ext cx="566928" cy="224835"/>
           </a:xfrm>
           <a:prstGeom prst="rect">
             <a:avLst/>
@@ -5072,8 +5072,8 @@
         </p:nvSpPr>
         <p:spPr>
           <a:xfrm>
-            <a:off x="10524744" y="2349470"/>
-            <a:ext cx="859536" cy="246350"/>
+            <a:off x="10524744" y="2327955"/>
+            <a:ext cx="859536" cy="224835"/>
           </a:xfrm>
           <a:prstGeom prst="rect">
             <a:avLst/>
@@ -5111,8 +5111,8 @@
         </p:nvSpPr>
         <p:spPr>
           <a:xfrm>
-            <a:off x="6208776" y="2595820"/>
-            <a:ext cx="2011680" cy="246350"/>
+            <a:off x="6208776" y="2552790"/>
+            <a:ext cx="2011680" cy="224835"/>
           </a:xfrm>
           <a:prstGeom prst="rect">
             <a:avLst/>
@@ -5150,8 +5150,8 @@
         </p:nvSpPr>
         <p:spPr>
           <a:xfrm>
-            <a:off x="8716961" y="2651249"/>
-            <a:ext cx="88711" cy="135493"/>
+            <a:off x="8716961" y="2603377"/>
+            <a:ext cx="88711" cy="123659"/>
           </a:xfrm>
           <a:prstGeom prst="rect">
             <a:avLst/>
@@ -5170,8 +5170,8 @@
         </p:nvSpPr>
         <p:spPr>
           <a:xfrm>
-            <a:off x="9390888" y="2595820"/>
-            <a:ext cx="566928" cy="246350"/>
+            <a:off x="9390888" y="2552790"/>
+            <a:ext cx="566928" cy="224835"/>
           </a:xfrm>
           <a:prstGeom prst="rect">
             <a:avLst/>
@@ -5209,8 +5209,8 @@
         </p:nvSpPr>
         <p:spPr>
           <a:xfrm>
-            <a:off x="9957816" y="2595820"/>
-            <a:ext cx="566928" cy="246350"/>
+            <a:off x="9957816" y="2552790"/>
+            <a:ext cx="566928" cy="224835"/>
           </a:xfrm>
           <a:prstGeom prst="rect">
             <a:avLst/>
@@ -5248,8 +5248,8 @@
         </p:nvSpPr>
         <p:spPr>
           <a:xfrm>
-            <a:off x="10524744" y="2595820"/>
-            <a:ext cx="859536" cy="246350"/>
+            <a:off x="10524744" y="2552790"/>
+            <a:ext cx="859536" cy="224835"/>
           </a:xfrm>
           <a:prstGeom prst="rect">
             <a:avLst/>
@@ -5287,8 +5287,8 @@
         </p:nvSpPr>
         <p:spPr>
           <a:xfrm>
-            <a:off x="6135624" y="2842170"/>
-            <a:ext cx="5394960" cy="246350"/>
+            <a:off x="6135624" y="2777624"/>
+            <a:ext cx="5394960" cy="224835"/>
           </a:xfrm>
           <a:prstGeom prst="rect">
             <a:avLst/>
@@ -5307,8 +5307,8 @@
         </p:nvSpPr>
         <p:spPr>
           <a:xfrm>
-            <a:off x="6208776" y="2842170"/>
-            <a:ext cx="2011680" cy="246350"/>
+            <a:off x="6208776" y="2777624"/>
+            <a:ext cx="2011680" cy="224835"/>
           </a:xfrm>
           <a:prstGeom prst="rect">
             <a:avLst/>
@@ -5346,8 +5346,8 @@
         </p:nvSpPr>
         <p:spPr>
           <a:xfrm>
-            <a:off x="8711353" y="2897599"/>
-            <a:ext cx="94319" cy="135493"/>
+            <a:off x="8711353" y="2828212"/>
+            <a:ext cx="94319" cy="123659"/>
           </a:xfrm>
           <a:prstGeom prst="rect">
             <a:avLst/>
@@ -5366,8 +5366,8 @@
         </p:nvSpPr>
         <p:spPr>
           <a:xfrm>
-            <a:off x="9390888" y="2842170"/>
-            <a:ext cx="566928" cy="246350"/>
+            <a:off x="9390888" y="2777624"/>
+            <a:ext cx="566928" cy="224835"/>
           </a:xfrm>
           <a:prstGeom prst="rect">
             <a:avLst/>
@@ -5405,8 +5405,8 @@
         </p:nvSpPr>
         <p:spPr>
           <a:xfrm>
-            <a:off x="9957816" y="2842170"/>
-            <a:ext cx="566928" cy="246350"/>
+            <a:off x="9957816" y="2777624"/>
+            <a:ext cx="566928" cy="224835"/>
           </a:xfrm>
           <a:prstGeom prst="rect">
             <a:avLst/>
@@ -5444,8 +5444,8 @@
         </p:nvSpPr>
         <p:spPr>
           <a:xfrm>
-            <a:off x="10524744" y="2842170"/>
-            <a:ext cx="859536" cy="246350"/>
+            <a:off x="10524744" y="2777624"/>
+            <a:ext cx="859536" cy="224835"/>
           </a:xfrm>
           <a:prstGeom prst="rect">
             <a:avLst/>
@@ -5483,8 +5483,8 @@
         </p:nvSpPr>
         <p:spPr>
           <a:xfrm>
-            <a:off x="6208776" y="3088520"/>
-            <a:ext cx="2011680" cy="246350"/>
+            <a:off x="6208776" y="3002459"/>
+            <a:ext cx="2011680" cy="224835"/>
           </a:xfrm>
           <a:prstGeom prst="rect">
             <a:avLst/>
@@ -5522,8 +5522,8 @@
         </p:nvSpPr>
         <p:spPr>
           <a:xfrm>
-            <a:off x="8703971" y="3143949"/>
-            <a:ext cx="101701" cy="135493"/>
+            <a:off x="8703971" y="3053047"/>
+            <a:ext cx="101701" cy="123659"/>
           </a:xfrm>
           <a:prstGeom prst="rect">
             <a:avLst/>
@@ -5542,8 +5542,8 @@
         </p:nvSpPr>
         <p:spPr>
           <a:xfrm>
-            <a:off x="9390888" y="3088520"/>
-            <a:ext cx="566928" cy="246350"/>
+            <a:off x="9390888" y="3002459"/>
+            <a:ext cx="566928" cy="224835"/>
           </a:xfrm>
           <a:prstGeom prst="rect">
             <a:avLst/>
@@ -5581,8 +5581,8 @@
         </p:nvSpPr>
         <p:spPr>
           <a:xfrm>
-            <a:off x="9957816" y="3088520"/>
-            <a:ext cx="566928" cy="246350"/>
+            <a:off x="9957816" y="3002459"/>
+            <a:ext cx="566928" cy="224835"/>
           </a:xfrm>
           <a:prstGeom prst="rect">
             <a:avLst/>
@@ -5620,8 +5620,8 @@
         </p:nvSpPr>
         <p:spPr>
           <a:xfrm>
-            <a:off x="10524744" y="3088520"/>
-            <a:ext cx="859536" cy="246350"/>
+            <a:off x="10524744" y="3002459"/>
+            <a:ext cx="859536" cy="224835"/>
           </a:xfrm>
           <a:prstGeom prst="rect">
             <a:avLst/>
@@ -5659,8 +5659,8 @@
         </p:nvSpPr>
         <p:spPr>
           <a:xfrm>
-            <a:off x="6135624" y="3334871"/>
-            <a:ext cx="5394960" cy="246350"/>
+            <a:off x="6135624" y="3227294"/>
+            <a:ext cx="5394960" cy="224835"/>
           </a:xfrm>
           <a:prstGeom prst="rect">
             <a:avLst/>
@@ -5679,8 +5679,8 @@
         </p:nvSpPr>
         <p:spPr>
           <a:xfrm>
-            <a:off x="6208776" y="3334871"/>
-            <a:ext cx="2011680" cy="246350"/>
+            <a:off x="6208776" y="3227294"/>
+            <a:ext cx="2011680" cy="224835"/>
           </a:xfrm>
           <a:prstGeom prst="rect">
             <a:avLst/>
@@ -5718,8 +5718,8 @@
         </p:nvSpPr>
         <p:spPr>
           <a:xfrm>
-            <a:off x="8701890" y="3390299"/>
-            <a:ext cx="103782" cy="135493"/>
+            <a:off x="8701890" y="3277882"/>
+            <a:ext cx="103782" cy="123659"/>
           </a:xfrm>
           <a:prstGeom prst="rect">
             <a:avLst/>
@@ -5738,8 +5738,8 @@
         </p:nvSpPr>
         <p:spPr>
           <a:xfrm>
-            <a:off x="9390888" y="3334871"/>
-            <a:ext cx="566928" cy="246350"/>
+            <a:off x="9390888" y="3227294"/>
+            <a:ext cx="566928" cy="224835"/>
           </a:xfrm>
           <a:prstGeom prst="rect">
             <a:avLst/>
@@ -5777,8 +5777,8 @@
         </p:nvSpPr>
         <p:spPr>
           <a:xfrm>
-            <a:off x="9957816" y="3334871"/>
-            <a:ext cx="566928" cy="246350"/>
+            <a:off x="9957816" y="3227294"/>
+            <a:ext cx="566928" cy="224835"/>
           </a:xfrm>
           <a:prstGeom prst="rect">
             <a:avLst/>
@@ -5816,8 +5816,8 @@
         </p:nvSpPr>
         <p:spPr>
           <a:xfrm>
-            <a:off x="10524744" y="3334871"/>
-            <a:ext cx="859536" cy="246350"/>
+            <a:off x="10524744" y="3227294"/>
+            <a:ext cx="859536" cy="224835"/>
           </a:xfrm>
           <a:prstGeom prst="rect">
             <a:avLst/>
@@ -5855,8 +5855,8 @@
         </p:nvSpPr>
         <p:spPr>
           <a:xfrm>
-            <a:off x="6208776" y="3581221"/>
-            <a:ext cx="2011680" cy="246350"/>
+            <a:off x="6208776" y="3452129"/>
+            <a:ext cx="2011680" cy="224835"/>
           </a:xfrm>
           <a:prstGeom prst="rect">
             <a:avLst/>
@@ -5894,8 +5894,8 @@
         </p:nvSpPr>
         <p:spPr>
           <a:xfrm>
-            <a:off x="8679444" y="3636649"/>
-            <a:ext cx="126228" cy="135493"/>
+            <a:off x="8679444" y="3502717"/>
+            <a:ext cx="126228" cy="123659"/>
           </a:xfrm>
           <a:prstGeom prst="rect">
             <a:avLst/>
@@ -5914,8 +5914,8 @@
         </p:nvSpPr>
         <p:spPr>
           <a:xfrm>
-            <a:off x="9390888" y="3581221"/>
-            <a:ext cx="566928" cy="246350"/>
+            <a:off x="9390888" y="3452129"/>
+            <a:ext cx="566928" cy="224835"/>
           </a:xfrm>
           <a:prstGeom prst="rect">
             <a:avLst/>
@@ -5953,8 +5953,8 @@
         </p:nvSpPr>
         <p:spPr>
           <a:xfrm>
-            <a:off x="9957816" y="3581221"/>
-            <a:ext cx="566928" cy="246350"/>
+            <a:off x="9957816" y="3452129"/>
+            <a:ext cx="566928" cy="224835"/>
           </a:xfrm>
           <a:prstGeom prst="rect">
             <a:avLst/>
@@ -5992,8 +5992,8 @@
         </p:nvSpPr>
         <p:spPr>
           <a:xfrm>
-            <a:off x="10524744" y="3581221"/>
-            <a:ext cx="859536" cy="246350"/>
+            <a:off x="10524744" y="3452129"/>
+            <a:ext cx="859536" cy="224835"/>
           </a:xfrm>
           <a:prstGeom prst="rect">
             <a:avLst/>
@@ -6031,8 +6031,8 @@
         </p:nvSpPr>
         <p:spPr>
           <a:xfrm>
-            <a:off x="6135624" y="3827571"/>
-            <a:ext cx="5394960" cy="246350"/>
+            <a:off x="6135624" y="3676964"/>
+            <a:ext cx="5394960" cy="224835"/>
           </a:xfrm>
           <a:prstGeom prst="rect">
             <a:avLst/>
@@ -6051,8 +6051,8 @@
         </p:nvSpPr>
         <p:spPr>
           <a:xfrm>
-            <a:off x="6208776" y="3827571"/>
-            <a:ext cx="2011680" cy="246350"/>
+            <a:off x="6208776" y="3676964"/>
+            <a:ext cx="2011680" cy="224835"/>
           </a:xfrm>
           <a:prstGeom prst="rect">
             <a:avLst/>
@@ -6090,8 +6090,8 @@
         </p:nvSpPr>
         <p:spPr>
           <a:xfrm>
-            <a:off x="8672194" y="3883000"/>
-            <a:ext cx="133478" cy="135493"/>
+            <a:off x="8672194" y="3727552"/>
+            <a:ext cx="133478" cy="123659"/>
           </a:xfrm>
           <a:prstGeom prst="rect">
             <a:avLst/>
@@ -6110,8 +6110,8 @@
         </p:nvSpPr>
         <p:spPr>
           <a:xfrm>
-            <a:off x="9390888" y="3827571"/>
-            <a:ext cx="566928" cy="246350"/>
+            <a:off x="9390888" y="3676964"/>
+            <a:ext cx="566928" cy="224835"/>
           </a:xfrm>
           <a:prstGeom prst="rect">
             <a:avLst/>
@@ -6149,8 +6149,8 @@
         </p:nvSpPr>
         <p:spPr>
           <a:xfrm>
-            <a:off x="9957816" y="3827571"/>
-            <a:ext cx="566928" cy="246350"/>
+            <a:off x="9957816" y="3676964"/>
+            <a:ext cx="566928" cy="224835"/>
           </a:xfrm>
           <a:prstGeom prst="rect">
             <a:avLst/>
@@ -6188,8 +6188,8 @@
         </p:nvSpPr>
         <p:spPr>
           <a:xfrm>
-            <a:off x="10524744" y="3827571"/>
-            <a:ext cx="859536" cy="246350"/>
+            <a:off x="10524744" y="3676964"/>
+            <a:ext cx="859536" cy="224835"/>
           </a:xfrm>
           <a:prstGeom prst="rect">
             <a:avLst/>
@@ -6227,8 +6227,8 @@
         </p:nvSpPr>
         <p:spPr>
           <a:xfrm>
-            <a:off x="6208776" y="4073921"/>
-            <a:ext cx="2011680" cy="246350"/>
+            <a:off x="6208776" y="3901799"/>
+            <a:ext cx="2011680" cy="224835"/>
           </a:xfrm>
           <a:prstGeom prst="rect">
             <a:avLst/>
@@ -6266,8 +6266,8 @@
         </p:nvSpPr>
         <p:spPr>
           <a:xfrm>
-            <a:off x="8624168" y="4129350"/>
-            <a:ext cx="181504" cy="135493"/>
+            <a:off x="8624168" y="3952386"/>
+            <a:ext cx="181504" cy="123659"/>
           </a:xfrm>
           <a:prstGeom prst="rect">
             <a:avLst/>
@@ -6286,8 +6286,8 @@
         </p:nvSpPr>
         <p:spPr>
           <a:xfrm>
-            <a:off x="9390888" y="4073921"/>
-            <a:ext cx="566928" cy="246350"/>
+            <a:off x="9390888" y="3901799"/>
+            <a:ext cx="566928" cy="224835"/>
           </a:xfrm>
           <a:prstGeom prst="rect">
             <a:avLst/>
@@ -6325,8 +6325,8 @@
         </p:nvSpPr>
         <p:spPr>
           <a:xfrm>
-            <a:off x="9957816" y="4073921"/>
-            <a:ext cx="566928" cy="246350"/>
+            <a:off x="9957816" y="3901799"/>
+            <a:ext cx="566928" cy="224835"/>
           </a:xfrm>
           <a:prstGeom prst="rect">
             <a:avLst/>
@@ -6364,8 +6364,8 @@
         </p:nvSpPr>
         <p:spPr>
           <a:xfrm>
-            <a:off x="10524744" y="4073921"/>
-            <a:ext cx="859536" cy="246350"/>
+            <a:off x="10524744" y="3901799"/>
+            <a:ext cx="859536" cy="224835"/>
           </a:xfrm>
           <a:prstGeom prst="rect">
             <a:avLst/>
@@ -6403,8 +6403,8 @@
         </p:nvSpPr>
         <p:spPr>
           <a:xfrm>
-            <a:off x="6135624" y="4320271"/>
-            <a:ext cx="5394960" cy="246350"/>
+            <a:off x="6135624" y="4126633"/>
+            <a:ext cx="5394960" cy="224835"/>
           </a:xfrm>
           <a:prstGeom prst="rect">
             <a:avLst/>
@@ -6423,8 +6423,8 @@
         </p:nvSpPr>
         <p:spPr>
           <a:xfrm>
-            <a:off x="6208776" y="4320271"/>
-            <a:ext cx="2011680" cy="246350"/>
+            <a:off x="6208776" y="4126633"/>
+            <a:ext cx="2011680" cy="224835"/>
           </a:xfrm>
           <a:prstGeom prst="rect">
             <a:avLst/>
@@ -6462,8 +6462,8 @@
         </p:nvSpPr>
         <p:spPr>
           <a:xfrm>
-            <a:off x="8616775" y="4375700"/>
-            <a:ext cx="188897" cy="135493"/>
+            <a:off x="8616775" y="4177221"/>
+            <a:ext cx="188897" cy="123659"/>
           </a:xfrm>
           <a:prstGeom prst="rect">
             <a:avLst/>
@@ -6482,8 +6482,8 @@
         </p:nvSpPr>
         <p:spPr>
           <a:xfrm>
-            <a:off x="9390888" y="4320271"/>
-            <a:ext cx="566928" cy="246350"/>
+            <a:off x="9390888" y="4126633"/>
+            <a:ext cx="566928" cy="224835"/>
           </a:xfrm>
           <a:prstGeom prst="rect">
             <a:avLst/>
@@ -6521,8 +6521,8 @@
         </p:nvSpPr>
         <p:spPr>
           <a:xfrm>
-            <a:off x="9957816" y="4320271"/>
-            <a:ext cx="566928" cy="246350"/>
+            <a:off x="9957816" y="4126633"/>
+            <a:ext cx="566928" cy="224835"/>
           </a:xfrm>
           <a:prstGeom prst="rect">
             <a:avLst/>
@@ -6560,8 +6560,8 @@
         </p:nvSpPr>
         <p:spPr>
           <a:xfrm>
-            <a:off x="10524744" y="4320271"/>
-            <a:ext cx="859536" cy="246350"/>
+            <a:off x="10524744" y="4126633"/>
+            <a:ext cx="859536" cy="224835"/>
           </a:xfrm>
           <a:prstGeom prst="rect">
             <a:avLst/>
@@ -6599,8 +6599,8 @@
         </p:nvSpPr>
         <p:spPr>
           <a:xfrm>
-            <a:off x="6208776" y="4566621"/>
-            <a:ext cx="2011680" cy="246350"/>
+            <a:off x="6208776" y="4351468"/>
+            <a:ext cx="2011680" cy="224835"/>
           </a:xfrm>
           <a:prstGeom prst="rect">
             <a:avLst/>
@@ -6638,8 +6638,8 @@
         </p:nvSpPr>
         <p:spPr>
           <a:xfrm>
-            <a:off x="8590345" y="4622050"/>
-            <a:ext cx="215327" cy="135493"/>
+            <a:off x="8590345" y="4402056"/>
+            <a:ext cx="215327" cy="123659"/>
           </a:xfrm>
           <a:prstGeom prst="rect">
             <a:avLst/>
@@ -6658,8 +6658,8 @@
         </p:nvSpPr>
         <p:spPr>
           <a:xfrm>
-            <a:off x="9390888" y="4566621"/>
-            <a:ext cx="566928" cy="246350"/>
+            <a:off x="9390888" y="4351468"/>
+            <a:ext cx="566928" cy="224835"/>
           </a:xfrm>
           <a:prstGeom prst="rect">
             <a:avLst/>
@@ -6697,8 +6697,8 @@
         </p:nvSpPr>
         <p:spPr>
           <a:xfrm>
-            <a:off x="9957816" y="4566621"/>
-            <a:ext cx="566928" cy="246350"/>
+            <a:off x="9957816" y="4351468"/>
+            <a:ext cx="566928" cy="224835"/>
           </a:xfrm>
           <a:prstGeom prst="rect">
             <a:avLst/>
@@ -6736,8 +6736,8 @@
         </p:nvSpPr>
         <p:spPr>
           <a:xfrm>
-            <a:off x="10524744" y="4566621"/>
-            <a:ext cx="859536" cy="246350"/>
+            <a:off x="10524744" y="4351468"/>
+            <a:ext cx="859536" cy="224835"/>
           </a:xfrm>
           <a:prstGeom prst="rect">
             <a:avLst/>
@@ -6775,8 +6775,8 @@
         </p:nvSpPr>
         <p:spPr>
           <a:xfrm>
-            <a:off x="6135624" y="4812971"/>
-            <a:ext cx="5394960" cy="246350"/>
+            <a:off x="6135624" y="4576303"/>
+            <a:ext cx="5394960" cy="224835"/>
           </a:xfrm>
           <a:prstGeom prst="rect">
             <a:avLst/>
@@ -6795,8 +6795,8 @@
         </p:nvSpPr>
         <p:spPr>
           <a:xfrm>
-            <a:off x="6208776" y="4812971"/>
-            <a:ext cx="2011680" cy="246350"/>
+            <a:off x="6208776" y="4576303"/>
+            <a:ext cx="2011680" cy="224835"/>
           </a:xfrm>
           <a:prstGeom prst="rect">
             <a:avLst/>
@@ -6834,8 +6834,8 @@
         </p:nvSpPr>
         <p:spPr>
           <a:xfrm>
-            <a:off x="8562958" y="4868400"/>
-            <a:ext cx="242714" cy="135493"/>
+            <a:off x="8562958" y="4626891"/>
+            <a:ext cx="242714" cy="123659"/>
           </a:xfrm>
           <a:prstGeom prst="rect">
             <a:avLst/>
@@ -6854,8 +6854,8 @@
         </p:nvSpPr>
         <p:spPr>
           <a:xfrm>
-            <a:off x="9390888" y="4812971"/>
-            <a:ext cx="566928" cy="246350"/>
+            <a:off x="9390888" y="4576303"/>
+            <a:ext cx="566928" cy="224835"/>
           </a:xfrm>
           <a:prstGeom prst="rect">
             <a:avLst/>
@@ -6893,8 +6893,8 @@
         </p:nvSpPr>
         <p:spPr>
           <a:xfrm>
-            <a:off x="9957816" y="4812971"/>
-            <a:ext cx="566928" cy="246350"/>
+            <a:off x="9957816" y="4576303"/>
+            <a:ext cx="566928" cy="224835"/>
           </a:xfrm>
           <a:prstGeom prst="rect">
             <a:avLst/>
@@ -6932,8 +6932,8 @@
         </p:nvSpPr>
         <p:spPr>
           <a:xfrm>
-            <a:off x="10524744" y="4812971"/>
-            <a:ext cx="859536" cy="246350"/>
+            <a:off x="10524744" y="4576303"/>
+            <a:ext cx="859536" cy="224835"/>
           </a:xfrm>
           <a:prstGeom prst="rect">
             <a:avLst/>
@@ -6971,8 +6971,8 @@
         </p:nvSpPr>
         <p:spPr>
           <a:xfrm>
-            <a:off x="6208776" y="5059321"/>
-            <a:ext cx="2011680" cy="246350"/>
+            <a:off x="6208776" y="4801138"/>
+            <a:ext cx="2011680" cy="224835"/>
           </a:xfrm>
           <a:prstGeom prst="rect">
             <a:avLst/>
@@ -7010,8 +7010,8 @@
         </p:nvSpPr>
         <p:spPr>
           <a:xfrm>
-            <a:off x="8514572" y="5114750"/>
-            <a:ext cx="291100" cy="135493"/>
+            <a:off x="8514572" y="4851726"/>
+            <a:ext cx="291100" cy="123659"/>
           </a:xfrm>
           <a:prstGeom prst="rect">
             <a:avLst/>
@@ -7030,8 +7030,8 @@
         </p:nvSpPr>
         <p:spPr>
           <a:xfrm>
-            <a:off x="9390888" y="5059321"/>
-            <a:ext cx="566928" cy="246350"/>
+            <a:off x="9390888" y="4801138"/>
+            <a:ext cx="566928" cy="224835"/>
           </a:xfrm>
           <a:prstGeom prst="rect">
             <a:avLst/>
@@ -7069,8 +7069,8 @@
         </p:nvSpPr>
         <p:spPr>
           <a:xfrm>
-            <a:off x="9957816" y="5059321"/>
-            <a:ext cx="566928" cy="246350"/>
+            <a:off x="9957816" y="4801138"/>
+            <a:ext cx="566928" cy="224835"/>
           </a:xfrm>
           <a:prstGeom prst="rect">
             <a:avLst/>
@@ -7108,8 +7108,8 @@
         </p:nvSpPr>
         <p:spPr>
           <a:xfrm>
-            <a:off x="10524744" y="5059321"/>
-            <a:ext cx="859536" cy="246350"/>
+            <a:off x="10524744" y="4801138"/>
+            <a:ext cx="859536" cy="224835"/>
           </a:xfrm>
           <a:prstGeom prst="rect">
             <a:avLst/>
@@ -7147,8 +7147,8 @@
         </p:nvSpPr>
         <p:spPr>
           <a:xfrm>
-            <a:off x="6135624" y="5305672"/>
-            <a:ext cx="5394960" cy="246350"/>
+            <a:off x="6135624" y="5025973"/>
+            <a:ext cx="5394960" cy="224835"/>
           </a:xfrm>
           <a:prstGeom prst="rect">
             <a:avLst/>
@@ -7167,8 +7167,8 @@
         </p:nvSpPr>
         <p:spPr>
           <a:xfrm>
-            <a:off x="6208776" y="5305672"/>
-            <a:ext cx="2011680" cy="246350"/>
+            <a:off x="6208776" y="5025973"/>
+            <a:ext cx="2011680" cy="224835"/>
           </a:xfrm>
           <a:prstGeom prst="rect">
             <a:avLst/>
@@ -7206,8 +7206,8 @@
         </p:nvSpPr>
         <p:spPr>
           <a:xfrm>
-            <a:off x="8475849" y="5361100"/>
-            <a:ext cx="329823" cy="135493"/>
+            <a:off x="8475849" y="5076561"/>
+            <a:ext cx="329823" cy="123659"/>
           </a:xfrm>
           <a:prstGeom prst="rect">
             <a:avLst/>
@@ -7226,8 +7226,8 @@
         </p:nvSpPr>
         <p:spPr>
           <a:xfrm>
-            <a:off x="9390888" y="5305672"/>
-            <a:ext cx="566928" cy="246350"/>
+            <a:off x="9390888" y="5025973"/>
+            <a:ext cx="566928" cy="224835"/>
           </a:xfrm>
           <a:prstGeom prst="rect">
             <a:avLst/>
@@ -7265,8 +7265,8 @@
         </p:nvSpPr>
         <p:spPr>
           <a:xfrm>
-            <a:off x="9957816" y="5305672"/>
-            <a:ext cx="566928" cy="246350"/>
+            <a:off x="9957816" y="5025973"/>
+            <a:ext cx="566928" cy="224835"/>
           </a:xfrm>
           <a:prstGeom prst="rect">
             <a:avLst/>
@@ -7304,8 +7304,8 @@
         </p:nvSpPr>
         <p:spPr>
           <a:xfrm>
-            <a:off x="10524744" y="5305672"/>
-            <a:ext cx="859536" cy="246350"/>
+            <a:off x="10524744" y="5025973"/>
+            <a:ext cx="859536" cy="224835"/>
           </a:xfrm>
           <a:prstGeom prst="rect">
             <a:avLst/>
@@ -7343,8 +7343,8 @@
         </p:nvSpPr>
         <p:spPr>
           <a:xfrm>
-            <a:off x="6208776" y="5552022"/>
-            <a:ext cx="2011680" cy="246350"/>
+            <a:off x="6208776" y="5250808"/>
+            <a:ext cx="2011680" cy="224835"/>
           </a:xfrm>
           <a:prstGeom prst="rect">
             <a:avLst/>
@@ -7382,8 +7382,8 @@
         </p:nvSpPr>
         <p:spPr>
           <a:xfrm>
-            <a:off x="8430963" y="5607450"/>
-            <a:ext cx="374709" cy="135493"/>
+            <a:off x="8430963" y="5301395"/>
+            <a:ext cx="374709" cy="123659"/>
           </a:xfrm>
           <a:prstGeom prst="rect">
             <a:avLst/>
@@ -7402,8 +7402,8 @@
         </p:nvSpPr>
         <p:spPr>
           <a:xfrm>
-            <a:off x="9390888" y="5552022"/>
-            <a:ext cx="566928" cy="246350"/>
+            <a:off x="9390888" y="5250808"/>
+            <a:ext cx="566928" cy="224835"/>
           </a:xfrm>
           <a:prstGeom prst="rect">
             <a:avLst/>
@@ -7441,8 +7441,8 @@
         </p:nvSpPr>
         <p:spPr>
           <a:xfrm>
-            <a:off x="9957816" y="5552022"/>
-            <a:ext cx="566928" cy="246350"/>
+            <a:off x="9957816" y="5250808"/>
+            <a:ext cx="566928" cy="224835"/>
           </a:xfrm>
           <a:prstGeom prst="rect">
             <a:avLst/>
@@ -7480,8 +7480,8 @@
         </p:nvSpPr>
         <p:spPr>
           <a:xfrm>
-            <a:off x="10524744" y="5552022"/>
-            <a:ext cx="859536" cy="246350"/>
+            <a:off x="10524744" y="5250808"/>
+            <a:ext cx="859536" cy="224835"/>
           </a:xfrm>
           <a:prstGeom prst="rect">
             <a:avLst/>
@@ -7519,8 +7519,8 @@
         </p:nvSpPr>
         <p:spPr>
           <a:xfrm>
-            <a:off x="6135624" y="5798372"/>
-            <a:ext cx="5394960" cy="246350"/>
+            <a:off x="6135624" y="5475642"/>
+            <a:ext cx="5394960" cy="224835"/>
           </a:xfrm>
           <a:prstGeom prst="rect">
             <a:avLst/>
@@ -7539,8 +7539,8 @@
         </p:nvSpPr>
         <p:spPr>
           <a:xfrm>
-            <a:off x="6208776" y="5798372"/>
-            <a:ext cx="2011680" cy="246350"/>
+            <a:off x="6208776" y="5475642"/>
+            <a:ext cx="2011680" cy="224835"/>
           </a:xfrm>
           <a:prstGeom prst="rect">
             <a:avLst/>
@@ -7578,8 +7578,8 @@
         </p:nvSpPr>
         <p:spPr>
           <a:xfrm>
-            <a:off x="8266176" y="5853801"/>
-            <a:ext cx="539496" cy="135493"/>
+            <a:off x="8266176" y="5526230"/>
+            <a:ext cx="539496" cy="123659"/>
           </a:xfrm>
           <a:prstGeom prst="rect">
             <a:avLst/>
@@ -7598,8 +7598,8 @@
         </p:nvSpPr>
         <p:spPr>
           <a:xfrm>
-            <a:off x="9390888" y="5798372"/>
-            <a:ext cx="566928" cy="246350"/>
+            <a:off x="9390888" y="5475642"/>
+            <a:ext cx="566928" cy="224835"/>
           </a:xfrm>
           <a:prstGeom prst="rect">
             <a:avLst/>
@@ -7637,8 +7637,8 @@
         </p:nvSpPr>
         <p:spPr>
           <a:xfrm>
-            <a:off x="9957816" y="5798372"/>
-            <a:ext cx="566928" cy="246350"/>
+            <a:off x="9957816" y="5475642"/>
+            <a:ext cx="566928" cy="224835"/>
           </a:xfrm>
           <a:prstGeom prst="rect">
             <a:avLst/>
@@ -7676,8 +7676,8 @@
         </p:nvSpPr>
         <p:spPr>
           <a:xfrm>
-            <a:off x="10524744" y="5798372"/>
-            <a:ext cx="859536" cy="246350"/>
+            <a:off x="10524744" y="5475642"/>
+            <a:ext cx="859536" cy="224835"/>
           </a:xfrm>
           <a:prstGeom prst="rect">
             <a:avLst/>
@@ -7704,6 +7704,65 @@
               <a:t>−20.0 pts</a:t>
             </a:r>
             <a:endParaRPr lang="en-US" sz="1300" dirty="0"/>
+          </a:p>
+        </p:txBody>
+      </p:sp>
+      <p:sp>
+        <p:nvSpPr>
+          <p:cNvPr id="203" name="Shape 200"/>
+          <p:cNvSpPr/>
+          <p:nvPr/>
+        </p:nvSpPr>
+        <p:spPr>
+          <a:xfrm>
+            <a:off x="457200" y="6126480"/>
+            <a:ext cx="11274552" cy="356616"/>
+          </a:xfrm>
+          <a:prstGeom prst="rect">
+            <a:avLst/>
+          </a:prstGeom>
+          <a:solidFill>
+            <a:srgbClr val="EDF4FA"/>
+          </a:solidFill>
+          <a:ln/>
+        </p:spPr>
+      </p:sp>
+      <p:sp>
+        <p:nvSpPr>
+          <p:cNvPr id="204" name="Text 201"/>
+          <p:cNvSpPr txBox="1"/>
+          <p:nvPr/>
+        </p:nvSpPr>
+        <p:spPr>
+          <a:xfrm>
+            <a:off x="658368" y="6144768"/>
+            <a:ext cx="10927080" cy="320040"/>
+          </a:xfrm>
+          <a:prstGeom prst="rect">
+            <a:avLst/>
+          </a:prstGeom>
+          <a:noFill/>
+          <a:ln/>
+        </p:spPr>
+        <p:txBody>
+          <a:bodyPr wrap="square" lIns="0" tIns="0" rIns="0" bIns="0" rtlCol="0" anchor="ctr"/>
+          <a:lstStyle/>
+          <a:p>
+            <a:pPr indent="0" marL="0">
+              <a:buNone/>
+            </a:pPr>
+            <a:r>
+              <a:rPr lang="en-US" sz="1500" b="1" dirty="0">
+                <a:solidFill>
+                  <a:srgbClr val="0B2C4A"/>
+                </a:solidFill>
+                <a:latin typeface="Inter" pitchFamily="34" charset="0"/>
+                <a:ea typeface="Inter" pitchFamily="34" charset="-122"/>
+                <a:cs typeface="Inter" pitchFamily="34" charset="-120"/>
+              </a:rPr>
+              <a:t>25 of 33 stores collect less labor margin on internal work than on customer pay; the group is −2.7 pts.</a:t>
+            </a:r>
+            <a:endParaRPr lang="en-US" sz="1500" dirty="0"/>
           </a:p>
         </p:txBody>
       </p:sp>
@@ -7846,7 +7905,7 @@
         <p:spPr>
           <a:xfrm>
             <a:off x="457200" y="1207008"/>
-            <a:ext cx="11274552" cy="5148072"/>
+            <a:ext cx="11274552" cy="4782312"/>
           </a:xfrm>
           <a:prstGeom prst="rect">
             <a:avLst/>
@@ -8132,7 +8191,7 @@
         <p:spPr>
           <a:xfrm>
             <a:off x="3249778" y="2103120"/>
-            <a:ext cx="10973" cy="4187952"/>
+            <a:ext cx="10973" cy="3822192"/>
           </a:xfrm>
           <a:prstGeom prst="rect">
             <a:avLst/>
@@ -8152,7 +8211,7 @@
         <p:spPr>
           <a:xfrm>
             <a:off x="3125947" y="2103120"/>
-            <a:ext cx="0" cy="4187952"/>
+            <a:ext cx="0" cy="3822192"/>
           </a:xfrm>
           <a:prstGeom prst="line">
             <a:avLst/>
@@ -8320,7 +8379,7 @@
         <p:spPr>
           <a:xfrm>
             <a:off x="8800186" y="2103120"/>
-            <a:ext cx="10973" cy="3941602"/>
+            <a:ext cx="10973" cy="3597357"/>
           </a:xfrm>
           <a:prstGeom prst="rect">
             <a:avLst/>
@@ -8340,7 +8399,7 @@
         <p:spPr>
           <a:xfrm>
             <a:off x="8676355" y="2103120"/>
-            <a:ext cx="0" cy="3941602"/>
+            <a:ext cx="0" cy="3597357"/>
           </a:xfrm>
           <a:prstGeom prst="line">
             <a:avLst/>
@@ -8363,7 +8422,7 @@
         <p:spPr>
           <a:xfrm>
             <a:off x="658368" y="2103120"/>
-            <a:ext cx="2011680" cy="246350"/>
+            <a:ext cx="2011680" cy="224835"/>
           </a:xfrm>
           <a:prstGeom prst="rect">
             <a:avLst/>
@@ -8401,8 +8460,8 @@
         </p:nvSpPr>
         <p:spPr>
           <a:xfrm>
-            <a:off x="3255264" y="2158549"/>
-            <a:ext cx="150363" cy="135493"/>
+            <a:off x="3255264" y="2153708"/>
+            <a:ext cx="150363" cy="123659"/>
           </a:xfrm>
           <a:prstGeom prst="rect">
             <a:avLst/>
@@ -8422,7 +8481,7 @@
         <p:spPr>
           <a:xfrm>
             <a:off x="3840480" y="2103120"/>
-            <a:ext cx="566928" cy="246350"/>
+            <a:ext cx="566928" cy="224835"/>
           </a:xfrm>
           <a:prstGeom prst="rect">
             <a:avLst/>
@@ -8461,7 +8520,7 @@
         <p:spPr>
           <a:xfrm>
             <a:off x="4407408" y="2103120"/>
-            <a:ext cx="566928" cy="246350"/>
+            <a:ext cx="566928" cy="224835"/>
           </a:xfrm>
           <a:prstGeom prst="rect">
             <a:avLst/>
@@ -8500,7 +8559,7 @@
         <p:spPr>
           <a:xfrm>
             <a:off x="4974336" y="2103120"/>
-            <a:ext cx="859536" cy="246350"/>
+            <a:ext cx="859536" cy="224835"/>
           </a:xfrm>
           <a:prstGeom prst="rect">
             <a:avLst/>
@@ -8538,8 +8597,8 @@
         </p:nvSpPr>
         <p:spPr>
           <a:xfrm>
-            <a:off x="585216" y="2349470"/>
-            <a:ext cx="5394960" cy="246350"/>
+            <a:off x="585216" y="2327955"/>
+            <a:ext cx="5394960" cy="224835"/>
           </a:xfrm>
           <a:prstGeom prst="rect">
             <a:avLst/>
@@ -8558,8 +8617,8 @@
         </p:nvSpPr>
         <p:spPr>
           <a:xfrm>
-            <a:off x="658368" y="2349470"/>
-            <a:ext cx="2011680" cy="246350"/>
+            <a:off x="658368" y="2327955"/>
+            <a:ext cx="2011680" cy="224835"/>
           </a:xfrm>
           <a:prstGeom prst="rect">
             <a:avLst/>
@@ -8597,8 +8656,8 @@
         </p:nvSpPr>
         <p:spPr>
           <a:xfrm>
-            <a:off x="3255264" y="2404899"/>
-            <a:ext cx="70154" cy="135493"/>
+            <a:off x="3255264" y="2378543"/>
+            <a:ext cx="70154" cy="123659"/>
           </a:xfrm>
           <a:prstGeom prst="rect">
             <a:avLst/>
@@ -8617,8 +8676,8 @@
         </p:nvSpPr>
         <p:spPr>
           <a:xfrm>
-            <a:off x="3840480" y="2349470"/>
-            <a:ext cx="566928" cy="246350"/>
+            <a:off x="3840480" y="2327955"/>
+            <a:ext cx="566928" cy="224835"/>
           </a:xfrm>
           <a:prstGeom prst="rect">
             <a:avLst/>
@@ -8656,8 +8715,8 @@
         </p:nvSpPr>
         <p:spPr>
           <a:xfrm>
-            <a:off x="4407408" y="2349470"/>
-            <a:ext cx="566928" cy="246350"/>
+            <a:off x="4407408" y="2327955"/>
+            <a:ext cx="566928" cy="224835"/>
           </a:xfrm>
           <a:prstGeom prst="rect">
             <a:avLst/>
@@ -8695,8 +8754,8 @@
         </p:nvSpPr>
         <p:spPr>
           <a:xfrm>
-            <a:off x="4974336" y="2349470"/>
-            <a:ext cx="859536" cy="246350"/>
+            <a:off x="4974336" y="2327955"/>
+            <a:ext cx="859536" cy="224835"/>
           </a:xfrm>
           <a:prstGeom prst="rect">
             <a:avLst/>
@@ -8734,8 +8793,8 @@
         </p:nvSpPr>
         <p:spPr>
           <a:xfrm>
-            <a:off x="658368" y="2595820"/>
-            <a:ext cx="2011680" cy="246350"/>
+            <a:off x="658368" y="2552790"/>
+            <a:ext cx="2011680" cy="224835"/>
           </a:xfrm>
           <a:prstGeom prst="rect">
             <a:avLst/>
@@ -8773,8 +8832,8 @@
         </p:nvSpPr>
         <p:spPr>
           <a:xfrm>
-            <a:off x="3255264" y="2651249"/>
-            <a:ext cx="38107" cy="135493"/>
+            <a:off x="3255264" y="2603377"/>
+            <a:ext cx="38107" cy="123659"/>
           </a:xfrm>
           <a:prstGeom prst="rect">
             <a:avLst/>
@@ -8793,8 +8852,8 @@
         </p:nvSpPr>
         <p:spPr>
           <a:xfrm>
-            <a:off x="3840480" y="2595820"/>
-            <a:ext cx="566928" cy="246350"/>
+            <a:off x="3840480" y="2552790"/>
+            <a:ext cx="566928" cy="224835"/>
           </a:xfrm>
           <a:prstGeom prst="rect">
             <a:avLst/>
@@ -8832,8 +8891,8 @@
         </p:nvSpPr>
         <p:spPr>
           <a:xfrm>
-            <a:off x="4407408" y="2595820"/>
-            <a:ext cx="566928" cy="246350"/>
+            <a:off x="4407408" y="2552790"/>
+            <a:ext cx="566928" cy="224835"/>
           </a:xfrm>
           <a:prstGeom prst="rect">
             <a:avLst/>
@@ -8871,8 +8930,8 @@
         </p:nvSpPr>
         <p:spPr>
           <a:xfrm>
-            <a:off x="4974336" y="2595820"/>
-            <a:ext cx="859536" cy="246350"/>
+            <a:off x="4974336" y="2552790"/>
+            <a:ext cx="859536" cy="224835"/>
           </a:xfrm>
           <a:prstGeom prst="rect">
             <a:avLst/>
@@ -8910,8 +8969,8 @@
         </p:nvSpPr>
         <p:spPr>
           <a:xfrm>
-            <a:off x="585216" y="2842170"/>
-            <a:ext cx="5394960" cy="246350"/>
+            <a:off x="585216" y="2777624"/>
+            <a:ext cx="5394960" cy="224835"/>
           </a:xfrm>
           <a:prstGeom prst="rect">
             <a:avLst/>
@@ -8930,8 +8989,8 @@
         </p:nvSpPr>
         <p:spPr>
           <a:xfrm>
-            <a:off x="658368" y="2842170"/>
-            <a:ext cx="2011680" cy="246350"/>
+            <a:off x="658368" y="2777624"/>
+            <a:ext cx="2011680" cy="224835"/>
           </a:xfrm>
           <a:prstGeom prst="rect">
             <a:avLst/>
@@ -8969,8 +9028,8 @@
         </p:nvSpPr>
         <p:spPr>
           <a:xfrm>
-            <a:off x="3255264" y="2897599"/>
-            <a:ext cx="20517" cy="135493"/>
+            <a:off x="3255264" y="2828212"/>
+            <a:ext cx="20517" cy="123659"/>
           </a:xfrm>
           <a:prstGeom prst="rect">
             <a:avLst/>
@@ -8989,8 +9048,8 @@
         </p:nvSpPr>
         <p:spPr>
           <a:xfrm>
-            <a:off x="3840480" y="2842170"/>
-            <a:ext cx="566928" cy="246350"/>
+            <a:off x="3840480" y="2777624"/>
+            <a:ext cx="566928" cy="224835"/>
           </a:xfrm>
           <a:prstGeom prst="rect">
             <a:avLst/>
@@ -9028,8 +9087,8 @@
         </p:nvSpPr>
         <p:spPr>
           <a:xfrm>
-            <a:off x="4407408" y="2842170"/>
-            <a:ext cx="566928" cy="246350"/>
+            <a:off x="4407408" y="2777624"/>
+            <a:ext cx="566928" cy="224835"/>
           </a:xfrm>
           <a:prstGeom prst="rect">
             <a:avLst/>
@@ -9067,8 +9126,8 @@
         </p:nvSpPr>
         <p:spPr>
           <a:xfrm>
-            <a:off x="4974336" y="2842170"/>
-            <a:ext cx="859536" cy="246350"/>
+            <a:off x="4974336" y="2777624"/>
+            <a:ext cx="859536" cy="224835"/>
           </a:xfrm>
           <a:prstGeom prst="rect">
             <a:avLst/>
@@ -9106,8 +9165,8 @@
         </p:nvSpPr>
         <p:spPr>
           <a:xfrm>
-            <a:off x="658368" y="3088520"/>
-            <a:ext cx="2011680" cy="246350"/>
+            <a:off x="658368" y="3002459"/>
+            <a:ext cx="2011680" cy="224835"/>
           </a:xfrm>
           <a:prstGeom prst="rect">
             <a:avLst/>
@@ -9145,8 +9204,8 @@
         </p:nvSpPr>
         <p:spPr>
           <a:xfrm>
-            <a:off x="3255264" y="3143949"/>
-            <a:ext cx="9144" cy="135493"/>
+            <a:off x="3255264" y="3053047"/>
+            <a:ext cx="9144" cy="123659"/>
           </a:xfrm>
           <a:prstGeom prst="rect">
             <a:avLst/>
@@ -9165,8 +9224,8 @@
         </p:nvSpPr>
         <p:spPr>
           <a:xfrm>
-            <a:off x="3840480" y="3088520"/>
-            <a:ext cx="566928" cy="246350"/>
+            <a:off x="3840480" y="3002459"/>
+            <a:ext cx="566928" cy="224835"/>
           </a:xfrm>
           <a:prstGeom prst="rect">
             <a:avLst/>
@@ -9204,8 +9263,8 @@
         </p:nvSpPr>
         <p:spPr>
           <a:xfrm>
-            <a:off x="4407408" y="3088520"/>
-            <a:ext cx="566928" cy="246350"/>
+            <a:off x="4407408" y="3002459"/>
+            <a:ext cx="566928" cy="224835"/>
           </a:xfrm>
           <a:prstGeom prst="rect">
             <a:avLst/>
@@ -9243,8 +9302,8 @@
         </p:nvSpPr>
         <p:spPr>
           <a:xfrm>
-            <a:off x="4974336" y="3088520"/>
-            <a:ext cx="859536" cy="246350"/>
+            <a:off x="4974336" y="3002459"/>
+            <a:ext cx="859536" cy="224835"/>
           </a:xfrm>
           <a:prstGeom prst="rect">
             <a:avLst/>
@@ -9282,8 +9341,8 @@
         </p:nvSpPr>
         <p:spPr>
           <a:xfrm>
-            <a:off x="585216" y="3334871"/>
-            <a:ext cx="5394960" cy="246350"/>
+            <a:off x="585216" y="3227294"/>
+            <a:ext cx="5394960" cy="224835"/>
           </a:xfrm>
           <a:prstGeom prst="rect">
             <a:avLst/>
@@ -9302,8 +9361,8 @@
         </p:nvSpPr>
         <p:spPr>
           <a:xfrm>
-            <a:off x="658368" y="3334871"/>
-            <a:ext cx="2011680" cy="246350"/>
+            <a:off x="658368" y="3227294"/>
+            <a:ext cx="2011680" cy="224835"/>
           </a:xfrm>
           <a:prstGeom prst="rect">
             <a:avLst/>
@@ -9341,8 +9400,8 @@
         </p:nvSpPr>
         <p:spPr>
           <a:xfrm>
-            <a:off x="3222182" y="3390299"/>
-            <a:ext cx="33082" cy="135493"/>
+            <a:off x="3222182" y="3277882"/>
+            <a:ext cx="33082" cy="123659"/>
           </a:xfrm>
           <a:prstGeom prst="rect">
             <a:avLst/>
@@ -9361,8 +9420,8 @@
         </p:nvSpPr>
         <p:spPr>
           <a:xfrm>
-            <a:off x="3840480" y="3334871"/>
-            <a:ext cx="566928" cy="246350"/>
+            <a:off x="3840480" y="3227294"/>
+            <a:ext cx="566928" cy="224835"/>
           </a:xfrm>
           <a:prstGeom prst="rect">
             <a:avLst/>
@@ -9400,8 +9459,8 @@
         </p:nvSpPr>
         <p:spPr>
           <a:xfrm>
-            <a:off x="4407408" y="3334871"/>
-            <a:ext cx="566928" cy="246350"/>
+            <a:off x="4407408" y="3227294"/>
+            <a:ext cx="566928" cy="224835"/>
           </a:xfrm>
           <a:prstGeom prst="rect">
             <a:avLst/>
@@ -9439,8 +9498,8 @@
         </p:nvSpPr>
         <p:spPr>
           <a:xfrm>
-            <a:off x="4974336" y="3334871"/>
-            <a:ext cx="859536" cy="246350"/>
+            <a:off x="4974336" y="3227294"/>
+            <a:ext cx="859536" cy="224835"/>
           </a:xfrm>
           <a:prstGeom prst="rect">
             <a:avLst/>
@@ -9478,8 +9537,8 @@
         </p:nvSpPr>
         <p:spPr>
           <a:xfrm>
-            <a:off x="658368" y="3581221"/>
-            <a:ext cx="2011680" cy="246350"/>
+            <a:off x="658368" y="3452129"/>
+            <a:ext cx="2011680" cy="224835"/>
           </a:xfrm>
           <a:prstGeom prst="rect">
             <a:avLst/>
@@ -9517,8 +9576,8 @@
         </p:nvSpPr>
         <p:spPr>
           <a:xfrm>
-            <a:off x="3179597" y="3636649"/>
-            <a:ext cx="75667" cy="135493"/>
+            <a:off x="3179597" y="3502717"/>
+            <a:ext cx="75667" cy="123659"/>
           </a:xfrm>
           <a:prstGeom prst="rect">
             <a:avLst/>
@@ -9537,8 +9596,8 @@
         </p:nvSpPr>
         <p:spPr>
           <a:xfrm>
-            <a:off x="3840480" y="3581221"/>
-            <a:ext cx="566928" cy="246350"/>
+            <a:off x="3840480" y="3452129"/>
+            <a:ext cx="566928" cy="224835"/>
           </a:xfrm>
           <a:prstGeom prst="rect">
             <a:avLst/>
@@ -9576,8 +9635,8 @@
         </p:nvSpPr>
         <p:spPr>
           <a:xfrm>
-            <a:off x="4407408" y="3581221"/>
-            <a:ext cx="566928" cy="246350"/>
+            <a:off x="4407408" y="3452129"/>
+            <a:ext cx="566928" cy="224835"/>
           </a:xfrm>
           <a:prstGeom prst="rect">
             <a:avLst/>
@@ -9615,8 +9674,8 @@
         </p:nvSpPr>
         <p:spPr>
           <a:xfrm>
-            <a:off x="4974336" y="3581221"/>
-            <a:ext cx="859536" cy="246350"/>
+            <a:off x="4974336" y="3452129"/>
+            <a:ext cx="859536" cy="224835"/>
           </a:xfrm>
           <a:prstGeom prst="rect">
             <a:avLst/>
@@ -9654,8 +9713,8 @@
         </p:nvSpPr>
         <p:spPr>
           <a:xfrm>
-            <a:off x="585216" y="3827571"/>
-            <a:ext cx="5394960" cy="246350"/>
+            <a:off x="585216" y="3676964"/>
+            <a:ext cx="5394960" cy="224835"/>
           </a:xfrm>
           <a:prstGeom prst="rect">
             <a:avLst/>
@@ -9674,8 +9733,8 @@
         </p:nvSpPr>
         <p:spPr>
           <a:xfrm>
-            <a:off x="658368" y="3827571"/>
-            <a:ext cx="2011680" cy="246350"/>
+            <a:off x="658368" y="3676964"/>
+            <a:ext cx="2011680" cy="224835"/>
           </a:xfrm>
           <a:prstGeom prst="rect">
             <a:avLst/>
@@ -9713,8 +9772,8 @@
         </p:nvSpPr>
         <p:spPr>
           <a:xfrm>
-            <a:off x="3178337" y="3883000"/>
-            <a:ext cx="76927" cy="135493"/>
+            <a:off x="3178337" y="3727552"/>
+            <a:ext cx="76927" cy="123659"/>
           </a:xfrm>
           <a:prstGeom prst="rect">
             <a:avLst/>
@@ -9733,8 +9792,8 @@
         </p:nvSpPr>
         <p:spPr>
           <a:xfrm>
-            <a:off x="3840480" y="3827571"/>
-            <a:ext cx="566928" cy="246350"/>
+            <a:off x="3840480" y="3676964"/>
+            <a:ext cx="566928" cy="224835"/>
           </a:xfrm>
           <a:prstGeom prst="rect">
             <a:avLst/>
@@ -9772,8 +9831,8 @@
         </p:nvSpPr>
         <p:spPr>
           <a:xfrm>
-            <a:off x="4407408" y="3827571"/>
-            <a:ext cx="566928" cy="246350"/>
+            <a:off x="4407408" y="3676964"/>
+            <a:ext cx="566928" cy="224835"/>
           </a:xfrm>
           <a:prstGeom prst="rect">
             <a:avLst/>
@@ -9811,8 +9870,8 @@
         </p:nvSpPr>
         <p:spPr>
           <a:xfrm>
-            <a:off x="4974336" y="3827571"/>
-            <a:ext cx="859536" cy="246350"/>
+            <a:off x="4974336" y="3676964"/>
+            <a:ext cx="859536" cy="224835"/>
           </a:xfrm>
           <a:prstGeom prst="rect">
             <a:avLst/>
@@ -9850,8 +9909,8 @@
         </p:nvSpPr>
         <p:spPr>
           <a:xfrm>
-            <a:off x="658368" y="4073921"/>
-            <a:ext cx="2011680" cy="246350"/>
+            <a:off x="658368" y="3901799"/>
+            <a:ext cx="2011680" cy="224835"/>
           </a:xfrm>
           <a:prstGeom prst="rect">
             <a:avLst/>
@@ -9889,8 +9948,8 @@
         </p:nvSpPr>
         <p:spPr>
           <a:xfrm>
-            <a:off x="3177426" y="4129350"/>
-            <a:ext cx="77838" cy="135493"/>
+            <a:off x="3177426" y="3952386"/>
+            <a:ext cx="77838" cy="123659"/>
           </a:xfrm>
           <a:prstGeom prst="rect">
             <a:avLst/>
@@ -9909,8 +9968,8 @@
         </p:nvSpPr>
         <p:spPr>
           <a:xfrm>
-            <a:off x="3840480" y="4073921"/>
-            <a:ext cx="566928" cy="246350"/>
+            <a:off x="3840480" y="3901799"/>
+            <a:ext cx="566928" cy="224835"/>
           </a:xfrm>
           <a:prstGeom prst="rect">
             <a:avLst/>
@@ -9948,8 +10007,8 @@
         </p:nvSpPr>
         <p:spPr>
           <a:xfrm>
-            <a:off x="4407408" y="4073921"/>
-            <a:ext cx="566928" cy="246350"/>
+            <a:off x="4407408" y="3901799"/>
+            <a:ext cx="566928" cy="224835"/>
           </a:xfrm>
           <a:prstGeom prst="rect">
             <a:avLst/>
@@ -9987,8 +10046,8 @@
         </p:nvSpPr>
         <p:spPr>
           <a:xfrm>
-            <a:off x="4974336" y="4073921"/>
-            <a:ext cx="859536" cy="246350"/>
+            <a:off x="4974336" y="3901799"/>
+            <a:ext cx="859536" cy="224835"/>
           </a:xfrm>
           <a:prstGeom prst="rect">
             <a:avLst/>
@@ -10026,8 +10085,8 @@
         </p:nvSpPr>
         <p:spPr>
           <a:xfrm>
-            <a:off x="585216" y="4320271"/>
-            <a:ext cx="5394960" cy="246350"/>
+            <a:off x="585216" y="4126633"/>
+            <a:ext cx="5394960" cy="224835"/>
           </a:xfrm>
           <a:prstGeom prst="rect">
             <a:avLst/>
@@ -10046,8 +10105,8 @@
         </p:nvSpPr>
         <p:spPr>
           <a:xfrm>
-            <a:off x="658368" y="4320271"/>
-            <a:ext cx="2011680" cy="246350"/>
+            <a:off x="658368" y="4126633"/>
+            <a:ext cx="2011680" cy="224835"/>
           </a:xfrm>
           <a:prstGeom prst="rect">
             <a:avLst/>
@@ -10085,8 +10144,8 @@
         </p:nvSpPr>
         <p:spPr>
           <a:xfrm>
-            <a:off x="3137487" y="4375700"/>
-            <a:ext cx="117777" cy="135493"/>
+            <a:off x="3137487" y="4177221"/>
+            <a:ext cx="117777" cy="123659"/>
           </a:xfrm>
           <a:prstGeom prst="rect">
             <a:avLst/>
@@ -10105,8 +10164,8 @@
         </p:nvSpPr>
         <p:spPr>
           <a:xfrm>
-            <a:off x="3840480" y="4320271"/>
-            <a:ext cx="566928" cy="246350"/>
+            <a:off x="3840480" y="4126633"/>
+            <a:ext cx="566928" cy="224835"/>
           </a:xfrm>
           <a:prstGeom prst="rect">
             <a:avLst/>
@@ -10144,8 +10203,8 @@
         </p:nvSpPr>
         <p:spPr>
           <a:xfrm>
-            <a:off x="4407408" y="4320271"/>
-            <a:ext cx="566928" cy="246350"/>
+            <a:off x="4407408" y="4126633"/>
+            <a:ext cx="566928" cy="224835"/>
           </a:xfrm>
           <a:prstGeom prst="rect">
             <a:avLst/>
@@ -10183,8 +10242,8 @@
         </p:nvSpPr>
         <p:spPr>
           <a:xfrm>
-            <a:off x="4974336" y="4320271"/>
-            <a:ext cx="859536" cy="246350"/>
+            <a:off x="4974336" y="4126633"/>
+            <a:ext cx="859536" cy="224835"/>
           </a:xfrm>
           <a:prstGeom prst="rect">
             <a:avLst/>
@@ -10222,8 +10281,8 @@
         </p:nvSpPr>
         <p:spPr>
           <a:xfrm>
-            <a:off x="658368" y="4566621"/>
-            <a:ext cx="2011680" cy="246350"/>
+            <a:off x="658368" y="4351468"/>
+            <a:ext cx="2011680" cy="224835"/>
           </a:xfrm>
           <a:prstGeom prst="rect">
             <a:avLst/>
@@ -10261,8 +10320,8 @@
         </p:nvSpPr>
         <p:spPr>
           <a:xfrm>
-            <a:off x="3136637" y="4622050"/>
-            <a:ext cx="118627" cy="135493"/>
+            <a:off x="3136637" y="4402056"/>
+            <a:ext cx="118627" cy="123659"/>
           </a:xfrm>
           <a:prstGeom prst="rect">
             <a:avLst/>
@@ -10281,8 +10340,8 @@
         </p:nvSpPr>
         <p:spPr>
           <a:xfrm>
-            <a:off x="3840480" y="4566621"/>
-            <a:ext cx="566928" cy="246350"/>
+            <a:off x="3840480" y="4351468"/>
+            <a:ext cx="566928" cy="224835"/>
           </a:xfrm>
           <a:prstGeom prst="rect">
             <a:avLst/>
@@ -10320,8 +10379,8 @@
         </p:nvSpPr>
         <p:spPr>
           <a:xfrm>
-            <a:off x="4407408" y="4566621"/>
-            <a:ext cx="566928" cy="246350"/>
+            <a:off x="4407408" y="4351468"/>
+            <a:ext cx="566928" cy="224835"/>
           </a:xfrm>
           <a:prstGeom prst="rect">
             <a:avLst/>
@@ -10359,8 +10418,8 @@
         </p:nvSpPr>
         <p:spPr>
           <a:xfrm>
-            <a:off x="4974336" y="4566621"/>
-            <a:ext cx="859536" cy="246350"/>
+            <a:off x="4974336" y="4351468"/>
+            <a:ext cx="859536" cy="224835"/>
           </a:xfrm>
           <a:prstGeom prst="rect">
             <a:avLst/>
@@ -10398,8 +10457,8 @@
         </p:nvSpPr>
         <p:spPr>
           <a:xfrm>
-            <a:off x="585216" y="4812971"/>
-            <a:ext cx="5394960" cy="246350"/>
+            <a:off x="585216" y="4576303"/>
+            <a:ext cx="5394960" cy="224835"/>
           </a:xfrm>
           <a:prstGeom prst="rect">
             <a:avLst/>
@@ -10418,8 +10477,8 @@
         </p:nvSpPr>
         <p:spPr>
           <a:xfrm>
-            <a:off x="658368" y="4812971"/>
-            <a:ext cx="2011680" cy="246350"/>
+            <a:off x="658368" y="4576303"/>
+            <a:ext cx="2011680" cy="224835"/>
           </a:xfrm>
           <a:prstGeom prst="rect">
             <a:avLst/>
@@ -10457,8 +10516,8 @@
         </p:nvSpPr>
         <p:spPr>
           <a:xfrm>
-            <a:off x="3096612" y="4868400"/>
-            <a:ext cx="158652" cy="135493"/>
+            <a:off x="3096612" y="4626891"/>
+            <a:ext cx="158652" cy="123659"/>
           </a:xfrm>
           <a:prstGeom prst="rect">
             <a:avLst/>
@@ -10477,8 +10536,8 @@
         </p:nvSpPr>
         <p:spPr>
           <a:xfrm>
-            <a:off x="3840480" y="4812971"/>
-            <a:ext cx="566928" cy="246350"/>
+            <a:off x="3840480" y="4576303"/>
+            <a:ext cx="566928" cy="224835"/>
           </a:xfrm>
           <a:prstGeom prst="rect">
             <a:avLst/>
@@ -10516,8 +10575,8 @@
         </p:nvSpPr>
         <p:spPr>
           <a:xfrm>
-            <a:off x="4407408" y="4812971"/>
-            <a:ext cx="566928" cy="246350"/>
+            <a:off x="4407408" y="4576303"/>
+            <a:ext cx="566928" cy="224835"/>
           </a:xfrm>
           <a:prstGeom prst="rect">
             <a:avLst/>
@@ -10555,8 +10614,8 @@
         </p:nvSpPr>
         <p:spPr>
           <a:xfrm>
-            <a:off x="4974336" y="4812971"/>
-            <a:ext cx="859536" cy="246350"/>
+            <a:off x="4974336" y="4576303"/>
+            <a:ext cx="859536" cy="224835"/>
           </a:xfrm>
           <a:prstGeom prst="rect">
             <a:avLst/>
@@ -10594,8 +10653,8 @@
         </p:nvSpPr>
         <p:spPr>
           <a:xfrm>
-            <a:off x="658368" y="5059321"/>
-            <a:ext cx="2011680" cy="246350"/>
+            <a:off x="658368" y="4801138"/>
+            <a:ext cx="2011680" cy="224835"/>
           </a:xfrm>
           <a:prstGeom prst="rect">
             <a:avLst/>
@@ -10633,8 +10692,8 @@
         </p:nvSpPr>
         <p:spPr>
           <a:xfrm>
-            <a:off x="3081235" y="5114750"/>
-            <a:ext cx="174029" cy="135493"/>
+            <a:off x="3081235" y="4851726"/>
+            <a:ext cx="174029" cy="123659"/>
           </a:xfrm>
           <a:prstGeom prst="rect">
             <a:avLst/>
@@ -10653,8 +10712,8 @@
         </p:nvSpPr>
         <p:spPr>
           <a:xfrm>
-            <a:off x="3840480" y="5059321"/>
-            <a:ext cx="566928" cy="246350"/>
+            <a:off x="3840480" y="4801138"/>
+            <a:ext cx="566928" cy="224835"/>
           </a:xfrm>
           <a:prstGeom prst="rect">
             <a:avLst/>
@@ -10692,8 +10751,8 @@
         </p:nvSpPr>
         <p:spPr>
           <a:xfrm>
-            <a:off x="4407408" y="5059321"/>
-            <a:ext cx="566928" cy="246350"/>
+            <a:off x="4407408" y="4801138"/>
+            <a:ext cx="566928" cy="224835"/>
           </a:xfrm>
           <a:prstGeom prst="rect">
             <a:avLst/>
@@ -10731,8 +10790,8 @@
         </p:nvSpPr>
         <p:spPr>
           <a:xfrm>
-            <a:off x="4974336" y="5059321"/>
-            <a:ext cx="859536" cy="246350"/>
+            <a:off x="4974336" y="4801138"/>
+            <a:ext cx="859536" cy="224835"/>
           </a:xfrm>
           <a:prstGeom prst="rect">
             <a:avLst/>
@@ -10770,8 +10829,8 @@
         </p:nvSpPr>
         <p:spPr>
           <a:xfrm>
-            <a:off x="585216" y="5305672"/>
-            <a:ext cx="5394960" cy="246350"/>
+            <a:off x="585216" y="5025973"/>
+            <a:ext cx="5394960" cy="224835"/>
           </a:xfrm>
           <a:prstGeom prst="rect">
             <a:avLst/>
@@ -10790,8 +10849,8 @@
         </p:nvSpPr>
         <p:spPr>
           <a:xfrm>
-            <a:off x="658368" y="5305672"/>
-            <a:ext cx="2011680" cy="246350"/>
+            <a:off x="658368" y="5025973"/>
+            <a:ext cx="2011680" cy="224835"/>
           </a:xfrm>
           <a:prstGeom prst="rect">
             <a:avLst/>
@@ -10829,8 +10888,8 @@
         </p:nvSpPr>
         <p:spPr>
           <a:xfrm>
-            <a:off x="3077450" y="5361100"/>
-            <a:ext cx="177814" cy="135493"/>
+            <a:off x="3077450" y="5076561"/>
+            <a:ext cx="177814" cy="123659"/>
           </a:xfrm>
           <a:prstGeom prst="rect">
             <a:avLst/>
@@ -10849,8 +10908,8 @@
         </p:nvSpPr>
         <p:spPr>
           <a:xfrm>
-            <a:off x="3840480" y="5305672"/>
-            <a:ext cx="566928" cy="246350"/>
+            <a:off x="3840480" y="5025973"/>
+            <a:ext cx="566928" cy="224835"/>
           </a:xfrm>
           <a:prstGeom prst="rect">
             <a:avLst/>
@@ -10888,8 +10947,8 @@
         </p:nvSpPr>
         <p:spPr>
           <a:xfrm>
-            <a:off x="4407408" y="5305672"/>
-            <a:ext cx="566928" cy="246350"/>
+            <a:off x="4407408" y="5025973"/>
+            <a:ext cx="566928" cy="224835"/>
           </a:xfrm>
           <a:prstGeom prst="rect">
             <a:avLst/>
@@ -10927,8 +10986,8 @@
         </p:nvSpPr>
         <p:spPr>
           <a:xfrm>
-            <a:off x="4974336" y="5305672"/>
-            <a:ext cx="859536" cy="246350"/>
+            <a:off x="4974336" y="5025973"/>
+            <a:ext cx="859536" cy="224835"/>
           </a:xfrm>
           <a:prstGeom prst="rect">
             <a:avLst/>
@@ -10966,8 +11025,8 @@
         </p:nvSpPr>
         <p:spPr>
           <a:xfrm>
-            <a:off x="658368" y="5552022"/>
-            <a:ext cx="2011680" cy="246350"/>
+            <a:off x="658368" y="5250808"/>
+            <a:ext cx="2011680" cy="224835"/>
           </a:xfrm>
           <a:prstGeom prst="rect">
             <a:avLst/>
@@ -11005,8 +11064,8 @@
         </p:nvSpPr>
         <p:spPr>
           <a:xfrm>
-            <a:off x="3070973" y="5607450"/>
-            <a:ext cx="184291" cy="135493"/>
+            <a:off x="3070973" y="5301395"/>
+            <a:ext cx="184291" cy="123659"/>
           </a:xfrm>
           <a:prstGeom prst="rect">
             <a:avLst/>
@@ -11025,8 +11084,8 @@
         </p:nvSpPr>
         <p:spPr>
           <a:xfrm>
-            <a:off x="3840480" y="5552022"/>
-            <a:ext cx="566928" cy="246350"/>
+            <a:off x="3840480" y="5250808"/>
+            <a:ext cx="566928" cy="224835"/>
           </a:xfrm>
           <a:prstGeom prst="rect">
             <a:avLst/>
@@ -11064,8 +11123,8 @@
         </p:nvSpPr>
         <p:spPr>
           <a:xfrm>
-            <a:off x="4407408" y="5552022"/>
-            <a:ext cx="566928" cy="246350"/>
+            <a:off x="4407408" y="5250808"/>
+            <a:ext cx="566928" cy="224835"/>
           </a:xfrm>
           <a:prstGeom prst="rect">
             <a:avLst/>
@@ -11103,8 +11162,8 @@
         </p:nvSpPr>
         <p:spPr>
           <a:xfrm>
-            <a:off x="4974336" y="5552022"/>
-            <a:ext cx="859536" cy="246350"/>
+            <a:off x="4974336" y="5250808"/>
+            <a:ext cx="859536" cy="224835"/>
           </a:xfrm>
           <a:prstGeom prst="rect">
             <a:avLst/>
@@ -11142,8 +11201,8 @@
         </p:nvSpPr>
         <p:spPr>
           <a:xfrm>
-            <a:off x="585216" y="5798372"/>
-            <a:ext cx="5394960" cy="246350"/>
+            <a:off x="585216" y="5475642"/>
+            <a:ext cx="5394960" cy="224835"/>
           </a:xfrm>
           <a:prstGeom prst="rect">
             <a:avLst/>
@@ -11162,8 +11221,8 @@
         </p:nvSpPr>
         <p:spPr>
           <a:xfrm>
-            <a:off x="658368" y="5798372"/>
-            <a:ext cx="2011680" cy="246350"/>
+            <a:off x="658368" y="5475642"/>
+            <a:ext cx="2011680" cy="224835"/>
           </a:xfrm>
           <a:prstGeom prst="rect">
             <a:avLst/>
@@ -11201,8 +11260,8 @@
         </p:nvSpPr>
         <p:spPr>
           <a:xfrm>
-            <a:off x="3060053" y="5853801"/>
-            <a:ext cx="195211" cy="135493"/>
+            <a:off x="3060053" y="5526230"/>
+            <a:ext cx="195211" cy="123659"/>
           </a:xfrm>
           <a:prstGeom prst="rect">
             <a:avLst/>
@@ -11221,8 +11280,8 @@
         </p:nvSpPr>
         <p:spPr>
           <a:xfrm>
-            <a:off x="3840480" y="5798372"/>
-            <a:ext cx="566928" cy="246350"/>
+            <a:off x="3840480" y="5475642"/>
+            <a:ext cx="566928" cy="224835"/>
           </a:xfrm>
           <a:prstGeom prst="rect">
             <a:avLst/>
@@ -11260,8 +11319,8 @@
         </p:nvSpPr>
         <p:spPr>
           <a:xfrm>
-            <a:off x="4407408" y="5798372"/>
-            <a:ext cx="566928" cy="246350"/>
+            <a:off x="4407408" y="5475642"/>
+            <a:ext cx="566928" cy="224835"/>
           </a:xfrm>
           <a:prstGeom prst="rect">
             <a:avLst/>
@@ -11299,8 +11358,8 @@
         </p:nvSpPr>
         <p:spPr>
           <a:xfrm>
-            <a:off x="4974336" y="5798372"/>
-            <a:ext cx="859536" cy="246350"/>
+            <a:off x="4974336" y="5475642"/>
+            <a:ext cx="859536" cy="224835"/>
           </a:xfrm>
           <a:prstGeom prst="rect">
             <a:avLst/>
@@ -11338,8 +11397,8 @@
         </p:nvSpPr>
         <p:spPr>
           <a:xfrm>
-            <a:off x="658368" y="6044722"/>
-            <a:ext cx="2011680" cy="246350"/>
+            <a:off x="658368" y="5700477"/>
+            <a:ext cx="2011680" cy="224835"/>
           </a:xfrm>
           <a:prstGeom prst="rect">
             <a:avLst/>
@@ -11377,8 +11436,8 @@
         </p:nvSpPr>
         <p:spPr>
           <a:xfrm>
-            <a:off x="3033339" y="6100151"/>
-            <a:ext cx="221925" cy="135493"/>
+            <a:off x="3033339" y="5751065"/>
+            <a:ext cx="221925" cy="123659"/>
           </a:xfrm>
           <a:prstGeom prst="rect">
             <a:avLst/>
@@ -11397,8 +11456,8 @@
         </p:nvSpPr>
         <p:spPr>
           <a:xfrm>
-            <a:off x="3840480" y="6044722"/>
-            <a:ext cx="566928" cy="246350"/>
+            <a:off x="3840480" y="5700477"/>
+            <a:ext cx="566928" cy="224835"/>
           </a:xfrm>
           <a:prstGeom prst="rect">
             <a:avLst/>
@@ -11436,8 +11495,8 @@
         </p:nvSpPr>
         <p:spPr>
           <a:xfrm>
-            <a:off x="4407408" y="6044722"/>
-            <a:ext cx="566928" cy="246350"/>
+            <a:off x="4407408" y="5700477"/>
+            <a:ext cx="566928" cy="224835"/>
           </a:xfrm>
           <a:prstGeom prst="rect">
             <a:avLst/>
@@ -11475,8 +11534,8 @@
         </p:nvSpPr>
         <p:spPr>
           <a:xfrm>
-            <a:off x="4974336" y="6044722"/>
-            <a:ext cx="859536" cy="246350"/>
+            <a:off x="4974336" y="5700477"/>
+            <a:ext cx="859536" cy="224835"/>
           </a:xfrm>
           <a:prstGeom prst="rect">
             <a:avLst/>
@@ -11515,7 +11574,7 @@
         <p:spPr>
           <a:xfrm>
             <a:off x="6208776" y="2103120"/>
-            <a:ext cx="2011680" cy="246350"/>
+            <a:ext cx="2011680" cy="224835"/>
           </a:xfrm>
           <a:prstGeom prst="rect">
             <a:avLst/>
@@ -11553,8 +11612,8 @@
         </p:nvSpPr>
         <p:spPr>
           <a:xfrm>
-            <a:off x="8575710" y="2158549"/>
-            <a:ext cx="229962" cy="135493"/>
+            <a:off x="8575710" y="2153708"/>
+            <a:ext cx="229962" cy="123659"/>
           </a:xfrm>
           <a:prstGeom prst="rect">
             <a:avLst/>
@@ -11574,7 +11633,7 @@
         <p:spPr>
           <a:xfrm>
             <a:off x="9390888" y="2103120"/>
-            <a:ext cx="566928" cy="246350"/>
+            <a:ext cx="566928" cy="224835"/>
           </a:xfrm>
           <a:prstGeom prst="rect">
             <a:avLst/>
@@ -11613,7 +11672,7 @@
         <p:spPr>
           <a:xfrm>
             <a:off x="9957816" y="2103120"/>
-            <a:ext cx="566928" cy="246350"/>
+            <a:ext cx="566928" cy="224835"/>
           </a:xfrm>
           <a:prstGeom prst="rect">
             <a:avLst/>
@@ -11652,7 +11711,7 @@
         <p:spPr>
           <a:xfrm>
             <a:off x="10524744" y="2103120"/>
-            <a:ext cx="859536" cy="246350"/>
+            <a:ext cx="859536" cy="224835"/>
           </a:xfrm>
           <a:prstGeom prst="rect">
             <a:avLst/>
@@ -11690,8 +11749,8 @@
         </p:nvSpPr>
         <p:spPr>
           <a:xfrm>
-            <a:off x="6135624" y="2349470"/>
-            <a:ext cx="5394960" cy="246350"/>
+            <a:off x="6135624" y="2327955"/>
+            <a:ext cx="5394960" cy="224835"/>
           </a:xfrm>
           <a:prstGeom prst="rect">
             <a:avLst/>
@@ -11710,8 +11769,8 @@
         </p:nvSpPr>
         <p:spPr>
           <a:xfrm>
-            <a:off x="6208776" y="2349470"/>
-            <a:ext cx="2011680" cy="246350"/>
+            <a:off x="6208776" y="2327955"/>
+            <a:ext cx="2011680" cy="224835"/>
           </a:xfrm>
           <a:prstGeom prst="rect">
             <a:avLst/>
@@ -11749,8 +11808,8 @@
         </p:nvSpPr>
         <p:spPr>
           <a:xfrm>
-            <a:off x="8565630" y="2404899"/>
-            <a:ext cx="240042" cy="135493"/>
+            <a:off x="8565630" y="2378543"/>
+            <a:ext cx="240042" cy="123659"/>
           </a:xfrm>
           <a:prstGeom prst="rect">
             <a:avLst/>
@@ -11769,8 +11828,8 @@
         </p:nvSpPr>
         <p:spPr>
           <a:xfrm>
-            <a:off x="9390888" y="2349470"/>
-            <a:ext cx="566928" cy="246350"/>
+            <a:off x="9390888" y="2327955"/>
+            <a:ext cx="566928" cy="224835"/>
           </a:xfrm>
           <a:prstGeom prst="rect">
             <a:avLst/>
@@ -11808,8 +11867,8 @@
         </p:nvSpPr>
         <p:spPr>
           <a:xfrm>
-            <a:off x="9957816" y="2349470"/>
-            <a:ext cx="566928" cy="246350"/>
+            <a:off x="9957816" y="2327955"/>
+            <a:ext cx="566928" cy="224835"/>
           </a:xfrm>
           <a:prstGeom prst="rect">
             <a:avLst/>
@@ -11847,8 +11906,8 @@
         </p:nvSpPr>
         <p:spPr>
           <a:xfrm>
-            <a:off x="10524744" y="2349470"/>
-            <a:ext cx="859536" cy="246350"/>
+            <a:off x="10524744" y="2327955"/>
+            <a:ext cx="859536" cy="224835"/>
           </a:xfrm>
           <a:prstGeom prst="rect">
             <a:avLst/>
@@ -11886,8 +11945,8 @@
         </p:nvSpPr>
         <p:spPr>
           <a:xfrm>
-            <a:off x="6208776" y="2595820"/>
-            <a:ext cx="2011680" cy="246350"/>
+            <a:off x="6208776" y="2552790"/>
+            <a:ext cx="2011680" cy="224835"/>
           </a:xfrm>
           <a:prstGeom prst="rect">
             <a:avLst/>
@@ -11925,8 +11984,8 @@
         </p:nvSpPr>
         <p:spPr>
           <a:xfrm>
-            <a:off x="8564916" y="2651249"/>
-            <a:ext cx="240756" cy="135493"/>
+            <a:off x="8564916" y="2603377"/>
+            <a:ext cx="240756" cy="123659"/>
           </a:xfrm>
           <a:prstGeom prst="rect">
             <a:avLst/>
@@ -11945,8 +12004,8 @@
         </p:nvSpPr>
         <p:spPr>
           <a:xfrm>
-            <a:off x="9390888" y="2595820"/>
-            <a:ext cx="566928" cy="246350"/>
+            <a:off x="9390888" y="2552790"/>
+            <a:ext cx="566928" cy="224835"/>
           </a:xfrm>
           <a:prstGeom prst="rect">
             <a:avLst/>
@@ -11984,8 +12043,8 @@
         </p:nvSpPr>
         <p:spPr>
           <a:xfrm>
-            <a:off x="9957816" y="2595820"/>
-            <a:ext cx="566928" cy="246350"/>
+            <a:off x="9957816" y="2552790"/>
+            <a:ext cx="566928" cy="224835"/>
           </a:xfrm>
           <a:prstGeom prst="rect">
             <a:avLst/>
@@ -12023,8 +12082,8 @@
         </p:nvSpPr>
         <p:spPr>
           <a:xfrm>
-            <a:off x="10524744" y="2595820"/>
-            <a:ext cx="859536" cy="246350"/>
+            <a:off x="10524744" y="2552790"/>
+            <a:ext cx="859536" cy="224835"/>
           </a:xfrm>
           <a:prstGeom prst="rect">
             <a:avLst/>
@@ -12062,8 +12121,8 @@
         </p:nvSpPr>
         <p:spPr>
           <a:xfrm>
-            <a:off x="6135624" y="2842170"/>
-            <a:ext cx="5394960" cy="246350"/>
+            <a:off x="6135624" y="2777624"/>
+            <a:ext cx="5394960" cy="224835"/>
           </a:xfrm>
           <a:prstGeom prst="rect">
             <a:avLst/>
@@ -12082,8 +12141,8 @@
         </p:nvSpPr>
         <p:spPr>
           <a:xfrm>
-            <a:off x="6208776" y="2842170"/>
-            <a:ext cx="2011680" cy="246350"/>
+            <a:off x="6208776" y="2777624"/>
+            <a:ext cx="2011680" cy="224835"/>
           </a:xfrm>
           <a:prstGeom prst="rect">
             <a:avLst/>
@@ -12121,8 +12180,8 @@
         </p:nvSpPr>
         <p:spPr>
           <a:xfrm>
-            <a:off x="8545748" y="2897599"/>
-            <a:ext cx="259924" cy="135493"/>
+            <a:off x="8545748" y="2828212"/>
+            <a:ext cx="259924" cy="123659"/>
           </a:xfrm>
           <a:prstGeom prst="rect">
             <a:avLst/>
@@ -12141,8 +12200,8 @@
         </p:nvSpPr>
         <p:spPr>
           <a:xfrm>
-            <a:off x="9390888" y="2842170"/>
-            <a:ext cx="566928" cy="246350"/>
+            <a:off x="9390888" y="2777624"/>
+            <a:ext cx="566928" cy="224835"/>
           </a:xfrm>
           <a:prstGeom prst="rect">
             <a:avLst/>
@@ -12180,8 +12239,8 @@
         </p:nvSpPr>
         <p:spPr>
           <a:xfrm>
-            <a:off x="9957816" y="2842170"/>
-            <a:ext cx="566928" cy="246350"/>
+            <a:off x="9957816" y="2777624"/>
+            <a:ext cx="566928" cy="224835"/>
           </a:xfrm>
           <a:prstGeom prst="rect">
             <a:avLst/>
@@ -12219,8 +12278,8 @@
         </p:nvSpPr>
         <p:spPr>
           <a:xfrm>
-            <a:off x="10524744" y="2842170"/>
-            <a:ext cx="859536" cy="246350"/>
+            <a:off x="10524744" y="2777624"/>
+            <a:ext cx="859536" cy="224835"/>
           </a:xfrm>
           <a:prstGeom prst="rect">
             <a:avLst/>
@@ -12258,8 +12317,8 @@
         </p:nvSpPr>
         <p:spPr>
           <a:xfrm>
-            <a:off x="6208776" y="3088520"/>
-            <a:ext cx="2011680" cy="246350"/>
+            <a:off x="6208776" y="3002459"/>
+            <a:ext cx="2011680" cy="224835"/>
           </a:xfrm>
           <a:prstGeom prst="rect">
             <a:avLst/>
@@ -12297,8 +12356,8 @@
         </p:nvSpPr>
         <p:spPr>
           <a:xfrm>
-            <a:off x="8541222" y="3143949"/>
-            <a:ext cx="264450" cy="135493"/>
+            <a:off x="8541222" y="3053047"/>
+            <a:ext cx="264450" cy="123659"/>
           </a:xfrm>
           <a:prstGeom prst="rect">
             <a:avLst/>
@@ -12317,8 +12376,8 @@
         </p:nvSpPr>
         <p:spPr>
           <a:xfrm>
-            <a:off x="9390888" y="3088520"/>
-            <a:ext cx="566928" cy="246350"/>
+            <a:off x="9390888" y="3002459"/>
+            <a:ext cx="566928" cy="224835"/>
           </a:xfrm>
           <a:prstGeom prst="rect">
             <a:avLst/>
@@ -12356,8 +12415,8 @@
         </p:nvSpPr>
         <p:spPr>
           <a:xfrm>
-            <a:off x="9957816" y="3088520"/>
-            <a:ext cx="566928" cy="246350"/>
+            <a:off x="9957816" y="3002459"/>
+            <a:ext cx="566928" cy="224835"/>
           </a:xfrm>
           <a:prstGeom prst="rect">
             <a:avLst/>
@@ -12395,8 +12454,8 @@
         </p:nvSpPr>
         <p:spPr>
           <a:xfrm>
-            <a:off x="10524744" y="3088520"/>
-            <a:ext cx="859536" cy="246350"/>
+            <a:off x="10524744" y="3002459"/>
+            <a:ext cx="859536" cy="224835"/>
           </a:xfrm>
           <a:prstGeom prst="rect">
             <a:avLst/>
@@ -12434,8 +12493,8 @@
         </p:nvSpPr>
         <p:spPr>
           <a:xfrm>
-            <a:off x="6135624" y="3334871"/>
-            <a:ext cx="5394960" cy="246350"/>
+            <a:off x="6135624" y="3227294"/>
+            <a:ext cx="5394960" cy="224835"/>
           </a:xfrm>
           <a:prstGeom prst="rect">
             <a:avLst/>
@@ -12454,8 +12513,8 @@
         </p:nvSpPr>
         <p:spPr>
           <a:xfrm>
-            <a:off x="6208776" y="3334871"/>
-            <a:ext cx="2011680" cy="246350"/>
+            <a:off x="6208776" y="3227294"/>
+            <a:ext cx="2011680" cy="224835"/>
           </a:xfrm>
           <a:prstGeom prst="rect">
             <a:avLst/>
@@ -12493,8 +12552,8 @@
         </p:nvSpPr>
         <p:spPr>
           <a:xfrm>
-            <a:off x="8534757" y="3390299"/>
-            <a:ext cx="270915" cy="135493"/>
+            <a:off x="8534757" y="3277882"/>
+            <a:ext cx="270915" cy="123659"/>
           </a:xfrm>
           <a:prstGeom prst="rect">
             <a:avLst/>
@@ -12513,8 +12572,8 @@
         </p:nvSpPr>
         <p:spPr>
           <a:xfrm>
-            <a:off x="9390888" y="3334871"/>
-            <a:ext cx="566928" cy="246350"/>
+            <a:off x="9390888" y="3227294"/>
+            <a:ext cx="566928" cy="224835"/>
           </a:xfrm>
           <a:prstGeom prst="rect">
             <a:avLst/>
@@ -12552,8 +12611,8 @@
         </p:nvSpPr>
         <p:spPr>
           <a:xfrm>
-            <a:off x="9957816" y="3334871"/>
-            <a:ext cx="566928" cy="246350"/>
+            <a:off x="9957816" y="3227294"/>
+            <a:ext cx="566928" cy="224835"/>
           </a:xfrm>
           <a:prstGeom prst="rect">
             <a:avLst/>
@@ -12591,8 +12650,8 @@
         </p:nvSpPr>
         <p:spPr>
           <a:xfrm>
-            <a:off x="10524744" y="3334871"/>
-            <a:ext cx="859536" cy="246350"/>
+            <a:off x="10524744" y="3227294"/>
+            <a:ext cx="859536" cy="224835"/>
           </a:xfrm>
           <a:prstGeom prst="rect">
             <a:avLst/>
@@ -12630,8 +12689,8 @@
         </p:nvSpPr>
         <p:spPr>
           <a:xfrm>
-            <a:off x="6208776" y="3581221"/>
-            <a:ext cx="2011680" cy="246350"/>
+            <a:off x="6208776" y="3452129"/>
+            <a:ext cx="2011680" cy="224835"/>
           </a:xfrm>
           <a:prstGeom prst="rect">
             <a:avLst/>
@@ -12669,8 +12728,8 @@
         </p:nvSpPr>
         <p:spPr>
           <a:xfrm>
-            <a:off x="8499284" y="3636649"/>
-            <a:ext cx="306388" cy="135493"/>
+            <a:off x="8499284" y="3502717"/>
+            <a:ext cx="306388" cy="123659"/>
           </a:xfrm>
           <a:prstGeom prst="rect">
             <a:avLst/>
@@ -12689,8 +12748,8 @@
         </p:nvSpPr>
         <p:spPr>
           <a:xfrm>
-            <a:off x="9390888" y="3581221"/>
-            <a:ext cx="566928" cy="246350"/>
+            <a:off x="9390888" y="3452129"/>
+            <a:ext cx="566928" cy="224835"/>
           </a:xfrm>
           <a:prstGeom prst="rect">
             <a:avLst/>
@@ -12728,8 +12787,8 @@
         </p:nvSpPr>
         <p:spPr>
           <a:xfrm>
-            <a:off x="9957816" y="3581221"/>
-            <a:ext cx="566928" cy="246350"/>
+            <a:off x="9957816" y="3452129"/>
+            <a:ext cx="566928" cy="224835"/>
           </a:xfrm>
           <a:prstGeom prst="rect">
             <a:avLst/>
@@ -12767,8 +12826,8 @@
         </p:nvSpPr>
         <p:spPr>
           <a:xfrm>
-            <a:off x="10524744" y="3581221"/>
-            <a:ext cx="859536" cy="246350"/>
+            <a:off x="10524744" y="3452129"/>
+            <a:ext cx="859536" cy="224835"/>
           </a:xfrm>
           <a:prstGeom prst="rect">
             <a:avLst/>
@@ -12806,8 +12865,8 @@
         </p:nvSpPr>
         <p:spPr>
           <a:xfrm>
-            <a:off x="6135624" y="3827571"/>
-            <a:ext cx="5394960" cy="246350"/>
+            <a:off x="6135624" y="3676964"/>
+            <a:ext cx="5394960" cy="224835"/>
           </a:xfrm>
           <a:prstGeom prst="rect">
             <a:avLst/>
@@ -12826,8 +12885,8 @@
         </p:nvSpPr>
         <p:spPr>
           <a:xfrm>
-            <a:off x="6208776" y="3827571"/>
-            <a:ext cx="2011680" cy="246350"/>
+            <a:off x="6208776" y="3676964"/>
+            <a:ext cx="2011680" cy="224835"/>
           </a:xfrm>
           <a:prstGeom prst="rect">
             <a:avLst/>
@@ -12865,8 +12924,8 @@
         </p:nvSpPr>
         <p:spPr>
           <a:xfrm>
-            <a:off x="8496238" y="3883000"/>
-            <a:ext cx="309434" cy="135493"/>
+            <a:off x="8496238" y="3727552"/>
+            <a:ext cx="309434" cy="123659"/>
           </a:xfrm>
           <a:prstGeom prst="rect">
             <a:avLst/>
@@ -12885,8 +12944,8 @@
         </p:nvSpPr>
         <p:spPr>
           <a:xfrm>
-            <a:off x="9390888" y="3827571"/>
-            <a:ext cx="566928" cy="246350"/>
+            <a:off x="9390888" y="3676964"/>
+            <a:ext cx="566928" cy="224835"/>
           </a:xfrm>
           <a:prstGeom prst="rect">
             <a:avLst/>
@@ -12924,8 +12983,8 @@
         </p:nvSpPr>
         <p:spPr>
           <a:xfrm>
-            <a:off x="9957816" y="3827571"/>
-            <a:ext cx="566928" cy="246350"/>
+            <a:off x="9957816" y="3676964"/>
+            <a:ext cx="566928" cy="224835"/>
           </a:xfrm>
           <a:prstGeom prst="rect">
             <a:avLst/>
@@ -12963,8 +13022,8 @@
         </p:nvSpPr>
         <p:spPr>
           <a:xfrm>
-            <a:off x="10524744" y="3827571"/>
-            <a:ext cx="859536" cy="246350"/>
+            <a:off x="10524744" y="3676964"/>
+            <a:ext cx="859536" cy="224835"/>
           </a:xfrm>
           <a:prstGeom prst="rect">
             <a:avLst/>
@@ -13002,8 +13061,8 @@
         </p:nvSpPr>
         <p:spPr>
           <a:xfrm>
-            <a:off x="6208776" y="4073921"/>
-            <a:ext cx="2011680" cy="246350"/>
+            <a:off x="6208776" y="3901799"/>
+            <a:ext cx="2011680" cy="224835"/>
           </a:xfrm>
           <a:prstGeom prst="rect">
             <a:avLst/>
@@ -13041,8 +13100,8 @@
         </p:nvSpPr>
         <p:spPr>
           <a:xfrm>
-            <a:off x="8493166" y="4129350"/>
-            <a:ext cx="312506" cy="135493"/>
+            <a:off x="8493166" y="3952386"/>
+            <a:ext cx="312506" cy="123659"/>
           </a:xfrm>
           <a:prstGeom prst="rect">
             <a:avLst/>
@@ -13061,8 +13120,8 @@
         </p:nvSpPr>
         <p:spPr>
           <a:xfrm>
-            <a:off x="9390888" y="4073921"/>
-            <a:ext cx="566928" cy="246350"/>
+            <a:off x="9390888" y="3901799"/>
+            <a:ext cx="566928" cy="224835"/>
           </a:xfrm>
           <a:prstGeom prst="rect">
             <a:avLst/>
@@ -13100,8 +13159,8 @@
         </p:nvSpPr>
         <p:spPr>
           <a:xfrm>
-            <a:off x="9957816" y="4073921"/>
-            <a:ext cx="566928" cy="246350"/>
+            <a:off x="9957816" y="3901799"/>
+            <a:ext cx="566928" cy="224835"/>
           </a:xfrm>
           <a:prstGeom prst="rect">
             <a:avLst/>
@@ -13139,8 +13198,8 @@
         </p:nvSpPr>
         <p:spPr>
           <a:xfrm>
-            <a:off x="10524744" y="4073921"/>
-            <a:ext cx="859536" cy="246350"/>
+            <a:off x="10524744" y="3901799"/>
+            <a:ext cx="859536" cy="224835"/>
           </a:xfrm>
           <a:prstGeom prst="rect">
             <a:avLst/>
@@ -13178,8 +13237,8 @@
         </p:nvSpPr>
         <p:spPr>
           <a:xfrm>
-            <a:off x="6135624" y="4320271"/>
-            <a:ext cx="5394960" cy="246350"/>
+            <a:off x="6135624" y="4126633"/>
+            <a:ext cx="5394960" cy="224835"/>
           </a:xfrm>
           <a:prstGeom prst="rect">
             <a:avLst/>
@@ -13198,8 +13257,8 @@
         </p:nvSpPr>
         <p:spPr>
           <a:xfrm>
-            <a:off x="6208776" y="4320271"/>
-            <a:ext cx="2011680" cy="246350"/>
+            <a:off x="6208776" y="4126633"/>
+            <a:ext cx="2011680" cy="224835"/>
           </a:xfrm>
           <a:prstGeom prst="rect">
             <a:avLst/>
@@ -13237,8 +13296,8 @@
         </p:nvSpPr>
         <p:spPr>
           <a:xfrm>
-            <a:off x="8491434" y="4375700"/>
-            <a:ext cx="314238" cy="135493"/>
+            <a:off x="8491434" y="4177221"/>
+            <a:ext cx="314238" cy="123659"/>
           </a:xfrm>
           <a:prstGeom prst="rect">
             <a:avLst/>
@@ -13257,8 +13316,8 @@
         </p:nvSpPr>
         <p:spPr>
           <a:xfrm>
-            <a:off x="9390888" y="4320271"/>
-            <a:ext cx="566928" cy="246350"/>
+            <a:off x="9390888" y="4126633"/>
+            <a:ext cx="566928" cy="224835"/>
           </a:xfrm>
           <a:prstGeom prst="rect">
             <a:avLst/>
@@ -13296,8 +13355,8 @@
         </p:nvSpPr>
         <p:spPr>
           <a:xfrm>
-            <a:off x="9957816" y="4320271"/>
-            <a:ext cx="566928" cy="246350"/>
+            <a:off x="9957816" y="4126633"/>
+            <a:ext cx="566928" cy="224835"/>
           </a:xfrm>
           <a:prstGeom prst="rect">
             <a:avLst/>
@@ -13335,8 +13394,8 @@
         </p:nvSpPr>
         <p:spPr>
           <a:xfrm>
-            <a:off x="10524744" y="4320271"/>
-            <a:ext cx="859536" cy="246350"/>
+            <a:off x="10524744" y="4126633"/>
+            <a:ext cx="859536" cy="224835"/>
           </a:xfrm>
           <a:prstGeom prst="rect">
             <a:avLst/>
@@ -13374,8 +13433,8 @@
         </p:nvSpPr>
         <p:spPr>
           <a:xfrm>
-            <a:off x="6208776" y="4566621"/>
-            <a:ext cx="2011680" cy="246350"/>
+            <a:off x="6208776" y="4351468"/>
+            <a:ext cx="2011680" cy="224835"/>
           </a:xfrm>
           <a:prstGeom prst="rect">
             <a:avLst/>
@@ -13413,8 +13472,8 @@
         </p:nvSpPr>
         <p:spPr>
           <a:xfrm>
-            <a:off x="8472728" y="4622050"/>
-            <a:ext cx="332944" cy="135493"/>
+            <a:off x="8472728" y="4402056"/>
+            <a:ext cx="332944" cy="123659"/>
           </a:xfrm>
           <a:prstGeom prst="rect">
             <a:avLst/>
@@ -13433,8 +13492,8 @@
         </p:nvSpPr>
         <p:spPr>
           <a:xfrm>
-            <a:off x="9390888" y="4566621"/>
-            <a:ext cx="566928" cy="246350"/>
+            <a:off x="9390888" y="4351468"/>
+            <a:ext cx="566928" cy="224835"/>
           </a:xfrm>
           <a:prstGeom prst="rect">
             <a:avLst/>
@@ -13472,8 +13531,8 @@
         </p:nvSpPr>
         <p:spPr>
           <a:xfrm>
-            <a:off x="9957816" y="4566621"/>
-            <a:ext cx="566928" cy="246350"/>
+            <a:off x="9957816" y="4351468"/>
+            <a:ext cx="566928" cy="224835"/>
           </a:xfrm>
           <a:prstGeom prst="rect">
             <a:avLst/>
@@ -13511,8 +13570,8 @@
         </p:nvSpPr>
         <p:spPr>
           <a:xfrm>
-            <a:off x="10524744" y="4566621"/>
-            <a:ext cx="859536" cy="246350"/>
+            <a:off x="10524744" y="4351468"/>
+            <a:ext cx="859536" cy="224835"/>
           </a:xfrm>
           <a:prstGeom prst="rect">
             <a:avLst/>
@@ -13550,8 +13609,8 @@
         </p:nvSpPr>
         <p:spPr>
           <a:xfrm>
-            <a:off x="6135624" y="4812971"/>
-            <a:ext cx="5394960" cy="246350"/>
+            <a:off x="6135624" y="4576303"/>
+            <a:ext cx="5394960" cy="224835"/>
           </a:xfrm>
           <a:prstGeom prst="rect">
             <a:avLst/>
@@ -13570,8 +13629,8 @@
         </p:nvSpPr>
         <p:spPr>
           <a:xfrm>
-            <a:off x="6208776" y="4812971"/>
-            <a:ext cx="2011680" cy="246350"/>
+            <a:off x="6208776" y="4576303"/>
+            <a:ext cx="2011680" cy="224835"/>
           </a:xfrm>
           <a:prstGeom prst="rect">
             <a:avLst/>
@@ -13609,8 +13668,8 @@
         </p:nvSpPr>
         <p:spPr>
           <a:xfrm>
-            <a:off x="8461553" y="4868400"/>
-            <a:ext cx="344119" cy="135493"/>
+            <a:off x="8461553" y="4626891"/>
+            <a:ext cx="344119" cy="123659"/>
           </a:xfrm>
           <a:prstGeom prst="rect">
             <a:avLst/>
@@ -13629,8 +13688,8 @@
         </p:nvSpPr>
         <p:spPr>
           <a:xfrm>
-            <a:off x="9390888" y="4812971"/>
-            <a:ext cx="566928" cy="246350"/>
+            <a:off x="9390888" y="4576303"/>
+            <a:ext cx="566928" cy="224835"/>
           </a:xfrm>
           <a:prstGeom prst="rect">
             <a:avLst/>
@@ -13668,8 +13727,8 @@
         </p:nvSpPr>
         <p:spPr>
           <a:xfrm>
-            <a:off x="9957816" y="4812971"/>
-            <a:ext cx="566928" cy="246350"/>
+            <a:off x="9957816" y="4576303"/>
+            <a:ext cx="566928" cy="224835"/>
           </a:xfrm>
           <a:prstGeom prst="rect">
             <a:avLst/>
@@ -13707,8 +13766,8 @@
         </p:nvSpPr>
         <p:spPr>
           <a:xfrm>
-            <a:off x="10524744" y="4812971"/>
-            <a:ext cx="859536" cy="246350"/>
+            <a:off x="10524744" y="4576303"/>
+            <a:ext cx="859536" cy="224835"/>
           </a:xfrm>
           <a:prstGeom prst="rect">
             <a:avLst/>
@@ -13746,8 +13805,8 @@
         </p:nvSpPr>
         <p:spPr>
           <a:xfrm>
-            <a:off x="6208776" y="5059321"/>
-            <a:ext cx="2011680" cy="246350"/>
+            <a:off x="6208776" y="4801138"/>
+            <a:ext cx="2011680" cy="224835"/>
           </a:xfrm>
           <a:prstGeom prst="rect">
             <a:avLst/>
@@ -13785,8 +13844,8 @@
         </p:nvSpPr>
         <p:spPr>
           <a:xfrm>
-            <a:off x="8358802" y="5114750"/>
-            <a:ext cx="446870" cy="135493"/>
+            <a:off x="8358802" y="4851726"/>
+            <a:ext cx="446870" cy="123659"/>
           </a:xfrm>
           <a:prstGeom prst="rect">
             <a:avLst/>
@@ -13805,8 +13864,8 @@
         </p:nvSpPr>
         <p:spPr>
           <a:xfrm>
-            <a:off x="9390888" y="5059321"/>
-            <a:ext cx="566928" cy="246350"/>
+            <a:off x="9390888" y="4801138"/>
+            <a:ext cx="566928" cy="224835"/>
           </a:xfrm>
           <a:prstGeom prst="rect">
             <a:avLst/>
@@ -13844,8 +13903,8 @@
         </p:nvSpPr>
         <p:spPr>
           <a:xfrm>
-            <a:off x="9957816" y="5059321"/>
-            <a:ext cx="566928" cy="246350"/>
+            <a:off x="9957816" y="4801138"/>
+            <a:ext cx="566928" cy="224835"/>
           </a:xfrm>
           <a:prstGeom prst="rect">
             <a:avLst/>
@@ -13883,8 +13942,8 @@
         </p:nvSpPr>
         <p:spPr>
           <a:xfrm>
-            <a:off x="10524744" y="5059321"/>
-            <a:ext cx="859536" cy="246350"/>
+            <a:off x="10524744" y="4801138"/>
+            <a:ext cx="859536" cy="224835"/>
           </a:xfrm>
           <a:prstGeom prst="rect">
             <a:avLst/>
@@ -13922,8 +13981,8 @@
         </p:nvSpPr>
         <p:spPr>
           <a:xfrm>
-            <a:off x="6135624" y="5305672"/>
-            <a:ext cx="5394960" cy="246350"/>
+            <a:off x="6135624" y="5025973"/>
+            <a:ext cx="5394960" cy="224835"/>
           </a:xfrm>
           <a:prstGeom prst="rect">
             <a:avLst/>
@@ -13942,8 +14001,8 @@
         </p:nvSpPr>
         <p:spPr>
           <a:xfrm>
-            <a:off x="6208776" y="5305672"/>
-            <a:ext cx="2011680" cy="246350"/>
+            <a:off x="6208776" y="5025973"/>
+            <a:ext cx="2011680" cy="224835"/>
           </a:xfrm>
           <a:prstGeom prst="rect">
             <a:avLst/>
@@ -13981,8 +14040,8 @@
         </p:nvSpPr>
         <p:spPr>
           <a:xfrm>
-            <a:off x="8352988" y="5361100"/>
-            <a:ext cx="452684" cy="135493"/>
+            <a:off x="8352988" y="5076561"/>
+            <a:ext cx="452684" cy="123659"/>
           </a:xfrm>
           <a:prstGeom prst="rect">
             <a:avLst/>
@@ -14001,8 +14060,8 @@
         </p:nvSpPr>
         <p:spPr>
           <a:xfrm>
-            <a:off x="9390888" y="5305672"/>
-            <a:ext cx="566928" cy="246350"/>
+            <a:off x="9390888" y="5025973"/>
+            <a:ext cx="566928" cy="224835"/>
           </a:xfrm>
           <a:prstGeom prst="rect">
             <a:avLst/>
@@ -14040,8 +14099,8 @@
         </p:nvSpPr>
         <p:spPr>
           <a:xfrm>
-            <a:off x="9957816" y="5305672"/>
-            <a:ext cx="566928" cy="246350"/>
+            <a:off x="9957816" y="5025973"/>
+            <a:ext cx="566928" cy="224835"/>
           </a:xfrm>
           <a:prstGeom prst="rect">
             <a:avLst/>
@@ -14079,8 +14138,8 @@
         </p:nvSpPr>
         <p:spPr>
           <a:xfrm>
-            <a:off x="10524744" y="5305672"/>
-            <a:ext cx="859536" cy="246350"/>
+            <a:off x="10524744" y="5025973"/>
+            <a:ext cx="859536" cy="224835"/>
           </a:xfrm>
           <a:prstGeom prst="rect">
             <a:avLst/>
@@ -14118,8 +14177,8 @@
         </p:nvSpPr>
         <p:spPr>
           <a:xfrm>
-            <a:off x="6208776" y="5552022"/>
-            <a:ext cx="2011680" cy="246350"/>
+            <a:off x="6208776" y="5250808"/>
+            <a:ext cx="2011680" cy="224835"/>
           </a:xfrm>
           <a:prstGeom prst="rect">
             <a:avLst/>
@@ -14157,8 +14216,8 @@
         </p:nvSpPr>
         <p:spPr>
           <a:xfrm>
-            <a:off x="8331777" y="5607450"/>
-            <a:ext cx="473895" cy="135493"/>
+            <a:off x="8331777" y="5301395"/>
+            <a:ext cx="473895" cy="123659"/>
           </a:xfrm>
           <a:prstGeom prst="rect">
             <a:avLst/>
@@ -14177,8 +14236,8 @@
         </p:nvSpPr>
         <p:spPr>
           <a:xfrm>
-            <a:off x="9390888" y="5552022"/>
-            <a:ext cx="566928" cy="246350"/>
+            <a:off x="9390888" y="5250808"/>
+            <a:ext cx="566928" cy="224835"/>
           </a:xfrm>
           <a:prstGeom prst="rect">
             <a:avLst/>
@@ -14216,8 +14275,8 @@
         </p:nvSpPr>
         <p:spPr>
           <a:xfrm>
-            <a:off x="9957816" y="5552022"/>
-            <a:ext cx="566928" cy="246350"/>
+            <a:off x="9957816" y="5250808"/>
+            <a:ext cx="566928" cy="224835"/>
           </a:xfrm>
           <a:prstGeom prst="rect">
             <a:avLst/>
@@ -14255,8 +14314,8 @@
         </p:nvSpPr>
         <p:spPr>
           <a:xfrm>
-            <a:off x="10524744" y="5552022"/>
-            <a:ext cx="859536" cy="246350"/>
+            <a:off x="10524744" y="5250808"/>
+            <a:ext cx="859536" cy="224835"/>
           </a:xfrm>
           <a:prstGeom prst="rect">
             <a:avLst/>
@@ -14294,8 +14353,8 @@
         </p:nvSpPr>
         <p:spPr>
           <a:xfrm>
-            <a:off x="6135624" y="5798372"/>
-            <a:ext cx="5394960" cy="246350"/>
+            <a:off x="6135624" y="5475642"/>
+            <a:ext cx="5394960" cy="224835"/>
           </a:xfrm>
           <a:prstGeom prst="rect">
             <a:avLst/>
@@ -14314,8 +14373,8 @@
         </p:nvSpPr>
         <p:spPr>
           <a:xfrm>
-            <a:off x="6208776" y="5798372"/>
-            <a:ext cx="2011680" cy="246350"/>
+            <a:off x="6208776" y="5475642"/>
+            <a:ext cx="2011680" cy="224835"/>
           </a:xfrm>
           <a:prstGeom prst="rect">
             <a:avLst/>
@@ -14353,8 +14412,8 @@
         </p:nvSpPr>
         <p:spPr>
           <a:xfrm>
-            <a:off x="8266176" y="5853801"/>
-            <a:ext cx="539496" cy="135493"/>
+            <a:off x="8266176" y="5526230"/>
+            <a:ext cx="539496" cy="123659"/>
           </a:xfrm>
           <a:prstGeom prst="rect">
             <a:avLst/>
@@ -14373,8 +14432,8 @@
         </p:nvSpPr>
         <p:spPr>
           <a:xfrm>
-            <a:off x="9390888" y="5798372"/>
-            <a:ext cx="566928" cy="246350"/>
+            <a:off x="9390888" y="5475642"/>
+            <a:ext cx="566928" cy="224835"/>
           </a:xfrm>
           <a:prstGeom prst="rect">
             <a:avLst/>
@@ -14412,8 +14471,8 @@
         </p:nvSpPr>
         <p:spPr>
           <a:xfrm>
-            <a:off x="9957816" y="5798372"/>
-            <a:ext cx="566928" cy="246350"/>
+            <a:off x="9957816" y="5475642"/>
+            <a:ext cx="566928" cy="224835"/>
           </a:xfrm>
           <a:prstGeom prst="rect">
             <a:avLst/>
@@ -14451,8 +14510,8 @@
         </p:nvSpPr>
         <p:spPr>
           <a:xfrm>
-            <a:off x="10524744" y="5798372"/>
-            <a:ext cx="859536" cy="246350"/>
+            <a:off x="10524744" y="5475642"/>
+            <a:ext cx="859536" cy="224835"/>
           </a:xfrm>
           <a:prstGeom prst="rect">
             <a:avLst/>
@@ -14479,6 +14538,65 @@
               <a:t>−17.6 pts</a:t>
             </a:r>
             <a:endParaRPr lang="en-US" sz="1300" dirty="0"/>
+          </a:p>
+        </p:txBody>
+      </p:sp>
+      <p:sp>
+        <p:nvSpPr>
+          <p:cNvPr id="203" name="Shape 200"/>
+          <p:cNvSpPr/>
+          <p:nvPr/>
+        </p:nvSpPr>
+        <p:spPr>
+          <a:xfrm>
+            <a:off x="457200" y="6126480"/>
+            <a:ext cx="11274552" cy="356616"/>
+          </a:xfrm>
+          <a:prstGeom prst="rect">
+            <a:avLst/>
+          </a:prstGeom>
+          <a:solidFill>
+            <a:srgbClr val="EDF4FA"/>
+          </a:solidFill>
+          <a:ln/>
+        </p:spPr>
+      </p:sp>
+      <p:sp>
+        <p:nvSpPr>
+          <p:cNvPr id="204" name="Text 201"/>
+          <p:cNvSpPr txBox="1"/>
+          <p:nvPr/>
+        </p:nvSpPr>
+        <p:spPr>
+          <a:xfrm>
+            <a:off x="658368" y="6144768"/>
+            <a:ext cx="10927080" cy="320040"/>
+          </a:xfrm>
+          <a:prstGeom prst="rect">
+            <a:avLst/>
+          </a:prstGeom>
+          <a:noFill/>
+          <a:ln/>
+        </p:spPr>
+        <p:txBody>
+          <a:bodyPr wrap="square" lIns="0" tIns="0" rIns="0" bIns="0" rtlCol="0" anchor="ctr"/>
+          <a:lstStyle/>
+          <a:p>
+            <a:pPr indent="0" marL="0">
+              <a:buNone/>
+            </a:pPr>
+            <a:r>
+              <a:rPr lang="en-US" sz="1500" b="1" dirty="0">
+                <a:solidFill>
+                  <a:srgbClr val="0B2C4A"/>
+                </a:solidFill>
+                <a:latin typeface="Inter" pitchFamily="34" charset="0"/>
+                <a:ea typeface="Inter" pitchFamily="34" charset="-122"/>
+                <a:cs typeface="Inter" pitchFamily="34" charset="-120"/>
+              </a:rPr>
+              <a:t>28 of 33 stores collect less parts margin on internal work than on customer pay; the group is −4.2 pts.</a:t>
+            </a:r>
+            <a:endParaRPr lang="en-US" sz="1500" dirty="0"/>
           </a:p>
         </p:txBody>
       </p:sp>
